--- a/deep_learning/4_transformers_deploy/modern_NLP_transformers_intro/1_transformers.pptx
+++ b/deep_learning/4_transformers_deploy/modern_NLP_transformers_intro/1_transformers.pptx
@@ -5,10 +5,10 @@
     <p:sldMasterId id="2147483648" r:id="rId1"/>
   </p:sldMasterIdLst>
   <p:notesMasterIdLst>
-    <p:notesMasterId r:id="rId26"/>
+    <p:notesMasterId r:id="rId28"/>
   </p:notesMasterIdLst>
   <p:handoutMasterIdLst>
-    <p:handoutMasterId r:id="rId27"/>
+    <p:handoutMasterId r:id="rId29"/>
   </p:handoutMasterIdLst>
   <p:sldIdLst>
     <p:sldId id="256" r:id="rId2"/>
@@ -21,20 +21,22 @@
     <p:sldId id="281" r:id="rId9"/>
     <p:sldId id="263" r:id="rId10"/>
     <p:sldId id="280" r:id="rId11"/>
-    <p:sldId id="282" r:id="rId12"/>
-    <p:sldId id="264" r:id="rId13"/>
-    <p:sldId id="279" r:id="rId14"/>
-    <p:sldId id="278" r:id="rId15"/>
-    <p:sldId id="283" r:id="rId16"/>
-    <p:sldId id="284" r:id="rId17"/>
-    <p:sldId id="285" r:id="rId18"/>
-    <p:sldId id="265" r:id="rId19"/>
-    <p:sldId id="267" r:id="rId20"/>
-    <p:sldId id="286" r:id="rId21"/>
-    <p:sldId id="269" r:id="rId22"/>
-    <p:sldId id="261" r:id="rId23"/>
-    <p:sldId id="259" r:id="rId24"/>
-    <p:sldId id="275" r:id="rId25"/>
+    <p:sldId id="288" r:id="rId12"/>
+    <p:sldId id="287" r:id="rId13"/>
+    <p:sldId id="282" r:id="rId14"/>
+    <p:sldId id="264" r:id="rId15"/>
+    <p:sldId id="279" r:id="rId16"/>
+    <p:sldId id="278" r:id="rId17"/>
+    <p:sldId id="283" r:id="rId18"/>
+    <p:sldId id="284" r:id="rId19"/>
+    <p:sldId id="285" r:id="rId20"/>
+    <p:sldId id="265" r:id="rId21"/>
+    <p:sldId id="267" r:id="rId22"/>
+    <p:sldId id="286" r:id="rId23"/>
+    <p:sldId id="269" r:id="rId24"/>
+    <p:sldId id="261" r:id="rId25"/>
+    <p:sldId id="259" r:id="rId26"/>
+    <p:sldId id="275" r:id="rId27"/>
   </p:sldIdLst>
   <p:sldSz cx="12192000" cy="6858000"/>
   <p:notesSz cx="6858000" cy="9144000"/>
@@ -238,7 +240,7 @@
           <a:p>
             <a:fld id="{7BAEECA8-D063-486F-AE31-5020270C1449}" type="datetimeFigureOut">
               <a:rPr lang="en-US" smtClean="0"/>
-              <a:t>4/24/2026</a:t>
+              <a:t>6/15/2026</a:t>
             </a:fld>
             <a:endParaRPr lang="en-US"/>
           </a:p>
@@ -1471,7 +1473,7 @@
           <a:p>
             <a:fld id="{CB233BD1-3BA8-448D-9D08-7846095EA517}" type="datetimeFigureOut">
               <a:rPr lang="en-US" smtClean="0"/>
-              <a:t>4/24/2026</a:t>
+              <a:t>6/15/2026</a:t>
             </a:fld>
             <a:endParaRPr lang="en-US"/>
           </a:p>
@@ -1885,7 +1887,7 @@
           <a:p>
             <a:fld id="{6383FAE1-13DE-4511-8C1B-C8AFB720664C}" type="datetimeFigureOut">
               <a:rPr lang="en-US" smtClean="0"/>
-              <a:t>4/24/2026</a:t>
+              <a:t>6/15/2026</a:t>
             </a:fld>
             <a:endParaRPr lang="en-US"/>
           </a:p>
@@ -2083,7 +2085,7 @@
           <a:p>
             <a:fld id="{6383FAE1-13DE-4511-8C1B-C8AFB720664C}" type="datetimeFigureOut">
               <a:rPr lang="en-US" smtClean="0"/>
-              <a:t>4/24/2026</a:t>
+              <a:t>6/15/2026</a:t>
             </a:fld>
             <a:endParaRPr lang="en-US"/>
           </a:p>
@@ -2291,7 +2293,7 @@
           <a:p>
             <a:fld id="{6383FAE1-13DE-4511-8C1B-C8AFB720664C}" type="datetimeFigureOut">
               <a:rPr lang="en-US" smtClean="0"/>
-              <a:t>4/24/2026</a:t>
+              <a:t>6/15/2026</a:t>
             </a:fld>
             <a:endParaRPr lang="en-US"/>
           </a:p>
@@ -2489,7 +2491,7 @@
           <a:p>
             <a:fld id="{6383FAE1-13DE-4511-8C1B-C8AFB720664C}" type="datetimeFigureOut">
               <a:rPr lang="en-US" smtClean="0"/>
-              <a:t>4/24/2026</a:t>
+              <a:t>6/15/2026</a:t>
             </a:fld>
             <a:endParaRPr lang="en-US"/>
           </a:p>
@@ -2764,7 +2766,7 @@
           <a:p>
             <a:fld id="{6383FAE1-13DE-4511-8C1B-C8AFB720664C}" type="datetimeFigureOut">
               <a:rPr lang="en-US" smtClean="0"/>
-              <a:t>4/24/2026</a:t>
+              <a:t>6/15/2026</a:t>
             </a:fld>
             <a:endParaRPr lang="en-US"/>
           </a:p>
@@ -3029,7 +3031,7 @@
           <a:p>
             <a:fld id="{6383FAE1-13DE-4511-8C1B-C8AFB720664C}" type="datetimeFigureOut">
               <a:rPr lang="en-US" smtClean="0"/>
-              <a:t>4/24/2026</a:t>
+              <a:t>6/15/2026</a:t>
             </a:fld>
             <a:endParaRPr lang="en-US"/>
           </a:p>
@@ -3441,7 +3443,7 @@
           <a:p>
             <a:fld id="{6383FAE1-13DE-4511-8C1B-C8AFB720664C}" type="datetimeFigureOut">
               <a:rPr lang="en-US" smtClean="0"/>
-              <a:t>4/24/2026</a:t>
+              <a:t>6/15/2026</a:t>
             </a:fld>
             <a:endParaRPr lang="en-US"/>
           </a:p>
@@ -3582,7 +3584,7 @@
           <a:p>
             <a:fld id="{6383FAE1-13DE-4511-8C1B-C8AFB720664C}" type="datetimeFigureOut">
               <a:rPr lang="en-US" smtClean="0"/>
-              <a:t>4/24/2026</a:t>
+              <a:t>6/15/2026</a:t>
             </a:fld>
             <a:endParaRPr lang="en-US"/>
           </a:p>
@@ -3695,7 +3697,7 @@
           <a:p>
             <a:fld id="{6383FAE1-13DE-4511-8C1B-C8AFB720664C}" type="datetimeFigureOut">
               <a:rPr lang="en-US" smtClean="0"/>
-              <a:t>4/24/2026</a:t>
+              <a:t>6/15/2026</a:t>
             </a:fld>
             <a:endParaRPr lang="en-US"/>
           </a:p>
@@ -4006,7 +4008,7 @@
           <a:p>
             <a:fld id="{6383FAE1-13DE-4511-8C1B-C8AFB720664C}" type="datetimeFigureOut">
               <a:rPr lang="en-US" smtClean="0"/>
-              <a:t>4/24/2026</a:t>
+              <a:t>6/15/2026</a:t>
             </a:fld>
             <a:endParaRPr lang="en-US"/>
           </a:p>
@@ -4297,7 +4299,7 @@
           <a:p>
             <a:fld id="{6383FAE1-13DE-4511-8C1B-C8AFB720664C}" type="datetimeFigureOut">
               <a:rPr lang="en-US" smtClean="0"/>
-              <a:t>4/24/2026</a:t>
+              <a:t>6/15/2026</a:t>
             </a:fld>
             <a:endParaRPr lang="en-US"/>
           </a:p>
@@ -4541,7 +4543,7 @@
           <a:p>
             <a:fld id="{6383FAE1-13DE-4511-8C1B-C8AFB720664C}" type="datetimeFigureOut">
               <a:rPr lang="en-US" smtClean="0"/>
-              <a:t>4/24/2026</a:t>
+              <a:t>6/15/2026</a:t>
             </a:fld>
             <a:endParaRPr lang="en-US"/>
           </a:p>
@@ -5158,12 +5160,234 @@
           <a:chExt cx="0" cy="0"/>
         </a:xfrm>
       </p:grpSpPr>
+      <p:pic>
+        <p:nvPicPr>
+          <p:cNvPr id="3" name="Picture 2">
+            <a:extLst>
+              <a:ext uri="{FF2B5EF4-FFF2-40B4-BE49-F238E27FC236}">
+                <a16:creationId xmlns:a16="http://schemas.microsoft.com/office/drawing/2014/main" id="{DA5C158B-2F8D-64B8-18B3-43FA881CB174}"/>
+              </a:ext>
+            </a:extLst>
+          </p:cNvPr>
+          <p:cNvPicPr>
+            <a:picLocks noChangeAspect="1"/>
+          </p:cNvPicPr>
+          <p:nvPr/>
+        </p:nvPicPr>
+        <p:blipFill>
+          <a:blip r:embed="rId2"/>
+          <a:stretch>
+            <a:fillRect/>
+          </a:stretch>
+        </p:blipFill>
+        <p:spPr>
+          <a:xfrm>
+            <a:off x="265568" y="0"/>
+            <a:ext cx="5296639" cy="3581900"/>
+          </a:xfrm>
+          <a:prstGeom prst="rect">
+            <a:avLst/>
+          </a:prstGeom>
+        </p:spPr>
+      </p:pic>
+      <p:pic>
+        <p:nvPicPr>
+          <p:cNvPr id="6" name="Picture 5">
+            <a:extLst>
+              <a:ext uri="{FF2B5EF4-FFF2-40B4-BE49-F238E27FC236}">
+                <a16:creationId xmlns:a16="http://schemas.microsoft.com/office/drawing/2014/main" id="{609164D6-46F9-00F6-CD54-AAF1B6FA7CFE}"/>
+              </a:ext>
+            </a:extLst>
+          </p:cNvPr>
+          <p:cNvPicPr>
+            <a:picLocks noChangeAspect="1"/>
+          </p:cNvPicPr>
+          <p:nvPr/>
+        </p:nvPicPr>
+        <p:blipFill>
+          <a:blip r:embed="rId3"/>
+          <a:stretch>
+            <a:fillRect/>
+          </a:stretch>
+        </p:blipFill>
+        <p:spPr>
+          <a:xfrm>
+            <a:off x="265568" y="1652516"/>
+            <a:ext cx="8280336" cy="3134193"/>
+          </a:xfrm>
+          <a:prstGeom prst="rect">
+            <a:avLst/>
+          </a:prstGeom>
+        </p:spPr>
+      </p:pic>
+      <p:pic>
+        <p:nvPicPr>
+          <p:cNvPr id="9" name="Picture 8">
+            <a:extLst>
+              <a:ext uri="{FF2B5EF4-FFF2-40B4-BE49-F238E27FC236}">
+                <a16:creationId xmlns:a16="http://schemas.microsoft.com/office/drawing/2014/main" id="{36B2FDD9-38D7-EEF0-E701-1960A5299255}"/>
+              </a:ext>
+            </a:extLst>
+          </p:cNvPr>
+          <p:cNvPicPr>
+            <a:picLocks noChangeAspect="1"/>
+          </p:cNvPicPr>
+          <p:nvPr/>
+        </p:nvPicPr>
+        <p:blipFill>
+          <a:blip r:embed="rId4"/>
+          <a:stretch>
+            <a:fillRect/>
+          </a:stretch>
+        </p:blipFill>
+        <p:spPr>
+          <a:xfrm>
+            <a:off x="265568" y="5234416"/>
+            <a:ext cx="8887352" cy="1228625"/>
+          </a:xfrm>
+          <a:prstGeom prst="rect">
+            <a:avLst/>
+          </a:prstGeom>
+        </p:spPr>
+      </p:pic>
+    </p:spTree>
+    <p:extLst>
+      <p:ext uri="{BB962C8B-B14F-4D97-AF65-F5344CB8AC3E}">
+        <p14:creationId xmlns:p14="http://schemas.microsoft.com/office/powerpoint/2010/main" val="105119119"/>
+      </p:ext>
+    </p:extLst>
+  </p:cSld>
+  <p:clrMapOvr>
+    <a:masterClrMapping/>
+  </p:clrMapOvr>
+</p:sld>
+</file>
+
+<file path=ppt/slides/slide11.xml><?xml version="1.0" encoding="utf-8"?>
+<p:sld xmlns:a="http://schemas.openxmlformats.org/drawingml/2006/main" xmlns:r="http://schemas.openxmlformats.org/officeDocument/2006/relationships" xmlns:p="http://schemas.openxmlformats.org/presentationml/2006/main">
+  <p:cSld>
+    <p:spTree>
+      <p:nvGrpSpPr>
+        <p:cNvPr id="1" name="">
+          <a:extLst>
+            <a:ext uri="{FF2B5EF4-FFF2-40B4-BE49-F238E27FC236}">
+              <a16:creationId xmlns:a16="http://schemas.microsoft.com/office/drawing/2014/main" id="{5A1D3B37-12A5-F996-827E-C6FED29F7C7F}"/>
+            </a:ext>
+          </a:extLst>
+        </p:cNvPr>
+        <p:cNvGrpSpPr/>
+        <p:nvPr/>
+      </p:nvGrpSpPr>
+      <p:grpSpPr>
+        <a:xfrm>
+          <a:off x="0" y="0"/>
+          <a:ext cx="0" cy="0"/>
+          <a:chOff x="0" y="0"/>
+          <a:chExt cx="0" cy="0"/>
+        </a:xfrm>
+      </p:grpSpPr>
+      <p:pic>
+        <p:nvPicPr>
+          <p:cNvPr id="4" name="Picture 3">
+            <a:extLst>
+              <a:ext uri="{FF2B5EF4-FFF2-40B4-BE49-F238E27FC236}">
+                <a16:creationId xmlns:a16="http://schemas.microsoft.com/office/drawing/2014/main" id="{2568287F-3D5A-A49E-7F19-0D5332F7CF3D}"/>
+              </a:ext>
+            </a:extLst>
+          </p:cNvPr>
+          <p:cNvPicPr>
+            <a:picLocks noChangeAspect="1"/>
+          </p:cNvPicPr>
+          <p:nvPr/>
+        </p:nvPicPr>
+        <p:blipFill>
+          <a:blip r:embed="rId2"/>
+          <a:stretch>
+            <a:fillRect/>
+          </a:stretch>
+        </p:blipFill>
+        <p:spPr>
+          <a:xfrm>
+            <a:off x="318058" y="130708"/>
+            <a:ext cx="9288171" cy="2372056"/>
+          </a:xfrm>
+          <a:prstGeom prst="rect">
+            <a:avLst/>
+          </a:prstGeom>
+        </p:spPr>
+      </p:pic>
+      <p:pic>
+        <p:nvPicPr>
+          <p:cNvPr id="7" name="Picture 6">
+            <a:extLst>
+              <a:ext uri="{FF2B5EF4-FFF2-40B4-BE49-F238E27FC236}">
+                <a16:creationId xmlns:a16="http://schemas.microsoft.com/office/drawing/2014/main" id="{36E1ECFC-6C73-F0A1-A811-5333FDB022BF}"/>
+              </a:ext>
+            </a:extLst>
+          </p:cNvPr>
+          <p:cNvPicPr>
+            <a:picLocks noChangeAspect="1"/>
+          </p:cNvPicPr>
+          <p:nvPr/>
+        </p:nvPicPr>
+        <p:blipFill>
+          <a:blip r:embed="rId3"/>
+          <a:stretch>
+            <a:fillRect/>
+          </a:stretch>
+        </p:blipFill>
+        <p:spPr>
+          <a:xfrm>
+            <a:off x="1019170" y="2971800"/>
+            <a:ext cx="8651068" cy="3641447"/>
+          </a:xfrm>
+          <a:prstGeom prst="rect">
+            <a:avLst/>
+          </a:prstGeom>
+        </p:spPr>
+      </p:pic>
+    </p:spTree>
+    <p:extLst>
+      <p:ext uri="{BB962C8B-B14F-4D97-AF65-F5344CB8AC3E}">
+        <p14:creationId xmlns:p14="http://schemas.microsoft.com/office/powerpoint/2010/main" val="3368803007"/>
+      </p:ext>
+    </p:extLst>
+  </p:cSld>
+  <p:clrMapOvr>
+    <a:masterClrMapping/>
+  </p:clrMapOvr>
+</p:sld>
+</file>
+
+<file path=ppt/slides/slide12.xml><?xml version="1.0" encoding="utf-8"?>
+<p:sld xmlns:a="http://schemas.openxmlformats.org/drawingml/2006/main" xmlns:r="http://schemas.openxmlformats.org/officeDocument/2006/relationships" xmlns:p="http://schemas.openxmlformats.org/presentationml/2006/main">
+  <p:cSld>
+    <p:spTree>
+      <p:nvGrpSpPr>
+        <p:cNvPr id="1" name="">
+          <a:extLst>
+            <a:ext uri="{FF2B5EF4-FFF2-40B4-BE49-F238E27FC236}">
+              <a16:creationId xmlns:a16="http://schemas.microsoft.com/office/drawing/2014/main" id="{E3D58DE5-2D6F-8D76-4990-A4B3B9BD36CF}"/>
+            </a:ext>
+          </a:extLst>
+        </p:cNvPr>
+        <p:cNvGrpSpPr/>
+        <p:nvPr/>
+      </p:nvGrpSpPr>
+      <p:grpSpPr>
+        <a:xfrm>
+          <a:off x="0" y="0"/>
+          <a:ext cx="0" cy="0"/>
+          <a:chOff x="0" y="0"/>
+          <a:chExt cx="0" cy="0"/>
+        </a:xfrm>
+      </p:grpSpPr>
       <p:sp>
         <p:nvSpPr>
           <p:cNvPr id="5" name="TextBox 4">
             <a:extLst>
               <a:ext uri="{FF2B5EF4-FFF2-40B4-BE49-F238E27FC236}">
-                <a16:creationId xmlns:a16="http://schemas.microsoft.com/office/drawing/2014/main" id="{23497898-5F83-BA4F-1100-399402842F79}"/>
+                <a16:creationId xmlns:a16="http://schemas.microsoft.com/office/drawing/2014/main" id="{09FC948F-F74D-7056-6CCB-3C09FE63086C}"/>
               </a:ext>
             </a:extLst>
           </p:cNvPr>
@@ -5172,7 +5396,7 @@
         </p:nvSpPr>
         <p:spPr>
           <a:xfrm>
-            <a:off x="100584" y="692184"/>
+            <a:off x="201168" y="1131096"/>
             <a:ext cx="11420856" cy="5262979"/>
           </a:xfrm>
           <a:prstGeom prst="rect">
@@ -5404,7 +5628,7 @@
           <p:cNvPr id="7" name="TextBox 6">
             <a:extLst>
               <a:ext uri="{FF2B5EF4-FFF2-40B4-BE49-F238E27FC236}">
-                <a16:creationId xmlns:a16="http://schemas.microsoft.com/office/drawing/2014/main" id="{02A28C5D-9B4B-7740-B933-94DE649DEB2E}"/>
+                <a16:creationId xmlns:a16="http://schemas.microsoft.com/office/drawing/2014/main" id="{084584EC-4834-49DD-8419-F66768D1A2D4}"/>
               </a:ext>
             </a:extLst>
           </p:cNvPr>
@@ -5444,7 +5668,7 @@
     </p:spTree>
     <p:extLst>
       <p:ext uri="{BB962C8B-B14F-4D97-AF65-F5344CB8AC3E}">
-        <p14:creationId xmlns:p14="http://schemas.microsoft.com/office/powerpoint/2010/main" val="105119119"/>
+        <p14:creationId xmlns:p14="http://schemas.microsoft.com/office/powerpoint/2010/main" val="1657236665"/>
       </p:ext>
     </p:extLst>
   </p:cSld>
@@ -5454,7 +5678,7 @@
 </p:sld>
 </file>
 
-<file path=ppt/slides/slide11.xml><?xml version="1.0" encoding="utf-8"?>
+<file path=ppt/slides/slide13.xml><?xml version="1.0" encoding="utf-8"?>
 <p:sld xmlns:a="http://schemas.openxmlformats.org/drawingml/2006/main" xmlns:r="http://schemas.openxmlformats.org/officeDocument/2006/relationships" xmlns:p="http://schemas.openxmlformats.org/presentationml/2006/main">
   <p:cSld>
     <p:spTree>
@@ -8035,7 +8259,7 @@
 </p:sld>
 </file>
 
-<file path=ppt/slides/slide12.xml><?xml version="1.0" encoding="utf-8"?>
+<file path=ppt/slides/slide14.xml><?xml version="1.0" encoding="utf-8"?>
 <p:sld xmlns:a="http://schemas.openxmlformats.org/drawingml/2006/main" xmlns:r="http://schemas.openxmlformats.org/officeDocument/2006/relationships" xmlns:p="http://schemas.openxmlformats.org/presentationml/2006/main">
   <p:cSld>
     <p:spTree>
@@ -8066,7 +8290,7 @@
         </p:nvSpPr>
         <p:spPr>
           <a:xfrm>
-            <a:off x="228600" y="621989"/>
+            <a:off x="237744" y="1111282"/>
             <a:ext cx="11082528" cy="5632311"/>
           </a:xfrm>
           <a:prstGeom prst="rect">
@@ -8418,7 +8642,7 @@
 </p:sld>
 </file>
 
-<file path=ppt/slides/slide13.xml><?xml version="1.0" encoding="utf-8"?>
+<file path=ppt/slides/slide15.xml><?xml version="1.0" encoding="utf-8"?>
 <p:sld xmlns:a="http://schemas.openxmlformats.org/drawingml/2006/main" xmlns:r="http://schemas.openxmlformats.org/officeDocument/2006/relationships" xmlns:p="http://schemas.openxmlformats.org/presentationml/2006/main">
   <p:cSld>
     <p:spTree>
@@ -10220,7 +10444,7 @@
         <p:spPr>
           <a:xfrm>
             <a:off x="234732" y="3774411"/>
-            <a:ext cx="4297356" cy="1200329"/>
+            <a:ext cx="4297356" cy="1938992"/>
           </a:xfrm>
           <a:prstGeom prst="rect">
             <a:avLst/>
@@ -10242,7 +10466,51 @@
                   </a:schemeClr>
                 </a:solidFill>
               </a:rPr>
-              <a:t>The attention mechanism:</a:t>
+              <a:t>The attention mechanism would find the similarity score between </a:t>
+            </a:r>
+            <a:r>
+              <a:rPr lang="en-US" sz="2400" b="1" u="sng" dirty="0">
+                <a:solidFill>
+                  <a:schemeClr val="accent6">
+                    <a:lumMod val="60000"/>
+                    <a:lumOff val="40000"/>
+                  </a:schemeClr>
+                </a:solidFill>
+              </a:rPr>
+              <a:t>it</a:t>
+            </a:r>
+            <a:r>
+              <a:rPr lang="en-US" sz="2400" dirty="0">
+                <a:solidFill>
+                  <a:schemeClr val="accent6">
+                    <a:lumMod val="60000"/>
+                    <a:lumOff val="40000"/>
+                  </a:schemeClr>
+                </a:solidFill>
+              </a:rPr>
+              <a:t> and </a:t>
+            </a:r>
+            <a:r>
+              <a:rPr lang="en-US" sz="2400" b="1" u="sng" dirty="0">
+                <a:solidFill>
+                  <a:schemeClr val="accent6">
+                    <a:lumMod val="60000"/>
+                    <a:lumOff val="40000"/>
+                  </a:schemeClr>
+                </a:solidFill>
+              </a:rPr>
+              <a:t>all words</a:t>
+            </a:r>
+            <a:r>
+              <a:rPr lang="en-US" sz="2400" dirty="0">
+                <a:solidFill>
+                  <a:schemeClr val="accent6">
+                    <a:lumMod val="60000"/>
+                    <a:lumOff val="40000"/>
+                  </a:schemeClr>
+                </a:solidFill>
+              </a:rPr>
+              <a:t>:</a:t>
             </a:r>
           </a:p>
           <a:p>
@@ -10294,7 +10562,7 @@
 </p:sld>
 </file>
 
-<file path=ppt/slides/slide14.xml><?xml version="1.0" encoding="utf-8"?>
+<file path=ppt/slides/slide16.xml><?xml version="1.0" encoding="utf-8"?>
 <p:sld xmlns:a="http://schemas.openxmlformats.org/drawingml/2006/main" xmlns:r="http://schemas.openxmlformats.org/officeDocument/2006/relationships" xmlns:p="http://schemas.openxmlformats.org/presentationml/2006/main">
   <p:cSld>
     <p:spTree>
@@ -10581,7 +10849,7 @@
 </p:sld>
 </file>
 
-<file path=ppt/slides/slide15.xml><?xml version="1.0" encoding="utf-8"?>
+<file path=ppt/slides/slide17.xml><?xml version="1.0" encoding="utf-8"?>
 <p:sld xmlns:a="http://schemas.openxmlformats.org/drawingml/2006/main" xmlns:r="http://schemas.openxmlformats.org/officeDocument/2006/relationships" xmlns:p="http://schemas.openxmlformats.org/presentationml/2006/main">
   <p:cSld>
     <p:spTree>
@@ -10842,7 +11110,7 @@
 </p:sld>
 </file>
 
-<file path=ppt/slides/slide16.xml><?xml version="1.0" encoding="utf-8"?>
+<file path=ppt/slides/slide18.xml><?xml version="1.0" encoding="utf-8"?>
 <p:sld xmlns:a="http://schemas.openxmlformats.org/drawingml/2006/main" xmlns:r="http://schemas.openxmlformats.org/officeDocument/2006/relationships" xmlns:p="http://schemas.openxmlformats.org/presentationml/2006/main">
   <p:cSld>
     <p:spTree>
@@ -11028,7 +11296,7 @@
 </p:sld>
 </file>
 
-<file path=ppt/slides/slide17.xml><?xml version="1.0" encoding="utf-8"?>
+<file path=ppt/slides/slide19.xml><?xml version="1.0" encoding="utf-8"?>
 <p:sld xmlns:a="http://schemas.openxmlformats.org/drawingml/2006/main" xmlns:r="http://schemas.openxmlformats.org/officeDocument/2006/relationships" xmlns:p="http://schemas.openxmlformats.org/presentationml/2006/main">
   <p:cSld>
     <p:spTree>
@@ -11184,7 +11452,321 @@
 </p:sld>
 </file>
 
-<file path=ppt/slides/slide18.xml><?xml version="1.0" encoding="utf-8"?>
+<file path=ppt/slides/slide2.xml><?xml version="1.0" encoding="utf-8"?>
+<p:sld xmlns:a="http://schemas.openxmlformats.org/drawingml/2006/main" xmlns:r="http://schemas.openxmlformats.org/officeDocument/2006/relationships" xmlns:p="http://schemas.openxmlformats.org/presentationml/2006/main">
+  <p:cSld>
+    <p:spTree>
+      <p:nvGrpSpPr>
+        <p:cNvPr id="1" name=""/>
+        <p:cNvGrpSpPr/>
+        <p:nvPr/>
+      </p:nvGrpSpPr>
+      <p:grpSpPr>
+        <a:xfrm>
+          <a:off x="0" y="0"/>
+          <a:ext cx="0" cy="0"/>
+          <a:chOff x="0" y="0"/>
+          <a:chExt cx="0" cy="0"/>
+        </a:xfrm>
+      </p:grpSpPr>
+      <p:sp>
+        <p:nvSpPr>
+          <p:cNvPr id="4" name="TextBox 3">
+            <a:extLst>
+              <a:ext uri="{FF2B5EF4-FFF2-40B4-BE49-F238E27FC236}">
+                <a16:creationId xmlns:a16="http://schemas.microsoft.com/office/drawing/2014/main" id="{29D68720-C308-BDDC-262A-F5640C4C8FED}"/>
+              </a:ext>
+            </a:extLst>
+          </p:cNvPr>
+          <p:cNvSpPr txBox="1"/>
+          <p:nvPr/>
+        </p:nvSpPr>
+        <p:spPr>
+          <a:xfrm>
+            <a:off x="777618" y="1245090"/>
+            <a:ext cx="10268712" cy="4893647"/>
+          </a:xfrm>
+          <a:prstGeom prst="rect">
+            <a:avLst/>
+          </a:prstGeom>
+          <a:noFill/>
+        </p:spPr>
+        <p:txBody>
+          <a:bodyPr wrap="square">
+            <a:spAutoFit/>
+          </a:bodyPr>
+          <a:lstStyle/>
+          <a:p>
+            <a:r>
+              <a:rPr lang="en-US" sz="2400" dirty="0">
+                <a:solidFill>
+                  <a:schemeClr val="accent6">
+                    <a:lumMod val="40000"/>
+                    <a:lumOff val="60000"/>
+                  </a:schemeClr>
+                </a:solidFill>
+                <a:hlinkClick r:id="rId2">
+                  <a:extLst>
+                    <a:ext uri="{A12FA001-AC4F-418D-AE19-62706E023703}">
+                      <ahyp:hlinkClr xmlns:ahyp="http://schemas.microsoft.com/office/drawing/2018/hyperlinkcolor" val="tx"/>
+                    </a:ext>
+                  </a:extLst>
+                </a:hlinkClick>
+              </a:rPr>
+              <a:t>Source:</a:t>
+            </a:r>
+          </a:p>
+          <a:p>
+            <a:r>
+              <a:rPr lang="en-US" sz="2400" dirty="0">
+                <a:solidFill>
+                  <a:schemeClr val="accent6">
+                    <a:lumMod val="40000"/>
+                    <a:lumOff val="60000"/>
+                  </a:schemeClr>
+                </a:solidFill>
+                <a:hlinkClick r:id="rId2">
+                  <a:extLst>
+                    <a:ext uri="{A12FA001-AC4F-418D-AE19-62706E023703}">
+                      <ahyp:hlinkClr xmlns:ahyp="http://schemas.microsoft.com/office/drawing/2018/hyperlinkcolor" val="tx"/>
+                    </a:ext>
+                  </a:extLst>
+                </a:hlinkClick>
+              </a:rPr>
+              <a:t>https://youtu.be/ZhAz268Hdpw?si=jQXkVM058uJkEWCw</a:t>
+            </a:r>
+            <a:endParaRPr lang="en-US" sz="2400" dirty="0">
+              <a:solidFill>
+                <a:schemeClr val="accent6">
+                  <a:lumMod val="40000"/>
+                  <a:lumOff val="60000"/>
+                </a:schemeClr>
+              </a:solidFill>
+            </a:endParaRPr>
+          </a:p>
+          <a:p>
+            <a:r>
+              <a:rPr lang="en-US" sz="2400" dirty="0">
+                <a:solidFill>
+                  <a:schemeClr val="accent6">
+                    <a:lumMod val="40000"/>
+                    <a:lumOff val="60000"/>
+                  </a:schemeClr>
+                </a:solidFill>
+                <a:hlinkClick r:id="rId3">
+                  <a:extLst>
+                    <a:ext uri="{A12FA001-AC4F-418D-AE19-62706E023703}">
+                      <ahyp:hlinkClr xmlns:ahyp="http://schemas.microsoft.com/office/drawing/2018/hyperlinkcolor" val="tx"/>
+                    </a:ext>
+                  </a:extLst>
+                </a:hlinkClick>
+              </a:rPr>
+              <a:t>https://youtu.be/zxQyTK8quyY?si=C-flWWBSxwrqWao7</a:t>
+            </a:r>
+            <a:endParaRPr lang="en-US" sz="2400" dirty="0">
+              <a:solidFill>
+                <a:schemeClr val="accent6">
+                  <a:lumMod val="40000"/>
+                  <a:lumOff val="60000"/>
+                </a:schemeClr>
+              </a:solidFill>
+            </a:endParaRPr>
+          </a:p>
+          <a:p>
+            <a:endParaRPr lang="en-US" sz="2400" dirty="0">
+              <a:solidFill>
+                <a:schemeClr val="accent6">
+                  <a:lumMod val="40000"/>
+                  <a:lumOff val="60000"/>
+                </a:schemeClr>
+              </a:solidFill>
+            </a:endParaRPr>
+          </a:p>
+          <a:p>
+            <a:pPr marL="0" indent="0">
+              <a:buNone/>
+            </a:pPr>
+            <a:endParaRPr lang="en-US" sz="2400" dirty="0">
+              <a:solidFill>
+                <a:schemeClr val="accent6">
+                  <a:lumMod val="40000"/>
+                  <a:lumOff val="60000"/>
+                </a:schemeClr>
+              </a:solidFill>
+            </a:endParaRPr>
+          </a:p>
+          <a:p>
+            <a:pPr marL="0" indent="0">
+              <a:buNone/>
+            </a:pPr>
+            <a:r>
+              <a:rPr lang="en-US" sz="2400" dirty="0">
+                <a:solidFill>
+                  <a:schemeClr val="accent6">
+                    <a:lumMod val="40000"/>
+                    <a:lumOff val="60000"/>
+                  </a:schemeClr>
+                </a:solidFill>
+              </a:rPr>
+              <a:t>3 parts:</a:t>
+            </a:r>
+          </a:p>
+          <a:p>
+            <a:pPr marL="0" indent="0">
+              <a:buNone/>
+            </a:pPr>
+            <a:r>
+              <a:rPr lang="en-US" sz="2400" dirty="0">
+                <a:solidFill>
+                  <a:schemeClr val="accent6">
+                    <a:lumMod val="40000"/>
+                    <a:lumOff val="60000"/>
+                  </a:schemeClr>
+                </a:solidFill>
+                <a:hlinkClick r:id="rId4">
+                  <a:extLst>
+                    <a:ext uri="{A12FA001-AC4F-418D-AE19-62706E023703}">
+                      <ahyp:hlinkClr xmlns:ahyp="http://schemas.microsoft.com/office/drawing/2018/hyperlinkcolor" val="tx"/>
+                    </a:ext>
+                  </a:extLst>
+                </a:hlinkClick>
+              </a:rPr>
+              <a:t>1) https://youtu.be/OxCpWwDCDFQ?si=xo2r5jOoc3YQgji6</a:t>
+            </a:r>
+          </a:p>
+          <a:p>
+            <a:pPr marL="0" indent="0">
+              <a:buNone/>
+            </a:pPr>
+            <a:r>
+              <a:rPr lang="en-US" sz="2400" dirty="0">
+                <a:solidFill>
+                  <a:schemeClr val="accent6">
+                    <a:lumMod val="40000"/>
+                    <a:lumOff val="60000"/>
+                  </a:schemeClr>
+                </a:solidFill>
+                <a:hlinkClick r:id="rId4">
+                  <a:extLst>
+                    <a:ext uri="{A12FA001-AC4F-418D-AE19-62706E023703}">
+                      <ahyp:hlinkClr xmlns:ahyp="http://schemas.microsoft.com/office/drawing/2018/hyperlinkcolor" val="tx"/>
+                    </a:ext>
+                  </a:extLst>
+                </a:hlinkClick>
+              </a:rPr>
+              <a:t>2) https://youtu.be/UPtG_38Oq8o?si=fYUN8D7y1fvW2vCw</a:t>
+            </a:r>
+            <a:endParaRPr lang="en-US" sz="2400" dirty="0">
+              <a:solidFill>
+                <a:schemeClr val="accent6">
+                  <a:lumMod val="40000"/>
+                  <a:lumOff val="60000"/>
+                </a:schemeClr>
+              </a:solidFill>
+            </a:endParaRPr>
+          </a:p>
+          <a:p>
+            <a:pPr marL="0" indent="0">
+              <a:buNone/>
+            </a:pPr>
+            <a:r>
+              <a:rPr lang="en-US" sz="2400" dirty="0">
+                <a:solidFill>
+                  <a:schemeClr val="accent6">
+                    <a:lumMod val="40000"/>
+                    <a:lumOff val="60000"/>
+                  </a:schemeClr>
+                </a:solidFill>
+                <a:hlinkClick r:id="rId5">
+                  <a:extLst>
+                    <a:ext uri="{A12FA001-AC4F-418D-AE19-62706E023703}">
+                      <ahyp:hlinkClr xmlns:ahyp="http://schemas.microsoft.com/office/drawing/2018/hyperlinkcolor" val="tx"/>
+                    </a:ext>
+                  </a:extLst>
+                </a:hlinkClick>
+              </a:rPr>
+              <a:t>3) https://youtu.be/qaWMOYf4ri8?si=iA8GmBLLFfcZgCQk</a:t>
+            </a:r>
+            <a:endParaRPr lang="en-US" sz="2400" dirty="0">
+              <a:solidFill>
+                <a:schemeClr val="accent6">
+                  <a:lumMod val="40000"/>
+                  <a:lumOff val="60000"/>
+                </a:schemeClr>
+              </a:solidFill>
+            </a:endParaRPr>
+          </a:p>
+          <a:p>
+            <a:pPr marL="514350" indent="-514350">
+              <a:buAutoNum type="arabicParenR" startAt="3"/>
+            </a:pPr>
+            <a:endParaRPr lang="en-US" sz="2400" dirty="0">
+              <a:solidFill>
+                <a:schemeClr val="accent6">
+                  <a:lumMod val="40000"/>
+                  <a:lumOff val="60000"/>
+                </a:schemeClr>
+              </a:solidFill>
+            </a:endParaRPr>
+          </a:p>
+          <a:p>
+            <a:pPr marL="0" indent="0">
+              <a:buNone/>
+            </a:pPr>
+            <a:r>
+              <a:rPr lang="en-US" sz="2400" dirty="0">
+                <a:solidFill>
+                  <a:schemeClr val="accent6">
+                    <a:lumMod val="40000"/>
+                    <a:lumOff val="60000"/>
+                  </a:schemeClr>
+                </a:solidFill>
+              </a:rPr>
+              <a:t>https://www.datacamp.com/tutorial/how-transformers-work</a:t>
+            </a:r>
+          </a:p>
+          <a:p>
+            <a:pPr marL="0" indent="0">
+              <a:buNone/>
+            </a:pPr>
+            <a:endParaRPr lang="en-US" sz="2400" dirty="0">
+              <a:solidFill>
+                <a:schemeClr val="accent6">
+                  <a:lumMod val="40000"/>
+                  <a:lumOff val="60000"/>
+                </a:schemeClr>
+              </a:solidFill>
+            </a:endParaRPr>
+          </a:p>
+          <a:p>
+            <a:pPr marL="514350" indent="-514350">
+              <a:buAutoNum type="arabicParenR" startAt="3"/>
+            </a:pPr>
+            <a:endParaRPr lang="en-US" sz="2400" dirty="0">
+              <a:solidFill>
+                <a:schemeClr val="accent6">
+                  <a:lumMod val="40000"/>
+                  <a:lumOff val="60000"/>
+                </a:schemeClr>
+              </a:solidFill>
+            </a:endParaRPr>
+          </a:p>
+        </p:txBody>
+      </p:sp>
+    </p:spTree>
+    <p:extLst>
+      <p:ext uri="{BB962C8B-B14F-4D97-AF65-F5344CB8AC3E}">
+        <p14:creationId xmlns:p14="http://schemas.microsoft.com/office/powerpoint/2010/main" val="1193052763"/>
+      </p:ext>
+    </p:extLst>
+  </p:cSld>
+  <p:clrMapOvr>
+    <a:masterClrMapping/>
+  </p:clrMapOvr>
+</p:sld>
+</file>
+
+<file path=ppt/slides/slide20.xml><?xml version="1.0" encoding="utf-8"?>
 <p:sld xmlns:a="http://schemas.openxmlformats.org/drawingml/2006/main" xmlns:r="http://schemas.openxmlformats.org/officeDocument/2006/relationships" xmlns:p="http://schemas.openxmlformats.org/presentationml/2006/main">
   <p:cSld>
     <p:spTree>
@@ -11458,7 +12040,7 @@
 </p:sld>
 </file>
 
-<file path=ppt/slides/slide19.xml><?xml version="1.0" encoding="utf-8"?>
+<file path=ppt/slides/slide21.xml><?xml version="1.0" encoding="utf-8"?>
 <p:sld xmlns:a="http://schemas.openxmlformats.org/drawingml/2006/main" xmlns:r="http://schemas.openxmlformats.org/officeDocument/2006/relationships" xmlns:p="http://schemas.openxmlformats.org/presentationml/2006/main">
   <p:cSld>
     <p:spTree>
@@ -11745,321 +12327,7 @@
 </p:sld>
 </file>
 
-<file path=ppt/slides/slide2.xml><?xml version="1.0" encoding="utf-8"?>
-<p:sld xmlns:a="http://schemas.openxmlformats.org/drawingml/2006/main" xmlns:r="http://schemas.openxmlformats.org/officeDocument/2006/relationships" xmlns:p="http://schemas.openxmlformats.org/presentationml/2006/main">
-  <p:cSld>
-    <p:spTree>
-      <p:nvGrpSpPr>
-        <p:cNvPr id="1" name=""/>
-        <p:cNvGrpSpPr/>
-        <p:nvPr/>
-      </p:nvGrpSpPr>
-      <p:grpSpPr>
-        <a:xfrm>
-          <a:off x="0" y="0"/>
-          <a:ext cx="0" cy="0"/>
-          <a:chOff x="0" y="0"/>
-          <a:chExt cx="0" cy="0"/>
-        </a:xfrm>
-      </p:grpSpPr>
-      <p:sp>
-        <p:nvSpPr>
-          <p:cNvPr id="4" name="TextBox 3">
-            <a:extLst>
-              <a:ext uri="{FF2B5EF4-FFF2-40B4-BE49-F238E27FC236}">
-                <a16:creationId xmlns:a16="http://schemas.microsoft.com/office/drawing/2014/main" id="{29D68720-C308-BDDC-262A-F5640C4C8FED}"/>
-              </a:ext>
-            </a:extLst>
-          </p:cNvPr>
-          <p:cNvSpPr txBox="1"/>
-          <p:nvPr/>
-        </p:nvSpPr>
-        <p:spPr>
-          <a:xfrm>
-            <a:off x="777618" y="1245090"/>
-            <a:ext cx="10268712" cy="4893647"/>
-          </a:xfrm>
-          <a:prstGeom prst="rect">
-            <a:avLst/>
-          </a:prstGeom>
-          <a:noFill/>
-        </p:spPr>
-        <p:txBody>
-          <a:bodyPr wrap="square">
-            <a:spAutoFit/>
-          </a:bodyPr>
-          <a:lstStyle/>
-          <a:p>
-            <a:r>
-              <a:rPr lang="en-US" sz="2400" dirty="0">
-                <a:solidFill>
-                  <a:schemeClr val="accent6">
-                    <a:lumMod val="40000"/>
-                    <a:lumOff val="60000"/>
-                  </a:schemeClr>
-                </a:solidFill>
-                <a:hlinkClick r:id="rId2">
-                  <a:extLst>
-                    <a:ext uri="{A12FA001-AC4F-418D-AE19-62706E023703}">
-                      <ahyp:hlinkClr xmlns:ahyp="http://schemas.microsoft.com/office/drawing/2018/hyperlinkcolor" val="tx"/>
-                    </a:ext>
-                  </a:extLst>
-                </a:hlinkClick>
-              </a:rPr>
-              <a:t>Source:</a:t>
-            </a:r>
-          </a:p>
-          <a:p>
-            <a:r>
-              <a:rPr lang="en-US" sz="2400" dirty="0">
-                <a:solidFill>
-                  <a:schemeClr val="accent6">
-                    <a:lumMod val="40000"/>
-                    <a:lumOff val="60000"/>
-                  </a:schemeClr>
-                </a:solidFill>
-                <a:hlinkClick r:id="rId2">
-                  <a:extLst>
-                    <a:ext uri="{A12FA001-AC4F-418D-AE19-62706E023703}">
-                      <ahyp:hlinkClr xmlns:ahyp="http://schemas.microsoft.com/office/drawing/2018/hyperlinkcolor" val="tx"/>
-                    </a:ext>
-                  </a:extLst>
-                </a:hlinkClick>
-              </a:rPr>
-              <a:t>https://youtu.be/ZhAz268Hdpw?si=jQXkVM058uJkEWCw</a:t>
-            </a:r>
-            <a:endParaRPr lang="en-US" sz="2400" dirty="0">
-              <a:solidFill>
-                <a:schemeClr val="accent6">
-                  <a:lumMod val="40000"/>
-                  <a:lumOff val="60000"/>
-                </a:schemeClr>
-              </a:solidFill>
-            </a:endParaRPr>
-          </a:p>
-          <a:p>
-            <a:r>
-              <a:rPr lang="en-US" sz="2400" dirty="0">
-                <a:solidFill>
-                  <a:schemeClr val="accent6">
-                    <a:lumMod val="40000"/>
-                    <a:lumOff val="60000"/>
-                  </a:schemeClr>
-                </a:solidFill>
-                <a:hlinkClick r:id="rId3">
-                  <a:extLst>
-                    <a:ext uri="{A12FA001-AC4F-418D-AE19-62706E023703}">
-                      <ahyp:hlinkClr xmlns:ahyp="http://schemas.microsoft.com/office/drawing/2018/hyperlinkcolor" val="tx"/>
-                    </a:ext>
-                  </a:extLst>
-                </a:hlinkClick>
-              </a:rPr>
-              <a:t>https://youtu.be/zxQyTK8quyY?si=C-flWWBSxwrqWao7</a:t>
-            </a:r>
-            <a:endParaRPr lang="en-US" sz="2400" dirty="0">
-              <a:solidFill>
-                <a:schemeClr val="accent6">
-                  <a:lumMod val="40000"/>
-                  <a:lumOff val="60000"/>
-                </a:schemeClr>
-              </a:solidFill>
-            </a:endParaRPr>
-          </a:p>
-          <a:p>
-            <a:endParaRPr lang="en-US" sz="2400" dirty="0">
-              <a:solidFill>
-                <a:schemeClr val="accent6">
-                  <a:lumMod val="40000"/>
-                  <a:lumOff val="60000"/>
-                </a:schemeClr>
-              </a:solidFill>
-            </a:endParaRPr>
-          </a:p>
-          <a:p>
-            <a:pPr marL="0" indent="0">
-              <a:buNone/>
-            </a:pPr>
-            <a:endParaRPr lang="en-US" sz="2400" dirty="0">
-              <a:solidFill>
-                <a:schemeClr val="accent6">
-                  <a:lumMod val="40000"/>
-                  <a:lumOff val="60000"/>
-                </a:schemeClr>
-              </a:solidFill>
-            </a:endParaRPr>
-          </a:p>
-          <a:p>
-            <a:pPr marL="0" indent="0">
-              <a:buNone/>
-            </a:pPr>
-            <a:r>
-              <a:rPr lang="en-US" sz="2400" dirty="0">
-                <a:solidFill>
-                  <a:schemeClr val="accent6">
-                    <a:lumMod val="40000"/>
-                    <a:lumOff val="60000"/>
-                  </a:schemeClr>
-                </a:solidFill>
-              </a:rPr>
-              <a:t>3 parts:</a:t>
-            </a:r>
-          </a:p>
-          <a:p>
-            <a:pPr marL="0" indent="0">
-              <a:buNone/>
-            </a:pPr>
-            <a:r>
-              <a:rPr lang="en-US" sz="2400" dirty="0">
-                <a:solidFill>
-                  <a:schemeClr val="accent6">
-                    <a:lumMod val="40000"/>
-                    <a:lumOff val="60000"/>
-                  </a:schemeClr>
-                </a:solidFill>
-                <a:hlinkClick r:id="rId4">
-                  <a:extLst>
-                    <a:ext uri="{A12FA001-AC4F-418D-AE19-62706E023703}">
-                      <ahyp:hlinkClr xmlns:ahyp="http://schemas.microsoft.com/office/drawing/2018/hyperlinkcolor" val="tx"/>
-                    </a:ext>
-                  </a:extLst>
-                </a:hlinkClick>
-              </a:rPr>
-              <a:t>1) https://youtu.be/OxCpWwDCDFQ?si=xo2r5jOoc3YQgji6</a:t>
-            </a:r>
-          </a:p>
-          <a:p>
-            <a:pPr marL="0" indent="0">
-              <a:buNone/>
-            </a:pPr>
-            <a:r>
-              <a:rPr lang="en-US" sz="2400" dirty="0">
-                <a:solidFill>
-                  <a:schemeClr val="accent6">
-                    <a:lumMod val="40000"/>
-                    <a:lumOff val="60000"/>
-                  </a:schemeClr>
-                </a:solidFill>
-                <a:hlinkClick r:id="rId4">
-                  <a:extLst>
-                    <a:ext uri="{A12FA001-AC4F-418D-AE19-62706E023703}">
-                      <ahyp:hlinkClr xmlns:ahyp="http://schemas.microsoft.com/office/drawing/2018/hyperlinkcolor" val="tx"/>
-                    </a:ext>
-                  </a:extLst>
-                </a:hlinkClick>
-              </a:rPr>
-              <a:t>2) https://youtu.be/UPtG_38Oq8o?si=fYUN8D7y1fvW2vCw</a:t>
-            </a:r>
-            <a:endParaRPr lang="en-US" sz="2400" dirty="0">
-              <a:solidFill>
-                <a:schemeClr val="accent6">
-                  <a:lumMod val="40000"/>
-                  <a:lumOff val="60000"/>
-                </a:schemeClr>
-              </a:solidFill>
-            </a:endParaRPr>
-          </a:p>
-          <a:p>
-            <a:pPr marL="0" indent="0">
-              <a:buNone/>
-            </a:pPr>
-            <a:r>
-              <a:rPr lang="en-US" sz="2400" dirty="0">
-                <a:solidFill>
-                  <a:schemeClr val="accent6">
-                    <a:lumMod val="40000"/>
-                    <a:lumOff val="60000"/>
-                  </a:schemeClr>
-                </a:solidFill>
-                <a:hlinkClick r:id="rId5">
-                  <a:extLst>
-                    <a:ext uri="{A12FA001-AC4F-418D-AE19-62706E023703}">
-                      <ahyp:hlinkClr xmlns:ahyp="http://schemas.microsoft.com/office/drawing/2018/hyperlinkcolor" val="tx"/>
-                    </a:ext>
-                  </a:extLst>
-                </a:hlinkClick>
-              </a:rPr>
-              <a:t>3) https://youtu.be/qaWMOYf4ri8?si=iA8GmBLLFfcZgCQk</a:t>
-            </a:r>
-            <a:endParaRPr lang="en-US" sz="2400" dirty="0">
-              <a:solidFill>
-                <a:schemeClr val="accent6">
-                  <a:lumMod val="40000"/>
-                  <a:lumOff val="60000"/>
-                </a:schemeClr>
-              </a:solidFill>
-            </a:endParaRPr>
-          </a:p>
-          <a:p>
-            <a:pPr marL="514350" indent="-514350">
-              <a:buAutoNum type="arabicParenR" startAt="3"/>
-            </a:pPr>
-            <a:endParaRPr lang="en-US" sz="2400" dirty="0">
-              <a:solidFill>
-                <a:schemeClr val="accent6">
-                  <a:lumMod val="40000"/>
-                  <a:lumOff val="60000"/>
-                </a:schemeClr>
-              </a:solidFill>
-            </a:endParaRPr>
-          </a:p>
-          <a:p>
-            <a:pPr marL="0" indent="0">
-              <a:buNone/>
-            </a:pPr>
-            <a:r>
-              <a:rPr lang="en-US" sz="2400" dirty="0">
-                <a:solidFill>
-                  <a:schemeClr val="accent6">
-                    <a:lumMod val="40000"/>
-                    <a:lumOff val="60000"/>
-                  </a:schemeClr>
-                </a:solidFill>
-              </a:rPr>
-              <a:t>https://www.datacamp.com/tutorial/how-transformers-work</a:t>
-            </a:r>
-          </a:p>
-          <a:p>
-            <a:pPr marL="0" indent="0">
-              <a:buNone/>
-            </a:pPr>
-            <a:endParaRPr lang="en-US" sz="2400" dirty="0">
-              <a:solidFill>
-                <a:schemeClr val="accent6">
-                  <a:lumMod val="40000"/>
-                  <a:lumOff val="60000"/>
-                </a:schemeClr>
-              </a:solidFill>
-            </a:endParaRPr>
-          </a:p>
-          <a:p>
-            <a:pPr marL="514350" indent="-514350">
-              <a:buAutoNum type="arabicParenR" startAt="3"/>
-            </a:pPr>
-            <a:endParaRPr lang="en-US" sz="2400" dirty="0">
-              <a:solidFill>
-                <a:schemeClr val="accent6">
-                  <a:lumMod val="40000"/>
-                  <a:lumOff val="60000"/>
-                </a:schemeClr>
-              </a:solidFill>
-            </a:endParaRPr>
-          </a:p>
-        </p:txBody>
-      </p:sp>
-    </p:spTree>
-    <p:extLst>
-      <p:ext uri="{BB962C8B-B14F-4D97-AF65-F5344CB8AC3E}">
-        <p14:creationId xmlns:p14="http://schemas.microsoft.com/office/powerpoint/2010/main" val="1193052763"/>
-      </p:ext>
-    </p:extLst>
-  </p:cSld>
-  <p:clrMapOvr>
-    <a:masterClrMapping/>
-  </p:clrMapOvr>
-</p:sld>
-</file>
-
-<file path=ppt/slides/slide20.xml><?xml version="1.0" encoding="utf-8"?>
+<file path=ppt/slides/slide22.xml><?xml version="1.0" encoding="utf-8"?>
 <p:sld xmlns:a="http://schemas.openxmlformats.org/drawingml/2006/main" xmlns:r="http://schemas.openxmlformats.org/officeDocument/2006/relationships" xmlns:p="http://schemas.openxmlformats.org/presentationml/2006/main">
   <p:cSld>
     <p:spTree>
@@ -12231,7 +12499,7 @@
 </p:sld>
 </file>
 
-<file path=ppt/slides/slide21.xml><?xml version="1.0" encoding="utf-8"?>
+<file path=ppt/slides/slide23.xml><?xml version="1.0" encoding="utf-8"?>
 <p:sld xmlns:a="http://schemas.openxmlformats.org/drawingml/2006/main" xmlns:r="http://schemas.openxmlformats.org/officeDocument/2006/relationships" xmlns:p="http://schemas.openxmlformats.org/presentationml/2006/main">
   <p:cSld>
     <p:spTree>
@@ -12458,7 +12726,7 @@
 </p:sld>
 </file>
 
-<file path=ppt/slides/slide22.xml><?xml version="1.0" encoding="utf-8"?>
+<file path=ppt/slides/slide24.xml><?xml version="1.0" encoding="utf-8"?>
 <p:sld xmlns:a="http://schemas.openxmlformats.org/drawingml/2006/main" xmlns:r="http://schemas.openxmlformats.org/officeDocument/2006/relationships" xmlns:p="http://schemas.openxmlformats.org/presentationml/2006/main">
   <p:cSld>
     <p:spTree>
@@ -12606,7 +12874,7 @@
 </p:sld>
 </file>
 
-<file path=ppt/slides/slide23.xml><?xml version="1.0" encoding="utf-8"?>
+<file path=ppt/slides/slide25.xml><?xml version="1.0" encoding="utf-8"?>
 <p:sld xmlns:a="http://schemas.openxmlformats.org/drawingml/2006/main" xmlns:r="http://schemas.openxmlformats.org/officeDocument/2006/relationships" xmlns:p="http://schemas.openxmlformats.org/presentationml/2006/main">
   <p:cSld>
     <p:spTree>
@@ -12742,7 +13010,7 @@
 </p:sld>
 </file>
 
-<file path=ppt/slides/slide24.xml><?xml version="1.0" encoding="utf-8"?>
+<file path=ppt/slides/slide26.xml><?xml version="1.0" encoding="utf-8"?>
 <p:sld xmlns:a="http://schemas.openxmlformats.org/drawingml/2006/main" xmlns:r="http://schemas.openxmlformats.org/officeDocument/2006/relationships" xmlns:p="http://schemas.openxmlformats.org/presentationml/2006/main">
   <p:cSld>
     <p:spTree>
@@ -14326,7 +14594,7 @@
         </p:nvSpPr>
         <p:spPr>
           <a:xfrm>
-            <a:off x="100584" y="713893"/>
+            <a:off x="100584" y="1132185"/>
             <a:ext cx="10561320" cy="1938992"/>
           </a:xfrm>
           <a:prstGeom prst="rect">
@@ -15428,7 +15696,7 @@
         </p:nvSpPr>
         <p:spPr>
           <a:xfrm>
-            <a:off x="100584" y="692184"/>
+            <a:off x="100584" y="1166842"/>
             <a:ext cx="11420856" cy="4524315"/>
           </a:xfrm>
           <a:prstGeom prst="rect">
@@ -15706,13 +15974,13 @@
           <p:nvPr>
             <p:extLst>
               <p:ext uri="{D42A27DB-BD31-4B8C-83A1-F6EECF244321}">
-                <p14:modId xmlns:p14="http://schemas.microsoft.com/office/powerpoint/2010/main" val="716512454"/>
+                <p14:modId xmlns:p14="http://schemas.microsoft.com/office/powerpoint/2010/main" val="847480628"/>
               </p:ext>
             </p:extLst>
           </p:nvPr>
         </p:nvGraphicFramePr>
         <p:xfrm>
-          <a:off x="6934201" y="2084832"/>
+          <a:off x="6934200" y="2382727"/>
           <a:ext cx="5157215" cy="2560320"/>
         </p:xfrm>
         <a:graphic>
@@ -16309,7 +16577,7 @@
         </p:nvSpPr>
         <p:spPr>
           <a:xfrm>
-            <a:off x="8622792" y="1623167"/>
+            <a:off x="8575548" y="1543952"/>
             <a:ext cx="1874520" cy="461665"/>
           </a:xfrm>
           <a:prstGeom prst="rect">

--- a/deep_learning/4_transformers_deploy/modern_NLP_transformers_intro/1_transformers.pptx
+++ b/deep_learning/4_transformers_deploy/modern_NLP_transformers_intro/1_transformers.pptx
@@ -5,38 +5,41 @@
     <p:sldMasterId id="2147483648" r:id="rId1"/>
   </p:sldMasterIdLst>
   <p:notesMasterIdLst>
-    <p:notesMasterId r:id="rId28"/>
+    <p:notesMasterId r:id="rId31"/>
   </p:notesMasterIdLst>
   <p:handoutMasterIdLst>
-    <p:handoutMasterId r:id="rId29"/>
+    <p:handoutMasterId r:id="rId32"/>
   </p:handoutMasterIdLst>
   <p:sldIdLst>
     <p:sldId id="256" r:id="rId2"/>
     <p:sldId id="270" r:id="rId3"/>
-    <p:sldId id="258" r:id="rId4"/>
-    <p:sldId id="277" r:id="rId5"/>
-    <p:sldId id="260" r:id="rId6"/>
-    <p:sldId id="262" r:id="rId7"/>
-    <p:sldId id="276" r:id="rId8"/>
-    <p:sldId id="281" r:id="rId9"/>
-    <p:sldId id="263" r:id="rId10"/>
-    <p:sldId id="280" r:id="rId11"/>
-    <p:sldId id="288" r:id="rId12"/>
-    <p:sldId id="287" r:id="rId13"/>
-    <p:sldId id="282" r:id="rId14"/>
-    <p:sldId id="264" r:id="rId15"/>
-    <p:sldId id="279" r:id="rId16"/>
-    <p:sldId id="278" r:id="rId17"/>
-    <p:sldId id="283" r:id="rId18"/>
-    <p:sldId id="284" r:id="rId19"/>
-    <p:sldId id="285" r:id="rId20"/>
-    <p:sldId id="265" r:id="rId21"/>
-    <p:sldId id="267" r:id="rId22"/>
-    <p:sldId id="286" r:id="rId23"/>
-    <p:sldId id="269" r:id="rId24"/>
-    <p:sldId id="261" r:id="rId25"/>
-    <p:sldId id="259" r:id="rId26"/>
-    <p:sldId id="275" r:id="rId27"/>
+    <p:sldId id="289" r:id="rId4"/>
+    <p:sldId id="291" r:id="rId5"/>
+    <p:sldId id="292" r:id="rId6"/>
+    <p:sldId id="290" r:id="rId7"/>
+    <p:sldId id="277" r:id="rId8"/>
+    <p:sldId id="260" r:id="rId9"/>
+    <p:sldId id="262" r:id="rId10"/>
+    <p:sldId id="276" r:id="rId11"/>
+    <p:sldId id="281" r:id="rId12"/>
+    <p:sldId id="263" r:id="rId13"/>
+    <p:sldId id="280" r:id="rId14"/>
+    <p:sldId id="288" r:id="rId15"/>
+    <p:sldId id="287" r:id="rId16"/>
+    <p:sldId id="282" r:id="rId17"/>
+    <p:sldId id="264" r:id="rId18"/>
+    <p:sldId id="279" r:id="rId19"/>
+    <p:sldId id="278" r:id="rId20"/>
+    <p:sldId id="283" r:id="rId21"/>
+    <p:sldId id="284" r:id="rId22"/>
+    <p:sldId id="285" r:id="rId23"/>
+    <p:sldId id="265" r:id="rId24"/>
+    <p:sldId id="267" r:id="rId25"/>
+    <p:sldId id="286" r:id="rId26"/>
+    <p:sldId id="269" r:id="rId27"/>
+    <p:sldId id="261" r:id="rId28"/>
+    <p:sldId id="259" r:id="rId29"/>
+    <p:sldId id="275" r:id="rId30"/>
   </p:sldIdLst>
   <p:sldSz cx="12192000" cy="6858000"/>
   <p:notesSz cx="6858000" cy="9144000"/>
@@ -240,7 +243,7 @@
           <a:p>
             <a:fld id="{7BAEECA8-D063-486F-AE31-5020270C1449}" type="datetimeFigureOut">
               <a:rPr lang="en-US" smtClean="0"/>
-              <a:t>6/15/2026</a:t>
+              <a:t>7/2/2026</a:t>
             </a:fld>
             <a:endParaRPr lang="en-US"/>
           </a:p>
@@ -1473,7 +1476,7 @@
           <a:p>
             <a:fld id="{CB233BD1-3BA8-448D-9D08-7846095EA517}" type="datetimeFigureOut">
               <a:rPr lang="en-US" smtClean="0"/>
-              <a:t>6/15/2026</a:t>
+              <a:t>7/2/2026</a:t>
             </a:fld>
             <a:endParaRPr lang="en-US"/>
           </a:p>
@@ -1887,7 +1890,7 @@
           <a:p>
             <a:fld id="{6383FAE1-13DE-4511-8C1B-C8AFB720664C}" type="datetimeFigureOut">
               <a:rPr lang="en-US" smtClean="0"/>
-              <a:t>6/15/2026</a:t>
+              <a:t>7/2/2026</a:t>
             </a:fld>
             <a:endParaRPr lang="en-US"/>
           </a:p>
@@ -2085,7 +2088,7 @@
           <a:p>
             <a:fld id="{6383FAE1-13DE-4511-8C1B-C8AFB720664C}" type="datetimeFigureOut">
               <a:rPr lang="en-US" smtClean="0"/>
-              <a:t>6/15/2026</a:t>
+              <a:t>7/2/2026</a:t>
             </a:fld>
             <a:endParaRPr lang="en-US"/>
           </a:p>
@@ -2293,7 +2296,7 @@
           <a:p>
             <a:fld id="{6383FAE1-13DE-4511-8C1B-C8AFB720664C}" type="datetimeFigureOut">
               <a:rPr lang="en-US" smtClean="0"/>
-              <a:t>6/15/2026</a:t>
+              <a:t>7/2/2026</a:t>
             </a:fld>
             <a:endParaRPr lang="en-US"/>
           </a:p>
@@ -2491,7 +2494,7 @@
           <a:p>
             <a:fld id="{6383FAE1-13DE-4511-8C1B-C8AFB720664C}" type="datetimeFigureOut">
               <a:rPr lang="en-US" smtClean="0"/>
-              <a:t>6/15/2026</a:t>
+              <a:t>7/2/2026</a:t>
             </a:fld>
             <a:endParaRPr lang="en-US"/>
           </a:p>
@@ -2766,7 +2769,7 @@
           <a:p>
             <a:fld id="{6383FAE1-13DE-4511-8C1B-C8AFB720664C}" type="datetimeFigureOut">
               <a:rPr lang="en-US" smtClean="0"/>
-              <a:t>6/15/2026</a:t>
+              <a:t>7/2/2026</a:t>
             </a:fld>
             <a:endParaRPr lang="en-US"/>
           </a:p>
@@ -3031,7 +3034,7 @@
           <a:p>
             <a:fld id="{6383FAE1-13DE-4511-8C1B-C8AFB720664C}" type="datetimeFigureOut">
               <a:rPr lang="en-US" smtClean="0"/>
-              <a:t>6/15/2026</a:t>
+              <a:t>7/2/2026</a:t>
             </a:fld>
             <a:endParaRPr lang="en-US"/>
           </a:p>
@@ -3443,7 +3446,7 @@
           <a:p>
             <a:fld id="{6383FAE1-13DE-4511-8C1B-C8AFB720664C}" type="datetimeFigureOut">
               <a:rPr lang="en-US" smtClean="0"/>
-              <a:t>6/15/2026</a:t>
+              <a:t>7/2/2026</a:t>
             </a:fld>
             <a:endParaRPr lang="en-US"/>
           </a:p>
@@ -3584,7 +3587,7 @@
           <a:p>
             <a:fld id="{6383FAE1-13DE-4511-8C1B-C8AFB720664C}" type="datetimeFigureOut">
               <a:rPr lang="en-US" smtClean="0"/>
-              <a:t>6/15/2026</a:t>
+              <a:t>7/2/2026</a:t>
             </a:fld>
             <a:endParaRPr lang="en-US"/>
           </a:p>
@@ -3697,7 +3700,7 @@
           <a:p>
             <a:fld id="{6383FAE1-13DE-4511-8C1B-C8AFB720664C}" type="datetimeFigureOut">
               <a:rPr lang="en-US" smtClean="0"/>
-              <a:t>6/15/2026</a:t>
+              <a:t>7/2/2026</a:t>
             </a:fld>
             <a:endParaRPr lang="en-US"/>
           </a:p>
@@ -4008,7 +4011,7 @@
           <a:p>
             <a:fld id="{6383FAE1-13DE-4511-8C1B-C8AFB720664C}" type="datetimeFigureOut">
               <a:rPr lang="en-US" smtClean="0"/>
-              <a:t>6/15/2026</a:t>
+              <a:t>7/2/2026</a:t>
             </a:fld>
             <a:endParaRPr lang="en-US"/>
           </a:p>
@@ -4299,7 +4302,7 @@
           <a:p>
             <a:fld id="{6383FAE1-13DE-4511-8C1B-C8AFB720664C}" type="datetimeFigureOut">
               <a:rPr lang="en-US" smtClean="0"/>
-              <a:t>6/15/2026</a:t>
+              <a:t>7/2/2026</a:t>
             </a:fld>
             <a:endParaRPr lang="en-US"/>
           </a:p>
@@ -4543,7 +4546,7 @@
           <a:p>
             <a:fld id="{6383FAE1-13DE-4511-8C1B-C8AFB720664C}" type="datetimeFigureOut">
               <a:rPr lang="en-US" smtClean="0"/>
-              <a:t>6/15/2026</a:t>
+              <a:t>7/2/2026</a:t>
             </a:fld>
             <a:endParaRPr lang="en-US"/>
           </a:p>
@@ -5145,6 +5148,2067 @@
         <p:cNvPr id="1" name="">
           <a:extLst>
             <a:ext uri="{FF2B5EF4-FFF2-40B4-BE49-F238E27FC236}">
+              <a16:creationId xmlns:a16="http://schemas.microsoft.com/office/drawing/2014/main" id="{598FCEFC-A825-0545-ADEC-20963105EB8A}"/>
+            </a:ext>
+          </a:extLst>
+        </p:cNvPr>
+        <p:cNvGrpSpPr/>
+        <p:nvPr/>
+      </p:nvGrpSpPr>
+      <p:grpSpPr>
+        <a:xfrm>
+          <a:off x="0" y="0"/>
+          <a:ext cx="0" cy="0"/>
+          <a:chOff x="0" y="0"/>
+          <a:chExt cx="0" cy="0"/>
+        </a:xfrm>
+      </p:grpSpPr>
+      <p:sp>
+        <p:nvSpPr>
+          <p:cNvPr id="5" name="TextBox 4">
+            <a:extLst>
+              <a:ext uri="{FF2B5EF4-FFF2-40B4-BE49-F238E27FC236}">
+                <a16:creationId xmlns:a16="http://schemas.microsoft.com/office/drawing/2014/main" id="{37B5DF61-E4A7-81A0-F452-9A7D2C8B18E1}"/>
+              </a:ext>
+            </a:extLst>
+          </p:cNvPr>
+          <p:cNvSpPr txBox="1"/>
+          <p:nvPr/>
+        </p:nvSpPr>
+        <p:spPr>
+          <a:xfrm>
+            <a:off x="100584" y="1132185"/>
+            <a:ext cx="10561320" cy="1938992"/>
+          </a:xfrm>
+          <a:prstGeom prst="rect">
+            <a:avLst/>
+          </a:prstGeom>
+          <a:noFill/>
+        </p:spPr>
+        <p:txBody>
+          <a:bodyPr wrap="square">
+            <a:spAutoFit/>
+          </a:bodyPr>
+          <a:lstStyle/>
+          <a:p>
+            <a:pPr marL="0" indent="0">
+              <a:buNone/>
+            </a:pPr>
+            <a:r>
+              <a:rPr lang="en-US" sz="2400" dirty="0">
+                <a:solidFill>
+                  <a:schemeClr val="accent6">
+                    <a:lumMod val="60000"/>
+                    <a:lumOff val="40000"/>
+                  </a:schemeClr>
+                </a:solidFill>
+              </a:rPr>
+              <a:t>Transformers consist of </a:t>
+            </a:r>
+            <a:r>
+              <a:rPr lang="en-US" sz="2400" b="1" dirty="0">
+                <a:solidFill>
+                  <a:schemeClr val="accent6">
+                    <a:lumMod val="60000"/>
+                    <a:lumOff val="40000"/>
+                  </a:schemeClr>
+                </a:solidFill>
+              </a:rPr>
+              <a:t>encoder</a:t>
+            </a:r>
+            <a:r>
+              <a:rPr lang="en-US" sz="2400" dirty="0">
+                <a:solidFill>
+                  <a:schemeClr val="accent6">
+                    <a:lumMod val="60000"/>
+                    <a:lumOff val="40000"/>
+                  </a:schemeClr>
+                </a:solidFill>
+              </a:rPr>
+              <a:t> and </a:t>
+            </a:r>
+            <a:r>
+              <a:rPr lang="en-US" sz="2400" b="1" dirty="0">
+                <a:solidFill>
+                  <a:schemeClr val="accent6">
+                    <a:lumMod val="60000"/>
+                    <a:lumOff val="40000"/>
+                  </a:schemeClr>
+                </a:solidFill>
+              </a:rPr>
+              <a:t>decoder</a:t>
+            </a:r>
+            <a:r>
+              <a:rPr lang="en-US" sz="2400" dirty="0">
+                <a:solidFill>
+                  <a:schemeClr val="accent6">
+                    <a:lumMod val="60000"/>
+                    <a:lumOff val="40000"/>
+                  </a:schemeClr>
+                </a:solidFill>
+              </a:rPr>
+              <a:t> stacks. Most models use either:</a:t>
+            </a:r>
+          </a:p>
+          <a:p>
+            <a:pPr marL="0" indent="0">
+              <a:buNone/>
+            </a:pPr>
+            <a:endParaRPr lang="en-US" sz="2400" dirty="0">
+              <a:solidFill>
+                <a:schemeClr val="accent6">
+                  <a:lumMod val="60000"/>
+                  <a:lumOff val="40000"/>
+                </a:schemeClr>
+              </a:solidFill>
+            </a:endParaRPr>
+          </a:p>
+          <a:p>
+            <a:r>
+              <a:rPr lang="en-US" sz="2400" b="1" dirty="0">
+                <a:solidFill>
+                  <a:schemeClr val="accent6">
+                    <a:lumMod val="60000"/>
+                    <a:lumOff val="40000"/>
+                  </a:schemeClr>
+                </a:solidFill>
+              </a:rPr>
+              <a:t>Encoder-only</a:t>
+            </a:r>
+            <a:r>
+              <a:rPr lang="en-US" sz="2400" dirty="0">
+                <a:solidFill>
+                  <a:schemeClr val="accent6">
+                    <a:lumMod val="60000"/>
+                    <a:lumOff val="40000"/>
+                  </a:schemeClr>
+                </a:solidFill>
+              </a:rPr>
+              <a:t> (e.g., BERT – understanding tasks)</a:t>
+            </a:r>
+          </a:p>
+          <a:p>
+            <a:r>
+              <a:rPr lang="en-US" sz="2400" b="1" dirty="0">
+                <a:solidFill>
+                  <a:schemeClr val="accent6">
+                    <a:lumMod val="60000"/>
+                    <a:lumOff val="40000"/>
+                  </a:schemeClr>
+                </a:solidFill>
+              </a:rPr>
+              <a:t>Decoder-only</a:t>
+            </a:r>
+            <a:r>
+              <a:rPr lang="en-US" sz="2400" dirty="0">
+                <a:solidFill>
+                  <a:schemeClr val="accent6">
+                    <a:lumMod val="60000"/>
+                    <a:lumOff val="40000"/>
+                  </a:schemeClr>
+                </a:solidFill>
+              </a:rPr>
+              <a:t> (e.g., GPT – generation tasks)</a:t>
+            </a:r>
+          </a:p>
+          <a:p>
+            <a:r>
+              <a:rPr lang="en-US" sz="2400" b="1" dirty="0">
+                <a:solidFill>
+                  <a:schemeClr val="accent6">
+                    <a:lumMod val="60000"/>
+                    <a:lumOff val="40000"/>
+                  </a:schemeClr>
+                </a:solidFill>
+              </a:rPr>
+              <a:t>Both</a:t>
+            </a:r>
+            <a:r>
+              <a:rPr lang="en-US" sz="2400" dirty="0">
+                <a:solidFill>
+                  <a:schemeClr val="accent6">
+                    <a:lumMod val="60000"/>
+                    <a:lumOff val="40000"/>
+                  </a:schemeClr>
+                </a:solidFill>
+              </a:rPr>
+              <a:t> (e.g., T5 – translation/summarization)</a:t>
+            </a:r>
+          </a:p>
+        </p:txBody>
+      </p:sp>
+      <p:sp>
+        <p:nvSpPr>
+          <p:cNvPr id="7" name="TextBox 6">
+            <a:extLst>
+              <a:ext uri="{FF2B5EF4-FFF2-40B4-BE49-F238E27FC236}">
+                <a16:creationId xmlns:a16="http://schemas.microsoft.com/office/drawing/2014/main" id="{50085F69-2D24-BDB4-5D8B-C5F2C0609A01}"/>
+              </a:ext>
+            </a:extLst>
+          </p:cNvPr>
+          <p:cNvSpPr txBox="1"/>
+          <p:nvPr/>
+        </p:nvSpPr>
+        <p:spPr>
+          <a:xfrm>
+            <a:off x="100584" y="85082"/>
+            <a:ext cx="6190488" cy="461665"/>
+          </a:xfrm>
+          <a:prstGeom prst="rect">
+            <a:avLst/>
+          </a:prstGeom>
+          <a:noFill/>
+        </p:spPr>
+        <p:txBody>
+          <a:bodyPr wrap="square">
+            <a:spAutoFit/>
+          </a:bodyPr>
+          <a:lstStyle/>
+          <a:p>
+            <a:r>
+              <a:rPr lang="en-US" sz="2400" b="1" dirty="0">
+                <a:solidFill>
+                  <a:schemeClr val="accent6">
+                    <a:lumMod val="60000"/>
+                    <a:lumOff val="40000"/>
+                  </a:schemeClr>
+                </a:solidFill>
+              </a:rPr>
+              <a:t>Core Components of a Transformer</a:t>
+            </a:r>
+          </a:p>
+        </p:txBody>
+      </p:sp>
+      <p:sp>
+        <p:nvSpPr>
+          <p:cNvPr id="2" name="Rectangle 1">
+            <a:extLst>
+              <a:ext uri="{FF2B5EF4-FFF2-40B4-BE49-F238E27FC236}">
+                <a16:creationId xmlns:a16="http://schemas.microsoft.com/office/drawing/2014/main" id="{C290403B-4B31-3F17-2251-3238FE37C144}"/>
+              </a:ext>
+            </a:extLst>
+          </p:cNvPr>
+          <p:cNvSpPr/>
+          <p:nvPr/>
+        </p:nvSpPr>
+        <p:spPr>
+          <a:xfrm>
+            <a:off x="2990088" y="3429000"/>
+            <a:ext cx="4197096" cy="1467612"/>
+          </a:xfrm>
+          <a:prstGeom prst="rect">
+            <a:avLst/>
+          </a:prstGeom>
+        </p:spPr>
+        <p:style>
+          <a:lnRef idx="2">
+            <a:schemeClr val="accent1">
+              <a:shade val="15000"/>
+            </a:schemeClr>
+          </a:lnRef>
+          <a:fillRef idx="1">
+            <a:schemeClr val="accent1"/>
+          </a:fillRef>
+          <a:effectRef idx="0">
+            <a:schemeClr val="accent1"/>
+          </a:effectRef>
+          <a:fontRef idx="minor">
+            <a:schemeClr val="lt1"/>
+          </a:fontRef>
+        </p:style>
+        <p:txBody>
+          <a:bodyPr rtlCol="0" anchor="ctr"/>
+          <a:lstStyle/>
+          <a:p>
+            <a:pPr algn="ctr"/>
+            <a:endParaRPr lang="en-US" dirty="0"/>
+          </a:p>
+        </p:txBody>
+      </p:sp>
+      <p:sp>
+        <p:nvSpPr>
+          <p:cNvPr id="3" name="Rectangle 2">
+            <a:extLst>
+              <a:ext uri="{FF2B5EF4-FFF2-40B4-BE49-F238E27FC236}">
+                <a16:creationId xmlns:a16="http://schemas.microsoft.com/office/drawing/2014/main" id="{5F380A36-8080-F9F8-E64A-87702AFB7420}"/>
+              </a:ext>
+            </a:extLst>
+          </p:cNvPr>
+          <p:cNvSpPr/>
+          <p:nvPr/>
+        </p:nvSpPr>
+        <p:spPr>
+          <a:xfrm>
+            <a:off x="3195828" y="3480453"/>
+            <a:ext cx="1618488" cy="722376"/>
+          </a:xfrm>
+          <a:prstGeom prst="rect">
+            <a:avLst/>
+          </a:prstGeom>
+          <a:solidFill>
+            <a:srgbClr val="00B050"/>
+          </a:solidFill>
+        </p:spPr>
+        <p:style>
+          <a:lnRef idx="2">
+            <a:schemeClr val="accent1">
+              <a:shade val="15000"/>
+            </a:schemeClr>
+          </a:lnRef>
+          <a:fillRef idx="1">
+            <a:schemeClr val="accent1"/>
+          </a:fillRef>
+          <a:effectRef idx="0">
+            <a:schemeClr val="accent1"/>
+          </a:effectRef>
+          <a:fontRef idx="minor">
+            <a:schemeClr val="lt1"/>
+          </a:fontRef>
+        </p:style>
+        <p:txBody>
+          <a:bodyPr rtlCol="0" anchor="ctr"/>
+          <a:lstStyle/>
+          <a:p>
+            <a:pPr algn="ctr"/>
+            <a:r>
+              <a:rPr lang="en-US" dirty="0"/>
+              <a:t>Encoder</a:t>
+            </a:r>
+          </a:p>
+          <a:p>
+            <a:pPr algn="ctr"/>
+            <a:r>
+              <a:rPr lang="en-US" dirty="0"/>
+              <a:t>layer</a:t>
+            </a:r>
+          </a:p>
+        </p:txBody>
+      </p:sp>
+      <p:sp>
+        <p:nvSpPr>
+          <p:cNvPr id="4" name="Rectangle 3">
+            <a:extLst>
+              <a:ext uri="{FF2B5EF4-FFF2-40B4-BE49-F238E27FC236}">
+                <a16:creationId xmlns:a16="http://schemas.microsoft.com/office/drawing/2014/main" id="{4470F763-99A2-E532-4166-87DA9B436D69}"/>
+              </a:ext>
+            </a:extLst>
+          </p:cNvPr>
+          <p:cNvSpPr/>
+          <p:nvPr/>
+        </p:nvSpPr>
+        <p:spPr>
+          <a:xfrm>
+            <a:off x="5381244" y="3480453"/>
+            <a:ext cx="1618488" cy="722376"/>
+          </a:xfrm>
+          <a:prstGeom prst="rect">
+            <a:avLst/>
+          </a:prstGeom>
+          <a:solidFill>
+            <a:srgbClr val="00B050"/>
+          </a:solidFill>
+        </p:spPr>
+        <p:style>
+          <a:lnRef idx="2">
+            <a:schemeClr val="accent1">
+              <a:shade val="15000"/>
+            </a:schemeClr>
+          </a:lnRef>
+          <a:fillRef idx="1">
+            <a:schemeClr val="accent1"/>
+          </a:fillRef>
+          <a:effectRef idx="0">
+            <a:schemeClr val="accent1"/>
+          </a:effectRef>
+          <a:fontRef idx="minor">
+            <a:schemeClr val="lt1"/>
+          </a:fontRef>
+        </p:style>
+        <p:txBody>
+          <a:bodyPr rtlCol="0" anchor="ctr"/>
+          <a:lstStyle/>
+          <a:p>
+            <a:pPr algn="ctr"/>
+            <a:r>
+              <a:rPr lang="en-US" dirty="0"/>
+              <a:t>Decoder</a:t>
+            </a:r>
+          </a:p>
+          <a:p>
+            <a:pPr algn="ctr"/>
+            <a:r>
+              <a:rPr lang="en-US" dirty="0"/>
+              <a:t>layer</a:t>
+            </a:r>
+          </a:p>
+        </p:txBody>
+      </p:sp>
+      <p:sp>
+        <p:nvSpPr>
+          <p:cNvPr id="6" name="TextBox 5">
+            <a:extLst>
+              <a:ext uri="{FF2B5EF4-FFF2-40B4-BE49-F238E27FC236}">
+                <a16:creationId xmlns:a16="http://schemas.microsoft.com/office/drawing/2014/main" id="{84896610-09E5-6194-CEAC-259AC6598DE9}"/>
+              </a:ext>
+            </a:extLst>
+          </p:cNvPr>
+          <p:cNvSpPr txBox="1"/>
+          <p:nvPr/>
+        </p:nvSpPr>
+        <p:spPr>
+          <a:xfrm>
+            <a:off x="4498848" y="4527280"/>
+            <a:ext cx="1325619" cy="369332"/>
+          </a:xfrm>
+          <a:prstGeom prst="rect">
+            <a:avLst/>
+          </a:prstGeom>
+          <a:noFill/>
+        </p:spPr>
+        <p:txBody>
+          <a:bodyPr wrap="none" rtlCol="0">
+            <a:spAutoFit/>
+          </a:bodyPr>
+          <a:lstStyle/>
+          <a:p>
+            <a:r>
+              <a:rPr lang="en-US" dirty="0">
+                <a:solidFill>
+                  <a:schemeClr val="accent6">
+                    <a:lumMod val="40000"/>
+                    <a:lumOff val="60000"/>
+                  </a:schemeClr>
+                </a:solidFill>
+              </a:rPr>
+              <a:t>Transformer</a:t>
+            </a:r>
+          </a:p>
+        </p:txBody>
+      </p:sp>
+      <p:sp>
+        <p:nvSpPr>
+          <p:cNvPr id="8" name="Oval 7">
+            <a:extLst>
+              <a:ext uri="{FF2B5EF4-FFF2-40B4-BE49-F238E27FC236}">
+                <a16:creationId xmlns:a16="http://schemas.microsoft.com/office/drawing/2014/main" id="{376D8C4F-76D3-5D8C-FD56-9A39E255F5B7}"/>
+              </a:ext>
+            </a:extLst>
+          </p:cNvPr>
+          <p:cNvSpPr/>
+          <p:nvPr/>
+        </p:nvSpPr>
+        <p:spPr>
+          <a:xfrm>
+            <a:off x="1917454" y="5559552"/>
+            <a:ext cx="2926080" cy="675995"/>
+          </a:xfrm>
+          <a:prstGeom prst="ellipse">
+            <a:avLst/>
+          </a:prstGeom>
+        </p:spPr>
+        <p:style>
+          <a:lnRef idx="2">
+            <a:schemeClr val="accent1">
+              <a:shade val="15000"/>
+            </a:schemeClr>
+          </a:lnRef>
+          <a:fillRef idx="1">
+            <a:schemeClr val="accent1"/>
+          </a:fillRef>
+          <a:effectRef idx="0">
+            <a:schemeClr val="accent1"/>
+          </a:effectRef>
+          <a:fontRef idx="minor">
+            <a:schemeClr val="lt1"/>
+          </a:fontRef>
+        </p:style>
+        <p:txBody>
+          <a:bodyPr rtlCol="0" anchor="ctr"/>
+          <a:lstStyle/>
+          <a:p>
+            <a:pPr algn="ctr"/>
+            <a:r>
+              <a:rPr lang="en-US" dirty="0"/>
+              <a:t>How are you ?</a:t>
+            </a:r>
+          </a:p>
+        </p:txBody>
+      </p:sp>
+      <p:sp>
+        <p:nvSpPr>
+          <p:cNvPr id="9" name="Arrow: Right 8">
+            <a:extLst>
+              <a:ext uri="{FF2B5EF4-FFF2-40B4-BE49-F238E27FC236}">
+                <a16:creationId xmlns:a16="http://schemas.microsoft.com/office/drawing/2014/main" id="{753B7037-F7BA-112C-4BDD-21CD50C04175}"/>
+              </a:ext>
+            </a:extLst>
+          </p:cNvPr>
+          <p:cNvSpPr/>
+          <p:nvPr/>
+        </p:nvSpPr>
+        <p:spPr>
+          <a:xfrm rot="16200000">
+            <a:off x="2892183" y="5043416"/>
+            <a:ext cx="565142" cy="369332"/>
+          </a:xfrm>
+          <a:prstGeom prst="rightArrow">
+            <a:avLst/>
+          </a:prstGeom>
+        </p:spPr>
+        <p:style>
+          <a:lnRef idx="2">
+            <a:schemeClr val="accent1">
+              <a:shade val="15000"/>
+            </a:schemeClr>
+          </a:lnRef>
+          <a:fillRef idx="1">
+            <a:schemeClr val="accent1"/>
+          </a:fillRef>
+          <a:effectRef idx="0">
+            <a:schemeClr val="accent1"/>
+          </a:effectRef>
+          <a:fontRef idx="minor">
+            <a:schemeClr val="lt1"/>
+          </a:fontRef>
+        </p:style>
+        <p:txBody>
+          <a:bodyPr rtlCol="0" anchor="ctr"/>
+          <a:lstStyle/>
+          <a:p>
+            <a:pPr algn="ctr"/>
+            <a:endParaRPr lang="en-US"/>
+          </a:p>
+        </p:txBody>
+      </p:sp>
+      <p:sp>
+        <p:nvSpPr>
+          <p:cNvPr id="10" name="Oval 9">
+            <a:extLst>
+              <a:ext uri="{FF2B5EF4-FFF2-40B4-BE49-F238E27FC236}">
+                <a16:creationId xmlns:a16="http://schemas.microsoft.com/office/drawing/2014/main" id="{B906E69D-F4D1-7AB6-2027-C0DDD2404F1C}"/>
+              </a:ext>
+            </a:extLst>
+          </p:cNvPr>
+          <p:cNvSpPr/>
+          <p:nvPr/>
+        </p:nvSpPr>
+        <p:spPr>
+          <a:xfrm>
+            <a:off x="8060436" y="3526834"/>
+            <a:ext cx="2926080" cy="675995"/>
+          </a:xfrm>
+          <a:prstGeom prst="ellipse">
+            <a:avLst/>
+          </a:prstGeom>
+        </p:spPr>
+        <p:style>
+          <a:lnRef idx="2">
+            <a:schemeClr val="accent1">
+              <a:shade val="15000"/>
+            </a:schemeClr>
+          </a:lnRef>
+          <a:fillRef idx="1">
+            <a:schemeClr val="accent1"/>
+          </a:fillRef>
+          <a:effectRef idx="0">
+            <a:schemeClr val="accent1"/>
+          </a:effectRef>
+          <a:fontRef idx="minor">
+            <a:schemeClr val="lt1"/>
+          </a:fontRef>
+        </p:style>
+        <p:txBody>
+          <a:bodyPr rtlCol="0" anchor="ctr"/>
+          <a:lstStyle/>
+          <a:p>
+            <a:pPr algn="ctr"/>
+            <a:r>
+              <a:rPr lang="en-US" dirty="0"/>
+              <a:t>Como </a:t>
+            </a:r>
+            <a:r>
+              <a:rPr lang="en-US" dirty="0" err="1"/>
+              <a:t>Estas</a:t>
+            </a:r>
+            <a:r>
+              <a:rPr lang="en-US" dirty="0"/>
+              <a:t> ?</a:t>
+            </a:r>
+          </a:p>
+        </p:txBody>
+      </p:sp>
+      <p:sp>
+        <p:nvSpPr>
+          <p:cNvPr id="11" name="Arrow: Right 10">
+            <a:extLst>
+              <a:ext uri="{FF2B5EF4-FFF2-40B4-BE49-F238E27FC236}">
+                <a16:creationId xmlns:a16="http://schemas.microsoft.com/office/drawing/2014/main" id="{0D7414FF-9152-8B33-F341-625082033616}"/>
+              </a:ext>
+            </a:extLst>
+          </p:cNvPr>
+          <p:cNvSpPr/>
+          <p:nvPr/>
+        </p:nvSpPr>
+        <p:spPr>
+          <a:xfrm>
+            <a:off x="7324344" y="3758184"/>
+            <a:ext cx="539496" cy="301752"/>
+          </a:xfrm>
+          <a:prstGeom prst="rightArrow">
+            <a:avLst/>
+          </a:prstGeom>
+        </p:spPr>
+        <p:style>
+          <a:lnRef idx="2">
+            <a:schemeClr val="accent1">
+              <a:shade val="15000"/>
+            </a:schemeClr>
+          </a:lnRef>
+          <a:fillRef idx="1">
+            <a:schemeClr val="accent1"/>
+          </a:fillRef>
+          <a:effectRef idx="0">
+            <a:schemeClr val="accent1"/>
+          </a:effectRef>
+          <a:fontRef idx="minor">
+            <a:schemeClr val="lt1"/>
+          </a:fontRef>
+        </p:style>
+        <p:txBody>
+          <a:bodyPr rtlCol="0" anchor="ctr"/>
+          <a:lstStyle/>
+          <a:p>
+            <a:pPr algn="ctr"/>
+            <a:endParaRPr lang="en-US"/>
+          </a:p>
+        </p:txBody>
+      </p:sp>
+      <p:sp>
+        <p:nvSpPr>
+          <p:cNvPr id="12" name="TextBox 11">
+            <a:extLst>
+              <a:ext uri="{FF2B5EF4-FFF2-40B4-BE49-F238E27FC236}">
+                <a16:creationId xmlns:a16="http://schemas.microsoft.com/office/drawing/2014/main" id="{F4C744E4-A9F1-05DD-DB54-6DE9CFCA0ED6}"/>
+              </a:ext>
+            </a:extLst>
+          </p:cNvPr>
+          <p:cNvSpPr txBox="1"/>
+          <p:nvPr/>
+        </p:nvSpPr>
+        <p:spPr>
+          <a:xfrm>
+            <a:off x="2310094" y="5042022"/>
+            <a:ext cx="679994" cy="369332"/>
+          </a:xfrm>
+          <a:prstGeom prst="rect">
+            <a:avLst/>
+          </a:prstGeom>
+          <a:noFill/>
+        </p:spPr>
+        <p:txBody>
+          <a:bodyPr wrap="none" rtlCol="0">
+            <a:spAutoFit/>
+          </a:bodyPr>
+          <a:lstStyle/>
+          <a:p>
+            <a:r>
+              <a:rPr lang="en-US" dirty="0">
+                <a:solidFill>
+                  <a:schemeClr val="accent6">
+                    <a:lumMod val="40000"/>
+                    <a:lumOff val="60000"/>
+                  </a:schemeClr>
+                </a:solidFill>
+              </a:rPr>
+              <a:t>input</a:t>
+            </a:r>
+          </a:p>
+        </p:txBody>
+      </p:sp>
+      <p:sp>
+        <p:nvSpPr>
+          <p:cNvPr id="13" name="TextBox 12">
+            <a:extLst>
+              <a:ext uri="{FF2B5EF4-FFF2-40B4-BE49-F238E27FC236}">
+                <a16:creationId xmlns:a16="http://schemas.microsoft.com/office/drawing/2014/main" id="{5F74F4E8-C5C0-F78A-EDDE-626AD695A9F5}"/>
+              </a:ext>
+            </a:extLst>
+          </p:cNvPr>
+          <p:cNvSpPr txBox="1"/>
+          <p:nvPr/>
+        </p:nvSpPr>
+        <p:spPr>
+          <a:xfrm>
+            <a:off x="7324344" y="4157948"/>
+            <a:ext cx="825867" cy="369332"/>
+          </a:xfrm>
+          <a:prstGeom prst="rect">
+            <a:avLst/>
+          </a:prstGeom>
+          <a:noFill/>
+        </p:spPr>
+        <p:txBody>
+          <a:bodyPr wrap="none" rtlCol="0">
+            <a:spAutoFit/>
+          </a:bodyPr>
+          <a:lstStyle/>
+          <a:p>
+            <a:r>
+              <a:rPr lang="en-US" dirty="0">
+                <a:solidFill>
+                  <a:schemeClr val="accent6">
+                    <a:lumMod val="40000"/>
+                    <a:lumOff val="60000"/>
+                  </a:schemeClr>
+                </a:solidFill>
+              </a:rPr>
+              <a:t>output</a:t>
+            </a:r>
+          </a:p>
+        </p:txBody>
+      </p:sp>
+      <p:sp>
+        <p:nvSpPr>
+          <p:cNvPr id="15" name="TextBox 14">
+            <a:extLst>
+              <a:ext uri="{FF2B5EF4-FFF2-40B4-BE49-F238E27FC236}">
+                <a16:creationId xmlns:a16="http://schemas.microsoft.com/office/drawing/2014/main" id="{FDA98640-34D9-F544-74EB-41F2816D21DF}"/>
+              </a:ext>
+            </a:extLst>
+          </p:cNvPr>
+          <p:cNvSpPr txBox="1"/>
+          <p:nvPr/>
+        </p:nvSpPr>
+        <p:spPr>
+          <a:xfrm>
+            <a:off x="5523528" y="5482050"/>
+            <a:ext cx="6190488" cy="830997"/>
+          </a:xfrm>
+          <a:prstGeom prst="rect">
+            <a:avLst/>
+          </a:prstGeom>
+          <a:noFill/>
+        </p:spPr>
+        <p:txBody>
+          <a:bodyPr wrap="square">
+            <a:spAutoFit/>
+          </a:bodyPr>
+          <a:lstStyle/>
+          <a:p>
+            <a:r>
+              <a:rPr lang="en-US" sz="2400" b="1" dirty="0">
+                <a:solidFill>
+                  <a:schemeClr val="accent6">
+                    <a:lumMod val="60000"/>
+                    <a:lumOff val="40000"/>
+                  </a:schemeClr>
+                </a:solidFill>
+              </a:rPr>
+              <a:t>Stacking Layers: </a:t>
+            </a:r>
+            <a:r>
+              <a:rPr lang="en-US" sz="2400" dirty="0">
+                <a:solidFill>
+                  <a:schemeClr val="accent6">
+                    <a:lumMod val="60000"/>
+                    <a:lumOff val="40000"/>
+                  </a:schemeClr>
+                </a:solidFill>
+              </a:rPr>
+              <a:t>A typical transformer model stacks </a:t>
+            </a:r>
+            <a:r>
+              <a:rPr lang="en-US" sz="2400" b="1" dirty="0">
+                <a:solidFill>
+                  <a:schemeClr val="accent6">
+                    <a:lumMod val="60000"/>
+                    <a:lumOff val="40000"/>
+                  </a:schemeClr>
+                </a:solidFill>
+              </a:rPr>
+              <a:t>6–96</a:t>
+            </a:r>
+            <a:r>
+              <a:rPr lang="en-US" sz="2400" dirty="0">
+                <a:solidFill>
+                  <a:schemeClr val="accent6">
+                    <a:lumMod val="60000"/>
+                    <a:lumOff val="40000"/>
+                  </a:schemeClr>
+                </a:solidFill>
+              </a:rPr>
+              <a:t> of these encoder or decoder blocks.</a:t>
+            </a:r>
+          </a:p>
+        </p:txBody>
+      </p:sp>
+      <p:sp>
+        <p:nvSpPr>
+          <p:cNvPr id="16" name="Arrow: Right 15">
+            <a:extLst>
+              <a:ext uri="{FF2B5EF4-FFF2-40B4-BE49-F238E27FC236}">
+                <a16:creationId xmlns:a16="http://schemas.microsoft.com/office/drawing/2014/main" id="{64D8A72F-6AE5-6F0E-F710-2D385AF75419}"/>
+              </a:ext>
+            </a:extLst>
+          </p:cNvPr>
+          <p:cNvSpPr/>
+          <p:nvPr/>
+        </p:nvSpPr>
+        <p:spPr>
+          <a:xfrm>
+            <a:off x="4914900" y="3630614"/>
+            <a:ext cx="466344" cy="422053"/>
+          </a:xfrm>
+          <a:prstGeom prst="rightArrow">
+            <a:avLst/>
+          </a:prstGeom>
+          <a:solidFill>
+            <a:srgbClr val="00B050"/>
+          </a:solidFill>
+        </p:spPr>
+        <p:style>
+          <a:lnRef idx="2">
+            <a:schemeClr val="accent1">
+              <a:shade val="15000"/>
+            </a:schemeClr>
+          </a:lnRef>
+          <a:fillRef idx="1">
+            <a:schemeClr val="accent1"/>
+          </a:fillRef>
+          <a:effectRef idx="0">
+            <a:schemeClr val="accent1"/>
+          </a:effectRef>
+          <a:fontRef idx="minor">
+            <a:schemeClr val="lt1"/>
+          </a:fontRef>
+        </p:style>
+        <p:txBody>
+          <a:bodyPr rtlCol="0" anchor="ctr"/>
+          <a:lstStyle/>
+          <a:p>
+            <a:pPr algn="ctr"/>
+            <a:endParaRPr lang="en-US"/>
+          </a:p>
+        </p:txBody>
+      </p:sp>
+    </p:spTree>
+    <p:extLst>
+      <p:ext uri="{BB962C8B-B14F-4D97-AF65-F5344CB8AC3E}">
+        <p14:creationId xmlns:p14="http://schemas.microsoft.com/office/powerpoint/2010/main" val="843416041"/>
+      </p:ext>
+    </p:extLst>
+  </p:cSld>
+  <p:clrMapOvr>
+    <a:masterClrMapping/>
+  </p:clrMapOvr>
+</p:sld>
+</file>
+
+<file path=ppt/slides/slide11.xml><?xml version="1.0" encoding="utf-8"?>
+<p:sld xmlns:a="http://schemas.openxmlformats.org/drawingml/2006/main" xmlns:r="http://schemas.openxmlformats.org/officeDocument/2006/relationships" xmlns:p="http://schemas.openxmlformats.org/presentationml/2006/main">
+  <p:cSld>
+    <p:spTree>
+      <p:nvGrpSpPr>
+        <p:cNvPr id="1" name="">
+          <a:extLst>
+            <a:ext uri="{FF2B5EF4-FFF2-40B4-BE49-F238E27FC236}">
+              <a16:creationId xmlns:a16="http://schemas.microsoft.com/office/drawing/2014/main" id="{22377599-5300-AEB7-B220-C73BA1161EA8}"/>
+            </a:ext>
+          </a:extLst>
+        </p:cNvPr>
+        <p:cNvGrpSpPr/>
+        <p:nvPr/>
+      </p:nvGrpSpPr>
+      <p:grpSpPr>
+        <a:xfrm>
+          <a:off x="0" y="0"/>
+          <a:ext cx="0" cy="0"/>
+          <a:chOff x="0" y="0"/>
+          <a:chExt cx="0" cy="0"/>
+        </a:xfrm>
+      </p:grpSpPr>
+      <p:pic>
+        <p:nvPicPr>
+          <p:cNvPr id="17" name="Picture 16">
+            <a:extLst>
+              <a:ext uri="{FF2B5EF4-FFF2-40B4-BE49-F238E27FC236}">
+                <a16:creationId xmlns:a16="http://schemas.microsoft.com/office/drawing/2014/main" id="{630DD6E3-6504-BF56-95BE-B9F080ECAC98}"/>
+              </a:ext>
+            </a:extLst>
+          </p:cNvPr>
+          <p:cNvPicPr>
+            <a:picLocks noChangeAspect="1"/>
+          </p:cNvPicPr>
+          <p:nvPr/>
+        </p:nvPicPr>
+        <p:blipFill>
+          <a:blip r:embed="rId2"/>
+          <a:stretch>
+            <a:fillRect/>
+          </a:stretch>
+        </p:blipFill>
+        <p:spPr>
+          <a:xfrm>
+            <a:off x="2933525" y="178170"/>
+            <a:ext cx="5157397" cy="6153912"/>
+          </a:xfrm>
+          <a:prstGeom prst="rect">
+            <a:avLst/>
+          </a:prstGeom>
+        </p:spPr>
+      </p:pic>
+      <p:sp>
+        <p:nvSpPr>
+          <p:cNvPr id="18" name="TextBox 17">
+            <a:extLst>
+              <a:ext uri="{FF2B5EF4-FFF2-40B4-BE49-F238E27FC236}">
+                <a16:creationId xmlns:a16="http://schemas.microsoft.com/office/drawing/2014/main" id="{9A2B06B8-FF93-6850-A3D5-E8A6A77EC6FB}"/>
+              </a:ext>
+            </a:extLst>
+          </p:cNvPr>
+          <p:cNvSpPr txBox="1"/>
+          <p:nvPr/>
+        </p:nvSpPr>
+        <p:spPr>
+          <a:xfrm>
+            <a:off x="5512224" y="6488668"/>
+            <a:ext cx="914033" cy="369332"/>
+          </a:xfrm>
+          <a:prstGeom prst="rect">
+            <a:avLst/>
+          </a:prstGeom>
+          <a:noFill/>
+        </p:spPr>
+        <p:txBody>
+          <a:bodyPr wrap="none" rtlCol="0">
+            <a:spAutoFit/>
+          </a:bodyPr>
+          <a:lstStyle/>
+          <a:p>
+            <a:r>
+              <a:rPr lang="en-US" dirty="0">
+                <a:solidFill>
+                  <a:schemeClr val="accent6">
+                    <a:lumMod val="40000"/>
+                    <a:lumOff val="60000"/>
+                  </a:schemeClr>
+                </a:solidFill>
+              </a:rPr>
+              <a:t>Generic</a:t>
+            </a:r>
+          </a:p>
+        </p:txBody>
+      </p:sp>
+      <p:sp>
+        <p:nvSpPr>
+          <p:cNvPr id="19" name="TextBox 18">
+            <a:extLst>
+              <a:ext uri="{FF2B5EF4-FFF2-40B4-BE49-F238E27FC236}">
+                <a16:creationId xmlns:a16="http://schemas.microsoft.com/office/drawing/2014/main" id="{5B240C24-9F58-310A-5F38-73F9E4453D66}"/>
+              </a:ext>
+            </a:extLst>
+          </p:cNvPr>
+          <p:cNvSpPr txBox="1"/>
+          <p:nvPr/>
+        </p:nvSpPr>
+        <p:spPr>
+          <a:xfrm>
+            <a:off x="8647218" y="2424130"/>
+            <a:ext cx="3057102" cy="830997"/>
+          </a:xfrm>
+          <a:prstGeom prst="rect">
+            <a:avLst/>
+          </a:prstGeom>
+          <a:noFill/>
+        </p:spPr>
+        <p:txBody>
+          <a:bodyPr wrap="square" rtlCol="0">
+            <a:spAutoFit/>
+          </a:bodyPr>
+          <a:lstStyle/>
+          <a:p>
+            <a:r>
+              <a:rPr lang="en-US" sz="2400" dirty="0">
+                <a:solidFill>
+                  <a:schemeClr val="accent6">
+                    <a:lumMod val="40000"/>
+                    <a:lumOff val="60000"/>
+                  </a:schemeClr>
+                </a:solidFill>
+              </a:rPr>
+              <a:t>GPT has only the </a:t>
+            </a:r>
+            <a:r>
+              <a:rPr lang="en-US" sz="2400" b="1" dirty="0">
+                <a:solidFill>
+                  <a:schemeClr val="accent6">
+                    <a:lumMod val="40000"/>
+                    <a:lumOff val="60000"/>
+                  </a:schemeClr>
+                </a:solidFill>
+              </a:rPr>
+              <a:t>decoder</a:t>
+            </a:r>
+            <a:r>
+              <a:rPr lang="en-US" sz="2400" dirty="0">
+                <a:solidFill>
+                  <a:schemeClr val="accent6">
+                    <a:lumMod val="40000"/>
+                    <a:lumOff val="60000"/>
+                  </a:schemeClr>
+                </a:solidFill>
+              </a:rPr>
+              <a:t> part</a:t>
+            </a:r>
+            <a:endParaRPr lang="en-US" sz="2400" b="1" dirty="0">
+              <a:solidFill>
+                <a:schemeClr val="accent6">
+                  <a:lumMod val="40000"/>
+                  <a:lumOff val="60000"/>
+                </a:schemeClr>
+              </a:solidFill>
+            </a:endParaRPr>
+          </a:p>
+        </p:txBody>
+      </p:sp>
+      <p:sp>
+        <p:nvSpPr>
+          <p:cNvPr id="3" name="TextBox 2">
+            <a:extLst>
+              <a:ext uri="{FF2B5EF4-FFF2-40B4-BE49-F238E27FC236}">
+                <a16:creationId xmlns:a16="http://schemas.microsoft.com/office/drawing/2014/main" id="{0C8FB693-1081-E053-8781-DF151F067832}"/>
+              </a:ext>
+            </a:extLst>
+          </p:cNvPr>
+          <p:cNvSpPr txBox="1"/>
+          <p:nvPr/>
+        </p:nvSpPr>
+        <p:spPr>
+          <a:xfrm>
+            <a:off x="487680" y="2424129"/>
+            <a:ext cx="3360420" cy="830997"/>
+          </a:xfrm>
+          <a:prstGeom prst="rect">
+            <a:avLst/>
+          </a:prstGeom>
+          <a:noFill/>
+        </p:spPr>
+        <p:txBody>
+          <a:bodyPr wrap="square">
+            <a:spAutoFit/>
+          </a:bodyPr>
+          <a:lstStyle/>
+          <a:p>
+            <a:r>
+              <a:rPr lang="en-US" sz="2400" dirty="0">
+                <a:solidFill>
+                  <a:schemeClr val="accent6">
+                    <a:lumMod val="40000"/>
+                    <a:lumOff val="60000"/>
+                  </a:schemeClr>
+                </a:solidFill>
+              </a:rPr>
+              <a:t>BERT has only the </a:t>
+            </a:r>
+            <a:r>
+              <a:rPr lang="en-US" sz="2400" b="1" dirty="0">
+                <a:solidFill>
+                  <a:schemeClr val="accent6">
+                    <a:lumMod val="40000"/>
+                    <a:lumOff val="60000"/>
+                  </a:schemeClr>
+                </a:solidFill>
+              </a:rPr>
+              <a:t>encoder</a:t>
+            </a:r>
+            <a:r>
+              <a:rPr lang="en-US" sz="2400" dirty="0">
+                <a:solidFill>
+                  <a:schemeClr val="accent6">
+                    <a:lumMod val="40000"/>
+                    <a:lumOff val="60000"/>
+                  </a:schemeClr>
+                </a:solidFill>
+              </a:rPr>
+              <a:t> part</a:t>
+            </a:r>
+          </a:p>
+        </p:txBody>
+      </p:sp>
+    </p:spTree>
+    <p:extLst>
+      <p:ext uri="{BB962C8B-B14F-4D97-AF65-F5344CB8AC3E}">
+        <p14:creationId xmlns:p14="http://schemas.microsoft.com/office/powerpoint/2010/main" val="183077440"/>
+      </p:ext>
+    </p:extLst>
+  </p:cSld>
+  <p:clrMapOvr>
+    <a:masterClrMapping/>
+  </p:clrMapOvr>
+</p:sld>
+</file>
+
+<file path=ppt/slides/slide12.xml><?xml version="1.0" encoding="utf-8"?>
+<p:sld xmlns:a="http://schemas.openxmlformats.org/drawingml/2006/main" xmlns:r="http://schemas.openxmlformats.org/officeDocument/2006/relationships" xmlns:p="http://schemas.openxmlformats.org/presentationml/2006/main">
+  <p:cSld>
+    <p:spTree>
+      <p:nvGrpSpPr>
+        <p:cNvPr id="1" name=""/>
+        <p:cNvGrpSpPr/>
+        <p:nvPr/>
+      </p:nvGrpSpPr>
+      <p:grpSpPr>
+        <a:xfrm>
+          <a:off x="0" y="0"/>
+          <a:ext cx="0" cy="0"/>
+          <a:chOff x="0" y="0"/>
+          <a:chExt cx="0" cy="0"/>
+        </a:xfrm>
+      </p:grpSpPr>
+      <p:sp>
+        <p:nvSpPr>
+          <p:cNvPr id="5" name="TextBox 4">
+            <a:extLst>
+              <a:ext uri="{FF2B5EF4-FFF2-40B4-BE49-F238E27FC236}">
+                <a16:creationId xmlns:a16="http://schemas.microsoft.com/office/drawing/2014/main" id="{A869B156-F629-370C-0410-DC37260227B0}"/>
+              </a:ext>
+            </a:extLst>
+          </p:cNvPr>
+          <p:cNvSpPr txBox="1"/>
+          <p:nvPr/>
+        </p:nvSpPr>
+        <p:spPr>
+          <a:xfrm>
+            <a:off x="100584" y="1166842"/>
+            <a:ext cx="11420856" cy="4524315"/>
+          </a:xfrm>
+          <a:prstGeom prst="rect">
+            <a:avLst/>
+          </a:prstGeom>
+          <a:noFill/>
+        </p:spPr>
+        <p:txBody>
+          <a:bodyPr wrap="square">
+            <a:spAutoFit/>
+          </a:bodyPr>
+          <a:lstStyle/>
+          <a:p>
+            <a:pPr marL="0" indent="0">
+              <a:buNone/>
+            </a:pPr>
+            <a:r>
+              <a:rPr lang="en-US" sz="2400" b="1" dirty="0">
+                <a:solidFill>
+                  <a:schemeClr val="accent6">
+                    <a:lumMod val="60000"/>
+                    <a:lumOff val="40000"/>
+                  </a:schemeClr>
+                </a:solidFill>
+              </a:rPr>
+              <a:t>(Word) Embedding + Positional Encoding</a:t>
+            </a:r>
+          </a:p>
+          <a:p>
+            <a:pPr marL="0" indent="0">
+              <a:buNone/>
+            </a:pPr>
+            <a:endParaRPr lang="en-US" sz="2400" b="1" dirty="0">
+              <a:solidFill>
+                <a:schemeClr val="accent6">
+                  <a:lumMod val="60000"/>
+                  <a:lumOff val="40000"/>
+                </a:schemeClr>
+              </a:solidFill>
+            </a:endParaRPr>
+          </a:p>
+          <a:p>
+            <a:r>
+              <a:rPr lang="en-US" sz="2400" dirty="0">
+                <a:solidFill>
+                  <a:schemeClr val="accent6">
+                    <a:lumMod val="60000"/>
+                    <a:lumOff val="40000"/>
+                  </a:schemeClr>
+                </a:solidFill>
+              </a:rPr>
+              <a:t>Words are converted into </a:t>
+            </a:r>
+            <a:r>
+              <a:rPr lang="en-US" sz="2400" b="1" dirty="0">
+                <a:solidFill>
+                  <a:schemeClr val="accent6">
+                    <a:lumMod val="60000"/>
+                    <a:lumOff val="40000"/>
+                  </a:schemeClr>
+                </a:solidFill>
+              </a:rPr>
+              <a:t>vectors</a:t>
+            </a:r>
+            <a:r>
+              <a:rPr lang="en-US" sz="2400" dirty="0">
+                <a:solidFill>
+                  <a:schemeClr val="accent6">
+                    <a:lumMod val="60000"/>
+                    <a:lumOff val="40000"/>
+                  </a:schemeClr>
+                </a:solidFill>
+              </a:rPr>
+              <a:t> via </a:t>
+            </a:r>
+            <a:r>
+              <a:rPr lang="en-US" sz="2400" b="1" dirty="0">
+                <a:solidFill>
+                  <a:schemeClr val="accent6">
+                    <a:lumMod val="60000"/>
+                    <a:lumOff val="40000"/>
+                  </a:schemeClr>
+                </a:solidFill>
+              </a:rPr>
+              <a:t>embedding layers</a:t>
+            </a:r>
+            <a:r>
+              <a:rPr lang="en-US" sz="2400" dirty="0">
+                <a:solidFill>
+                  <a:schemeClr val="accent6">
+                    <a:lumMod val="60000"/>
+                    <a:lumOff val="40000"/>
+                  </a:schemeClr>
+                </a:solidFill>
+              </a:rPr>
+              <a:t>.</a:t>
+            </a:r>
+          </a:p>
+          <a:p>
+            <a:endParaRPr lang="en-US" sz="2400" dirty="0">
+              <a:solidFill>
+                <a:schemeClr val="accent6">
+                  <a:lumMod val="60000"/>
+                  <a:lumOff val="40000"/>
+                </a:schemeClr>
+              </a:solidFill>
+            </a:endParaRPr>
+          </a:p>
+          <a:p>
+            <a:r>
+              <a:rPr lang="en-US" sz="2400" dirty="0">
+                <a:solidFill>
+                  <a:schemeClr val="accent6">
+                    <a:lumMod val="60000"/>
+                    <a:lumOff val="40000"/>
+                  </a:schemeClr>
+                </a:solidFill>
+              </a:rPr>
+              <a:t>Swim    -&gt;  [  1,     0,    0,     0.7,  ]</a:t>
+            </a:r>
+          </a:p>
+          <a:p>
+            <a:r>
+              <a:rPr lang="en-US" sz="2400" dirty="0">
+                <a:solidFill>
+                  <a:schemeClr val="accent6">
+                    <a:lumMod val="60000"/>
+                    <a:lumOff val="40000"/>
+                  </a:schemeClr>
+                </a:solidFill>
+              </a:rPr>
+              <a:t>Fishing -&gt;  [ 0.9, 0.1, 0.6, 0.03,  ]</a:t>
+            </a:r>
+          </a:p>
+          <a:p>
+            <a:endParaRPr lang="en-US" sz="2400" dirty="0">
+              <a:solidFill>
+                <a:schemeClr val="accent6">
+                  <a:lumMod val="60000"/>
+                  <a:lumOff val="40000"/>
+                </a:schemeClr>
+              </a:solidFill>
+            </a:endParaRPr>
+          </a:p>
+          <a:p>
+            <a:r>
+              <a:rPr lang="en-US" sz="2400" dirty="0">
+                <a:solidFill>
+                  <a:schemeClr val="accent6">
+                    <a:lumMod val="60000"/>
+                    <a:lumOff val="40000"/>
+                  </a:schemeClr>
+                </a:solidFill>
+              </a:rPr>
+              <a:t>We use these vectors to find which words are similar. </a:t>
+            </a:r>
+          </a:p>
+          <a:p>
+            <a:endParaRPr lang="en-US" sz="2400" dirty="0">
+              <a:solidFill>
+                <a:schemeClr val="accent6">
+                  <a:lumMod val="60000"/>
+                  <a:lumOff val="40000"/>
+                </a:schemeClr>
+              </a:solidFill>
+            </a:endParaRPr>
+          </a:p>
+          <a:p>
+            <a:pPr marL="342900" indent="-342900">
+              <a:buFont typeface="Arial" panose="020B0604020202020204" pitchFamily="34" charset="0"/>
+              <a:buChar char="•"/>
+            </a:pPr>
+            <a:r>
+              <a:rPr lang="en-US" sz="2400" dirty="0">
+                <a:solidFill>
+                  <a:schemeClr val="accent6">
+                    <a:lumMod val="60000"/>
+                    <a:lumOff val="40000"/>
+                  </a:schemeClr>
+                </a:solidFill>
+              </a:rPr>
+              <a:t>The values are found through training data</a:t>
+            </a:r>
+          </a:p>
+          <a:p>
+            <a:pPr marL="342900" indent="-342900">
+              <a:buFont typeface="Arial" panose="020B0604020202020204" pitchFamily="34" charset="0"/>
+              <a:buChar char="•"/>
+            </a:pPr>
+            <a:r>
+              <a:rPr lang="en-US" sz="2400" dirty="0">
+                <a:solidFill>
+                  <a:schemeClr val="accent6">
+                    <a:lumMod val="60000"/>
+                    <a:lumOff val="40000"/>
+                  </a:schemeClr>
+                </a:solidFill>
+              </a:rPr>
+              <a:t>Googles Word2Vec uses 300 dimension</a:t>
+            </a:r>
+          </a:p>
+          <a:p>
+            <a:pPr marL="342900" indent="-342900">
+              <a:buFont typeface="Arial" panose="020B0604020202020204" pitchFamily="34" charset="0"/>
+              <a:buChar char="•"/>
+            </a:pPr>
+            <a:r>
+              <a:rPr lang="en-US" sz="2400" dirty="0">
+                <a:solidFill>
+                  <a:schemeClr val="accent6">
+                    <a:lumMod val="60000"/>
+                    <a:lumOff val="40000"/>
+                  </a:schemeClr>
+                </a:solidFill>
+              </a:rPr>
+              <a:t>Other word embedding packages are Glove, etc.</a:t>
+            </a:r>
+          </a:p>
+        </p:txBody>
+      </p:sp>
+      <p:sp>
+        <p:nvSpPr>
+          <p:cNvPr id="7" name="TextBox 6">
+            <a:extLst>
+              <a:ext uri="{FF2B5EF4-FFF2-40B4-BE49-F238E27FC236}">
+                <a16:creationId xmlns:a16="http://schemas.microsoft.com/office/drawing/2014/main" id="{21BECA1F-232B-9C71-0841-A6E1F5E82D8A}"/>
+              </a:ext>
+            </a:extLst>
+          </p:cNvPr>
+          <p:cNvSpPr txBox="1"/>
+          <p:nvPr/>
+        </p:nvSpPr>
+        <p:spPr>
+          <a:xfrm>
+            <a:off x="100584" y="85082"/>
+            <a:ext cx="6190488" cy="461665"/>
+          </a:xfrm>
+          <a:prstGeom prst="rect">
+            <a:avLst/>
+          </a:prstGeom>
+          <a:noFill/>
+        </p:spPr>
+        <p:txBody>
+          <a:bodyPr wrap="square">
+            <a:spAutoFit/>
+          </a:bodyPr>
+          <a:lstStyle/>
+          <a:p>
+            <a:r>
+              <a:rPr lang="en-US" sz="2400" b="1" dirty="0">
+                <a:solidFill>
+                  <a:schemeClr val="accent6">
+                    <a:lumMod val="60000"/>
+                    <a:lumOff val="40000"/>
+                  </a:schemeClr>
+                </a:solidFill>
+              </a:rPr>
+              <a:t>Core Components of a Transformer</a:t>
+            </a:r>
+          </a:p>
+        </p:txBody>
+      </p:sp>
+      <p:graphicFrame>
+        <p:nvGraphicFramePr>
+          <p:cNvPr id="8" name="Table 7">
+            <a:extLst>
+              <a:ext uri="{FF2B5EF4-FFF2-40B4-BE49-F238E27FC236}">
+                <a16:creationId xmlns:a16="http://schemas.microsoft.com/office/drawing/2014/main" id="{5DB3F138-7D3F-11B2-CF8B-1E24CA32BE5D}"/>
+              </a:ext>
+            </a:extLst>
+          </p:cNvPr>
+          <p:cNvGraphicFramePr>
+            <a:graphicFrameLocks noGrp="1"/>
+          </p:cNvGraphicFramePr>
+          <p:nvPr>
+            <p:extLst>
+              <p:ext uri="{D42A27DB-BD31-4B8C-83A1-F6EECF244321}">
+                <p14:modId xmlns:p14="http://schemas.microsoft.com/office/powerpoint/2010/main" val="847480628"/>
+              </p:ext>
+            </p:extLst>
+          </p:nvPr>
+        </p:nvGraphicFramePr>
+        <p:xfrm>
+          <a:off x="6934200" y="2382727"/>
+          <a:ext cx="5157215" cy="2560320"/>
+        </p:xfrm>
+        <a:graphic>
+          <a:graphicData uri="http://schemas.openxmlformats.org/drawingml/2006/table">
+            <a:tbl>
+              <a:tblPr firstRow="1" bandRow="1">
+                <a:tableStyleId>{5C22544A-7EE6-4342-B048-85BDC9FD1C3A}</a:tableStyleId>
+              </a:tblPr>
+              <a:tblGrid>
+                <a:gridCol w="1031443">
+                  <a:extLst>
+                    <a:ext uri="{9D8B030D-6E8A-4147-A177-3AD203B41FA5}">
+                      <a16:colId xmlns:a16="http://schemas.microsoft.com/office/drawing/2014/main" val="2515424243"/>
+                    </a:ext>
+                  </a:extLst>
+                </a:gridCol>
+                <a:gridCol w="1031443">
+                  <a:extLst>
+                    <a:ext uri="{9D8B030D-6E8A-4147-A177-3AD203B41FA5}">
+                      <a16:colId xmlns:a16="http://schemas.microsoft.com/office/drawing/2014/main" val="2020340870"/>
+                    </a:ext>
+                  </a:extLst>
+                </a:gridCol>
+                <a:gridCol w="1031443">
+                  <a:extLst>
+                    <a:ext uri="{9D8B030D-6E8A-4147-A177-3AD203B41FA5}">
+                      <a16:colId xmlns:a16="http://schemas.microsoft.com/office/drawing/2014/main" val="1919491014"/>
+                    </a:ext>
+                  </a:extLst>
+                </a:gridCol>
+                <a:gridCol w="1031443">
+                  <a:extLst>
+                    <a:ext uri="{9D8B030D-6E8A-4147-A177-3AD203B41FA5}">
+                      <a16:colId xmlns:a16="http://schemas.microsoft.com/office/drawing/2014/main" val="1485554102"/>
+                    </a:ext>
+                  </a:extLst>
+                </a:gridCol>
+                <a:gridCol w="1031443">
+                  <a:extLst>
+                    <a:ext uri="{9D8B030D-6E8A-4147-A177-3AD203B41FA5}">
+                      <a16:colId xmlns:a16="http://schemas.microsoft.com/office/drawing/2014/main" val="3968963040"/>
+                    </a:ext>
+                  </a:extLst>
+                </a:gridCol>
+              </a:tblGrid>
+              <a:tr h="364812">
+                <a:tc>
+                  <a:txBody>
+                    <a:bodyPr/>
+                    <a:lstStyle/>
+                    <a:p>
+                      <a:pPr algn="ctr"/>
+                      <a:endParaRPr lang="en-US" dirty="0"/>
+                    </a:p>
+                  </a:txBody>
+                  <a:tcPr/>
+                </a:tc>
+                <a:tc>
+                  <a:txBody>
+                    <a:bodyPr/>
+                    <a:lstStyle/>
+                    <a:p>
+                      <a:pPr algn="ctr"/>
+                      <a:r>
+                        <a:rPr lang="en-US" dirty="0"/>
+                        <a:t>Sea</a:t>
+                      </a:r>
+                    </a:p>
+                  </a:txBody>
+                  <a:tcPr/>
+                </a:tc>
+                <a:tc>
+                  <a:txBody>
+                    <a:bodyPr/>
+                    <a:lstStyle/>
+                    <a:p>
+                      <a:pPr algn="ctr"/>
+                      <a:r>
+                        <a:rPr lang="en-US" dirty="0"/>
+                        <a:t>Air</a:t>
+                      </a:r>
+                    </a:p>
+                  </a:txBody>
+                  <a:tcPr/>
+                </a:tc>
+                <a:tc>
+                  <a:txBody>
+                    <a:bodyPr/>
+                    <a:lstStyle/>
+                    <a:p>
+                      <a:pPr algn="ctr"/>
+                      <a:r>
+                        <a:rPr lang="en-US" dirty="0"/>
+                        <a:t>Land</a:t>
+                      </a:r>
+                    </a:p>
+                  </a:txBody>
+                  <a:tcPr/>
+                </a:tc>
+                <a:tc>
+                  <a:txBody>
+                    <a:bodyPr/>
+                    <a:lstStyle/>
+                    <a:p>
+                      <a:pPr algn="ctr"/>
+                      <a:r>
+                        <a:rPr lang="en-US" dirty="0"/>
+                        <a:t>Love</a:t>
+                      </a:r>
+                    </a:p>
+                  </a:txBody>
+                  <a:tcPr/>
+                </a:tc>
+                <a:extLst>
+                  <a:ext uri="{0D108BD9-81ED-4DB2-BD59-A6C34878D82A}">
+                    <a16:rowId xmlns:a16="http://schemas.microsoft.com/office/drawing/2014/main" val="146901908"/>
+                  </a:ext>
+                </a:extLst>
+              </a:tr>
+              <a:tr h="364812">
+                <a:tc>
+                  <a:txBody>
+                    <a:bodyPr/>
+                    <a:lstStyle/>
+                    <a:p>
+                      <a:pPr algn="ctr"/>
+                      <a:r>
+                        <a:rPr lang="en-US" dirty="0"/>
+                        <a:t>Swim</a:t>
+                      </a:r>
+                    </a:p>
+                  </a:txBody>
+                  <a:tcPr/>
+                </a:tc>
+                <a:tc>
+                  <a:txBody>
+                    <a:bodyPr/>
+                    <a:lstStyle/>
+                    <a:p>
+                      <a:pPr algn="ctr"/>
+                      <a:r>
+                        <a:rPr lang="en-US" b="1" dirty="0"/>
+                        <a:t>1</a:t>
+                      </a:r>
+                    </a:p>
+                  </a:txBody>
+                  <a:tcPr/>
+                </a:tc>
+                <a:tc>
+                  <a:txBody>
+                    <a:bodyPr/>
+                    <a:lstStyle/>
+                    <a:p>
+                      <a:pPr algn="ctr"/>
+                      <a:r>
+                        <a:rPr lang="en-US" dirty="0"/>
+                        <a:t>0</a:t>
+                      </a:r>
+                    </a:p>
+                  </a:txBody>
+                  <a:tcPr/>
+                </a:tc>
+                <a:tc>
+                  <a:txBody>
+                    <a:bodyPr/>
+                    <a:lstStyle/>
+                    <a:p>
+                      <a:pPr algn="ctr"/>
+                      <a:r>
+                        <a:rPr lang="en-US" dirty="0"/>
+                        <a:t>0</a:t>
+                      </a:r>
+                    </a:p>
+                  </a:txBody>
+                  <a:tcPr/>
+                </a:tc>
+                <a:tc>
+                  <a:txBody>
+                    <a:bodyPr/>
+                    <a:lstStyle/>
+                    <a:p>
+                      <a:pPr algn="ctr"/>
+                      <a:r>
+                        <a:rPr lang="en-US" b="1" dirty="0"/>
+                        <a:t>0.7</a:t>
+                      </a:r>
+                    </a:p>
+                  </a:txBody>
+                  <a:tcPr/>
+                </a:tc>
+                <a:extLst>
+                  <a:ext uri="{0D108BD9-81ED-4DB2-BD59-A6C34878D82A}">
+                    <a16:rowId xmlns:a16="http://schemas.microsoft.com/office/drawing/2014/main" val="603757318"/>
+                  </a:ext>
+                </a:extLst>
+              </a:tr>
+              <a:tr h="364812">
+                <a:tc>
+                  <a:txBody>
+                    <a:bodyPr/>
+                    <a:lstStyle/>
+                    <a:p>
+                      <a:pPr algn="ctr"/>
+                      <a:r>
+                        <a:rPr lang="en-US" dirty="0"/>
+                        <a:t>Fly</a:t>
+                      </a:r>
+                    </a:p>
+                  </a:txBody>
+                  <a:tcPr/>
+                </a:tc>
+                <a:tc>
+                  <a:txBody>
+                    <a:bodyPr/>
+                    <a:lstStyle/>
+                    <a:p>
+                      <a:pPr algn="ctr"/>
+                      <a:r>
+                        <a:rPr lang="en-US" dirty="0"/>
+                        <a:t>0.01</a:t>
+                      </a:r>
+                    </a:p>
+                  </a:txBody>
+                  <a:tcPr/>
+                </a:tc>
+                <a:tc>
+                  <a:txBody>
+                    <a:bodyPr/>
+                    <a:lstStyle/>
+                    <a:p>
+                      <a:pPr algn="ctr"/>
+                      <a:r>
+                        <a:rPr lang="en-US" b="1" dirty="0"/>
+                        <a:t>0.9</a:t>
+                      </a:r>
+                    </a:p>
+                  </a:txBody>
+                  <a:tcPr/>
+                </a:tc>
+                <a:tc>
+                  <a:txBody>
+                    <a:bodyPr/>
+                    <a:lstStyle/>
+                    <a:p>
+                      <a:pPr algn="ctr"/>
+                      <a:r>
+                        <a:rPr lang="en-US" dirty="0"/>
+                        <a:t>0.2</a:t>
+                      </a:r>
+                    </a:p>
+                  </a:txBody>
+                  <a:tcPr/>
+                </a:tc>
+                <a:tc>
+                  <a:txBody>
+                    <a:bodyPr/>
+                    <a:lstStyle/>
+                    <a:p>
+                      <a:pPr algn="ctr"/>
+                      <a:r>
+                        <a:rPr lang="en-US" b="1" dirty="0"/>
+                        <a:t>0.8</a:t>
+                      </a:r>
+                    </a:p>
+                  </a:txBody>
+                  <a:tcPr/>
+                </a:tc>
+                <a:extLst>
+                  <a:ext uri="{0D108BD9-81ED-4DB2-BD59-A6C34878D82A}">
+                    <a16:rowId xmlns:a16="http://schemas.microsoft.com/office/drawing/2014/main" val="3329932118"/>
+                  </a:ext>
+                </a:extLst>
+              </a:tr>
+              <a:tr h="364812">
+                <a:tc>
+                  <a:txBody>
+                    <a:bodyPr/>
+                    <a:lstStyle/>
+                    <a:p>
+                      <a:pPr algn="ctr"/>
+                      <a:r>
+                        <a:rPr lang="en-US" dirty="0"/>
+                        <a:t>Walk</a:t>
+                      </a:r>
+                    </a:p>
+                  </a:txBody>
+                  <a:tcPr/>
+                </a:tc>
+                <a:tc>
+                  <a:txBody>
+                    <a:bodyPr/>
+                    <a:lstStyle/>
+                    <a:p>
+                      <a:pPr algn="ctr"/>
+                      <a:r>
+                        <a:rPr lang="en-US" dirty="0"/>
+                        <a:t>0</a:t>
+                      </a:r>
+                    </a:p>
+                  </a:txBody>
+                  <a:tcPr/>
+                </a:tc>
+                <a:tc>
+                  <a:txBody>
+                    <a:bodyPr/>
+                    <a:lstStyle/>
+                    <a:p>
+                      <a:pPr algn="ctr"/>
+                      <a:r>
+                        <a:rPr lang="en-US" dirty="0"/>
+                        <a:t>0</a:t>
+                      </a:r>
+                    </a:p>
+                  </a:txBody>
+                  <a:tcPr/>
+                </a:tc>
+                <a:tc>
+                  <a:txBody>
+                    <a:bodyPr/>
+                    <a:lstStyle/>
+                    <a:p>
+                      <a:pPr algn="ctr"/>
+                      <a:r>
+                        <a:rPr lang="en-US" dirty="0"/>
+                        <a:t>1</a:t>
+                      </a:r>
+                    </a:p>
+                  </a:txBody>
+                  <a:tcPr/>
+                </a:tc>
+                <a:tc>
+                  <a:txBody>
+                    <a:bodyPr/>
+                    <a:lstStyle/>
+                    <a:p>
+                      <a:pPr algn="ctr"/>
+                      <a:endParaRPr lang="en-US" dirty="0"/>
+                    </a:p>
+                  </a:txBody>
+                  <a:tcPr/>
+                </a:tc>
+                <a:extLst>
+                  <a:ext uri="{0D108BD9-81ED-4DB2-BD59-A6C34878D82A}">
+                    <a16:rowId xmlns:a16="http://schemas.microsoft.com/office/drawing/2014/main" val="2111078679"/>
+                  </a:ext>
+                </a:extLst>
+              </a:tr>
+              <a:tr h="364812">
+                <a:tc>
+                  <a:txBody>
+                    <a:bodyPr/>
+                    <a:lstStyle/>
+                    <a:p>
+                      <a:pPr algn="ctr"/>
+                      <a:r>
+                        <a:rPr lang="en-US" dirty="0"/>
+                        <a:t>Stand</a:t>
+                      </a:r>
+                    </a:p>
+                  </a:txBody>
+                  <a:tcPr/>
+                </a:tc>
+                <a:tc>
+                  <a:txBody>
+                    <a:bodyPr/>
+                    <a:lstStyle/>
+                    <a:p>
+                      <a:pPr algn="ctr"/>
+                      <a:r>
+                        <a:rPr lang="en-US" dirty="0"/>
+                        <a:t>0</a:t>
+                      </a:r>
+                    </a:p>
+                  </a:txBody>
+                  <a:tcPr/>
+                </a:tc>
+                <a:tc>
+                  <a:txBody>
+                    <a:bodyPr/>
+                    <a:lstStyle/>
+                    <a:p>
+                      <a:pPr algn="ctr"/>
+                      <a:r>
+                        <a:rPr lang="en-US" dirty="0"/>
+                        <a:t>0</a:t>
+                      </a:r>
+                    </a:p>
+                  </a:txBody>
+                  <a:tcPr/>
+                </a:tc>
+                <a:tc>
+                  <a:txBody>
+                    <a:bodyPr/>
+                    <a:lstStyle/>
+                    <a:p>
+                      <a:pPr algn="ctr"/>
+                      <a:r>
+                        <a:rPr lang="en-US" b="1" dirty="0"/>
+                        <a:t>0.9</a:t>
+                      </a:r>
+                    </a:p>
+                  </a:txBody>
+                  <a:tcPr/>
+                </a:tc>
+                <a:tc>
+                  <a:txBody>
+                    <a:bodyPr/>
+                    <a:lstStyle/>
+                    <a:p>
+                      <a:pPr algn="ctr"/>
+                      <a:r>
+                        <a:rPr lang="en-US" dirty="0"/>
+                        <a:t>0</a:t>
+                      </a:r>
+                    </a:p>
+                  </a:txBody>
+                  <a:tcPr/>
+                </a:tc>
+                <a:extLst>
+                  <a:ext uri="{0D108BD9-81ED-4DB2-BD59-A6C34878D82A}">
+                    <a16:rowId xmlns:a16="http://schemas.microsoft.com/office/drawing/2014/main" val="2975866602"/>
+                  </a:ext>
+                </a:extLst>
+              </a:tr>
+              <a:tr h="364812">
+                <a:tc>
+                  <a:txBody>
+                    <a:bodyPr/>
+                    <a:lstStyle/>
+                    <a:p>
+                      <a:pPr algn="ctr"/>
+                      <a:r>
+                        <a:rPr lang="en-US" dirty="0"/>
+                        <a:t>Studying</a:t>
+                      </a:r>
+                    </a:p>
+                  </a:txBody>
+                  <a:tcPr/>
+                </a:tc>
+                <a:tc>
+                  <a:txBody>
+                    <a:bodyPr/>
+                    <a:lstStyle/>
+                    <a:p>
+                      <a:pPr algn="ctr"/>
+                      <a:r>
+                        <a:rPr lang="en-US" dirty="0"/>
+                        <a:t>0.1</a:t>
+                      </a:r>
+                    </a:p>
+                  </a:txBody>
+                  <a:tcPr/>
+                </a:tc>
+                <a:tc>
+                  <a:txBody>
+                    <a:bodyPr/>
+                    <a:lstStyle/>
+                    <a:p>
+                      <a:pPr algn="ctr"/>
+                      <a:r>
+                        <a:rPr lang="en-US" dirty="0"/>
+                        <a:t>0.4</a:t>
+                      </a:r>
+                    </a:p>
+                  </a:txBody>
+                  <a:tcPr/>
+                </a:tc>
+                <a:tc>
+                  <a:txBody>
+                    <a:bodyPr/>
+                    <a:lstStyle/>
+                    <a:p>
+                      <a:pPr algn="ctr"/>
+                      <a:r>
+                        <a:rPr lang="en-US" dirty="0"/>
+                        <a:t>0.3</a:t>
+                      </a:r>
+                    </a:p>
+                  </a:txBody>
+                  <a:tcPr/>
+                </a:tc>
+                <a:tc>
+                  <a:txBody>
+                    <a:bodyPr/>
+                    <a:lstStyle/>
+                    <a:p>
+                      <a:pPr algn="ctr"/>
+                      <a:r>
+                        <a:rPr lang="en-US" dirty="0"/>
+                        <a:t>-0.01</a:t>
+                      </a:r>
+                    </a:p>
+                  </a:txBody>
+                  <a:tcPr/>
+                </a:tc>
+                <a:extLst>
+                  <a:ext uri="{0D108BD9-81ED-4DB2-BD59-A6C34878D82A}">
+                    <a16:rowId xmlns:a16="http://schemas.microsoft.com/office/drawing/2014/main" val="3683087839"/>
+                  </a:ext>
+                </a:extLst>
+              </a:tr>
+              <a:tr h="364812">
+                <a:tc>
+                  <a:txBody>
+                    <a:bodyPr/>
+                    <a:lstStyle/>
+                    <a:p>
+                      <a:pPr algn="ctr"/>
+                      <a:r>
+                        <a:rPr lang="en-US" dirty="0"/>
+                        <a:t>Fishing</a:t>
+                      </a:r>
+                    </a:p>
+                  </a:txBody>
+                  <a:tcPr/>
+                </a:tc>
+                <a:tc>
+                  <a:txBody>
+                    <a:bodyPr/>
+                    <a:lstStyle/>
+                    <a:p>
+                      <a:pPr algn="ctr"/>
+                      <a:r>
+                        <a:rPr lang="en-US" b="1" dirty="0"/>
+                        <a:t>0.9</a:t>
+                      </a:r>
+                    </a:p>
+                  </a:txBody>
+                  <a:tcPr/>
+                </a:tc>
+                <a:tc>
+                  <a:txBody>
+                    <a:bodyPr/>
+                    <a:lstStyle/>
+                    <a:p>
+                      <a:pPr algn="ctr"/>
+                      <a:r>
+                        <a:rPr lang="en-US" dirty="0"/>
+                        <a:t>0.1</a:t>
+                      </a:r>
+                    </a:p>
+                  </a:txBody>
+                  <a:tcPr/>
+                </a:tc>
+                <a:tc>
+                  <a:txBody>
+                    <a:bodyPr/>
+                    <a:lstStyle/>
+                    <a:p>
+                      <a:pPr algn="ctr"/>
+                      <a:r>
+                        <a:rPr lang="en-US" b="1" dirty="0"/>
+                        <a:t>0.6</a:t>
+                      </a:r>
+                    </a:p>
+                  </a:txBody>
+                  <a:tcPr/>
+                </a:tc>
+                <a:tc>
+                  <a:txBody>
+                    <a:bodyPr/>
+                    <a:lstStyle/>
+                    <a:p>
+                      <a:pPr algn="ctr"/>
+                      <a:r>
+                        <a:rPr lang="en-US" dirty="0"/>
+                        <a:t>0.03</a:t>
+                      </a:r>
+                    </a:p>
+                  </a:txBody>
+                  <a:tcPr/>
+                </a:tc>
+                <a:extLst>
+                  <a:ext uri="{0D108BD9-81ED-4DB2-BD59-A6C34878D82A}">
+                    <a16:rowId xmlns:a16="http://schemas.microsoft.com/office/drawing/2014/main" val="2138655830"/>
+                  </a:ext>
+                </a:extLst>
+              </a:tr>
+            </a:tbl>
+          </a:graphicData>
+        </a:graphic>
+      </p:graphicFrame>
+      <p:sp>
+        <p:nvSpPr>
+          <p:cNvPr id="9" name="TextBox 8">
+            <a:extLst>
+              <a:ext uri="{FF2B5EF4-FFF2-40B4-BE49-F238E27FC236}">
+                <a16:creationId xmlns:a16="http://schemas.microsoft.com/office/drawing/2014/main" id="{78DA7790-6167-B755-AF07-3A19A7906340}"/>
+              </a:ext>
+            </a:extLst>
+          </p:cNvPr>
+          <p:cNvSpPr txBox="1"/>
+          <p:nvPr/>
+        </p:nvSpPr>
+        <p:spPr>
+          <a:xfrm>
+            <a:off x="8575548" y="1543952"/>
+            <a:ext cx="1874520" cy="461665"/>
+          </a:xfrm>
+          <a:prstGeom prst="rect">
+            <a:avLst/>
+          </a:prstGeom>
+          <a:noFill/>
+        </p:spPr>
+        <p:txBody>
+          <a:bodyPr wrap="square" rtlCol="0">
+            <a:spAutoFit/>
+          </a:bodyPr>
+          <a:lstStyle/>
+          <a:p>
+            <a:r>
+              <a:rPr lang="en-US" sz="2400" dirty="0">
+                <a:solidFill>
+                  <a:schemeClr val="accent6">
+                    <a:lumMod val="40000"/>
+                    <a:lumOff val="60000"/>
+                  </a:schemeClr>
+                </a:solidFill>
+              </a:rPr>
+              <a:t>4 Dimension</a:t>
+            </a:r>
+          </a:p>
+        </p:txBody>
+      </p:sp>
+    </p:spTree>
+    <p:extLst>
+      <p:ext uri="{BB962C8B-B14F-4D97-AF65-F5344CB8AC3E}">
+        <p14:creationId xmlns:p14="http://schemas.microsoft.com/office/powerpoint/2010/main" val="2271126536"/>
+      </p:ext>
+    </p:extLst>
+  </p:cSld>
+  <p:clrMapOvr>
+    <a:masterClrMapping/>
+  </p:clrMapOvr>
+</p:sld>
+</file>
+
+<file path=ppt/slides/slide13.xml><?xml version="1.0" encoding="utf-8"?>
+<p:sld xmlns:a="http://schemas.openxmlformats.org/drawingml/2006/main" xmlns:r="http://schemas.openxmlformats.org/officeDocument/2006/relationships" xmlns:p="http://schemas.openxmlformats.org/presentationml/2006/main">
+  <p:cSld>
+    <p:spTree>
+      <p:nvGrpSpPr>
+        <p:cNvPr id="1" name="">
+          <a:extLst>
+            <a:ext uri="{FF2B5EF4-FFF2-40B4-BE49-F238E27FC236}">
               <a16:creationId xmlns:a16="http://schemas.microsoft.com/office/drawing/2014/main" id="{C336F2FC-8561-38D9-93E1-A15413B279C8}"/>
             </a:ext>
           </a:extLst>
@@ -5263,7 +7327,7 @@
 </p:sld>
 </file>
 
-<file path=ppt/slides/slide11.xml><?xml version="1.0" encoding="utf-8"?>
+<file path=ppt/slides/slide14.xml><?xml version="1.0" encoding="utf-8"?>
 <p:sld xmlns:a="http://schemas.openxmlformats.org/drawingml/2006/main" xmlns:r="http://schemas.openxmlformats.org/officeDocument/2006/relationships" xmlns:p="http://schemas.openxmlformats.org/presentationml/2006/main">
   <p:cSld>
     <p:spTree>
@@ -5359,7 +7423,7 @@
 </p:sld>
 </file>
 
-<file path=ppt/slides/slide12.xml><?xml version="1.0" encoding="utf-8"?>
+<file path=ppt/slides/slide15.xml><?xml version="1.0" encoding="utf-8"?>
 <p:sld xmlns:a="http://schemas.openxmlformats.org/drawingml/2006/main" xmlns:r="http://schemas.openxmlformats.org/officeDocument/2006/relationships" xmlns:p="http://schemas.openxmlformats.org/presentationml/2006/main">
   <p:cSld>
     <p:spTree>
@@ -5678,7 +7742,7 @@
 </p:sld>
 </file>
 
-<file path=ppt/slides/slide13.xml><?xml version="1.0" encoding="utf-8"?>
+<file path=ppt/slides/slide16.xml><?xml version="1.0" encoding="utf-8"?>
 <p:sld xmlns:a="http://schemas.openxmlformats.org/drawingml/2006/main" xmlns:r="http://schemas.openxmlformats.org/officeDocument/2006/relationships" xmlns:p="http://schemas.openxmlformats.org/presentationml/2006/main">
   <p:cSld>
     <p:spTree>
@@ -8259,7 +10323,7 @@
 </p:sld>
 </file>
 
-<file path=ppt/slides/slide14.xml><?xml version="1.0" encoding="utf-8"?>
+<file path=ppt/slides/slide17.xml><?xml version="1.0" encoding="utf-8"?>
 <p:sld xmlns:a="http://schemas.openxmlformats.org/drawingml/2006/main" xmlns:r="http://schemas.openxmlformats.org/officeDocument/2006/relationships" xmlns:p="http://schemas.openxmlformats.org/presentationml/2006/main">
   <p:cSld>
     <p:spTree>
@@ -8642,7 +10706,7 @@
 </p:sld>
 </file>
 
-<file path=ppt/slides/slide15.xml><?xml version="1.0" encoding="utf-8"?>
+<file path=ppt/slides/slide18.xml><?xml version="1.0" encoding="utf-8"?>
 <p:sld xmlns:a="http://schemas.openxmlformats.org/drawingml/2006/main" xmlns:r="http://schemas.openxmlformats.org/officeDocument/2006/relationships" xmlns:p="http://schemas.openxmlformats.org/presentationml/2006/main">
   <p:cSld>
     <p:spTree>
@@ -10562,7 +12626,7 @@
 </p:sld>
 </file>
 
-<file path=ppt/slides/slide16.xml><?xml version="1.0" encoding="utf-8"?>
+<file path=ppt/slides/slide19.xml><?xml version="1.0" encoding="utf-8"?>
 <p:sld xmlns:a="http://schemas.openxmlformats.org/drawingml/2006/main" xmlns:r="http://schemas.openxmlformats.org/officeDocument/2006/relationships" xmlns:p="http://schemas.openxmlformats.org/presentationml/2006/main">
   <p:cSld>
     <p:spTree>
@@ -10849,7 +12913,376 @@
 </p:sld>
 </file>
 
-<file path=ppt/slides/slide17.xml><?xml version="1.0" encoding="utf-8"?>
+<file path=ppt/slides/slide2.xml><?xml version="1.0" encoding="utf-8"?>
+<p:sld xmlns:a="http://schemas.openxmlformats.org/drawingml/2006/main" xmlns:r="http://schemas.openxmlformats.org/officeDocument/2006/relationships" xmlns:p="http://schemas.openxmlformats.org/presentationml/2006/main">
+  <p:cSld>
+    <p:spTree>
+      <p:nvGrpSpPr>
+        <p:cNvPr id="1" name=""/>
+        <p:cNvGrpSpPr/>
+        <p:nvPr/>
+      </p:nvGrpSpPr>
+      <p:grpSpPr>
+        <a:xfrm>
+          <a:off x="0" y="0"/>
+          <a:ext cx="0" cy="0"/>
+          <a:chOff x="0" y="0"/>
+          <a:chExt cx="0" cy="0"/>
+        </a:xfrm>
+      </p:grpSpPr>
+      <p:sp>
+        <p:nvSpPr>
+          <p:cNvPr id="4" name="TextBox 3">
+            <a:extLst>
+              <a:ext uri="{FF2B5EF4-FFF2-40B4-BE49-F238E27FC236}">
+                <a16:creationId xmlns:a16="http://schemas.microsoft.com/office/drawing/2014/main" id="{29D68720-C308-BDDC-262A-F5640C4C8FED}"/>
+              </a:ext>
+            </a:extLst>
+          </p:cNvPr>
+          <p:cNvSpPr txBox="1"/>
+          <p:nvPr/>
+        </p:nvSpPr>
+        <p:spPr>
+          <a:xfrm>
+            <a:off x="777618" y="1245090"/>
+            <a:ext cx="10268712" cy="5632311"/>
+          </a:xfrm>
+          <a:prstGeom prst="rect">
+            <a:avLst/>
+          </a:prstGeom>
+          <a:noFill/>
+        </p:spPr>
+        <p:txBody>
+          <a:bodyPr wrap="square">
+            <a:spAutoFit/>
+          </a:bodyPr>
+          <a:lstStyle/>
+          <a:p>
+            <a:r>
+              <a:rPr lang="en-US" sz="2400" u="sng" dirty="0">
+                <a:solidFill>
+                  <a:schemeClr val="accent6">
+                    <a:lumMod val="40000"/>
+                    <a:lumOff val="60000"/>
+                  </a:schemeClr>
+                </a:solidFill>
+                <a:hlinkClick r:id="rId2">
+                  <a:extLst>
+                    <a:ext uri="{A12FA001-AC4F-418D-AE19-62706E023703}">
+                      <ahyp:hlinkClr xmlns:ahyp="http://schemas.microsoft.com/office/drawing/2018/hyperlinkcolor" val="tx"/>
+                    </a:ext>
+                  </a:extLst>
+                </a:hlinkClick>
+              </a:rPr>
+              <a:t>Playground:  </a:t>
+            </a:r>
+            <a:r>
+              <a:rPr lang="en-US" sz="2400" dirty="0">
+                <a:solidFill>
+                  <a:schemeClr val="accent6">
+                    <a:lumMod val="40000"/>
+                    <a:lumOff val="60000"/>
+                  </a:schemeClr>
+                </a:solidFill>
+                <a:hlinkClick r:id="rId2">
+                  <a:extLst>
+                    <a:ext uri="{A12FA001-AC4F-418D-AE19-62706E023703}">
+                      <ahyp:hlinkClr xmlns:ahyp="http://schemas.microsoft.com/office/drawing/2018/hyperlinkcolor" val="tx"/>
+                    </a:ext>
+                  </a:extLst>
+                </a:hlinkClick>
+              </a:rPr>
+              <a:t>https://poloclub.github.io/transformer-explainer/</a:t>
+            </a:r>
+          </a:p>
+          <a:p>
+            <a:endParaRPr lang="en-US" sz="2400" dirty="0">
+              <a:solidFill>
+                <a:schemeClr val="accent6">
+                  <a:lumMod val="40000"/>
+                  <a:lumOff val="60000"/>
+                </a:schemeClr>
+              </a:solidFill>
+              <a:hlinkClick r:id="rId2">
+                <a:extLst>
+                  <a:ext uri="{A12FA001-AC4F-418D-AE19-62706E023703}">
+                    <ahyp:hlinkClr xmlns:ahyp="http://schemas.microsoft.com/office/drawing/2018/hyperlinkcolor" val="tx"/>
+                  </a:ext>
+                </a:extLst>
+              </a:hlinkClick>
+            </a:endParaRPr>
+          </a:p>
+          <a:p>
+            <a:r>
+              <a:rPr lang="en-US" sz="2400" dirty="0">
+                <a:solidFill>
+                  <a:schemeClr val="accent6">
+                    <a:lumMod val="40000"/>
+                    <a:lumOff val="60000"/>
+                  </a:schemeClr>
+                </a:solidFill>
+                <a:hlinkClick r:id="rId2">
+                  <a:extLst>
+                    <a:ext uri="{A12FA001-AC4F-418D-AE19-62706E023703}">
+                      <ahyp:hlinkClr xmlns:ahyp="http://schemas.microsoft.com/office/drawing/2018/hyperlinkcolor" val="tx"/>
+                    </a:ext>
+                  </a:extLst>
+                </a:hlinkClick>
+              </a:rPr>
+              <a:t>Source:</a:t>
+            </a:r>
+          </a:p>
+          <a:p>
+            <a:r>
+              <a:rPr lang="en-US" sz="2400" dirty="0">
+                <a:solidFill>
+                  <a:schemeClr val="accent6">
+                    <a:lumMod val="40000"/>
+                    <a:lumOff val="60000"/>
+                  </a:schemeClr>
+                </a:solidFill>
+                <a:hlinkClick r:id="rId2">
+                  <a:extLst>
+                    <a:ext uri="{A12FA001-AC4F-418D-AE19-62706E023703}">
+                      <ahyp:hlinkClr xmlns:ahyp="http://schemas.microsoft.com/office/drawing/2018/hyperlinkcolor" val="tx"/>
+                    </a:ext>
+                  </a:extLst>
+                </a:hlinkClick>
+              </a:rPr>
+              <a:t>https://youtu.be/ZhAz268Hdpw?si=jQXkVM058uJkEWCw</a:t>
+            </a:r>
+            <a:endParaRPr lang="en-US" sz="2400" dirty="0">
+              <a:solidFill>
+                <a:schemeClr val="accent6">
+                  <a:lumMod val="40000"/>
+                  <a:lumOff val="60000"/>
+                </a:schemeClr>
+              </a:solidFill>
+            </a:endParaRPr>
+          </a:p>
+          <a:p>
+            <a:r>
+              <a:rPr lang="en-US" sz="2400" dirty="0">
+                <a:solidFill>
+                  <a:schemeClr val="accent6">
+                    <a:lumMod val="40000"/>
+                    <a:lumOff val="60000"/>
+                  </a:schemeClr>
+                </a:solidFill>
+                <a:hlinkClick r:id="rId3">
+                  <a:extLst>
+                    <a:ext uri="{A12FA001-AC4F-418D-AE19-62706E023703}">
+                      <ahyp:hlinkClr xmlns:ahyp="http://schemas.microsoft.com/office/drawing/2018/hyperlinkcolor" val="tx"/>
+                    </a:ext>
+                  </a:extLst>
+                </a:hlinkClick>
+              </a:rPr>
+              <a:t>https://youtu.be/zxQyTK8quyY?si=C-flWWBSxwrqWao7</a:t>
+            </a:r>
+            <a:endParaRPr lang="en-US" sz="2400" dirty="0">
+              <a:solidFill>
+                <a:schemeClr val="accent6">
+                  <a:lumMod val="40000"/>
+                  <a:lumOff val="60000"/>
+                </a:schemeClr>
+              </a:solidFill>
+            </a:endParaRPr>
+          </a:p>
+          <a:p>
+            <a:endParaRPr lang="en-US" sz="2400" dirty="0">
+              <a:solidFill>
+                <a:schemeClr val="accent6">
+                  <a:lumMod val="40000"/>
+                  <a:lumOff val="60000"/>
+                </a:schemeClr>
+              </a:solidFill>
+            </a:endParaRPr>
+          </a:p>
+          <a:p>
+            <a:pPr marL="0" indent="0">
+              <a:buNone/>
+            </a:pPr>
+            <a:endParaRPr lang="en-US" sz="2400" dirty="0">
+              <a:solidFill>
+                <a:schemeClr val="accent6">
+                  <a:lumMod val="40000"/>
+                  <a:lumOff val="60000"/>
+                </a:schemeClr>
+              </a:solidFill>
+            </a:endParaRPr>
+          </a:p>
+          <a:p>
+            <a:pPr marL="0" indent="0">
+              <a:buNone/>
+            </a:pPr>
+            <a:r>
+              <a:rPr lang="en-US" sz="2400" dirty="0">
+                <a:solidFill>
+                  <a:schemeClr val="accent6">
+                    <a:lumMod val="40000"/>
+                    <a:lumOff val="60000"/>
+                  </a:schemeClr>
+                </a:solidFill>
+              </a:rPr>
+              <a:t>3 parts:</a:t>
+            </a:r>
+          </a:p>
+          <a:p>
+            <a:pPr marL="0" indent="0">
+              <a:buNone/>
+            </a:pPr>
+            <a:r>
+              <a:rPr lang="en-US" sz="2400" dirty="0">
+                <a:solidFill>
+                  <a:schemeClr val="accent6">
+                    <a:lumMod val="40000"/>
+                    <a:lumOff val="60000"/>
+                  </a:schemeClr>
+                </a:solidFill>
+                <a:hlinkClick r:id="rId4">
+                  <a:extLst>
+                    <a:ext uri="{A12FA001-AC4F-418D-AE19-62706E023703}">
+                      <ahyp:hlinkClr xmlns:ahyp="http://schemas.microsoft.com/office/drawing/2018/hyperlinkcolor" val="tx"/>
+                    </a:ext>
+                  </a:extLst>
+                </a:hlinkClick>
+              </a:rPr>
+              <a:t>1) https://youtu.be/OxCpWwDCDFQ?si=xo2r5jOoc3YQgji6</a:t>
+            </a:r>
+          </a:p>
+          <a:p>
+            <a:pPr marL="0" indent="0">
+              <a:buNone/>
+            </a:pPr>
+            <a:r>
+              <a:rPr lang="en-US" sz="2400" dirty="0">
+                <a:solidFill>
+                  <a:schemeClr val="accent6">
+                    <a:lumMod val="40000"/>
+                    <a:lumOff val="60000"/>
+                  </a:schemeClr>
+                </a:solidFill>
+                <a:hlinkClick r:id="rId4">
+                  <a:extLst>
+                    <a:ext uri="{A12FA001-AC4F-418D-AE19-62706E023703}">
+                      <ahyp:hlinkClr xmlns:ahyp="http://schemas.microsoft.com/office/drawing/2018/hyperlinkcolor" val="tx"/>
+                    </a:ext>
+                  </a:extLst>
+                </a:hlinkClick>
+              </a:rPr>
+              <a:t>2) https://youtu.be/UPtG_38Oq8o?si=fYUN8D7y1fvW2vCw</a:t>
+            </a:r>
+            <a:endParaRPr lang="en-US" sz="2400" dirty="0">
+              <a:solidFill>
+                <a:schemeClr val="accent6">
+                  <a:lumMod val="40000"/>
+                  <a:lumOff val="60000"/>
+                </a:schemeClr>
+              </a:solidFill>
+            </a:endParaRPr>
+          </a:p>
+          <a:p>
+            <a:pPr marL="0" indent="0">
+              <a:buNone/>
+            </a:pPr>
+            <a:r>
+              <a:rPr lang="en-US" sz="2400" dirty="0">
+                <a:solidFill>
+                  <a:schemeClr val="accent6">
+                    <a:lumMod val="40000"/>
+                    <a:lumOff val="60000"/>
+                  </a:schemeClr>
+                </a:solidFill>
+                <a:hlinkClick r:id="rId5">
+                  <a:extLst>
+                    <a:ext uri="{A12FA001-AC4F-418D-AE19-62706E023703}">
+                      <ahyp:hlinkClr xmlns:ahyp="http://schemas.microsoft.com/office/drawing/2018/hyperlinkcolor" val="tx"/>
+                    </a:ext>
+                  </a:extLst>
+                </a:hlinkClick>
+              </a:rPr>
+              <a:t>3) https://youtu.be/qaWMOYf4ri8?si=iA8GmBLLFfcZgCQk</a:t>
+            </a:r>
+            <a:endParaRPr lang="en-US" sz="2400" dirty="0">
+              <a:solidFill>
+                <a:schemeClr val="accent6">
+                  <a:lumMod val="40000"/>
+                  <a:lumOff val="60000"/>
+                </a:schemeClr>
+              </a:solidFill>
+            </a:endParaRPr>
+          </a:p>
+          <a:p>
+            <a:pPr marL="514350" indent="-514350">
+              <a:buAutoNum type="arabicParenR" startAt="3"/>
+            </a:pPr>
+            <a:endParaRPr lang="en-US" sz="2400" dirty="0">
+              <a:solidFill>
+                <a:schemeClr val="accent6">
+                  <a:lumMod val="40000"/>
+                  <a:lumOff val="60000"/>
+                </a:schemeClr>
+              </a:solidFill>
+            </a:endParaRPr>
+          </a:p>
+          <a:p>
+            <a:pPr marL="0" indent="0">
+              <a:buNone/>
+            </a:pPr>
+            <a:r>
+              <a:rPr lang="en-US" sz="2400" dirty="0">
+                <a:solidFill>
+                  <a:schemeClr val="accent6">
+                    <a:lumMod val="40000"/>
+                    <a:lumOff val="60000"/>
+                  </a:schemeClr>
+                </a:solidFill>
+              </a:rPr>
+              <a:t>https://www.datacamp.com/tutorial/how-transformers-work</a:t>
+            </a:r>
+          </a:p>
+          <a:p>
+            <a:pPr marL="0" indent="0">
+              <a:buNone/>
+            </a:pPr>
+            <a:endParaRPr lang="en-US" sz="2400" dirty="0">
+              <a:solidFill>
+                <a:schemeClr val="accent6">
+                  <a:lumMod val="40000"/>
+                  <a:lumOff val="60000"/>
+                </a:schemeClr>
+              </a:solidFill>
+            </a:endParaRPr>
+          </a:p>
+          <a:p>
+            <a:pPr marL="514350" indent="-514350">
+              <a:buAutoNum type="arabicParenR" startAt="3"/>
+            </a:pPr>
+            <a:endParaRPr lang="en-US" sz="2400" dirty="0">
+              <a:solidFill>
+                <a:schemeClr val="accent6">
+                  <a:lumMod val="40000"/>
+                  <a:lumOff val="60000"/>
+                </a:schemeClr>
+              </a:solidFill>
+            </a:endParaRPr>
+          </a:p>
+        </p:txBody>
+      </p:sp>
+    </p:spTree>
+    <p:extLst>
+      <p:ext uri="{BB962C8B-B14F-4D97-AF65-F5344CB8AC3E}">
+        <p14:creationId xmlns:p14="http://schemas.microsoft.com/office/powerpoint/2010/main" val="1193052763"/>
+      </p:ext>
+    </p:extLst>
+  </p:cSld>
+  <p:clrMapOvr>
+    <a:masterClrMapping/>
+  </p:clrMapOvr>
+</p:sld>
+</file>
+
+<file path=ppt/slides/slide20.xml><?xml version="1.0" encoding="utf-8"?>
 <p:sld xmlns:a="http://schemas.openxmlformats.org/drawingml/2006/main" xmlns:r="http://schemas.openxmlformats.org/officeDocument/2006/relationships" xmlns:p="http://schemas.openxmlformats.org/presentationml/2006/main">
   <p:cSld>
     <p:spTree>
@@ -11110,7 +13543,7 @@
 </p:sld>
 </file>
 
-<file path=ppt/slides/slide18.xml><?xml version="1.0" encoding="utf-8"?>
+<file path=ppt/slides/slide21.xml><?xml version="1.0" encoding="utf-8"?>
 <p:sld xmlns:a="http://schemas.openxmlformats.org/drawingml/2006/main" xmlns:r="http://schemas.openxmlformats.org/officeDocument/2006/relationships" xmlns:p="http://schemas.openxmlformats.org/presentationml/2006/main">
   <p:cSld>
     <p:spTree>
@@ -11296,7 +13729,7 @@
 </p:sld>
 </file>
 
-<file path=ppt/slides/slide19.xml><?xml version="1.0" encoding="utf-8"?>
+<file path=ppt/slides/slide22.xml><?xml version="1.0" encoding="utf-8"?>
 <p:sld xmlns:a="http://schemas.openxmlformats.org/drawingml/2006/main" xmlns:r="http://schemas.openxmlformats.org/officeDocument/2006/relationships" xmlns:p="http://schemas.openxmlformats.org/presentationml/2006/main">
   <p:cSld>
     <p:spTree>
@@ -11452,321 +13885,7 @@
 </p:sld>
 </file>
 
-<file path=ppt/slides/slide2.xml><?xml version="1.0" encoding="utf-8"?>
-<p:sld xmlns:a="http://schemas.openxmlformats.org/drawingml/2006/main" xmlns:r="http://schemas.openxmlformats.org/officeDocument/2006/relationships" xmlns:p="http://schemas.openxmlformats.org/presentationml/2006/main">
-  <p:cSld>
-    <p:spTree>
-      <p:nvGrpSpPr>
-        <p:cNvPr id="1" name=""/>
-        <p:cNvGrpSpPr/>
-        <p:nvPr/>
-      </p:nvGrpSpPr>
-      <p:grpSpPr>
-        <a:xfrm>
-          <a:off x="0" y="0"/>
-          <a:ext cx="0" cy="0"/>
-          <a:chOff x="0" y="0"/>
-          <a:chExt cx="0" cy="0"/>
-        </a:xfrm>
-      </p:grpSpPr>
-      <p:sp>
-        <p:nvSpPr>
-          <p:cNvPr id="4" name="TextBox 3">
-            <a:extLst>
-              <a:ext uri="{FF2B5EF4-FFF2-40B4-BE49-F238E27FC236}">
-                <a16:creationId xmlns:a16="http://schemas.microsoft.com/office/drawing/2014/main" id="{29D68720-C308-BDDC-262A-F5640C4C8FED}"/>
-              </a:ext>
-            </a:extLst>
-          </p:cNvPr>
-          <p:cNvSpPr txBox="1"/>
-          <p:nvPr/>
-        </p:nvSpPr>
-        <p:spPr>
-          <a:xfrm>
-            <a:off x="777618" y="1245090"/>
-            <a:ext cx="10268712" cy="4893647"/>
-          </a:xfrm>
-          <a:prstGeom prst="rect">
-            <a:avLst/>
-          </a:prstGeom>
-          <a:noFill/>
-        </p:spPr>
-        <p:txBody>
-          <a:bodyPr wrap="square">
-            <a:spAutoFit/>
-          </a:bodyPr>
-          <a:lstStyle/>
-          <a:p>
-            <a:r>
-              <a:rPr lang="en-US" sz="2400" dirty="0">
-                <a:solidFill>
-                  <a:schemeClr val="accent6">
-                    <a:lumMod val="40000"/>
-                    <a:lumOff val="60000"/>
-                  </a:schemeClr>
-                </a:solidFill>
-                <a:hlinkClick r:id="rId2">
-                  <a:extLst>
-                    <a:ext uri="{A12FA001-AC4F-418D-AE19-62706E023703}">
-                      <ahyp:hlinkClr xmlns:ahyp="http://schemas.microsoft.com/office/drawing/2018/hyperlinkcolor" val="tx"/>
-                    </a:ext>
-                  </a:extLst>
-                </a:hlinkClick>
-              </a:rPr>
-              <a:t>Source:</a:t>
-            </a:r>
-          </a:p>
-          <a:p>
-            <a:r>
-              <a:rPr lang="en-US" sz="2400" dirty="0">
-                <a:solidFill>
-                  <a:schemeClr val="accent6">
-                    <a:lumMod val="40000"/>
-                    <a:lumOff val="60000"/>
-                  </a:schemeClr>
-                </a:solidFill>
-                <a:hlinkClick r:id="rId2">
-                  <a:extLst>
-                    <a:ext uri="{A12FA001-AC4F-418D-AE19-62706E023703}">
-                      <ahyp:hlinkClr xmlns:ahyp="http://schemas.microsoft.com/office/drawing/2018/hyperlinkcolor" val="tx"/>
-                    </a:ext>
-                  </a:extLst>
-                </a:hlinkClick>
-              </a:rPr>
-              <a:t>https://youtu.be/ZhAz268Hdpw?si=jQXkVM058uJkEWCw</a:t>
-            </a:r>
-            <a:endParaRPr lang="en-US" sz="2400" dirty="0">
-              <a:solidFill>
-                <a:schemeClr val="accent6">
-                  <a:lumMod val="40000"/>
-                  <a:lumOff val="60000"/>
-                </a:schemeClr>
-              </a:solidFill>
-            </a:endParaRPr>
-          </a:p>
-          <a:p>
-            <a:r>
-              <a:rPr lang="en-US" sz="2400" dirty="0">
-                <a:solidFill>
-                  <a:schemeClr val="accent6">
-                    <a:lumMod val="40000"/>
-                    <a:lumOff val="60000"/>
-                  </a:schemeClr>
-                </a:solidFill>
-                <a:hlinkClick r:id="rId3">
-                  <a:extLst>
-                    <a:ext uri="{A12FA001-AC4F-418D-AE19-62706E023703}">
-                      <ahyp:hlinkClr xmlns:ahyp="http://schemas.microsoft.com/office/drawing/2018/hyperlinkcolor" val="tx"/>
-                    </a:ext>
-                  </a:extLst>
-                </a:hlinkClick>
-              </a:rPr>
-              <a:t>https://youtu.be/zxQyTK8quyY?si=C-flWWBSxwrqWao7</a:t>
-            </a:r>
-            <a:endParaRPr lang="en-US" sz="2400" dirty="0">
-              <a:solidFill>
-                <a:schemeClr val="accent6">
-                  <a:lumMod val="40000"/>
-                  <a:lumOff val="60000"/>
-                </a:schemeClr>
-              </a:solidFill>
-            </a:endParaRPr>
-          </a:p>
-          <a:p>
-            <a:endParaRPr lang="en-US" sz="2400" dirty="0">
-              <a:solidFill>
-                <a:schemeClr val="accent6">
-                  <a:lumMod val="40000"/>
-                  <a:lumOff val="60000"/>
-                </a:schemeClr>
-              </a:solidFill>
-            </a:endParaRPr>
-          </a:p>
-          <a:p>
-            <a:pPr marL="0" indent="0">
-              <a:buNone/>
-            </a:pPr>
-            <a:endParaRPr lang="en-US" sz="2400" dirty="0">
-              <a:solidFill>
-                <a:schemeClr val="accent6">
-                  <a:lumMod val="40000"/>
-                  <a:lumOff val="60000"/>
-                </a:schemeClr>
-              </a:solidFill>
-            </a:endParaRPr>
-          </a:p>
-          <a:p>
-            <a:pPr marL="0" indent="0">
-              <a:buNone/>
-            </a:pPr>
-            <a:r>
-              <a:rPr lang="en-US" sz="2400" dirty="0">
-                <a:solidFill>
-                  <a:schemeClr val="accent6">
-                    <a:lumMod val="40000"/>
-                    <a:lumOff val="60000"/>
-                  </a:schemeClr>
-                </a:solidFill>
-              </a:rPr>
-              <a:t>3 parts:</a:t>
-            </a:r>
-          </a:p>
-          <a:p>
-            <a:pPr marL="0" indent="0">
-              <a:buNone/>
-            </a:pPr>
-            <a:r>
-              <a:rPr lang="en-US" sz="2400" dirty="0">
-                <a:solidFill>
-                  <a:schemeClr val="accent6">
-                    <a:lumMod val="40000"/>
-                    <a:lumOff val="60000"/>
-                  </a:schemeClr>
-                </a:solidFill>
-                <a:hlinkClick r:id="rId4">
-                  <a:extLst>
-                    <a:ext uri="{A12FA001-AC4F-418D-AE19-62706E023703}">
-                      <ahyp:hlinkClr xmlns:ahyp="http://schemas.microsoft.com/office/drawing/2018/hyperlinkcolor" val="tx"/>
-                    </a:ext>
-                  </a:extLst>
-                </a:hlinkClick>
-              </a:rPr>
-              <a:t>1) https://youtu.be/OxCpWwDCDFQ?si=xo2r5jOoc3YQgji6</a:t>
-            </a:r>
-          </a:p>
-          <a:p>
-            <a:pPr marL="0" indent="0">
-              <a:buNone/>
-            </a:pPr>
-            <a:r>
-              <a:rPr lang="en-US" sz="2400" dirty="0">
-                <a:solidFill>
-                  <a:schemeClr val="accent6">
-                    <a:lumMod val="40000"/>
-                    <a:lumOff val="60000"/>
-                  </a:schemeClr>
-                </a:solidFill>
-                <a:hlinkClick r:id="rId4">
-                  <a:extLst>
-                    <a:ext uri="{A12FA001-AC4F-418D-AE19-62706E023703}">
-                      <ahyp:hlinkClr xmlns:ahyp="http://schemas.microsoft.com/office/drawing/2018/hyperlinkcolor" val="tx"/>
-                    </a:ext>
-                  </a:extLst>
-                </a:hlinkClick>
-              </a:rPr>
-              <a:t>2) https://youtu.be/UPtG_38Oq8o?si=fYUN8D7y1fvW2vCw</a:t>
-            </a:r>
-            <a:endParaRPr lang="en-US" sz="2400" dirty="0">
-              <a:solidFill>
-                <a:schemeClr val="accent6">
-                  <a:lumMod val="40000"/>
-                  <a:lumOff val="60000"/>
-                </a:schemeClr>
-              </a:solidFill>
-            </a:endParaRPr>
-          </a:p>
-          <a:p>
-            <a:pPr marL="0" indent="0">
-              <a:buNone/>
-            </a:pPr>
-            <a:r>
-              <a:rPr lang="en-US" sz="2400" dirty="0">
-                <a:solidFill>
-                  <a:schemeClr val="accent6">
-                    <a:lumMod val="40000"/>
-                    <a:lumOff val="60000"/>
-                  </a:schemeClr>
-                </a:solidFill>
-                <a:hlinkClick r:id="rId5">
-                  <a:extLst>
-                    <a:ext uri="{A12FA001-AC4F-418D-AE19-62706E023703}">
-                      <ahyp:hlinkClr xmlns:ahyp="http://schemas.microsoft.com/office/drawing/2018/hyperlinkcolor" val="tx"/>
-                    </a:ext>
-                  </a:extLst>
-                </a:hlinkClick>
-              </a:rPr>
-              <a:t>3) https://youtu.be/qaWMOYf4ri8?si=iA8GmBLLFfcZgCQk</a:t>
-            </a:r>
-            <a:endParaRPr lang="en-US" sz="2400" dirty="0">
-              <a:solidFill>
-                <a:schemeClr val="accent6">
-                  <a:lumMod val="40000"/>
-                  <a:lumOff val="60000"/>
-                </a:schemeClr>
-              </a:solidFill>
-            </a:endParaRPr>
-          </a:p>
-          <a:p>
-            <a:pPr marL="514350" indent="-514350">
-              <a:buAutoNum type="arabicParenR" startAt="3"/>
-            </a:pPr>
-            <a:endParaRPr lang="en-US" sz="2400" dirty="0">
-              <a:solidFill>
-                <a:schemeClr val="accent6">
-                  <a:lumMod val="40000"/>
-                  <a:lumOff val="60000"/>
-                </a:schemeClr>
-              </a:solidFill>
-            </a:endParaRPr>
-          </a:p>
-          <a:p>
-            <a:pPr marL="0" indent="0">
-              <a:buNone/>
-            </a:pPr>
-            <a:r>
-              <a:rPr lang="en-US" sz="2400" dirty="0">
-                <a:solidFill>
-                  <a:schemeClr val="accent6">
-                    <a:lumMod val="40000"/>
-                    <a:lumOff val="60000"/>
-                  </a:schemeClr>
-                </a:solidFill>
-              </a:rPr>
-              <a:t>https://www.datacamp.com/tutorial/how-transformers-work</a:t>
-            </a:r>
-          </a:p>
-          <a:p>
-            <a:pPr marL="0" indent="0">
-              <a:buNone/>
-            </a:pPr>
-            <a:endParaRPr lang="en-US" sz="2400" dirty="0">
-              <a:solidFill>
-                <a:schemeClr val="accent6">
-                  <a:lumMod val="40000"/>
-                  <a:lumOff val="60000"/>
-                </a:schemeClr>
-              </a:solidFill>
-            </a:endParaRPr>
-          </a:p>
-          <a:p>
-            <a:pPr marL="514350" indent="-514350">
-              <a:buAutoNum type="arabicParenR" startAt="3"/>
-            </a:pPr>
-            <a:endParaRPr lang="en-US" sz="2400" dirty="0">
-              <a:solidFill>
-                <a:schemeClr val="accent6">
-                  <a:lumMod val="40000"/>
-                  <a:lumOff val="60000"/>
-                </a:schemeClr>
-              </a:solidFill>
-            </a:endParaRPr>
-          </a:p>
-        </p:txBody>
-      </p:sp>
-    </p:spTree>
-    <p:extLst>
-      <p:ext uri="{BB962C8B-B14F-4D97-AF65-F5344CB8AC3E}">
-        <p14:creationId xmlns:p14="http://schemas.microsoft.com/office/powerpoint/2010/main" val="1193052763"/>
-      </p:ext>
-    </p:extLst>
-  </p:cSld>
-  <p:clrMapOvr>
-    <a:masterClrMapping/>
-  </p:clrMapOvr>
-</p:sld>
-</file>
-
-<file path=ppt/slides/slide20.xml><?xml version="1.0" encoding="utf-8"?>
+<file path=ppt/slides/slide23.xml><?xml version="1.0" encoding="utf-8"?>
 <p:sld xmlns:a="http://schemas.openxmlformats.org/drawingml/2006/main" xmlns:r="http://schemas.openxmlformats.org/officeDocument/2006/relationships" xmlns:p="http://schemas.openxmlformats.org/presentationml/2006/main">
   <p:cSld>
     <p:spTree>
@@ -12040,7 +14159,7 @@
 </p:sld>
 </file>
 
-<file path=ppt/slides/slide21.xml><?xml version="1.0" encoding="utf-8"?>
+<file path=ppt/slides/slide24.xml><?xml version="1.0" encoding="utf-8"?>
 <p:sld xmlns:a="http://schemas.openxmlformats.org/drawingml/2006/main" xmlns:r="http://schemas.openxmlformats.org/officeDocument/2006/relationships" xmlns:p="http://schemas.openxmlformats.org/presentationml/2006/main">
   <p:cSld>
     <p:spTree>
@@ -12327,7 +14446,7 @@
 </p:sld>
 </file>
 
-<file path=ppt/slides/slide22.xml><?xml version="1.0" encoding="utf-8"?>
+<file path=ppt/slides/slide25.xml><?xml version="1.0" encoding="utf-8"?>
 <p:sld xmlns:a="http://schemas.openxmlformats.org/drawingml/2006/main" xmlns:r="http://schemas.openxmlformats.org/officeDocument/2006/relationships" xmlns:p="http://schemas.openxmlformats.org/presentationml/2006/main">
   <p:cSld>
     <p:spTree>
@@ -12499,7 +14618,7 @@
 </p:sld>
 </file>
 
-<file path=ppt/slides/slide23.xml><?xml version="1.0" encoding="utf-8"?>
+<file path=ppt/slides/slide26.xml><?xml version="1.0" encoding="utf-8"?>
 <p:sld xmlns:a="http://schemas.openxmlformats.org/drawingml/2006/main" xmlns:r="http://schemas.openxmlformats.org/officeDocument/2006/relationships" xmlns:p="http://schemas.openxmlformats.org/presentationml/2006/main">
   <p:cSld>
     <p:spTree>
@@ -12726,7 +14845,7 @@
 </p:sld>
 </file>
 
-<file path=ppt/slides/slide24.xml><?xml version="1.0" encoding="utf-8"?>
+<file path=ppt/slides/slide27.xml><?xml version="1.0" encoding="utf-8"?>
 <p:sld xmlns:a="http://schemas.openxmlformats.org/drawingml/2006/main" xmlns:r="http://schemas.openxmlformats.org/officeDocument/2006/relationships" xmlns:p="http://schemas.openxmlformats.org/presentationml/2006/main">
   <p:cSld>
     <p:spTree>
@@ -12874,7 +14993,7 @@
 </p:sld>
 </file>
 
-<file path=ppt/slides/slide25.xml><?xml version="1.0" encoding="utf-8"?>
+<file path=ppt/slides/slide28.xml><?xml version="1.0" encoding="utf-8"?>
 <p:sld xmlns:a="http://schemas.openxmlformats.org/drawingml/2006/main" xmlns:r="http://schemas.openxmlformats.org/officeDocument/2006/relationships" xmlns:p="http://schemas.openxmlformats.org/presentationml/2006/main">
   <p:cSld>
     <p:spTree>
@@ -13010,7 +15129,7 @@
 </p:sld>
 </file>
 
-<file path=ppt/slides/slide26.xml><?xml version="1.0" encoding="utf-8"?>
+<file path=ppt/slides/slide29.xml><?xml version="1.0" encoding="utf-8"?>
 <p:sld xmlns:a="http://schemas.openxmlformats.org/drawingml/2006/main" xmlns:r="http://schemas.openxmlformats.org/officeDocument/2006/relationships" xmlns:p="http://schemas.openxmlformats.org/presentationml/2006/main">
   <p:cSld>
     <p:spTree>
@@ -13163,7 +15282,13 @@
   <p:cSld>
     <p:spTree>
       <p:nvGrpSpPr>
-        <p:cNvPr id="1" name=""/>
+        <p:cNvPr id="1" name="">
+          <a:extLst>
+            <a:ext uri="{FF2B5EF4-FFF2-40B4-BE49-F238E27FC236}">
+              <a16:creationId xmlns:a16="http://schemas.microsoft.com/office/drawing/2014/main" id="{B87EE058-2E56-38C2-7DCF-3597C457BA32}"/>
+            </a:ext>
+          </a:extLst>
+        </p:cNvPr>
         <p:cNvGrpSpPr/>
         <p:nvPr/>
       </p:nvGrpSpPr>
@@ -13180,7 +15305,7 @@
           <p:cNvPr id="5" name="TextBox 4">
             <a:extLst>
               <a:ext uri="{FF2B5EF4-FFF2-40B4-BE49-F238E27FC236}">
-                <a16:creationId xmlns:a16="http://schemas.microsoft.com/office/drawing/2014/main" id="{6E9987B0-18A0-545F-41D4-8D384283B433}"/>
+                <a16:creationId xmlns:a16="http://schemas.microsoft.com/office/drawing/2014/main" id="{94D65004-F7E4-A2B4-8851-B290CA8E7D23}"/>
               </a:ext>
             </a:extLst>
           </p:cNvPr>
@@ -13190,7 +15315,7 @@
         <p:spPr>
           <a:xfrm>
             <a:off x="146304" y="243512"/>
-            <a:ext cx="11539728" cy="6740307"/>
+            <a:ext cx="11539728" cy="1938992"/>
           </a:xfrm>
           <a:prstGeom prst="rect">
             <a:avLst/>
@@ -13309,232 +15434,12 @@
               <a:t> by Vaswani et al. (2017)</a:t>
             </a:r>
           </a:p>
-          <a:p>
-            <a:pPr lvl="1"/>
-            <a:endParaRPr lang="en-US" sz="2400" dirty="0">
-              <a:solidFill>
-                <a:schemeClr val="accent6">
-                  <a:lumMod val="60000"/>
-                  <a:lumOff val="40000"/>
-                </a:schemeClr>
-              </a:solidFill>
-            </a:endParaRPr>
-          </a:p>
-          <a:p>
-            <a:pPr lvl="1"/>
-            <a:endParaRPr lang="en-US" sz="2400" dirty="0">
-              <a:solidFill>
-                <a:schemeClr val="accent6">
-                  <a:lumMod val="60000"/>
-                  <a:lumOff val="40000"/>
-                </a:schemeClr>
-              </a:solidFill>
-            </a:endParaRPr>
-          </a:p>
-          <a:p>
-            <a:pPr marL="0" indent="0">
-              <a:buNone/>
-            </a:pPr>
-            <a:r>
-              <a:rPr lang="en-US" sz="2400" b="1" dirty="0">
-                <a:solidFill>
-                  <a:schemeClr val="accent6">
-                    <a:lumMod val="60000"/>
-                    <a:lumOff val="40000"/>
-                  </a:schemeClr>
-                </a:solidFill>
-              </a:rPr>
-              <a:t>Why are Transformers important?</a:t>
-            </a:r>
-          </a:p>
-          <a:p>
-            <a:pPr marL="0" indent="0">
-              <a:buNone/>
-            </a:pPr>
-            <a:endParaRPr lang="en-US" sz="2400" b="1" dirty="0">
-              <a:solidFill>
-                <a:schemeClr val="accent6">
-                  <a:lumMod val="60000"/>
-                  <a:lumOff val="40000"/>
-                </a:schemeClr>
-              </a:solidFill>
-            </a:endParaRPr>
-          </a:p>
-          <a:p>
-            <a:r>
-              <a:rPr lang="en-US" sz="2400" dirty="0">
-                <a:solidFill>
-                  <a:schemeClr val="accent6">
-                    <a:lumMod val="60000"/>
-                    <a:lumOff val="40000"/>
-                  </a:schemeClr>
-                </a:solidFill>
-              </a:rPr>
-              <a:t>Overcame limitations of RNNs and LSTMs </a:t>
-            </a:r>
-          </a:p>
-          <a:p>
-            <a:r>
-              <a:rPr lang="en-US" sz="2400" dirty="0">
-                <a:solidFill>
-                  <a:schemeClr val="accent6">
-                    <a:lumMod val="60000"/>
-                    <a:lumOff val="40000"/>
-                  </a:schemeClr>
-                </a:solidFill>
-              </a:rPr>
-              <a:t>RNN Limitation: </a:t>
-            </a:r>
-          </a:p>
-          <a:p>
-            <a:pPr marL="457200" indent="-457200">
-              <a:buAutoNum type="arabicParenR"/>
-            </a:pPr>
-            <a:r>
-              <a:rPr lang="en-US" sz="2400" dirty="0">
-                <a:solidFill>
-                  <a:schemeClr val="accent6">
-                    <a:lumMod val="60000"/>
-                    <a:lumOff val="40000"/>
-                  </a:schemeClr>
-                </a:solidFill>
-              </a:rPr>
-              <a:t>Sequential processing and therefore no parallelism</a:t>
-            </a:r>
-          </a:p>
-          <a:p>
-            <a:pPr marL="457200" indent="-457200">
-              <a:buAutoNum type="arabicParenR"/>
-            </a:pPr>
-            <a:r>
-              <a:rPr lang="en-US" sz="2400" dirty="0">
-                <a:solidFill>
-                  <a:schemeClr val="accent6">
-                    <a:lumMod val="60000"/>
-                    <a:lumOff val="40000"/>
-                  </a:schemeClr>
-                </a:solidFill>
-              </a:rPr>
-              <a:t>Hard to capture long-term dependencies due to vanishing gradients</a:t>
-            </a:r>
-          </a:p>
-          <a:p>
-            <a:pPr marL="457200" indent="-457200">
-              <a:buAutoNum type="arabicParenR"/>
-            </a:pPr>
-            <a:r>
-              <a:rPr lang="en-US" sz="2400" dirty="0">
-                <a:solidFill>
-                  <a:schemeClr val="accent6">
-                    <a:lumMod val="60000"/>
-                    <a:lumOff val="40000"/>
-                  </a:schemeClr>
-                </a:solidFill>
-              </a:rPr>
-              <a:t>Sequential bottlenecks: Can’t process all words at once</a:t>
-            </a:r>
-          </a:p>
-          <a:p>
-            <a:endParaRPr lang="en-US" sz="2400" dirty="0">
-              <a:solidFill>
-                <a:schemeClr val="accent6">
-                  <a:lumMod val="60000"/>
-                  <a:lumOff val="40000"/>
-                </a:schemeClr>
-              </a:solidFill>
-            </a:endParaRPr>
-          </a:p>
-          <a:p>
-            <a:pPr marL="342900" indent="-342900">
-              <a:buFont typeface="Arial" panose="020B0604020202020204" pitchFamily="34" charset="0"/>
-              <a:buChar char="•"/>
-            </a:pPr>
-            <a:r>
-              <a:rPr lang="en-US" sz="2400" dirty="0">
-                <a:solidFill>
-                  <a:schemeClr val="accent6">
-                    <a:lumMod val="60000"/>
-                    <a:lumOff val="40000"/>
-                  </a:schemeClr>
-                </a:solidFill>
-              </a:rPr>
-              <a:t>Transformers enabled </a:t>
-            </a:r>
-            <a:r>
-              <a:rPr lang="en-US" sz="2400" b="1" dirty="0">
-                <a:solidFill>
-                  <a:schemeClr val="accent6">
-                    <a:lumMod val="60000"/>
-                    <a:lumOff val="40000"/>
-                  </a:schemeClr>
-                </a:solidFill>
-              </a:rPr>
-              <a:t>parallel processing</a:t>
-            </a:r>
-            <a:r>
-              <a:rPr lang="en-US" sz="2400" dirty="0">
-                <a:solidFill>
-                  <a:schemeClr val="accent6">
-                    <a:lumMod val="60000"/>
-                    <a:lumOff val="40000"/>
-                  </a:schemeClr>
-                </a:solidFill>
-              </a:rPr>
-              <a:t> of large text corpora</a:t>
-            </a:r>
-          </a:p>
-          <a:p>
-            <a:pPr marL="342900" indent="-342900">
-              <a:buFont typeface="Arial" panose="020B0604020202020204" pitchFamily="34" charset="0"/>
-              <a:buChar char="•"/>
-            </a:pPr>
-            <a:r>
-              <a:rPr lang="en-US" sz="2400" dirty="0">
-                <a:solidFill>
-                  <a:schemeClr val="accent6">
-                    <a:lumMod val="60000"/>
-                    <a:lumOff val="40000"/>
-                  </a:schemeClr>
-                </a:solidFill>
-              </a:rPr>
-              <a:t>Led to models like GPT, BERT, T5, </a:t>
-            </a:r>
-            <a:r>
-              <a:rPr lang="en-US" sz="2400" dirty="0" err="1">
-                <a:solidFill>
-                  <a:schemeClr val="accent6">
-                    <a:lumMod val="60000"/>
-                    <a:lumOff val="40000"/>
-                  </a:schemeClr>
-                </a:solidFill>
-              </a:rPr>
-              <a:t>ViT</a:t>
-            </a:r>
-            <a:endParaRPr lang="en-US" sz="2400" dirty="0">
-              <a:solidFill>
-                <a:schemeClr val="accent6">
-                  <a:lumMod val="60000"/>
-                  <a:lumOff val="40000"/>
-                </a:schemeClr>
-              </a:solidFill>
-            </a:endParaRPr>
-          </a:p>
-          <a:p>
-            <a:endParaRPr lang="en-US" sz="2400" dirty="0">
-              <a:solidFill>
-                <a:schemeClr val="accent6">
-                  <a:lumMod val="60000"/>
-                  <a:lumOff val="40000"/>
-                </a:schemeClr>
-              </a:solidFill>
-            </a:endParaRPr>
-          </a:p>
         </p:txBody>
       </p:sp>
     </p:spTree>
     <p:extLst>
       <p:ext uri="{BB962C8B-B14F-4D97-AF65-F5344CB8AC3E}">
-        <p14:creationId xmlns:p14="http://schemas.microsoft.com/office/powerpoint/2010/main" val="2959280584"/>
+        <p14:creationId xmlns:p14="http://schemas.microsoft.com/office/powerpoint/2010/main" val="623873989"/>
       </p:ext>
     </p:extLst>
   </p:cSld>
@@ -13545,6 +15450,665 @@
 </file>
 
 <file path=ppt/slides/slide4.xml><?xml version="1.0" encoding="utf-8"?>
+<p:sld xmlns:a="http://schemas.openxmlformats.org/drawingml/2006/main" xmlns:r="http://schemas.openxmlformats.org/officeDocument/2006/relationships" xmlns:p="http://schemas.openxmlformats.org/presentationml/2006/main">
+  <p:cSld>
+    <p:spTree>
+      <p:nvGrpSpPr>
+        <p:cNvPr id="1" name="">
+          <a:extLst>
+            <a:ext uri="{FF2B5EF4-FFF2-40B4-BE49-F238E27FC236}">
+              <a16:creationId xmlns:a16="http://schemas.microsoft.com/office/drawing/2014/main" id="{BCD3A89F-C21D-A354-66DB-02555A6996F0}"/>
+            </a:ext>
+          </a:extLst>
+        </p:cNvPr>
+        <p:cNvGrpSpPr/>
+        <p:nvPr/>
+      </p:nvGrpSpPr>
+      <p:grpSpPr>
+        <a:xfrm>
+          <a:off x="0" y="0"/>
+          <a:ext cx="0" cy="0"/>
+          <a:chOff x="0" y="0"/>
+          <a:chExt cx="0" cy="0"/>
+        </a:xfrm>
+      </p:grpSpPr>
+      <p:sp>
+        <p:nvSpPr>
+          <p:cNvPr id="5" name="TextBox 4">
+            <a:extLst>
+              <a:ext uri="{FF2B5EF4-FFF2-40B4-BE49-F238E27FC236}">
+                <a16:creationId xmlns:a16="http://schemas.microsoft.com/office/drawing/2014/main" id="{7D1747FF-D250-03A4-C6A6-550391BB568C}"/>
+              </a:ext>
+            </a:extLst>
+          </p:cNvPr>
+          <p:cNvSpPr txBox="1"/>
+          <p:nvPr/>
+        </p:nvSpPr>
+        <p:spPr>
+          <a:xfrm>
+            <a:off x="146304" y="243512"/>
+            <a:ext cx="11539728" cy="4524315"/>
+          </a:xfrm>
+          <a:prstGeom prst="rect">
+            <a:avLst/>
+          </a:prstGeom>
+          <a:noFill/>
+        </p:spPr>
+        <p:txBody>
+          <a:bodyPr wrap="square">
+            <a:spAutoFit/>
+          </a:bodyPr>
+          <a:lstStyle/>
+          <a:p>
+            <a:r>
+              <a:rPr lang="en-US" sz="2400" dirty="0">
+                <a:solidFill>
+                  <a:schemeClr val="accent6">
+                    <a:lumMod val="60000"/>
+                    <a:lumOff val="40000"/>
+                  </a:schemeClr>
+                </a:solidFill>
+              </a:rPr>
+              <a:t>Transformers overcame limitations of RNNs and LSTMs </a:t>
+            </a:r>
+          </a:p>
+          <a:p>
+            <a:endParaRPr lang="en-US" sz="2400" dirty="0">
+              <a:solidFill>
+                <a:schemeClr val="accent6">
+                  <a:lumMod val="60000"/>
+                  <a:lumOff val="40000"/>
+                </a:schemeClr>
+              </a:solidFill>
+            </a:endParaRPr>
+          </a:p>
+          <a:p>
+            <a:r>
+              <a:rPr lang="en-US" sz="2400" dirty="0">
+                <a:solidFill>
+                  <a:schemeClr val="accent6">
+                    <a:lumMod val="60000"/>
+                    <a:lumOff val="40000"/>
+                  </a:schemeClr>
+                </a:solidFill>
+              </a:rPr>
+              <a:t>RNN Limitation: </a:t>
+            </a:r>
+          </a:p>
+          <a:p>
+            <a:pPr marL="457200" indent="-457200">
+              <a:buAutoNum type="arabicParenR"/>
+            </a:pPr>
+            <a:r>
+              <a:rPr lang="en-US" sz="2400" dirty="0">
+                <a:solidFill>
+                  <a:schemeClr val="accent6">
+                    <a:lumMod val="60000"/>
+                    <a:lumOff val="40000"/>
+                  </a:schemeClr>
+                </a:solidFill>
+              </a:rPr>
+              <a:t>Sequential processing and therefore no parallelism</a:t>
+            </a:r>
+          </a:p>
+          <a:p>
+            <a:pPr marL="457200" indent="-457200">
+              <a:buAutoNum type="arabicParenR"/>
+            </a:pPr>
+            <a:endParaRPr lang="en-US" sz="2400" dirty="0">
+              <a:solidFill>
+                <a:schemeClr val="accent6">
+                  <a:lumMod val="60000"/>
+                  <a:lumOff val="40000"/>
+                </a:schemeClr>
+              </a:solidFill>
+            </a:endParaRPr>
+          </a:p>
+          <a:p>
+            <a:r>
+              <a:rPr lang="en-US" sz="2400" dirty="0">
+                <a:solidFill>
+                  <a:schemeClr val="accent6">
+                    <a:lumMod val="60000"/>
+                    <a:lumOff val="40000"/>
+                  </a:schemeClr>
+                </a:solidFill>
+              </a:rPr>
+              <a:t>An RNN reads one word at a time.</a:t>
+            </a:r>
+          </a:p>
+          <a:p>
+            <a:r>
+              <a:rPr lang="en-US" sz="2400" dirty="0">
+                <a:solidFill>
+                  <a:schemeClr val="accent6">
+                    <a:lumMod val="60000"/>
+                    <a:lumOff val="40000"/>
+                  </a:schemeClr>
+                </a:solidFill>
+              </a:rPr>
+              <a:t>The → movie → that → I → watched → last → week → with → my → friends → was → absolutely → amazing</a:t>
+            </a:r>
+          </a:p>
+          <a:p>
+            <a:r>
+              <a:rPr lang="en-US" sz="2400" dirty="0">
+                <a:solidFill>
+                  <a:schemeClr val="accent6">
+                    <a:lumMod val="60000"/>
+                    <a:lumOff val="40000"/>
+                  </a:schemeClr>
+                </a:solidFill>
+              </a:rPr>
+              <a:t>It cannot process "movie" before finishing "The."</a:t>
+            </a:r>
+          </a:p>
+          <a:p>
+            <a:endParaRPr lang="en-US" sz="2400" dirty="0">
+              <a:solidFill>
+                <a:schemeClr val="accent6">
+                  <a:lumMod val="60000"/>
+                  <a:lumOff val="40000"/>
+                </a:schemeClr>
+              </a:solidFill>
+            </a:endParaRPr>
+          </a:p>
+          <a:p>
+            <a:r>
+              <a:rPr lang="en-US" sz="2400" dirty="0">
+                <a:solidFill>
+                  <a:schemeClr val="accent6">
+                    <a:lumMod val="60000"/>
+                    <a:lumOff val="40000"/>
+                  </a:schemeClr>
+                </a:solidFill>
+              </a:rPr>
+              <a:t>Since every step waits for the previous one, GPU cannot process all words together. </a:t>
+            </a:r>
+          </a:p>
+          <a:p>
+            <a:r>
+              <a:rPr lang="en-US" sz="2400" dirty="0">
+                <a:solidFill>
+                  <a:schemeClr val="accent6">
+                    <a:lumMod val="60000"/>
+                    <a:lumOff val="40000"/>
+                  </a:schemeClr>
+                </a:solidFill>
+              </a:rPr>
+              <a:t>Training becomes slow. </a:t>
+            </a:r>
+          </a:p>
+        </p:txBody>
+      </p:sp>
+    </p:spTree>
+    <p:extLst>
+      <p:ext uri="{BB962C8B-B14F-4D97-AF65-F5344CB8AC3E}">
+        <p14:creationId xmlns:p14="http://schemas.microsoft.com/office/powerpoint/2010/main" val="2485145682"/>
+      </p:ext>
+    </p:extLst>
+  </p:cSld>
+  <p:clrMapOvr>
+    <a:masterClrMapping/>
+  </p:clrMapOvr>
+</p:sld>
+</file>
+
+<file path=ppt/slides/slide5.xml><?xml version="1.0" encoding="utf-8"?>
+<p:sld xmlns:a="http://schemas.openxmlformats.org/drawingml/2006/main" xmlns:r="http://schemas.openxmlformats.org/officeDocument/2006/relationships" xmlns:p="http://schemas.openxmlformats.org/presentationml/2006/main">
+  <p:cSld>
+    <p:spTree>
+      <p:nvGrpSpPr>
+        <p:cNvPr id="1" name="">
+          <a:extLst>
+            <a:ext uri="{FF2B5EF4-FFF2-40B4-BE49-F238E27FC236}">
+              <a16:creationId xmlns:a16="http://schemas.microsoft.com/office/drawing/2014/main" id="{FC20C344-476E-FDE1-5632-72B9FB46675F}"/>
+            </a:ext>
+          </a:extLst>
+        </p:cNvPr>
+        <p:cNvGrpSpPr/>
+        <p:nvPr/>
+      </p:nvGrpSpPr>
+      <p:grpSpPr>
+        <a:xfrm>
+          <a:off x="0" y="0"/>
+          <a:ext cx="0" cy="0"/>
+          <a:chOff x="0" y="0"/>
+          <a:chExt cx="0" cy="0"/>
+        </a:xfrm>
+      </p:grpSpPr>
+      <p:sp>
+        <p:nvSpPr>
+          <p:cNvPr id="5" name="TextBox 4">
+            <a:extLst>
+              <a:ext uri="{FF2B5EF4-FFF2-40B4-BE49-F238E27FC236}">
+                <a16:creationId xmlns:a16="http://schemas.microsoft.com/office/drawing/2014/main" id="{8D285FD3-4B63-F98A-75AE-9F35CDEF5B57}"/>
+              </a:ext>
+            </a:extLst>
+          </p:cNvPr>
+          <p:cNvSpPr txBox="1"/>
+          <p:nvPr/>
+        </p:nvSpPr>
+        <p:spPr>
+          <a:xfrm>
+            <a:off x="146304" y="243512"/>
+            <a:ext cx="11539728" cy="4154984"/>
+          </a:xfrm>
+          <a:prstGeom prst="rect">
+            <a:avLst/>
+          </a:prstGeom>
+          <a:noFill/>
+        </p:spPr>
+        <p:txBody>
+          <a:bodyPr wrap="square">
+            <a:spAutoFit/>
+          </a:bodyPr>
+          <a:lstStyle/>
+          <a:p>
+            <a:r>
+              <a:rPr lang="en-US" sz="2400" dirty="0">
+                <a:solidFill>
+                  <a:schemeClr val="accent6">
+                    <a:lumMod val="60000"/>
+                    <a:lumOff val="40000"/>
+                  </a:schemeClr>
+                </a:solidFill>
+              </a:rPr>
+              <a:t>Transformers overcame limitations of RNNs and LSTMs </a:t>
+            </a:r>
+          </a:p>
+          <a:p>
+            <a:endParaRPr lang="en-US" sz="2400" dirty="0">
+              <a:solidFill>
+                <a:schemeClr val="accent6">
+                  <a:lumMod val="60000"/>
+                  <a:lumOff val="40000"/>
+                </a:schemeClr>
+              </a:solidFill>
+            </a:endParaRPr>
+          </a:p>
+          <a:p>
+            <a:r>
+              <a:rPr lang="en-US" sz="2400" dirty="0">
+                <a:solidFill>
+                  <a:schemeClr val="accent6">
+                    <a:lumMod val="60000"/>
+                    <a:lumOff val="40000"/>
+                  </a:schemeClr>
+                </a:solidFill>
+              </a:rPr>
+              <a:t>RNN Limitation: </a:t>
+            </a:r>
+          </a:p>
+          <a:p>
+            <a:r>
+              <a:rPr lang="en-US" sz="2400" dirty="0">
+                <a:solidFill>
+                  <a:schemeClr val="accent6">
+                    <a:lumMod val="60000"/>
+                    <a:lumOff val="40000"/>
+                  </a:schemeClr>
+                </a:solidFill>
+              </a:rPr>
+              <a:t>2) Hard to capture long-term dependencies due to vanishing gradients</a:t>
+            </a:r>
+          </a:p>
+          <a:p>
+            <a:endParaRPr lang="en-US" sz="2400" dirty="0">
+              <a:solidFill>
+                <a:schemeClr val="accent6">
+                  <a:lumMod val="60000"/>
+                  <a:lumOff val="40000"/>
+                </a:schemeClr>
+              </a:solidFill>
+            </a:endParaRPr>
+          </a:p>
+          <a:p>
+            <a:r>
+              <a:rPr lang="en-US" sz="2400" dirty="0">
+                <a:solidFill>
+                  <a:schemeClr val="accent6">
+                    <a:lumMod val="60000"/>
+                    <a:lumOff val="40000"/>
+                  </a:schemeClr>
+                </a:solidFill>
+              </a:rPr>
+              <a:t>Consider sentence:  </a:t>
+            </a:r>
+          </a:p>
+          <a:p>
+            <a:r>
+              <a:rPr lang="en-US" sz="2400" dirty="0">
+                <a:solidFill>
+                  <a:schemeClr val="accent6">
+                    <a:lumMod val="60000"/>
+                    <a:lumOff val="40000"/>
+                  </a:schemeClr>
+                </a:solidFill>
+              </a:rPr>
+              <a:t>"The </a:t>
+            </a:r>
+            <a:r>
+              <a:rPr lang="en-US" sz="2400" b="1" u="sng" dirty="0">
+                <a:solidFill>
+                  <a:schemeClr val="accent6">
+                    <a:lumMod val="60000"/>
+                    <a:lumOff val="40000"/>
+                  </a:schemeClr>
+                </a:solidFill>
+              </a:rPr>
+              <a:t>book</a:t>
+            </a:r>
+            <a:r>
+              <a:rPr lang="en-US" sz="2400" dirty="0">
+                <a:solidFill>
+                  <a:schemeClr val="accent6">
+                    <a:lumMod val="60000"/>
+                    <a:lumOff val="40000"/>
+                  </a:schemeClr>
+                </a:solidFill>
+              </a:rPr>
+              <a:t> that I borrowed from the university library after attending the seminar yesterday was fascinating. I think I will buy </a:t>
+            </a:r>
+            <a:r>
+              <a:rPr lang="en-US" sz="2400" b="1" u="sng" dirty="0">
+                <a:solidFill>
+                  <a:schemeClr val="accent6">
+                    <a:lumMod val="60000"/>
+                    <a:lumOff val="40000"/>
+                  </a:schemeClr>
+                </a:solidFill>
+              </a:rPr>
+              <a:t>it.</a:t>
+            </a:r>
+            <a:r>
+              <a:rPr lang="en-US" sz="2400" dirty="0">
+                <a:solidFill>
+                  <a:schemeClr val="accent6">
+                    <a:lumMod val="60000"/>
+                    <a:lumOff val="40000"/>
+                  </a:schemeClr>
+                </a:solidFill>
+              </a:rPr>
+              <a:t>“</a:t>
+            </a:r>
+          </a:p>
+          <a:p>
+            <a:endParaRPr lang="en-US" sz="2400" dirty="0">
+              <a:solidFill>
+                <a:schemeClr val="accent6">
+                  <a:lumMod val="60000"/>
+                  <a:lumOff val="40000"/>
+                </a:schemeClr>
+              </a:solidFill>
+            </a:endParaRPr>
+          </a:p>
+          <a:p>
+            <a:r>
+              <a:rPr lang="en-US" sz="2400" dirty="0">
+                <a:solidFill>
+                  <a:schemeClr val="accent6">
+                    <a:lumMod val="60000"/>
+                    <a:lumOff val="40000"/>
+                  </a:schemeClr>
+                </a:solidFill>
+              </a:rPr>
+              <a:t>The word “</a:t>
+            </a:r>
+            <a:r>
+              <a:rPr lang="en-US" sz="2400" b="1" dirty="0">
+                <a:solidFill>
+                  <a:schemeClr val="accent6">
+                    <a:lumMod val="60000"/>
+                    <a:lumOff val="40000"/>
+                  </a:schemeClr>
+                </a:solidFill>
+              </a:rPr>
+              <a:t>it” </a:t>
+            </a:r>
+            <a:r>
+              <a:rPr lang="en-US" sz="2400" dirty="0">
+                <a:solidFill>
+                  <a:schemeClr val="accent6">
+                    <a:lumMod val="60000"/>
+                    <a:lumOff val="40000"/>
+                  </a:schemeClr>
+                </a:solidFill>
+              </a:rPr>
+              <a:t>refers to the “</a:t>
+            </a:r>
+            <a:r>
+              <a:rPr lang="en-US" sz="2400" b="1" dirty="0">
+                <a:solidFill>
+                  <a:schemeClr val="accent6">
+                    <a:lumMod val="60000"/>
+                    <a:lumOff val="40000"/>
+                  </a:schemeClr>
+                </a:solidFill>
+              </a:rPr>
+              <a:t>book” </a:t>
+            </a:r>
+            <a:r>
+              <a:rPr lang="en-US" sz="2400" dirty="0">
+                <a:solidFill>
+                  <a:schemeClr val="accent6">
+                    <a:lumMod val="60000"/>
+                    <a:lumOff val="40000"/>
+                  </a:schemeClr>
+                </a:solidFill>
+              </a:rPr>
+              <a:t>and appeared may words later.  The RNN model struggles to associate the word “</a:t>
+            </a:r>
+            <a:r>
+              <a:rPr lang="en-US" sz="2400" b="1" dirty="0">
+                <a:solidFill>
+                  <a:schemeClr val="accent6">
+                    <a:lumMod val="60000"/>
+                    <a:lumOff val="40000"/>
+                  </a:schemeClr>
+                </a:solidFill>
+              </a:rPr>
+              <a:t>it” </a:t>
+            </a:r>
+            <a:r>
+              <a:rPr lang="en-US" sz="2400" dirty="0">
+                <a:solidFill>
+                  <a:schemeClr val="accent6">
+                    <a:lumMod val="60000"/>
+                    <a:lumOff val="40000"/>
+                  </a:schemeClr>
+                </a:solidFill>
+              </a:rPr>
+              <a:t>to the </a:t>
+            </a:r>
+            <a:r>
+              <a:rPr lang="en-US" sz="2400" b="1" dirty="0">
+                <a:solidFill>
+                  <a:schemeClr val="accent6">
+                    <a:lumMod val="60000"/>
+                    <a:lumOff val="40000"/>
+                  </a:schemeClr>
+                </a:solidFill>
+              </a:rPr>
+              <a:t> “book”</a:t>
+            </a:r>
+          </a:p>
+        </p:txBody>
+      </p:sp>
+    </p:spTree>
+    <p:extLst>
+      <p:ext uri="{BB962C8B-B14F-4D97-AF65-F5344CB8AC3E}">
+        <p14:creationId xmlns:p14="http://schemas.microsoft.com/office/powerpoint/2010/main" val="3169020980"/>
+      </p:ext>
+    </p:extLst>
+  </p:cSld>
+  <p:clrMapOvr>
+    <a:masterClrMapping/>
+  </p:clrMapOvr>
+</p:sld>
+</file>
+
+<file path=ppt/slides/slide6.xml><?xml version="1.0" encoding="utf-8"?>
+<p:sld xmlns:a="http://schemas.openxmlformats.org/drawingml/2006/main" xmlns:r="http://schemas.openxmlformats.org/officeDocument/2006/relationships" xmlns:p="http://schemas.openxmlformats.org/presentationml/2006/main">
+  <p:cSld>
+    <p:spTree>
+      <p:nvGrpSpPr>
+        <p:cNvPr id="1" name="">
+          <a:extLst>
+            <a:ext uri="{FF2B5EF4-FFF2-40B4-BE49-F238E27FC236}">
+              <a16:creationId xmlns:a16="http://schemas.microsoft.com/office/drawing/2014/main" id="{33A6CB34-1810-B88A-6305-AD8A311DBB25}"/>
+            </a:ext>
+          </a:extLst>
+        </p:cNvPr>
+        <p:cNvGrpSpPr/>
+        <p:nvPr/>
+      </p:nvGrpSpPr>
+      <p:grpSpPr>
+        <a:xfrm>
+          <a:off x="0" y="0"/>
+          <a:ext cx="0" cy="0"/>
+          <a:chOff x="0" y="0"/>
+          <a:chExt cx="0" cy="0"/>
+        </a:xfrm>
+      </p:grpSpPr>
+      <p:sp>
+        <p:nvSpPr>
+          <p:cNvPr id="5" name="TextBox 4">
+            <a:extLst>
+              <a:ext uri="{FF2B5EF4-FFF2-40B4-BE49-F238E27FC236}">
+                <a16:creationId xmlns:a16="http://schemas.microsoft.com/office/drawing/2014/main" id="{72041C05-98F7-3EAC-50EB-32C6FE18A813}"/>
+              </a:ext>
+            </a:extLst>
+          </p:cNvPr>
+          <p:cNvSpPr txBox="1"/>
+          <p:nvPr/>
+        </p:nvSpPr>
+        <p:spPr>
+          <a:xfrm>
+            <a:off x="146304" y="243512"/>
+            <a:ext cx="11539728" cy="1569660"/>
+          </a:xfrm>
+          <a:prstGeom prst="rect">
+            <a:avLst/>
+          </a:prstGeom>
+          <a:noFill/>
+        </p:spPr>
+        <p:txBody>
+          <a:bodyPr wrap="square">
+            <a:spAutoFit/>
+          </a:bodyPr>
+          <a:lstStyle/>
+          <a:p>
+            <a:endParaRPr lang="en-US" sz="2400" dirty="0">
+              <a:solidFill>
+                <a:schemeClr val="accent6">
+                  <a:lumMod val="60000"/>
+                  <a:lumOff val="40000"/>
+                </a:schemeClr>
+              </a:solidFill>
+            </a:endParaRPr>
+          </a:p>
+          <a:p>
+            <a:pPr marL="342900" indent="-342900">
+              <a:buFont typeface="Arial" panose="020B0604020202020204" pitchFamily="34" charset="0"/>
+              <a:buChar char="•"/>
+            </a:pPr>
+            <a:r>
+              <a:rPr lang="en-US" sz="2400" dirty="0">
+                <a:solidFill>
+                  <a:schemeClr val="accent6">
+                    <a:lumMod val="60000"/>
+                    <a:lumOff val="40000"/>
+                  </a:schemeClr>
+                </a:solidFill>
+              </a:rPr>
+              <a:t>Transformers enabled </a:t>
+            </a:r>
+            <a:r>
+              <a:rPr lang="en-US" sz="2400" b="1" dirty="0">
+                <a:solidFill>
+                  <a:schemeClr val="accent6">
+                    <a:lumMod val="60000"/>
+                    <a:lumOff val="40000"/>
+                  </a:schemeClr>
+                </a:solidFill>
+              </a:rPr>
+              <a:t>parallel processing</a:t>
+            </a:r>
+            <a:r>
+              <a:rPr lang="en-US" sz="2400" dirty="0">
+                <a:solidFill>
+                  <a:schemeClr val="accent6">
+                    <a:lumMod val="60000"/>
+                    <a:lumOff val="40000"/>
+                  </a:schemeClr>
+                </a:solidFill>
+              </a:rPr>
+              <a:t> of large text corpora</a:t>
+            </a:r>
+          </a:p>
+          <a:p>
+            <a:pPr marL="342900" indent="-342900">
+              <a:buFont typeface="Arial" panose="020B0604020202020204" pitchFamily="34" charset="0"/>
+              <a:buChar char="•"/>
+            </a:pPr>
+            <a:r>
+              <a:rPr lang="en-US" sz="2400" dirty="0">
+                <a:solidFill>
+                  <a:schemeClr val="accent6">
+                    <a:lumMod val="60000"/>
+                    <a:lumOff val="40000"/>
+                  </a:schemeClr>
+                </a:solidFill>
+              </a:rPr>
+              <a:t>Led to models like GPT, BERT, T5, </a:t>
+            </a:r>
+            <a:r>
+              <a:rPr lang="en-US" sz="2400" dirty="0" err="1">
+                <a:solidFill>
+                  <a:schemeClr val="accent6">
+                    <a:lumMod val="60000"/>
+                    <a:lumOff val="40000"/>
+                  </a:schemeClr>
+                </a:solidFill>
+              </a:rPr>
+              <a:t>ViT</a:t>
+            </a:r>
+            <a:endParaRPr lang="en-US" sz="2400" dirty="0">
+              <a:solidFill>
+                <a:schemeClr val="accent6">
+                  <a:lumMod val="60000"/>
+                  <a:lumOff val="40000"/>
+                </a:schemeClr>
+              </a:solidFill>
+            </a:endParaRPr>
+          </a:p>
+          <a:p>
+            <a:endParaRPr lang="en-US" sz="2400" dirty="0">
+              <a:solidFill>
+                <a:schemeClr val="accent6">
+                  <a:lumMod val="60000"/>
+                  <a:lumOff val="40000"/>
+                </a:schemeClr>
+              </a:solidFill>
+            </a:endParaRPr>
+          </a:p>
+        </p:txBody>
+      </p:sp>
+    </p:spTree>
+    <p:extLst>
+      <p:ext uri="{BB962C8B-B14F-4D97-AF65-F5344CB8AC3E}">
+        <p14:creationId xmlns:p14="http://schemas.microsoft.com/office/powerpoint/2010/main" val="2081656534"/>
+      </p:ext>
+    </p:extLst>
+  </p:cSld>
+  <p:clrMapOvr>
+    <a:masterClrMapping/>
+  </p:clrMapOvr>
+</p:sld>
+</file>
+
+<file path=ppt/slides/slide7.xml><?xml version="1.0" encoding="utf-8"?>
 <p:sld xmlns:a="http://schemas.openxmlformats.org/drawingml/2006/main" xmlns:r="http://schemas.openxmlformats.org/officeDocument/2006/relationships" xmlns:p="http://schemas.openxmlformats.org/presentationml/2006/main">
   <p:cSld>
     <p:spTree>
@@ -13643,104 +16207,6 @@
             <a:pPr marL="0" indent="0">
               <a:buNone/>
             </a:pPr>
-            <a:r>
-              <a:rPr lang="en-US" sz="2400" dirty="0">
-                <a:solidFill>
-                  <a:schemeClr val="accent6">
-                    <a:lumMod val="60000"/>
-                    <a:lumOff val="40000"/>
-                  </a:schemeClr>
-                </a:solidFill>
-              </a:rPr>
-              <a:t>Sentence:</a:t>
-            </a:r>
-          </a:p>
-          <a:p>
-            <a:pPr marL="0" indent="0">
-              <a:buNone/>
-            </a:pPr>
-            <a:r>
-              <a:rPr lang="en-US" sz="2400" dirty="0">
-                <a:solidFill>
-                  <a:schemeClr val="accent6">
-                    <a:lumMod val="60000"/>
-                    <a:lumOff val="40000"/>
-                  </a:schemeClr>
-                </a:solidFill>
-              </a:rPr>
-              <a:t>“I drank </a:t>
-            </a:r>
-            <a:r>
-              <a:rPr lang="en-US" sz="2400" b="1" u="sng" dirty="0">
-                <a:solidFill>
-                  <a:schemeClr val="accent6">
-                    <a:lumMod val="60000"/>
-                    <a:lumOff val="40000"/>
-                  </a:schemeClr>
-                </a:solidFill>
-              </a:rPr>
-              <a:t>juice</a:t>
-            </a:r>
-            <a:r>
-              <a:rPr lang="en-US" sz="2400" dirty="0">
-                <a:solidFill>
-                  <a:schemeClr val="accent6">
-                    <a:lumMod val="60000"/>
-                    <a:lumOff val="40000"/>
-                  </a:schemeClr>
-                </a:solidFill>
-              </a:rPr>
-              <a:t> from the </a:t>
-            </a:r>
-            <a:r>
-              <a:rPr lang="en-US" sz="2400" b="1" u="sng" dirty="0">
-                <a:solidFill>
-                  <a:schemeClr val="accent6">
-                    <a:lumMod val="60000"/>
-                    <a:lumOff val="40000"/>
-                  </a:schemeClr>
-                </a:solidFill>
-              </a:rPr>
-              <a:t>bottle</a:t>
-            </a:r>
-            <a:r>
-              <a:rPr lang="en-US" sz="2400" dirty="0">
-                <a:solidFill>
-                  <a:schemeClr val="accent6">
-                    <a:lumMod val="60000"/>
-                    <a:lumOff val="40000"/>
-                  </a:schemeClr>
-                </a:solidFill>
-              </a:rPr>
-              <a:t>. </a:t>
-            </a:r>
-            <a:r>
-              <a:rPr lang="en-US" sz="2400" b="1" u="sng" dirty="0">
-                <a:solidFill>
-                  <a:schemeClr val="accent6">
-                    <a:lumMod val="60000"/>
-                    <a:lumOff val="40000"/>
-                  </a:schemeClr>
-                </a:solidFill>
-              </a:rPr>
-              <a:t>It</a:t>
-            </a:r>
-            <a:r>
-              <a:rPr lang="en-US" sz="2400" dirty="0">
-                <a:solidFill>
-                  <a:schemeClr val="accent6">
-                    <a:lumMod val="60000"/>
-                    <a:lumOff val="40000"/>
-                  </a:schemeClr>
-                </a:solidFill>
-              </a:rPr>
-              <a:t> was cold”</a:t>
-            </a:r>
-          </a:p>
-          <a:p>
-            <a:pPr marL="0" indent="0">
-              <a:buNone/>
-            </a:pPr>
             <a:endParaRPr lang="en-US" sz="2400" dirty="0">
               <a:solidFill>
                 <a:schemeClr val="accent6">
@@ -13749,6 +16215,88 @@
                 </a:schemeClr>
               </a:solidFill>
             </a:endParaRPr>
+          </a:p>
+          <a:p>
+            <a:pPr marL="0" indent="0">
+              <a:buNone/>
+            </a:pPr>
+            <a:r>
+              <a:rPr lang="en-US" sz="2400" dirty="0">
+                <a:solidFill>
+                  <a:schemeClr val="accent6">
+                    <a:lumMod val="60000"/>
+                    <a:lumOff val="40000"/>
+                  </a:schemeClr>
+                </a:solidFill>
+              </a:rPr>
+              <a:t>Sentence:  “I drank </a:t>
+            </a:r>
+            <a:r>
+              <a:rPr lang="en-US" sz="2400" b="1" u="sng" dirty="0">
+                <a:solidFill>
+                  <a:schemeClr val="accent6">
+                    <a:lumMod val="60000"/>
+                    <a:lumOff val="40000"/>
+                  </a:schemeClr>
+                </a:solidFill>
+              </a:rPr>
+              <a:t>juice</a:t>
+            </a:r>
+            <a:r>
+              <a:rPr lang="en-US" sz="2400" dirty="0">
+                <a:solidFill>
+                  <a:schemeClr val="accent6">
+                    <a:lumMod val="60000"/>
+                    <a:lumOff val="40000"/>
+                  </a:schemeClr>
+                </a:solidFill>
+              </a:rPr>
+              <a:t> from the </a:t>
+            </a:r>
+            <a:r>
+              <a:rPr lang="en-US" sz="2400" b="1" u="sng" dirty="0">
+                <a:solidFill>
+                  <a:schemeClr val="accent6">
+                    <a:lumMod val="60000"/>
+                    <a:lumOff val="40000"/>
+                  </a:schemeClr>
+                </a:solidFill>
+              </a:rPr>
+              <a:t>bottle</a:t>
+            </a:r>
+            <a:r>
+              <a:rPr lang="en-US" sz="2400" dirty="0">
+                <a:solidFill>
+                  <a:schemeClr val="accent6">
+                    <a:lumMod val="60000"/>
+                    <a:lumOff val="40000"/>
+                  </a:schemeClr>
+                </a:solidFill>
+              </a:rPr>
+              <a:t>. </a:t>
+            </a:r>
+            <a:r>
+              <a:rPr lang="en-US" sz="2400" b="1" u="sng" dirty="0">
+                <a:solidFill>
+                  <a:schemeClr val="accent6">
+                    <a:lumMod val="60000"/>
+                    <a:lumOff val="40000"/>
+                  </a:schemeClr>
+                </a:solidFill>
+              </a:rPr>
+              <a:t>It</a:t>
+            </a:r>
+            <a:r>
+              <a:rPr lang="en-US" sz="2400" dirty="0">
+                <a:solidFill>
+                  <a:schemeClr val="accent6">
+                    <a:lumMod val="60000"/>
+                    <a:lumOff val="40000"/>
+                  </a:schemeClr>
+                </a:solidFill>
+              </a:rPr>
+              <a:t> was cold”</a:t>
+            </a:r>
           </a:p>
           <a:p>
             <a:pPr marL="0" indent="0">
@@ -13817,8 +16365,18 @@
                   </a:schemeClr>
                 </a:solidFill>
               </a:rPr>
-              <a:t>Example2: Predicting next word</a:t>
-            </a:r>
+              <a:t>Example2: It is good for predicting next word</a:t>
+            </a:r>
+          </a:p>
+          <a:p>
+            <a:endParaRPr lang="en-US" sz="2400" dirty="0">
+              <a:solidFill>
+                <a:schemeClr val="accent6">
+                  <a:lumMod val="60000"/>
+                  <a:lumOff val="40000"/>
+                </a:schemeClr>
+              </a:solidFill>
+            </a:endParaRPr>
           </a:p>
           <a:p>
             <a:r>
@@ -13939,7 +16497,7 @@
 </p:sld>
 </file>
 
-<file path=ppt/slides/slide5.xml><?xml version="1.0" encoding="utf-8"?>
+<file path=ppt/slides/slide8.xml><?xml version="1.0" encoding="utf-8"?>
 <p:sld xmlns:a="http://schemas.openxmlformats.org/drawingml/2006/main" xmlns:r="http://schemas.openxmlformats.org/officeDocument/2006/relationships" xmlns:p="http://schemas.openxmlformats.org/presentationml/2006/main">
   <p:cSld>
     <p:spTree>
@@ -14390,7 +16948,7 @@
 </p:sld>
 </file>
 
-<file path=ppt/slides/slide6.xml><?xml version="1.0" encoding="utf-8"?>
+<file path=ppt/slides/slide9.xml><?xml version="1.0" encoding="utf-8"?>
 <p:sld xmlns:a="http://schemas.openxmlformats.org/drawingml/2006/main" xmlns:r="http://schemas.openxmlformats.org/officeDocument/2006/relationships" xmlns:p="http://schemas.openxmlformats.org/presentationml/2006/main">
   <p:cSld>
     <p:spTree>
@@ -14548,2067 +17106,6 @@
     <p:extLst>
       <p:ext uri="{BB962C8B-B14F-4D97-AF65-F5344CB8AC3E}">
         <p14:creationId xmlns:p14="http://schemas.microsoft.com/office/powerpoint/2010/main" val="1007131688"/>
-      </p:ext>
-    </p:extLst>
-  </p:cSld>
-  <p:clrMapOvr>
-    <a:masterClrMapping/>
-  </p:clrMapOvr>
-</p:sld>
-</file>
-
-<file path=ppt/slides/slide7.xml><?xml version="1.0" encoding="utf-8"?>
-<p:sld xmlns:a="http://schemas.openxmlformats.org/drawingml/2006/main" xmlns:r="http://schemas.openxmlformats.org/officeDocument/2006/relationships" xmlns:p="http://schemas.openxmlformats.org/presentationml/2006/main">
-  <p:cSld>
-    <p:spTree>
-      <p:nvGrpSpPr>
-        <p:cNvPr id="1" name="">
-          <a:extLst>
-            <a:ext uri="{FF2B5EF4-FFF2-40B4-BE49-F238E27FC236}">
-              <a16:creationId xmlns:a16="http://schemas.microsoft.com/office/drawing/2014/main" id="{598FCEFC-A825-0545-ADEC-20963105EB8A}"/>
-            </a:ext>
-          </a:extLst>
-        </p:cNvPr>
-        <p:cNvGrpSpPr/>
-        <p:nvPr/>
-      </p:nvGrpSpPr>
-      <p:grpSpPr>
-        <a:xfrm>
-          <a:off x="0" y="0"/>
-          <a:ext cx="0" cy="0"/>
-          <a:chOff x="0" y="0"/>
-          <a:chExt cx="0" cy="0"/>
-        </a:xfrm>
-      </p:grpSpPr>
-      <p:sp>
-        <p:nvSpPr>
-          <p:cNvPr id="5" name="TextBox 4">
-            <a:extLst>
-              <a:ext uri="{FF2B5EF4-FFF2-40B4-BE49-F238E27FC236}">
-                <a16:creationId xmlns:a16="http://schemas.microsoft.com/office/drawing/2014/main" id="{37B5DF61-E4A7-81A0-F452-9A7D2C8B18E1}"/>
-              </a:ext>
-            </a:extLst>
-          </p:cNvPr>
-          <p:cNvSpPr txBox="1"/>
-          <p:nvPr/>
-        </p:nvSpPr>
-        <p:spPr>
-          <a:xfrm>
-            <a:off x="100584" y="1132185"/>
-            <a:ext cx="10561320" cy="1938992"/>
-          </a:xfrm>
-          <a:prstGeom prst="rect">
-            <a:avLst/>
-          </a:prstGeom>
-          <a:noFill/>
-        </p:spPr>
-        <p:txBody>
-          <a:bodyPr wrap="square">
-            <a:spAutoFit/>
-          </a:bodyPr>
-          <a:lstStyle/>
-          <a:p>
-            <a:pPr marL="0" indent="0">
-              <a:buNone/>
-            </a:pPr>
-            <a:r>
-              <a:rPr lang="en-US" sz="2400" dirty="0">
-                <a:solidFill>
-                  <a:schemeClr val="accent6">
-                    <a:lumMod val="60000"/>
-                    <a:lumOff val="40000"/>
-                  </a:schemeClr>
-                </a:solidFill>
-              </a:rPr>
-              <a:t>Transformers consist of </a:t>
-            </a:r>
-            <a:r>
-              <a:rPr lang="en-US" sz="2400" b="1" dirty="0">
-                <a:solidFill>
-                  <a:schemeClr val="accent6">
-                    <a:lumMod val="60000"/>
-                    <a:lumOff val="40000"/>
-                  </a:schemeClr>
-                </a:solidFill>
-              </a:rPr>
-              <a:t>encoder</a:t>
-            </a:r>
-            <a:r>
-              <a:rPr lang="en-US" sz="2400" dirty="0">
-                <a:solidFill>
-                  <a:schemeClr val="accent6">
-                    <a:lumMod val="60000"/>
-                    <a:lumOff val="40000"/>
-                  </a:schemeClr>
-                </a:solidFill>
-              </a:rPr>
-              <a:t> and </a:t>
-            </a:r>
-            <a:r>
-              <a:rPr lang="en-US" sz="2400" b="1" dirty="0">
-                <a:solidFill>
-                  <a:schemeClr val="accent6">
-                    <a:lumMod val="60000"/>
-                    <a:lumOff val="40000"/>
-                  </a:schemeClr>
-                </a:solidFill>
-              </a:rPr>
-              <a:t>decoder</a:t>
-            </a:r>
-            <a:r>
-              <a:rPr lang="en-US" sz="2400" dirty="0">
-                <a:solidFill>
-                  <a:schemeClr val="accent6">
-                    <a:lumMod val="60000"/>
-                    <a:lumOff val="40000"/>
-                  </a:schemeClr>
-                </a:solidFill>
-              </a:rPr>
-              <a:t> stacks. Most models use either:</a:t>
-            </a:r>
-          </a:p>
-          <a:p>
-            <a:pPr marL="0" indent="0">
-              <a:buNone/>
-            </a:pPr>
-            <a:endParaRPr lang="en-US" sz="2400" dirty="0">
-              <a:solidFill>
-                <a:schemeClr val="accent6">
-                  <a:lumMod val="60000"/>
-                  <a:lumOff val="40000"/>
-                </a:schemeClr>
-              </a:solidFill>
-            </a:endParaRPr>
-          </a:p>
-          <a:p>
-            <a:r>
-              <a:rPr lang="en-US" sz="2400" b="1" dirty="0">
-                <a:solidFill>
-                  <a:schemeClr val="accent6">
-                    <a:lumMod val="60000"/>
-                    <a:lumOff val="40000"/>
-                  </a:schemeClr>
-                </a:solidFill>
-              </a:rPr>
-              <a:t>Encoder-only</a:t>
-            </a:r>
-            <a:r>
-              <a:rPr lang="en-US" sz="2400" dirty="0">
-                <a:solidFill>
-                  <a:schemeClr val="accent6">
-                    <a:lumMod val="60000"/>
-                    <a:lumOff val="40000"/>
-                  </a:schemeClr>
-                </a:solidFill>
-              </a:rPr>
-              <a:t> (e.g., BERT – understanding tasks)</a:t>
-            </a:r>
-          </a:p>
-          <a:p>
-            <a:r>
-              <a:rPr lang="en-US" sz="2400" b="1" dirty="0">
-                <a:solidFill>
-                  <a:schemeClr val="accent6">
-                    <a:lumMod val="60000"/>
-                    <a:lumOff val="40000"/>
-                  </a:schemeClr>
-                </a:solidFill>
-              </a:rPr>
-              <a:t>Decoder-only</a:t>
-            </a:r>
-            <a:r>
-              <a:rPr lang="en-US" sz="2400" dirty="0">
-                <a:solidFill>
-                  <a:schemeClr val="accent6">
-                    <a:lumMod val="60000"/>
-                    <a:lumOff val="40000"/>
-                  </a:schemeClr>
-                </a:solidFill>
-              </a:rPr>
-              <a:t> (e.g., GPT – generation tasks)</a:t>
-            </a:r>
-          </a:p>
-          <a:p>
-            <a:r>
-              <a:rPr lang="en-US" sz="2400" b="1" dirty="0">
-                <a:solidFill>
-                  <a:schemeClr val="accent6">
-                    <a:lumMod val="60000"/>
-                    <a:lumOff val="40000"/>
-                  </a:schemeClr>
-                </a:solidFill>
-              </a:rPr>
-              <a:t>Both</a:t>
-            </a:r>
-            <a:r>
-              <a:rPr lang="en-US" sz="2400" dirty="0">
-                <a:solidFill>
-                  <a:schemeClr val="accent6">
-                    <a:lumMod val="60000"/>
-                    <a:lumOff val="40000"/>
-                  </a:schemeClr>
-                </a:solidFill>
-              </a:rPr>
-              <a:t> (e.g., T5 – translation/summarization)</a:t>
-            </a:r>
-          </a:p>
-        </p:txBody>
-      </p:sp>
-      <p:sp>
-        <p:nvSpPr>
-          <p:cNvPr id="7" name="TextBox 6">
-            <a:extLst>
-              <a:ext uri="{FF2B5EF4-FFF2-40B4-BE49-F238E27FC236}">
-                <a16:creationId xmlns:a16="http://schemas.microsoft.com/office/drawing/2014/main" id="{50085F69-2D24-BDB4-5D8B-C5F2C0609A01}"/>
-              </a:ext>
-            </a:extLst>
-          </p:cNvPr>
-          <p:cNvSpPr txBox="1"/>
-          <p:nvPr/>
-        </p:nvSpPr>
-        <p:spPr>
-          <a:xfrm>
-            <a:off x="100584" y="85082"/>
-            <a:ext cx="6190488" cy="461665"/>
-          </a:xfrm>
-          <a:prstGeom prst="rect">
-            <a:avLst/>
-          </a:prstGeom>
-          <a:noFill/>
-        </p:spPr>
-        <p:txBody>
-          <a:bodyPr wrap="square">
-            <a:spAutoFit/>
-          </a:bodyPr>
-          <a:lstStyle/>
-          <a:p>
-            <a:r>
-              <a:rPr lang="en-US" sz="2400" b="1" dirty="0">
-                <a:solidFill>
-                  <a:schemeClr val="accent6">
-                    <a:lumMod val="60000"/>
-                    <a:lumOff val="40000"/>
-                  </a:schemeClr>
-                </a:solidFill>
-              </a:rPr>
-              <a:t>Core Components of a Transformer</a:t>
-            </a:r>
-          </a:p>
-        </p:txBody>
-      </p:sp>
-      <p:sp>
-        <p:nvSpPr>
-          <p:cNvPr id="2" name="Rectangle 1">
-            <a:extLst>
-              <a:ext uri="{FF2B5EF4-FFF2-40B4-BE49-F238E27FC236}">
-                <a16:creationId xmlns:a16="http://schemas.microsoft.com/office/drawing/2014/main" id="{C290403B-4B31-3F17-2251-3238FE37C144}"/>
-              </a:ext>
-            </a:extLst>
-          </p:cNvPr>
-          <p:cNvSpPr/>
-          <p:nvPr/>
-        </p:nvSpPr>
-        <p:spPr>
-          <a:xfrm>
-            <a:off x="2990088" y="3429000"/>
-            <a:ext cx="4197096" cy="1467612"/>
-          </a:xfrm>
-          <a:prstGeom prst="rect">
-            <a:avLst/>
-          </a:prstGeom>
-        </p:spPr>
-        <p:style>
-          <a:lnRef idx="2">
-            <a:schemeClr val="accent1">
-              <a:shade val="15000"/>
-            </a:schemeClr>
-          </a:lnRef>
-          <a:fillRef idx="1">
-            <a:schemeClr val="accent1"/>
-          </a:fillRef>
-          <a:effectRef idx="0">
-            <a:schemeClr val="accent1"/>
-          </a:effectRef>
-          <a:fontRef idx="minor">
-            <a:schemeClr val="lt1"/>
-          </a:fontRef>
-        </p:style>
-        <p:txBody>
-          <a:bodyPr rtlCol="0" anchor="ctr"/>
-          <a:lstStyle/>
-          <a:p>
-            <a:pPr algn="ctr"/>
-            <a:endParaRPr lang="en-US" dirty="0"/>
-          </a:p>
-        </p:txBody>
-      </p:sp>
-      <p:sp>
-        <p:nvSpPr>
-          <p:cNvPr id="3" name="Rectangle 2">
-            <a:extLst>
-              <a:ext uri="{FF2B5EF4-FFF2-40B4-BE49-F238E27FC236}">
-                <a16:creationId xmlns:a16="http://schemas.microsoft.com/office/drawing/2014/main" id="{5F380A36-8080-F9F8-E64A-87702AFB7420}"/>
-              </a:ext>
-            </a:extLst>
-          </p:cNvPr>
-          <p:cNvSpPr/>
-          <p:nvPr/>
-        </p:nvSpPr>
-        <p:spPr>
-          <a:xfrm>
-            <a:off x="3195828" y="3480453"/>
-            <a:ext cx="1618488" cy="722376"/>
-          </a:xfrm>
-          <a:prstGeom prst="rect">
-            <a:avLst/>
-          </a:prstGeom>
-          <a:solidFill>
-            <a:srgbClr val="00B050"/>
-          </a:solidFill>
-        </p:spPr>
-        <p:style>
-          <a:lnRef idx="2">
-            <a:schemeClr val="accent1">
-              <a:shade val="15000"/>
-            </a:schemeClr>
-          </a:lnRef>
-          <a:fillRef idx="1">
-            <a:schemeClr val="accent1"/>
-          </a:fillRef>
-          <a:effectRef idx="0">
-            <a:schemeClr val="accent1"/>
-          </a:effectRef>
-          <a:fontRef idx="minor">
-            <a:schemeClr val="lt1"/>
-          </a:fontRef>
-        </p:style>
-        <p:txBody>
-          <a:bodyPr rtlCol="0" anchor="ctr"/>
-          <a:lstStyle/>
-          <a:p>
-            <a:pPr algn="ctr"/>
-            <a:r>
-              <a:rPr lang="en-US" dirty="0"/>
-              <a:t>Encoder</a:t>
-            </a:r>
-          </a:p>
-          <a:p>
-            <a:pPr algn="ctr"/>
-            <a:r>
-              <a:rPr lang="en-US" dirty="0"/>
-              <a:t>layer</a:t>
-            </a:r>
-          </a:p>
-        </p:txBody>
-      </p:sp>
-      <p:sp>
-        <p:nvSpPr>
-          <p:cNvPr id="4" name="Rectangle 3">
-            <a:extLst>
-              <a:ext uri="{FF2B5EF4-FFF2-40B4-BE49-F238E27FC236}">
-                <a16:creationId xmlns:a16="http://schemas.microsoft.com/office/drawing/2014/main" id="{4470F763-99A2-E532-4166-87DA9B436D69}"/>
-              </a:ext>
-            </a:extLst>
-          </p:cNvPr>
-          <p:cNvSpPr/>
-          <p:nvPr/>
-        </p:nvSpPr>
-        <p:spPr>
-          <a:xfrm>
-            <a:off x="5381244" y="3480453"/>
-            <a:ext cx="1618488" cy="722376"/>
-          </a:xfrm>
-          <a:prstGeom prst="rect">
-            <a:avLst/>
-          </a:prstGeom>
-          <a:solidFill>
-            <a:srgbClr val="00B050"/>
-          </a:solidFill>
-        </p:spPr>
-        <p:style>
-          <a:lnRef idx="2">
-            <a:schemeClr val="accent1">
-              <a:shade val="15000"/>
-            </a:schemeClr>
-          </a:lnRef>
-          <a:fillRef idx="1">
-            <a:schemeClr val="accent1"/>
-          </a:fillRef>
-          <a:effectRef idx="0">
-            <a:schemeClr val="accent1"/>
-          </a:effectRef>
-          <a:fontRef idx="minor">
-            <a:schemeClr val="lt1"/>
-          </a:fontRef>
-        </p:style>
-        <p:txBody>
-          <a:bodyPr rtlCol="0" anchor="ctr"/>
-          <a:lstStyle/>
-          <a:p>
-            <a:pPr algn="ctr"/>
-            <a:r>
-              <a:rPr lang="en-US" dirty="0"/>
-              <a:t>Decoder</a:t>
-            </a:r>
-          </a:p>
-          <a:p>
-            <a:pPr algn="ctr"/>
-            <a:r>
-              <a:rPr lang="en-US" dirty="0"/>
-              <a:t>layer</a:t>
-            </a:r>
-          </a:p>
-        </p:txBody>
-      </p:sp>
-      <p:sp>
-        <p:nvSpPr>
-          <p:cNvPr id="6" name="TextBox 5">
-            <a:extLst>
-              <a:ext uri="{FF2B5EF4-FFF2-40B4-BE49-F238E27FC236}">
-                <a16:creationId xmlns:a16="http://schemas.microsoft.com/office/drawing/2014/main" id="{84896610-09E5-6194-CEAC-259AC6598DE9}"/>
-              </a:ext>
-            </a:extLst>
-          </p:cNvPr>
-          <p:cNvSpPr txBox="1"/>
-          <p:nvPr/>
-        </p:nvSpPr>
-        <p:spPr>
-          <a:xfrm>
-            <a:off x="4498848" y="4527280"/>
-            <a:ext cx="1325619" cy="369332"/>
-          </a:xfrm>
-          <a:prstGeom prst="rect">
-            <a:avLst/>
-          </a:prstGeom>
-          <a:noFill/>
-        </p:spPr>
-        <p:txBody>
-          <a:bodyPr wrap="none" rtlCol="0">
-            <a:spAutoFit/>
-          </a:bodyPr>
-          <a:lstStyle/>
-          <a:p>
-            <a:r>
-              <a:rPr lang="en-US" dirty="0">
-                <a:solidFill>
-                  <a:schemeClr val="accent6">
-                    <a:lumMod val="40000"/>
-                    <a:lumOff val="60000"/>
-                  </a:schemeClr>
-                </a:solidFill>
-              </a:rPr>
-              <a:t>Transformer</a:t>
-            </a:r>
-          </a:p>
-        </p:txBody>
-      </p:sp>
-      <p:sp>
-        <p:nvSpPr>
-          <p:cNvPr id="8" name="Oval 7">
-            <a:extLst>
-              <a:ext uri="{FF2B5EF4-FFF2-40B4-BE49-F238E27FC236}">
-                <a16:creationId xmlns:a16="http://schemas.microsoft.com/office/drawing/2014/main" id="{376D8C4F-76D3-5D8C-FD56-9A39E255F5B7}"/>
-              </a:ext>
-            </a:extLst>
-          </p:cNvPr>
-          <p:cNvSpPr/>
-          <p:nvPr/>
-        </p:nvSpPr>
-        <p:spPr>
-          <a:xfrm>
-            <a:off x="1917454" y="5559552"/>
-            <a:ext cx="2926080" cy="675995"/>
-          </a:xfrm>
-          <a:prstGeom prst="ellipse">
-            <a:avLst/>
-          </a:prstGeom>
-        </p:spPr>
-        <p:style>
-          <a:lnRef idx="2">
-            <a:schemeClr val="accent1">
-              <a:shade val="15000"/>
-            </a:schemeClr>
-          </a:lnRef>
-          <a:fillRef idx="1">
-            <a:schemeClr val="accent1"/>
-          </a:fillRef>
-          <a:effectRef idx="0">
-            <a:schemeClr val="accent1"/>
-          </a:effectRef>
-          <a:fontRef idx="minor">
-            <a:schemeClr val="lt1"/>
-          </a:fontRef>
-        </p:style>
-        <p:txBody>
-          <a:bodyPr rtlCol="0" anchor="ctr"/>
-          <a:lstStyle/>
-          <a:p>
-            <a:pPr algn="ctr"/>
-            <a:r>
-              <a:rPr lang="en-US" dirty="0"/>
-              <a:t>How are you ?</a:t>
-            </a:r>
-          </a:p>
-        </p:txBody>
-      </p:sp>
-      <p:sp>
-        <p:nvSpPr>
-          <p:cNvPr id="9" name="Arrow: Right 8">
-            <a:extLst>
-              <a:ext uri="{FF2B5EF4-FFF2-40B4-BE49-F238E27FC236}">
-                <a16:creationId xmlns:a16="http://schemas.microsoft.com/office/drawing/2014/main" id="{753B7037-F7BA-112C-4BDD-21CD50C04175}"/>
-              </a:ext>
-            </a:extLst>
-          </p:cNvPr>
-          <p:cNvSpPr/>
-          <p:nvPr/>
-        </p:nvSpPr>
-        <p:spPr>
-          <a:xfrm rot="16200000">
-            <a:off x="2892183" y="5043416"/>
-            <a:ext cx="565142" cy="369332"/>
-          </a:xfrm>
-          <a:prstGeom prst="rightArrow">
-            <a:avLst/>
-          </a:prstGeom>
-        </p:spPr>
-        <p:style>
-          <a:lnRef idx="2">
-            <a:schemeClr val="accent1">
-              <a:shade val="15000"/>
-            </a:schemeClr>
-          </a:lnRef>
-          <a:fillRef idx="1">
-            <a:schemeClr val="accent1"/>
-          </a:fillRef>
-          <a:effectRef idx="0">
-            <a:schemeClr val="accent1"/>
-          </a:effectRef>
-          <a:fontRef idx="minor">
-            <a:schemeClr val="lt1"/>
-          </a:fontRef>
-        </p:style>
-        <p:txBody>
-          <a:bodyPr rtlCol="0" anchor="ctr"/>
-          <a:lstStyle/>
-          <a:p>
-            <a:pPr algn="ctr"/>
-            <a:endParaRPr lang="en-US"/>
-          </a:p>
-        </p:txBody>
-      </p:sp>
-      <p:sp>
-        <p:nvSpPr>
-          <p:cNvPr id="10" name="Oval 9">
-            <a:extLst>
-              <a:ext uri="{FF2B5EF4-FFF2-40B4-BE49-F238E27FC236}">
-                <a16:creationId xmlns:a16="http://schemas.microsoft.com/office/drawing/2014/main" id="{B906E69D-F4D1-7AB6-2027-C0DDD2404F1C}"/>
-              </a:ext>
-            </a:extLst>
-          </p:cNvPr>
-          <p:cNvSpPr/>
-          <p:nvPr/>
-        </p:nvSpPr>
-        <p:spPr>
-          <a:xfrm>
-            <a:off x="8060436" y="3526834"/>
-            <a:ext cx="2926080" cy="675995"/>
-          </a:xfrm>
-          <a:prstGeom prst="ellipse">
-            <a:avLst/>
-          </a:prstGeom>
-        </p:spPr>
-        <p:style>
-          <a:lnRef idx="2">
-            <a:schemeClr val="accent1">
-              <a:shade val="15000"/>
-            </a:schemeClr>
-          </a:lnRef>
-          <a:fillRef idx="1">
-            <a:schemeClr val="accent1"/>
-          </a:fillRef>
-          <a:effectRef idx="0">
-            <a:schemeClr val="accent1"/>
-          </a:effectRef>
-          <a:fontRef idx="minor">
-            <a:schemeClr val="lt1"/>
-          </a:fontRef>
-        </p:style>
-        <p:txBody>
-          <a:bodyPr rtlCol="0" anchor="ctr"/>
-          <a:lstStyle/>
-          <a:p>
-            <a:pPr algn="ctr"/>
-            <a:r>
-              <a:rPr lang="en-US" dirty="0"/>
-              <a:t>Como </a:t>
-            </a:r>
-            <a:r>
-              <a:rPr lang="en-US" dirty="0" err="1"/>
-              <a:t>Estas</a:t>
-            </a:r>
-            <a:r>
-              <a:rPr lang="en-US" dirty="0"/>
-              <a:t> ?</a:t>
-            </a:r>
-          </a:p>
-        </p:txBody>
-      </p:sp>
-      <p:sp>
-        <p:nvSpPr>
-          <p:cNvPr id="11" name="Arrow: Right 10">
-            <a:extLst>
-              <a:ext uri="{FF2B5EF4-FFF2-40B4-BE49-F238E27FC236}">
-                <a16:creationId xmlns:a16="http://schemas.microsoft.com/office/drawing/2014/main" id="{0D7414FF-9152-8B33-F341-625082033616}"/>
-              </a:ext>
-            </a:extLst>
-          </p:cNvPr>
-          <p:cNvSpPr/>
-          <p:nvPr/>
-        </p:nvSpPr>
-        <p:spPr>
-          <a:xfrm>
-            <a:off x="7324344" y="3758184"/>
-            <a:ext cx="539496" cy="301752"/>
-          </a:xfrm>
-          <a:prstGeom prst="rightArrow">
-            <a:avLst/>
-          </a:prstGeom>
-        </p:spPr>
-        <p:style>
-          <a:lnRef idx="2">
-            <a:schemeClr val="accent1">
-              <a:shade val="15000"/>
-            </a:schemeClr>
-          </a:lnRef>
-          <a:fillRef idx="1">
-            <a:schemeClr val="accent1"/>
-          </a:fillRef>
-          <a:effectRef idx="0">
-            <a:schemeClr val="accent1"/>
-          </a:effectRef>
-          <a:fontRef idx="minor">
-            <a:schemeClr val="lt1"/>
-          </a:fontRef>
-        </p:style>
-        <p:txBody>
-          <a:bodyPr rtlCol="0" anchor="ctr"/>
-          <a:lstStyle/>
-          <a:p>
-            <a:pPr algn="ctr"/>
-            <a:endParaRPr lang="en-US"/>
-          </a:p>
-        </p:txBody>
-      </p:sp>
-      <p:sp>
-        <p:nvSpPr>
-          <p:cNvPr id="12" name="TextBox 11">
-            <a:extLst>
-              <a:ext uri="{FF2B5EF4-FFF2-40B4-BE49-F238E27FC236}">
-                <a16:creationId xmlns:a16="http://schemas.microsoft.com/office/drawing/2014/main" id="{F4C744E4-A9F1-05DD-DB54-6DE9CFCA0ED6}"/>
-              </a:ext>
-            </a:extLst>
-          </p:cNvPr>
-          <p:cNvSpPr txBox="1"/>
-          <p:nvPr/>
-        </p:nvSpPr>
-        <p:spPr>
-          <a:xfrm>
-            <a:off x="2310094" y="5042022"/>
-            <a:ext cx="679994" cy="369332"/>
-          </a:xfrm>
-          <a:prstGeom prst="rect">
-            <a:avLst/>
-          </a:prstGeom>
-          <a:noFill/>
-        </p:spPr>
-        <p:txBody>
-          <a:bodyPr wrap="none" rtlCol="0">
-            <a:spAutoFit/>
-          </a:bodyPr>
-          <a:lstStyle/>
-          <a:p>
-            <a:r>
-              <a:rPr lang="en-US" dirty="0">
-                <a:solidFill>
-                  <a:schemeClr val="accent6">
-                    <a:lumMod val="40000"/>
-                    <a:lumOff val="60000"/>
-                  </a:schemeClr>
-                </a:solidFill>
-              </a:rPr>
-              <a:t>input</a:t>
-            </a:r>
-          </a:p>
-        </p:txBody>
-      </p:sp>
-      <p:sp>
-        <p:nvSpPr>
-          <p:cNvPr id="13" name="TextBox 12">
-            <a:extLst>
-              <a:ext uri="{FF2B5EF4-FFF2-40B4-BE49-F238E27FC236}">
-                <a16:creationId xmlns:a16="http://schemas.microsoft.com/office/drawing/2014/main" id="{5F74F4E8-C5C0-F78A-EDDE-626AD695A9F5}"/>
-              </a:ext>
-            </a:extLst>
-          </p:cNvPr>
-          <p:cNvSpPr txBox="1"/>
-          <p:nvPr/>
-        </p:nvSpPr>
-        <p:spPr>
-          <a:xfrm>
-            <a:off x="7324344" y="4157948"/>
-            <a:ext cx="825867" cy="369332"/>
-          </a:xfrm>
-          <a:prstGeom prst="rect">
-            <a:avLst/>
-          </a:prstGeom>
-          <a:noFill/>
-        </p:spPr>
-        <p:txBody>
-          <a:bodyPr wrap="none" rtlCol="0">
-            <a:spAutoFit/>
-          </a:bodyPr>
-          <a:lstStyle/>
-          <a:p>
-            <a:r>
-              <a:rPr lang="en-US" dirty="0">
-                <a:solidFill>
-                  <a:schemeClr val="accent6">
-                    <a:lumMod val="40000"/>
-                    <a:lumOff val="60000"/>
-                  </a:schemeClr>
-                </a:solidFill>
-              </a:rPr>
-              <a:t>output</a:t>
-            </a:r>
-          </a:p>
-        </p:txBody>
-      </p:sp>
-      <p:sp>
-        <p:nvSpPr>
-          <p:cNvPr id="15" name="TextBox 14">
-            <a:extLst>
-              <a:ext uri="{FF2B5EF4-FFF2-40B4-BE49-F238E27FC236}">
-                <a16:creationId xmlns:a16="http://schemas.microsoft.com/office/drawing/2014/main" id="{FDA98640-34D9-F544-74EB-41F2816D21DF}"/>
-              </a:ext>
-            </a:extLst>
-          </p:cNvPr>
-          <p:cNvSpPr txBox="1"/>
-          <p:nvPr/>
-        </p:nvSpPr>
-        <p:spPr>
-          <a:xfrm>
-            <a:off x="5523528" y="5482050"/>
-            <a:ext cx="6190488" cy="830997"/>
-          </a:xfrm>
-          <a:prstGeom prst="rect">
-            <a:avLst/>
-          </a:prstGeom>
-          <a:noFill/>
-        </p:spPr>
-        <p:txBody>
-          <a:bodyPr wrap="square">
-            <a:spAutoFit/>
-          </a:bodyPr>
-          <a:lstStyle/>
-          <a:p>
-            <a:r>
-              <a:rPr lang="en-US" sz="2400" b="1" dirty="0">
-                <a:solidFill>
-                  <a:schemeClr val="accent6">
-                    <a:lumMod val="60000"/>
-                    <a:lumOff val="40000"/>
-                  </a:schemeClr>
-                </a:solidFill>
-              </a:rPr>
-              <a:t>Stacking Layers: </a:t>
-            </a:r>
-            <a:r>
-              <a:rPr lang="en-US" sz="2400" dirty="0">
-                <a:solidFill>
-                  <a:schemeClr val="accent6">
-                    <a:lumMod val="60000"/>
-                    <a:lumOff val="40000"/>
-                  </a:schemeClr>
-                </a:solidFill>
-              </a:rPr>
-              <a:t>A typical transformer model stacks </a:t>
-            </a:r>
-            <a:r>
-              <a:rPr lang="en-US" sz="2400" b="1" dirty="0">
-                <a:solidFill>
-                  <a:schemeClr val="accent6">
-                    <a:lumMod val="60000"/>
-                    <a:lumOff val="40000"/>
-                  </a:schemeClr>
-                </a:solidFill>
-              </a:rPr>
-              <a:t>6–96</a:t>
-            </a:r>
-            <a:r>
-              <a:rPr lang="en-US" sz="2400" dirty="0">
-                <a:solidFill>
-                  <a:schemeClr val="accent6">
-                    <a:lumMod val="60000"/>
-                    <a:lumOff val="40000"/>
-                  </a:schemeClr>
-                </a:solidFill>
-              </a:rPr>
-              <a:t> of these encoder or decoder blocks.</a:t>
-            </a:r>
-          </a:p>
-        </p:txBody>
-      </p:sp>
-      <p:sp>
-        <p:nvSpPr>
-          <p:cNvPr id="16" name="Arrow: Right 15">
-            <a:extLst>
-              <a:ext uri="{FF2B5EF4-FFF2-40B4-BE49-F238E27FC236}">
-                <a16:creationId xmlns:a16="http://schemas.microsoft.com/office/drawing/2014/main" id="{64D8A72F-6AE5-6F0E-F710-2D385AF75419}"/>
-              </a:ext>
-            </a:extLst>
-          </p:cNvPr>
-          <p:cNvSpPr/>
-          <p:nvPr/>
-        </p:nvSpPr>
-        <p:spPr>
-          <a:xfrm>
-            <a:off x="4914900" y="3630614"/>
-            <a:ext cx="466344" cy="422053"/>
-          </a:xfrm>
-          <a:prstGeom prst="rightArrow">
-            <a:avLst/>
-          </a:prstGeom>
-          <a:solidFill>
-            <a:srgbClr val="00B050"/>
-          </a:solidFill>
-        </p:spPr>
-        <p:style>
-          <a:lnRef idx="2">
-            <a:schemeClr val="accent1">
-              <a:shade val="15000"/>
-            </a:schemeClr>
-          </a:lnRef>
-          <a:fillRef idx="1">
-            <a:schemeClr val="accent1"/>
-          </a:fillRef>
-          <a:effectRef idx="0">
-            <a:schemeClr val="accent1"/>
-          </a:effectRef>
-          <a:fontRef idx="minor">
-            <a:schemeClr val="lt1"/>
-          </a:fontRef>
-        </p:style>
-        <p:txBody>
-          <a:bodyPr rtlCol="0" anchor="ctr"/>
-          <a:lstStyle/>
-          <a:p>
-            <a:pPr algn="ctr"/>
-            <a:endParaRPr lang="en-US"/>
-          </a:p>
-        </p:txBody>
-      </p:sp>
-    </p:spTree>
-    <p:extLst>
-      <p:ext uri="{BB962C8B-B14F-4D97-AF65-F5344CB8AC3E}">
-        <p14:creationId xmlns:p14="http://schemas.microsoft.com/office/powerpoint/2010/main" val="843416041"/>
-      </p:ext>
-    </p:extLst>
-  </p:cSld>
-  <p:clrMapOvr>
-    <a:masterClrMapping/>
-  </p:clrMapOvr>
-</p:sld>
-</file>
-
-<file path=ppt/slides/slide8.xml><?xml version="1.0" encoding="utf-8"?>
-<p:sld xmlns:a="http://schemas.openxmlformats.org/drawingml/2006/main" xmlns:r="http://schemas.openxmlformats.org/officeDocument/2006/relationships" xmlns:p="http://schemas.openxmlformats.org/presentationml/2006/main">
-  <p:cSld>
-    <p:spTree>
-      <p:nvGrpSpPr>
-        <p:cNvPr id="1" name="">
-          <a:extLst>
-            <a:ext uri="{FF2B5EF4-FFF2-40B4-BE49-F238E27FC236}">
-              <a16:creationId xmlns:a16="http://schemas.microsoft.com/office/drawing/2014/main" id="{22377599-5300-AEB7-B220-C73BA1161EA8}"/>
-            </a:ext>
-          </a:extLst>
-        </p:cNvPr>
-        <p:cNvGrpSpPr/>
-        <p:nvPr/>
-      </p:nvGrpSpPr>
-      <p:grpSpPr>
-        <a:xfrm>
-          <a:off x="0" y="0"/>
-          <a:ext cx="0" cy="0"/>
-          <a:chOff x="0" y="0"/>
-          <a:chExt cx="0" cy="0"/>
-        </a:xfrm>
-      </p:grpSpPr>
-      <p:pic>
-        <p:nvPicPr>
-          <p:cNvPr id="17" name="Picture 16">
-            <a:extLst>
-              <a:ext uri="{FF2B5EF4-FFF2-40B4-BE49-F238E27FC236}">
-                <a16:creationId xmlns:a16="http://schemas.microsoft.com/office/drawing/2014/main" id="{630DD6E3-6504-BF56-95BE-B9F080ECAC98}"/>
-              </a:ext>
-            </a:extLst>
-          </p:cNvPr>
-          <p:cNvPicPr>
-            <a:picLocks noChangeAspect="1"/>
-          </p:cNvPicPr>
-          <p:nvPr/>
-        </p:nvPicPr>
-        <p:blipFill>
-          <a:blip r:embed="rId2"/>
-          <a:stretch>
-            <a:fillRect/>
-          </a:stretch>
-        </p:blipFill>
-        <p:spPr>
-          <a:xfrm>
-            <a:off x="2933525" y="178170"/>
-            <a:ext cx="5157397" cy="6153912"/>
-          </a:xfrm>
-          <a:prstGeom prst="rect">
-            <a:avLst/>
-          </a:prstGeom>
-        </p:spPr>
-      </p:pic>
-      <p:sp>
-        <p:nvSpPr>
-          <p:cNvPr id="18" name="TextBox 17">
-            <a:extLst>
-              <a:ext uri="{FF2B5EF4-FFF2-40B4-BE49-F238E27FC236}">
-                <a16:creationId xmlns:a16="http://schemas.microsoft.com/office/drawing/2014/main" id="{9A2B06B8-FF93-6850-A3D5-E8A6A77EC6FB}"/>
-              </a:ext>
-            </a:extLst>
-          </p:cNvPr>
-          <p:cNvSpPr txBox="1"/>
-          <p:nvPr/>
-        </p:nvSpPr>
-        <p:spPr>
-          <a:xfrm>
-            <a:off x="5512224" y="6488668"/>
-            <a:ext cx="914033" cy="369332"/>
-          </a:xfrm>
-          <a:prstGeom prst="rect">
-            <a:avLst/>
-          </a:prstGeom>
-          <a:noFill/>
-        </p:spPr>
-        <p:txBody>
-          <a:bodyPr wrap="none" rtlCol="0">
-            <a:spAutoFit/>
-          </a:bodyPr>
-          <a:lstStyle/>
-          <a:p>
-            <a:r>
-              <a:rPr lang="en-US" dirty="0">
-                <a:solidFill>
-                  <a:schemeClr val="accent6">
-                    <a:lumMod val="40000"/>
-                    <a:lumOff val="60000"/>
-                  </a:schemeClr>
-                </a:solidFill>
-              </a:rPr>
-              <a:t>Generic</a:t>
-            </a:r>
-          </a:p>
-        </p:txBody>
-      </p:sp>
-      <p:sp>
-        <p:nvSpPr>
-          <p:cNvPr id="19" name="TextBox 18">
-            <a:extLst>
-              <a:ext uri="{FF2B5EF4-FFF2-40B4-BE49-F238E27FC236}">
-                <a16:creationId xmlns:a16="http://schemas.microsoft.com/office/drawing/2014/main" id="{5B240C24-9F58-310A-5F38-73F9E4453D66}"/>
-              </a:ext>
-            </a:extLst>
-          </p:cNvPr>
-          <p:cNvSpPr txBox="1"/>
-          <p:nvPr/>
-        </p:nvSpPr>
-        <p:spPr>
-          <a:xfrm>
-            <a:off x="8647218" y="2424130"/>
-            <a:ext cx="3057102" cy="830997"/>
-          </a:xfrm>
-          <a:prstGeom prst="rect">
-            <a:avLst/>
-          </a:prstGeom>
-          <a:noFill/>
-        </p:spPr>
-        <p:txBody>
-          <a:bodyPr wrap="square" rtlCol="0">
-            <a:spAutoFit/>
-          </a:bodyPr>
-          <a:lstStyle/>
-          <a:p>
-            <a:r>
-              <a:rPr lang="en-US" sz="2400" dirty="0">
-                <a:solidFill>
-                  <a:schemeClr val="accent6">
-                    <a:lumMod val="40000"/>
-                    <a:lumOff val="60000"/>
-                  </a:schemeClr>
-                </a:solidFill>
-              </a:rPr>
-              <a:t>GPT has only the </a:t>
-            </a:r>
-            <a:r>
-              <a:rPr lang="en-US" sz="2400" b="1" dirty="0">
-                <a:solidFill>
-                  <a:schemeClr val="accent6">
-                    <a:lumMod val="40000"/>
-                    <a:lumOff val="60000"/>
-                  </a:schemeClr>
-                </a:solidFill>
-              </a:rPr>
-              <a:t>decoder</a:t>
-            </a:r>
-            <a:r>
-              <a:rPr lang="en-US" sz="2400" dirty="0">
-                <a:solidFill>
-                  <a:schemeClr val="accent6">
-                    <a:lumMod val="40000"/>
-                    <a:lumOff val="60000"/>
-                  </a:schemeClr>
-                </a:solidFill>
-              </a:rPr>
-              <a:t> part</a:t>
-            </a:r>
-            <a:endParaRPr lang="en-US" sz="2400" b="1" dirty="0">
-              <a:solidFill>
-                <a:schemeClr val="accent6">
-                  <a:lumMod val="40000"/>
-                  <a:lumOff val="60000"/>
-                </a:schemeClr>
-              </a:solidFill>
-            </a:endParaRPr>
-          </a:p>
-        </p:txBody>
-      </p:sp>
-      <p:sp>
-        <p:nvSpPr>
-          <p:cNvPr id="3" name="TextBox 2">
-            <a:extLst>
-              <a:ext uri="{FF2B5EF4-FFF2-40B4-BE49-F238E27FC236}">
-                <a16:creationId xmlns:a16="http://schemas.microsoft.com/office/drawing/2014/main" id="{0C8FB693-1081-E053-8781-DF151F067832}"/>
-              </a:ext>
-            </a:extLst>
-          </p:cNvPr>
-          <p:cNvSpPr txBox="1"/>
-          <p:nvPr/>
-        </p:nvSpPr>
-        <p:spPr>
-          <a:xfrm>
-            <a:off x="487680" y="2424129"/>
-            <a:ext cx="3360420" cy="830997"/>
-          </a:xfrm>
-          <a:prstGeom prst="rect">
-            <a:avLst/>
-          </a:prstGeom>
-          <a:noFill/>
-        </p:spPr>
-        <p:txBody>
-          <a:bodyPr wrap="square">
-            <a:spAutoFit/>
-          </a:bodyPr>
-          <a:lstStyle/>
-          <a:p>
-            <a:r>
-              <a:rPr lang="en-US" sz="2400" dirty="0">
-                <a:solidFill>
-                  <a:schemeClr val="accent6">
-                    <a:lumMod val="40000"/>
-                    <a:lumOff val="60000"/>
-                  </a:schemeClr>
-                </a:solidFill>
-              </a:rPr>
-              <a:t>BERT has only the </a:t>
-            </a:r>
-            <a:r>
-              <a:rPr lang="en-US" sz="2400" b="1" dirty="0">
-                <a:solidFill>
-                  <a:schemeClr val="accent6">
-                    <a:lumMod val="40000"/>
-                    <a:lumOff val="60000"/>
-                  </a:schemeClr>
-                </a:solidFill>
-              </a:rPr>
-              <a:t>encoder</a:t>
-            </a:r>
-            <a:r>
-              <a:rPr lang="en-US" sz="2400" dirty="0">
-                <a:solidFill>
-                  <a:schemeClr val="accent6">
-                    <a:lumMod val="40000"/>
-                    <a:lumOff val="60000"/>
-                  </a:schemeClr>
-                </a:solidFill>
-              </a:rPr>
-              <a:t> part</a:t>
-            </a:r>
-          </a:p>
-        </p:txBody>
-      </p:sp>
-    </p:spTree>
-    <p:extLst>
-      <p:ext uri="{BB962C8B-B14F-4D97-AF65-F5344CB8AC3E}">
-        <p14:creationId xmlns:p14="http://schemas.microsoft.com/office/powerpoint/2010/main" val="183077440"/>
-      </p:ext>
-    </p:extLst>
-  </p:cSld>
-  <p:clrMapOvr>
-    <a:masterClrMapping/>
-  </p:clrMapOvr>
-</p:sld>
-</file>
-
-<file path=ppt/slides/slide9.xml><?xml version="1.0" encoding="utf-8"?>
-<p:sld xmlns:a="http://schemas.openxmlformats.org/drawingml/2006/main" xmlns:r="http://schemas.openxmlformats.org/officeDocument/2006/relationships" xmlns:p="http://schemas.openxmlformats.org/presentationml/2006/main">
-  <p:cSld>
-    <p:spTree>
-      <p:nvGrpSpPr>
-        <p:cNvPr id="1" name=""/>
-        <p:cNvGrpSpPr/>
-        <p:nvPr/>
-      </p:nvGrpSpPr>
-      <p:grpSpPr>
-        <a:xfrm>
-          <a:off x="0" y="0"/>
-          <a:ext cx="0" cy="0"/>
-          <a:chOff x="0" y="0"/>
-          <a:chExt cx="0" cy="0"/>
-        </a:xfrm>
-      </p:grpSpPr>
-      <p:sp>
-        <p:nvSpPr>
-          <p:cNvPr id="5" name="TextBox 4">
-            <a:extLst>
-              <a:ext uri="{FF2B5EF4-FFF2-40B4-BE49-F238E27FC236}">
-                <a16:creationId xmlns:a16="http://schemas.microsoft.com/office/drawing/2014/main" id="{A869B156-F629-370C-0410-DC37260227B0}"/>
-              </a:ext>
-            </a:extLst>
-          </p:cNvPr>
-          <p:cNvSpPr txBox="1"/>
-          <p:nvPr/>
-        </p:nvSpPr>
-        <p:spPr>
-          <a:xfrm>
-            <a:off x="100584" y="1166842"/>
-            <a:ext cx="11420856" cy="4524315"/>
-          </a:xfrm>
-          <a:prstGeom prst="rect">
-            <a:avLst/>
-          </a:prstGeom>
-          <a:noFill/>
-        </p:spPr>
-        <p:txBody>
-          <a:bodyPr wrap="square">
-            <a:spAutoFit/>
-          </a:bodyPr>
-          <a:lstStyle/>
-          <a:p>
-            <a:pPr marL="0" indent="0">
-              <a:buNone/>
-            </a:pPr>
-            <a:r>
-              <a:rPr lang="en-US" sz="2400" b="1" dirty="0">
-                <a:solidFill>
-                  <a:schemeClr val="accent6">
-                    <a:lumMod val="60000"/>
-                    <a:lumOff val="40000"/>
-                  </a:schemeClr>
-                </a:solidFill>
-              </a:rPr>
-              <a:t>(Word) Embedding + Positional Encoding</a:t>
-            </a:r>
-          </a:p>
-          <a:p>
-            <a:pPr marL="0" indent="0">
-              <a:buNone/>
-            </a:pPr>
-            <a:endParaRPr lang="en-US" sz="2400" b="1" dirty="0">
-              <a:solidFill>
-                <a:schemeClr val="accent6">
-                  <a:lumMod val="60000"/>
-                  <a:lumOff val="40000"/>
-                </a:schemeClr>
-              </a:solidFill>
-            </a:endParaRPr>
-          </a:p>
-          <a:p>
-            <a:r>
-              <a:rPr lang="en-US" sz="2400" dirty="0">
-                <a:solidFill>
-                  <a:schemeClr val="accent6">
-                    <a:lumMod val="60000"/>
-                    <a:lumOff val="40000"/>
-                  </a:schemeClr>
-                </a:solidFill>
-              </a:rPr>
-              <a:t>Words are converted into </a:t>
-            </a:r>
-            <a:r>
-              <a:rPr lang="en-US" sz="2400" b="1" dirty="0">
-                <a:solidFill>
-                  <a:schemeClr val="accent6">
-                    <a:lumMod val="60000"/>
-                    <a:lumOff val="40000"/>
-                  </a:schemeClr>
-                </a:solidFill>
-              </a:rPr>
-              <a:t>vectors</a:t>
-            </a:r>
-            <a:r>
-              <a:rPr lang="en-US" sz="2400" dirty="0">
-                <a:solidFill>
-                  <a:schemeClr val="accent6">
-                    <a:lumMod val="60000"/>
-                    <a:lumOff val="40000"/>
-                  </a:schemeClr>
-                </a:solidFill>
-              </a:rPr>
-              <a:t> via </a:t>
-            </a:r>
-            <a:r>
-              <a:rPr lang="en-US" sz="2400" b="1" dirty="0">
-                <a:solidFill>
-                  <a:schemeClr val="accent6">
-                    <a:lumMod val="60000"/>
-                    <a:lumOff val="40000"/>
-                  </a:schemeClr>
-                </a:solidFill>
-              </a:rPr>
-              <a:t>embedding layers</a:t>
-            </a:r>
-            <a:r>
-              <a:rPr lang="en-US" sz="2400" dirty="0">
-                <a:solidFill>
-                  <a:schemeClr val="accent6">
-                    <a:lumMod val="60000"/>
-                    <a:lumOff val="40000"/>
-                  </a:schemeClr>
-                </a:solidFill>
-              </a:rPr>
-              <a:t>.</a:t>
-            </a:r>
-          </a:p>
-          <a:p>
-            <a:endParaRPr lang="en-US" sz="2400" dirty="0">
-              <a:solidFill>
-                <a:schemeClr val="accent6">
-                  <a:lumMod val="60000"/>
-                  <a:lumOff val="40000"/>
-                </a:schemeClr>
-              </a:solidFill>
-            </a:endParaRPr>
-          </a:p>
-          <a:p>
-            <a:r>
-              <a:rPr lang="en-US" sz="2400" dirty="0">
-                <a:solidFill>
-                  <a:schemeClr val="accent6">
-                    <a:lumMod val="60000"/>
-                    <a:lumOff val="40000"/>
-                  </a:schemeClr>
-                </a:solidFill>
-              </a:rPr>
-              <a:t>Swim    -&gt;  [  1,     0,    0,     0.7,  ]</a:t>
-            </a:r>
-          </a:p>
-          <a:p>
-            <a:r>
-              <a:rPr lang="en-US" sz="2400" dirty="0">
-                <a:solidFill>
-                  <a:schemeClr val="accent6">
-                    <a:lumMod val="60000"/>
-                    <a:lumOff val="40000"/>
-                  </a:schemeClr>
-                </a:solidFill>
-              </a:rPr>
-              <a:t>Fishing -&gt;  [ 0.9, 0.1, 0.6, 0.03,  ]</a:t>
-            </a:r>
-          </a:p>
-          <a:p>
-            <a:endParaRPr lang="en-US" sz="2400" dirty="0">
-              <a:solidFill>
-                <a:schemeClr val="accent6">
-                  <a:lumMod val="60000"/>
-                  <a:lumOff val="40000"/>
-                </a:schemeClr>
-              </a:solidFill>
-            </a:endParaRPr>
-          </a:p>
-          <a:p>
-            <a:r>
-              <a:rPr lang="en-US" sz="2400" dirty="0">
-                <a:solidFill>
-                  <a:schemeClr val="accent6">
-                    <a:lumMod val="60000"/>
-                    <a:lumOff val="40000"/>
-                  </a:schemeClr>
-                </a:solidFill>
-              </a:rPr>
-              <a:t>We use these vectors to find which words are similar. </a:t>
-            </a:r>
-          </a:p>
-          <a:p>
-            <a:endParaRPr lang="en-US" sz="2400" dirty="0">
-              <a:solidFill>
-                <a:schemeClr val="accent6">
-                  <a:lumMod val="60000"/>
-                  <a:lumOff val="40000"/>
-                </a:schemeClr>
-              </a:solidFill>
-            </a:endParaRPr>
-          </a:p>
-          <a:p>
-            <a:pPr marL="342900" indent="-342900">
-              <a:buFont typeface="Arial" panose="020B0604020202020204" pitchFamily="34" charset="0"/>
-              <a:buChar char="•"/>
-            </a:pPr>
-            <a:r>
-              <a:rPr lang="en-US" sz="2400" dirty="0">
-                <a:solidFill>
-                  <a:schemeClr val="accent6">
-                    <a:lumMod val="60000"/>
-                    <a:lumOff val="40000"/>
-                  </a:schemeClr>
-                </a:solidFill>
-              </a:rPr>
-              <a:t>The values are found through training data</a:t>
-            </a:r>
-          </a:p>
-          <a:p>
-            <a:pPr marL="342900" indent="-342900">
-              <a:buFont typeface="Arial" panose="020B0604020202020204" pitchFamily="34" charset="0"/>
-              <a:buChar char="•"/>
-            </a:pPr>
-            <a:r>
-              <a:rPr lang="en-US" sz="2400" dirty="0">
-                <a:solidFill>
-                  <a:schemeClr val="accent6">
-                    <a:lumMod val="60000"/>
-                    <a:lumOff val="40000"/>
-                  </a:schemeClr>
-                </a:solidFill>
-              </a:rPr>
-              <a:t>Googles Word2Vec uses 300 dimension</a:t>
-            </a:r>
-          </a:p>
-          <a:p>
-            <a:pPr marL="342900" indent="-342900">
-              <a:buFont typeface="Arial" panose="020B0604020202020204" pitchFamily="34" charset="0"/>
-              <a:buChar char="•"/>
-            </a:pPr>
-            <a:r>
-              <a:rPr lang="en-US" sz="2400" dirty="0">
-                <a:solidFill>
-                  <a:schemeClr val="accent6">
-                    <a:lumMod val="60000"/>
-                    <a:lumOff val="40000"/>
-                  </a:schemeClr>
-                </a:solidFill>
-              </a:rPr>
-              <a:t>Other word embedding packages are Glove, etc.</a:t>
-            </a:r>
-          </a:p>
-        </p:txBody>
-      </p:sp>
-      <p:sp>
-        <p:nvSpPr>
-          <p:cNvPr id="7" name="TextBox 6">
-            <a:extLst>
-              <a:ext uri="{FF2B5EF4-FFF2-40B4-BE49-F238E27FC236}">
-                <a16:creationId xmlns:a16="http://schemas.microsoft.com/office/drawing/2014/main" id="{21BECA1F-232B-9C71-0841-A6E1F5E82D8A}"/>
-              </a:ext>
-            </a:extLst>
-          </p:cNvPr>
-          <p:cNvSpPr txBox="1"/>
-          <p:nvPr/>
-        </p:nvSpPr>
-        <p:spPr>
-          <a:xfrm>
-            <a:off x="100584" y="85082"/>
-            <a:ext cx="6190488" cy="461665"/>
-          </a:xfrm>
-          <a:prstGeom prst="rect">
-            <a:avLst/>
-          </a:prstGeom>
-          <a:noFill/>
-        </p:spPr>
-        <p:txBody>
-          <a:bodyPr wrap="square">
-            <a:spAutoFit/>
-          </a:bodyPr>
-          <a:lstStyle/>
-          <a:p>
-            <a:r>
-              <a:rPr lang="en-US" sz="2400" b="1" dirty="0">
-                <a:solidFill>
-                  <a:schemeClr val="accent6">
-                    <a:lumMod val="60000"/>
-                    <a:lumOff val="40000"/>
-                  </a:schemeClr>
-                </a:solidFill>
-              </a:rPr>
-              <a:t>Core Components of a Transformer</a:t>
-            </a:r>
-          </a:p>
-        </p:txBody>
-      </p:sp>
-      <p:graphicFrame>
-        <p:nvGraphicFramePr>
-          <p:cNvPr id="8" name="Table 7">
-            <a:extLst>
-              <a:ext uri="{FF2B5EF4-FFF2-40B4-BE49-F238E27FC236}">
-                <a16:creationId xmlns:a16="http://schemas.microsoft.com/office/drawing/2014/main" id="{5DB3F138-7D3F-11B2-CF8B-1E24CA32BE5D}"/>
-              </a:ext>
-            </a:extLst>
-          </p:cNvPr>
-          <p:cNvGraphicFramePr>
-            <a:graphicFrameLocks noGrp="1"/>
-          </p:cNvGraphicFramePr>
-          <p:nvPr>
-            <p:extLst>
-              <p:ext uri="{D42A27DB-BD31-4B8C-83A1-F6EECF244321}">
-                <p14:modId xmlns:p14="http://schemas.microsoft.com/office/powerpoint/2010/main" val="847480628"/>
-              </p:ext>
-            </p:extLst>
-          </p:nvPr>
-        </p:nvGraphicFramePr>
-        <p:xfrm>
-          <a:off x="6934200" y="2382727"/>
-          <a:ext cx="5157215" cy="2560320"/>
-        </p:xfrm>
-        <a:graphic>
-          <a:graphicData uri="http://schemas.openxmlformats.org/drawingml/2006/table">
-            <a:tbl>
-              <a:tblPr firstRow="1" bandRow="1">
-                <a:tableStyleId>{5C22544A-7EE6-4342-B048-85BDC9FD1C3A}</a:tableStyleId>
-              </a:tblPr>
-              <a:tblGrid>
-                <a:gridCol w="1031443">
-                  <a:extLst>
-                    <a:ext uri="{9D8B030D-6E8A-4147-A177-3AD203B41FA5}">
-                      <a16:colId xmlns:a16="http://schemas.microsoft.com/office/drawing/2014/main" val="2515424243"/>
-                    </a:ext>
-                  </a:extLst>
-                </a:gridCol>
-                <a:gridCol w="1031443">
-                  <a:extLst>
-                    <a:ext uri="{9D8B030D-6E8A-4147-A177-3AD203B41FA5}">
-                      <a16:colId xmlns:a16="http://schemas.microsoft.com/office/drawing/2014/main" val="2020340870"/>
-                    </a:ext>
-                  </a:extLst>
-                </a:gridCol>
-                <a:gridCol w="1031443">
-                  <a:extLst>
-                    <a:ext uri="{9D8B030D-6E8A-4147-A177-3AD203B41FA5}">
-                      <a16:colId xmlns:a16="http://schemas.microsoft.com/office/drawing/2014/main" val="1919491014"/>
-                    </a:ext>
-                  </a:extLst>
-                </a:gridCol>
-                <a:gridCol w="1031443">
-                  <a:extLst>
-                    <a:ext uri="{9D8B030D-6E8A-4147-A177-3AD203B41FA5}">
-                      <a16:colId xmlns:a16="http://schemas.microsoft.com/office/drawing/2014/main" val="1485554102"/>
-                    </a:ext>
-                  </a:extLst>
-                </a:gridCol>
-                <a:gridCol w="1031443">
-                  <a:extLst>
-                    <a:ext uri="{9D8B030D-6E8A-4147-A177-3AD203B41FA5}">
-                      <a16:colId xmlns:a16="http://schemas.microsoft.com/office/drawing/2014/main" val="3968963040"/>
-                    </a:ext>
-                  </a:extLst>
-                </a:gridCol>
-              </a:tblGrid>
-              <a:tr h="364812">
-                <a:tc>
-                  <a:txBody>
-                    <a:bodyPr/>
-                    <a:lstStyle/>
-                    <a:p>
-                      <a:pPr algn="ctr"/>
-                      <a:endParaRPr lang="en-US" dirty="0"/>
-                    </a:p>
-                  </a:txBody>
-                  <a:tcPr/>
-                </a:tc>
-                <a:tc>
-                  <a:txBody>
-                    <a:bodyPr/>
-                    <a:lstStyle/>
-                    <a:p>
-                      <a:pPr algn="ctr"/>
-                      <a:r>
-                        <a:rPr lang="en-US" dirty="0"/>
-                        <a:t>Sea</a:t>
-                      </a:r>
-                    </a:p>
-                  </a:txBody>
-                  <a:tcPr/>
-                </a:tc>
-                <a:tc>
-                  <a:txBody>
-                    <a:bodyPr/>
-                    <a:lstStyle/>
-                    <a:p>
-                      <a:pPr algn="ctr"/>
-                      <a:r>
-                        <a:rPr lang="en-US" dirty="0"/>
-                        <a:t>Air</a:t>
-                      </a:r>
-                    </a:p>
-                  </a:txBody>
-                  <a:tcPr/>
-                </a:tc>
-                <a:tc>
-                  <a:txBody>
-                    <a:bodyPr/>
-                    <a:lstStyle/>
-                    <a:p>
-                      <a:pPr algn="ctr"/>
-                      <a:r>
-                        <a:rPr lang="en-US" dirty="0"/>
-                        <a:t>Land</a:t>
-                      </a:r>
-                    </a:p>
-                  </a:txBody>
-                  <a:tcPr/>
-                </a:tc>
-                <a:tc>
-                  <a:txBody>
-                    <a:bodyPr/>
-                    <a:lstStyle/>
-                    <a:p>
-                      <a:pPr algn="ctr"/>
-                      <a:r>
-                        <a:rPr lang="en-US" dirty="0"/>
-                        <a:t>Love</a:t>
-                      </a:r>
-                    </a:p>
-                  </a:txBody>
-                  <a:tcPr/>
-                </a:tc>
-                <a:extLst>
-                  <a:ext uri="{0D108BD9-81ED-4DB2-BD59-A6C34878D82A}">
-                    <a16:rowId xmlns:a16="http://schemas.microsoft.com/office/drawing/2014/main" val="146901908"/>
-                  </a:ext>
-                </a:extLst>
-              </a:tr>
-              <a:tr h="364812">
-                <a:tc>
-                  <a:txBody>
-                    <a:bodyPr/>
-                    <a:lstStyle/>
-                    <a:p>
-                      <a:pPr algn="ctr"/>
-                      <a:r>
-                        <a:rPr lang="en-US" dirty="0"/>
-                        <a:t>Swim</a:t>
-                      </a:r>
-                    </a:p>
-                  </a:txBody>
-                  <a:tcPr/>
-                </a:tc>
-                <a:tc>
-                  <a:txBody>
-                    <a:bodyPr/>
-                    <a:lstStyle/>
-                    <a:p>
-                      <a:pPr algn="ctr"/>
-                      <a:r>
-                        <a:rPr lang="en-US" b="1" dirty="0"/>
-                        <a:t>1</a:t>
-                      </a:r>
-                    </a:p>
-                  </a:txBody>
-                  <a:tcPr/>
-                </a:tc>
-                <a:tc>
-                  <a:txBody>
-                    <a:bodyPr/>
-                    <a:lstStyle/>
-                    <a:p>
-                      <a:pPr algn="ctr"/>
-                      <a:r>
-                        <a:rPr lang="en-US" dirty="0"/>
-                        <a:t>0</a:t>
-                      </a:r>
-                    </a:p>
-                  </a:txBody>
-                  <a:tcPr/>
-                </a:tc>
-                <a:tc>
-                  <a:txBody>
-                    <a:bodyPr/>
-                    <a:lstStyle/>
-                    <a:p>
-                      <a:pPr algn="ctr"/>
-                      <a:r>
-                        <a:rPr lang="en-US" dirty="0"/>
-                        <a:t>0</a:t>
-                      </a:r>
-                    </a:p>
-                  </a:txBody>
-                  <a:tcPr/>
-                </a:tc>
-                <a:tc>
-                  <a:txBody>
-                    <a:bodyPr/>
-                    <a:lstStyle/>
-                    <a:p>
-                      <a:pPr algn="ctr"/>
-                      <a:r>
-                        <a:rPr lang="en-US" b="1" dirty="0"/>
-                        <a:t>0.7</a:t>
-                      </a:r>
-                    </a:p>
-                  </a:txBody>
-                  <a:tcPr/>
-                </a:tc>
-                <a:extLst>
-                  <a:ext uri="{0D108BD9-81ED-4DB2-BD59-A6C34878D82A}">
-                    <a16:rowId xmlns:a16="http://schemas.microsoft.com/office/drawing/2014/main" val="603757318"/>
-                  </a:ext>
-                </a:extLst>
-              </a:tr>
-              <a:tr h="364812">
-                <a:tc>
-                  <a:txBody>
-                    <a:bodyPr/>
-                    <a:lstStyle/>
-                    <a:p>
-                      <a:pPr algn="ctr"/>
-                      <a:r>
-                        <a:rPr lang="en-US" dirty="0"/>
-                        <a:t>Fly</a:t>
-                      </a:r>
-                    </a:p>
-                  </a:txBody>
-                  <a:tcPr/>
-                </a:tc>
-                <a:tc>
-                  <a:txBody>
-                    <a:bodyPr/>
-                    <a:lstStyle/>
-                    <a:p>
-                      <a:pPr algn="ctr"/>
-                      <a:r>
-                        <a:rPr lang="en-US" dirty="0"/>
-                        <a:t>0.01</a:t>
-                      </a:r>
-                    </a:p>
-                  </a:txBody>
-                  <a:tcPr/>
-                </a:tc>
-                <a:tc>
-                  <a:txBody>
-                    <a:bodyPr/>
-                    <a:lstStyle/>
-                    <a:p>
-                      <a:pPr algn="ctr"/>
-                      <a:r>
-                        <a:rPr lang="en-US" b="1" dirty="0"/>
-                        <a:t>0.9</a:t>
-                      </a:r>
-                    </a:p>
-                  </a:txBody>
-                  <a:tcPr/>
-                </a:tc>
-                <a:tc>
-                  <a:txBody>
-                    <a:bodyPr/>
-                    <a:lstStyle/>
-                    <a:p>
-                      <a:pPr algn="ctr"/>
-                      <a:r>
-                        <a:rPr lang="en-US" dirty="0"/>
-                        <a:t>0.2</a:t>
-                      </a:r>
-                    </a:p>
-                  </a:txBody>
-                  <a:tcPr/>
-                </a:tc>
-                <a:tc>
-                  <a:txBody>
-                    <a:bodyPr/>
-                    <a:lstStyle/>
-                    <a:p>
-                      <a:pPr algn="ctr"/>
-                      <a:r>
-                        <a:rPr lang="en-US" b="1" dirty="0"/>
-                        <a:t>0.8</a:t>
-                      </a:r>
-                    </a:p>
-                  </a:txBody>
-                  <a:tcPr/>
-                </a:tc>
-                <a:extLst>
-                  <a:ext uri="{0D108BD9-81ED-4DB2-BD59-A6C34878D82A}">
-                    <a16:rowId xmlns:a16="http://schemas.microsoft.com/office/drawing/2014/main" val="3329932118"/>
-                  </a:ext>
-                </a:extLst>
-              </a:tr>
-              <a:tr h="364812">
-                <a:tc>
-                  <a:txBody>
-                    <a:bodyPr/>
-                    <a:lstStyle/>
-                    <a:p>
-                      <a:pPr algn="ctr"/>
-                      <a:r>
-                        <a:rPr lang="en-US" dirty="0"/>
-                        <a:t>Walk</a:t>
-                      </a:r>
-                    </a:p>
-                  </a:txBody>
-                  <a:tcPr/>
-                </a:tc>
-                <a:tc>
-                  <a:txBody>
-                    <a:bodyPr/>
-                    <a:lstStyle/>
-                    <a:p>
-                      <a:pPr algn="ctr"/>
-                      <a:r>
-                        <a:rPr lang="en-US" dirty="0"/>
-                        <a:t>0</a:t>
-                      </a:r>
-                    </a:p>
-                  </a:txBody>
-                  <a:tcPr/>
-                </a:tc>
-                <a:tc>
-                  <a:txBody>
-                    <a:bodyPr/>
-                    <a:lstStyle/>
-                    <a:p>
-                      <a:pPr algn="ctr"/>
-                      <a:r>
-                        <a:rPr lang="en-US" dirty="0"/>
-                        <a:t>0</a:t>
-                      </a:r>
-                    </a:p>
-                  </a:txBody>
-                  <a:tcPr/>
-                </a:tc>
-                <a:tc>
-                  <a:txBody>
-                    <a:bodyPr/>
-                    <a:lstStyle/>
-                    <a:p>
-                      <a:pPr algn="ctr"/>
-                      <a:r>
-                        <a:rPr lang="en-US" dirty="0"/>
-                        <a:t>1</a:t>
-                      </a:r>
-                    </a:p>
-                  </a:txBody>
-                  <a:tcPr/>
-                </a:tc>
-                <a:tc>
-                  <a:txBody>
-                    <a:bodyPr/>
-                    <a:lstStyle/>
-                    <a:p>
-                      <a:pPr algn="ctr"/>
-                      <a:endParaRPr lang="en-US" dirty="0"/>
-                    </a:p>
-                  </a:txBody>
-                  <a:tcPr/>
-                </a:tc>
-                <a:extLst>
-                  <a:ext uri="{0D108BD9-81ED-4DB2-BD59-A6C34878D82A}">
-                    <a16:rowId xmlns:a16="http://schemas.microsoft.com/office/drawing/2014/main" val="2111078679"/>
-                  </a:ext>
-                </a:extLst>
-              </a:tr>
-              <a:tr h="364812">
-                <a:tc>
-                  <a:txBody>
-                    <a:bodyPr/>
-                    <a:lstStyle/>
-                    <a:p>
-                      <a:pPr algn="ctr"/>
-                      <a:r>
-                        <a:rPr lang="en-US" dirty="0"/>
-                        <a:t>Stand</a:t>
-                      </a:r>
-                    </a:p>
-                  </a:txBody>
-                  <a:tcPr/>
-                </a:tc>
-                <a:tc>
-                  <a:txBody>
-                    <a:bodyPr/>
-                    <a:lstStyle/>
-                    <a:p>
-                      <a:pPr algn="ctr"/>
-                      <a:r>
-                        <a:rPr lang="en-US" dirty="0"/>
-                        <a:t>0</a:t>
-                      </a:r>
-                    </a:p>
-                  </a:txBody>
-                  <a:tcPr/>
-                </a:tc>
-                <a:tc>
-                  <a:txBody>
-                    <a:bodyPr/>
-                    <a:lstStyle/>
-                    <a:p>
-                      <a:pPr algn="ctr"/>
-                      <a:r>
-                        <a:rPr lang="en-US" dirty="0"/>
-                        <a:t>0</a:t>
-                      </a:r>
-                    </a:p>
-                  </a:txBody>
-                  <a:tcPr/>
-                </a:tc>
-                <a:tc>
-                  <a:txBody>
-                    <a:bodyPr/>
-                    <a:lstStyle/>
-                    <a:p>
-                      <a:pPr algn="ctr"/>
-                      <a:r>
-                        <a:rPr lang="en-US" b="1" dirty="0"/>
-                        <a:t>0.9</a:t>
-                      </a:r>
-                    </a:p>
-                  </a:txBody>
-                  <a:tcPr/>
-                </a:tc>
-                <a:tc>
-                  <a:txBody>
-                    <a:bodyPr/>
-                    <a:lstStyle/>
-                    <a:p>
-                      <a:pPr algn="ctr"/>
-                      <a:r>
-                        <a:rPr lang="en-US" dirty="0"/>
-                        <a:t>0</a:t>
-                      </a:r>
-                    </a:p>
-                  </a:txBody>
-                  <a:tcPr/>
-                </a:tc>
-                <a:extLst>
-                  <a:ext uri="{0D108BD9-81ED-4DB2-BD59-A6C34878D82A}">
-                    <a16:rowId xmlns:a16="http://schemas.microsoft.com/office/drawing/2014/main" val="2975866602"/>
-                  </a:ext>
-                </a:extLst>
-              </a:tr>
-              <a:tr h="364812">
-                <a:tc>
-                  <a:txBody>
-                    <a:bodyPr/>
-                    <a:lstStyle/>
-                    <a:p>
-                      <a:pPr algn="ctr"/>
-                      <a:r>
-                        <a:rPr lang="en-US" dirty="0"/>
-                        <a:t>Studying</a:t>
-                      </a:r>
-                    </a:p>
-                  </a:txBody>
-                  <a:tcPr/>
-                </a:tc>
-                <a:tc>
-                  <a:txBody>
-                    <a:bodyPr/>
-                    <a:lstStyle/>
-                    <a:p>
-                      <a:pPr algn="ctr"/>
-                      <a:r>
-                        <a:rPr lang="en-US" dirty="0"/>
-                        <a:t>0.1</a:t>
-                      </a:r>
-                    </a:p>
-                  </a:txBody>
-                  <a:tcPr/>
-                </a:tc>
-                <a:tc>
-                  <a:txBody>
-                    <a:bodyPr/>
-                    <a:lstStyle/>
-                    <a:p>
-                      <a:pPr algn="ctr"/>
-                      <a:r>
-                        <a:rPr lang="en-US" dirty="0"/>
-                        <a:t>0.4</a:t>
-                      </a:r>
-                    </a:p>
-                  </a:txBody>
-                  <a:tcPr/>
-                </a:tc>
-                <a:tc>
-                  <a:txBody>
-                    <a:bodyPr/>
-                    <a:lstStyle/>
-                    <a:p>
-                      <a:pPr algn="ctr"/>
-                      <a:r>
-                        <a:rPr lang="en-US" dirty="0"/>
-                        <a:t>0.3</a:t>
-                      </a:r>
-                    </a:p>
-                  </a:txBody>
-                  <a:tcPr/>
-                </a:tc>
-                <a:tc>
-                  <a:txBody>
-                    <a:bodyPr/>
-                    <a:lstStyle/>
-                    <a:p>
-                      <a:pPr algn="ctr"/>
-                      <a:r>
-                        <a:rPr lang="en-US" dirty="0"/>
-                        <a:t>-0.01</a:t>
-                      </a:r>
-                    </a:p>
-                  </a:txBody>
-                  <a:tcPr/>
-                </a:tc>
-                <a:extLst>
-                  <a:ext uri="{0D108BD9-81ED-4DB2-BD59-A6C34878D82A}">
-                    <a16:rowId xmlns:a16="http://schemas.microsoft.com/office/drawing/2014/main" val="3683087839"/>
-                  </a:ext>
-                </a:extLst>
-              </a:tr>
-              <a:tr h="364812">
-                <a:tc>
-                  <a:txBody>
-                    <a:bodyPr/>
-                    <a:lstStyle/>
-                    <a:p>
-                      <a:pPr algn="ctr"/>
-                      <a:r>
-                        <a:rPr lang="en-US" dirty="0"/>
-                        <a:t>Fishing</a:t>
-                      </a:r>
-                    </a:p>
-                  </a:txBody>
-                  <a:tcPr/>
-                </a:tc>
-                <a:tc>
-                  <a:txBody>
-                    <a:bodyPr/>
-                    <a:lstStyle/>
-                    <a:p>
-                      <a:pPr algn="ctr"/>
-                      <a:r>
-                        <a:rPr lang="en-US" b="1" dirty="0"/>
-                        <a:t>0.9</a:t>
-                      </a:r>
-                    </a:p>
-                  </a:txBody>
-                  <a:tcPr/>
-                </a:tc>
-                <a:tc>
-                  <a:txBody>
-                    <a:bodyPr/>
-                    <a:lstStyle/>
-                    <a:p>
-                      <a:pPr algn="ctr"/>
-                      <a:r>
-                        <a:rPr lang="en-US" dirty="0"/>
-                        <a:t>0.1</a:t>
-                      </a:r>
-                    </a:p>
-                  </a:txBody>
-                  <a:tcPr/>
-                </a:tc>
-                <a:tc>
-                  <a:txBody>
-                    <a:bodyPr/>
-                    <a:lstStyle/>
-                    <a:p>
-                      <a:pPr algn="ctr"/>
-                      <a:r>
-                        <a:rPr lang="en-US" b="1" dirty="0"/>
-                        <a:t>0.6</a:t>
-                      </a:r>
-                    </a:p>
-                  </a:txBody>
-                  <a:tcPr/>
-                </a:tc>
-                <a:tc>
-                  <a:txBody>
-                    <a:bodyPr/>
-                    <a:lstStyle/>
-                    <a:p>
-                      <a:pPr algn="ctr"/>
-                      <a:r>
-                        <a:rPr lang="en-US" dirty="0"/>
-                        <a:t>0.03</a:t>
-                      </a:r>
-                    </a:p>
-                  </a:txBody>
-                  <a:tcPr/>
-                </a:tc>
-                <a:extLst>
-                  <a:ext uri="{0D108BD9-81ED-4DB2-BD59-A6C34878D82A}">
-                    <a16:rowId xmlns:a16="http://schemas.microsoft.com/office/drawing/2014/main" val="2138655830"/>
-                  </a:ext>
-                </a:extLst>
-              </a:tr>
-            </a:tbl>
-          </a:graphicData>
-        </a:graphic>
-      </p:graphicFrame>
-      <p:sp>
-        <p:nvSpPr>
-          <p:cNvPr id="9" name="TextBox 8">
-            <a:extLst>
-              <a:ext uri="{FF2B5EF4-FFF2-40B4-BE49-F238E27FC236}">
-                <a16:creationId xmlns:a16="http://schemas.microsoft.com/office/drawing/2014/main" id="{78DA7790-6167-B755-AF07-3A19A7906340}"/>
-              </a:ext>
-            </a:extLst>
-          </p:cNvPr>
-          <p:cNvSpPr txBox="1"/>
-          <p:nvPr/>
-        </p:nvSpPr>
-        <p:spPr>
-          <a:xfrm>
-            <a:off x="8575548" y="1543952"/>
-            <a:ext cx="1874520" cy="461665"/>
-          </a:xfrm>
-          <a:prstGeom prst="rect">
-            <a:avLst/>
-          </a:prstGeom>
-          <a:noFill/>
-        </p:spPr>
-        <p:txBody>
-          <a:bodyPr wrap="square" rtlCol="0">
-            <a:spAutoFit/>
-          </a:bodyPr>
-          <a:lstStyle/>
-          <a:p>
-            <a:r>
-              <a:rPr lang="en-US" sz="2400" dirty="0">
-                <a:solidFill>
-                  <a:schemeClr val="accent6">
-                    <a:lumMod val="40000"/>
-                    <a:lumOff val="60000"/>
-                  </a:schemeClr>
-                </a:solidFill>
-              </a:rPr>
-              <a:t>4 Dimension</a:t>
-            </a:r>
-          </a:p>
-        </p:txBody>
-      </p:sp>
-    </p:spTree>
-    <p:extLst>
-      <p:ext uri="{BB962C8B-B14F-4D97-AF65-F5344CB8AC3E}">
-        <p14:creationId xmlns:p14="http://schemas.microsoft.com/office/powerpoint/2010/main" val="2271126536"/>
       </p:ext>
     </p:extLst>
   </p:cSld>

--- a/deep_learning/4_transformers_deploy/modern_NLP_transformers_intro/1_transformers.pptx
+++ b/deep_learning/4_transformers_deploy/modern_NLP_transformers_intro/1_transformers.pptx
@@ -5,41 +5,44 @@
     <p:sldMasterId id="2147483648" r:id="rId1"/>
   </p:sldMasterIdLst>
   <p:notesMasterIdLst>
-    <p:notesMasterId r:id="rId31"/>
+    <p:notesMasterId r:id="rId34"/>
   </p:notesMasterIdLst>
   <p:handoutMasterIdLst>
-    <p:handoutMasterId r:id="rId32"/>
+    <p:handoutMasterId r:id="rId35"/>
   </p:handoutMasterIdLst>
   <p:sldIdLst>
     <p:sldId id="256" r:id="rId2"/>
     <p:sldId id="270" r:id="rId3"/>
     <p:sldId id="289" r:id="rId4"/>
-    <p:sldId id="291" r:id="rId5"/>
-    <p:sldId id="292" r:id="rId6"/>
-    <p:sldId id="290" r:id="rId7"/>
-    <p:sldId id="277" r:id="rId8"/>
-    <p:sldId id="260" r:id="rId9"/>
-    <p:sldId id="262" r:id="rId10"/>
-    <p:sldId id="276" r:id="rId11"/>
-    <p:sldId id="281" r:id="rId12"/>
-    <p:sldId id="263" r:id="rId13"/>
-    <p:sldId id="280" r:id="rId14"/>
-    <p:sldId id="288" r:id="rId15"/>
-    <p:sldId id="287" r:id="rId16"/>
-    <p:sldId id="282" r:id="rId17"/>
-    <p:sldId id="264" r:id="rId18"/>
-    <p:sldId id="279" r:id="rId19"/>
-    <p:sldId id="278" r:id="rId20"/>
-    <p:sldId id="283" r:id="rId21"/>
-    <p:sldId id="284" r:id="rId22"/>
-    <p:sldId id="285" r:id="rId23"/>
-    <p:sldId id="265" r:id="rId24"/>
-    <p:sldId id="267" r:id="rId25"/>
-    <p:sldId id="286" r:id="rId26"/>
-    <p:sldId id="269" r:id="rId27"/>
-    <p:sldId id="261" r:id="rId28"/>
+    <p:sldId id="260" r:id="rId5"/>
+    <p:sldId id="291" r:id="rId6"/>
+    <p:sldId id="292" r:id="rId7"/>
+    <p:sldId id="290" r:id="rId8"/>
+    <p:sldId id="277" r:id="rId9"/>
+    <p:sldId id="295" r:id="rId10"/>
+    <p:sldId id="262" r:id="rId11"/>
+    <p:sldId id="276" r:id="rId12"/>
+    <p:sldId id="294" r:id="rId13"/>
+    <p:sldId id="293" r:id="rId14"/>
+    <p:sldId id="281" r:id="rId15"/>
+    <p:sldId id="263" r:id="rId16"/>
+    <p:sldId id="280" r:id="rId17"/>
+    <p:sldId id="288" r:id="rId18"/>
+    <p:sldId id="287" r:id="rId19"/>
+    <p:sldId id="282" r:id="rId20"/>
+    <p:sldId id="264" r:id="rId21"/>
+    <p:sldId id="279" r:id="rId22"/>
+    <p:sldId id="278" r:id="rId23"/>
+    <p:sldId id="283" r:id="rId24"/>
+    <p:sldId id="284" r:id="rId25"/>
+    <p:sldId id="285" r:id="rId26"/>
+    <p:sldId id="265" r:id="rId27"/>
+    <p:sldId id="269" r:id="rId28"/>
     <p:sldId id="259" r:id="rId29"/>
-    <p:sldId id="275" r:id="rId30"/>
+    <p:sldId id="261" r:id="rId30"/>
+    <p:sldId id="267" r:id="rId31"/>
+    <p:sldId id="286" r:id="rId32"/>
+    <p:sldId id="275" r:id="rId33"/>
   </p:sldIdLst>
   <p:sldSz cx="12192000" cy="6858000"/>
   <p:notesSz cx="6858000" cy="9144000"/>
@@ -243,7 +246,7 @@
           <a:p>
             <a:fld id="{7BAEECA8-D063-486F-AE31-5020270C1449}" type="datetimeFigureOut">
               <a:rPr lang="en-US" smtClean="0"/>
-              <a:t>7/2/2026</a:t>
+              <a:t>7/5/2026</a:t>
             </a:fld>
             <a:endParaRPr lang="en-US"/>
           </a:p>
@@ -358,6 +361,134 @@
           <inkml:channelProperty channel="OE" name="resolution" value="1000" units="1/deg"/>
         </inkml:channelProperties>
       </inkml:inkSource>
+      <inkml:timestamp xml:id="ts0" timeString="2026-07-04T09:19:20.094"/>
+    </inkml:context>
+    <inkml:brush xml:id="br0">
+      <inkml:brushProperty name="width" value="0.1" units="cm"/>
+      <inkml:brushProperty name="height" value="0.1" units="cm"/>
+      <inkml:brushProperty name="color" value="#5B2D90"/>
+    </inkml:brush>
+  </inkml:definitions>
+  <inkml:trace contextRef="#ctx0" brushRef="#br0">25 1 628 0 0,'0'0'-216'0'0,"-24"19"72"0"0</inkml:trace>
+</inkml:ink>
+</file>
+
+<file path=ppt/ink/ink10.xml><?xml version="1.0" encoding="utf-8"?>
+<inkml:ink xmlns:inkml="http://www.w3.org/2003/InkML">
+  <inkml:definitions>
+    <inkml:context xml:id="ctx0">
+      <inkml:inkSource xml:id="inkSrc0">
+        <inkml:traceFormat>
+          <inkml:channel name="X" type="integer" min="-2.14748E9" max="2.14748E9" units="cm"/>
+          <inkml:channel name="Y" type="integer" min="-2.14748E9" max="2.14748E9" units="cm"/>
+          <inkml:channel name="F" type="integer" max="32767" units="dev"/>
+          <inkml:channel name="OA" type="integer" max="360" units="deg"/>
+          <inkml:channel name="OE" type="integer" max="90" units="deg"/>
+        </inkml:traceFormat>
+        <inkml:channelProperties>
+          <inkml:channelProperty channel="X" name="resolution" value="1000" units="1/cm"/>
+          <inkml:channelProperty channel="Y" name="resolution" value="1000" units="1/cm"/>
+          <inkml:channelProperty channel="F" name="resolution" value="0" units="1/dev"/>
+          <inkml:channelProperty channel="OA" name="resolution" value="1000" units="1/deg"/>
+          <inkml:channelProperty channel="OE" name="resolution" value="1000" units="1/deg"/>
+        </inkml:channelProperties>
+      </inkml:inkSource>
+      <inkml:timestamp xml:id="ts0" timeString="2026-07-04T09:22:07.446"/>
+    </inkml:context>
+    <inkml:brush xml:id="br0">
+      <inkml:brushProperty name="width" value="0.1" units="cm"/>
+      <inkml:brushProperty name="height" value="0.1" units="cm"/>
+      <inkml:brushProperty name="color" value="#FFC114"/>
+    </inkml:brush>
+  </inkml:definitions>
+  <inkml:trace contextRef="#ctx0" brushRef="#br0">0 328 5841 0 0,'2'-39'387'0'0,"2"-1"0"0"0,1 1 0 0 0,3 1 1 0 0,0-1-1 0 0,25-64 0 0 0,-20 76 433 0 0,-13 27-807 0 0,1 0 0 0 0,-1-1 0 0 0,0 1 0 0 0,0 0 0 0 0,0 0 0 0 0,1 0 0 0 0,-1-1 0 0 0,0 1 0 0 0,0 0 0 0 0,1 0 0 0 0,-1 0 0 0 0,0 0 1 0 0,0 0-1 0 0,0 0 0 0 0,1 0 0 0 0,-1 0 0 0 0,0-1 0 0 0,1 1 0 0 0,-1 0 0 0 0,0 0 0 0 0,0 0 0 0 0,1 0 0 0 0,-1 0 0 0 0,0 0 0 0 0,0 1 0 0 0,1-1 0 0 0,-1 0 0 0 0,0 0 1 0 0,0 0-1 0 0,1 0 0 0 0,-1 0 0 0 0,0 0 0 0 0,0 0 0 0 0,1 0 0 0 0,-1 1 0 0 0,0-1 0 0 0,0 0 0 0 0,0 0 0 0 0,1 0 0 0 0,-1 0 0 0 0,0 1 0 0 0,0-1 0 0 0,0 0 1 0 0,0 0-1 0 0,1 1 0 0 0,1 4 29 0 0,0 0 1 0 0,0 1-1 0 0,0-1 0 0 0,-1 1 1 0 0,0-1-1 0 0,0 1 1 0 0,0 7-1 0 0,10 73 105 0 0,3 0 0 0 0,4-1-1 0 0,31 88 1 0 0,-47-169-147 0 0,4 17 48 0 0,2 0 0 0 0,0-1-1 0 0,2 0 1 0 0,20 33 0 0 0,-27-48-21 0 0,0-1 0 0 0,1 0-1 0 0,-1 1 1 0 0,1-1 0 0 0,0 0-1 0 0,1-1 1 0 0,-1 1 0 0 0,0-1-1 0 0,1 0 1 0 0,0 0 0 0 0,0 0 0 0 0,0-1-1 0 0,0 1 1 0 0,0-1 0 0 0,0-1-1 0 0,1 1 1 0 0,-1-1 0 0 0,1 0-1 0 0,-1 0 1 0 0,1 0 0 0 0,-1-1 0 0 0,1 0-1 0 0,-1 0 1 0 0,1 0 0 0 0,5-2-1 0 0,33-8 52 0 0,0-3 1 0 0,-1-2-1 0 0,-1-1 0 0 0,-1-3 0 0 0,49-28 0 0 0,15-6 19 0 0,423-171 312 0 0,-527 223-1032 0 0,13-4 1798 0 0</inkml:trace>
+</inkml:ink>
+</file>
+
+<file path=ppt/ink/ink11.xml><?xml version="1.0" encoding="utf-8"?>
+<inkml:ink xmlns:inkml="http://www.w3.org/2003/InkML">
+  <inkml:definitions>
+    <inkml:context xml:id="ctx0">
+      <inkml:inkSource xml:id="inkSrc0">
+        <inkml:traceFormat>
+          <inkml:channel name="X" type="integer" min="-2.14748E9" max="2.14748E9" units="cm"/>
+          <inkml:channel name="Y" type="integer" min="-2.14748E9" max="2.14748E9" units="cm"/>
+          <inkml:channel name="F" type="integer" max="32767" units="dev"/>
+          <inkml:channel name="OA" type="integer" max="360" units="deg"/>
+          <inkml:channel name="OE" type="integer" max="90" units="deg"/>
+        </inkml:traceFormat>
+        <inkml:channelProperties>
+          <inkml:channelProperty channel="X" name="resolution" value="1000" units="1/cm"/>
+          <inkml:channelProperty channel="Y" name="resolution" value="1000" units="1/cm"/>
+          <inkml:channelProperty channel="F" name="resolution" value="0" units="1/dev"/>
+          <inkml:channelProperty channel="OA" name="resolution" value="1000" units="1/deg"/>
+          <inkml:channelProperty channel="OE" name="resolution" value="1000" units="1/deg"/>
+        </inkml:channelProperties>
+      </inkml:inkSource>
+      <inkml:timestamp xml:id="ts0" timeString="2026-07-04T09:22:55.544"/>
+    </inkml:context>
+    <inkml:brush xml:id="br0">
+      <inkml:brushProperty name="width" value="0.1" units="cm"/>
+      <inkml:brushProperty name="height" value="0.1" units="cm"/>
+      <inkml:brushProperty name="color" value="#FFC114"/>
+    </inkml:brush>
+  </inkml:definitions>
+  <inkml:trace contextRef="#ctx0" brushRef="#br0">74 84 2456 0 0,'-74'-17'5165'0'0,"79"15"-5128"0"0,36-10 34 0 0,0 3 0 0 0,73-9 0 0 0,96 4-5 0 0,-84 7-29 0 0,-70 3-33 0 0,1 3 0 0 0,110 12 0 0 0,-137-6-2 0 0,0 1-1 0 0,-1 1 1 0 0,1 2-1 0 0,-1 1 1 0 0,-1 1 0 0 0,0 1-1 0 0,29 18 1 0 0,-42-21 4 0 0,0 0-1 0 0,-2 2 1 0 0,1-1 0 0 0,-1 1 0 0 0,-1 1 0 0 0,23 26 0 0 0,-28-28 16 0 0,-1 1 1 0 0,0-1-1 0 0,0 1 0 0 0,-1 0 0 0 0,0 0 1 0 0,-1 1-1 0 0,0-1 0 0 0,-1 1 1 0 0,0 0-1 0 0,2 20 0 0 0,-4-17 49 0 0,0 0 0 0 0,-1 0 0 0 0,0 0 0 0 0,-1 0 0 0 0,-1 0 0 0 0,0 0 0 0 0,-1 0 0 0 0,-1 0-1 0 0,0 0 1 0 0,-1-1 0 0 0,0 0 0 0 0,-1 0 0 0 0,-1 0 0 0 0,0-1 0 0 0,-1 0 0 0 0,-1-1-1 0 0,0 1 1 0 0,0-2 0 0 0,-1 1 0 0 0,-1-1 0 0 0,-16 13 0 0 0,-64 54 357 0 0,-144 93 1 0 0,-11-27-68 0 0,157-95-137 0 0,25-20 481 0 0,62-28-599 0 0,1 0-61 0 0,0 0 0 0 0,0 0 0 0 0,0 0 0 0 0,0 0 1 0 0,-1 0-1 0 0,1 0 0 0 0,0 0 0 0 0,0 0 0 0 0,-1-1 0 0 0,1 1 1 0 0,0 0-1 0 0,-1-1 0 0 0,1 1 0 0 0,-1-1 0 0 0,-1 1 0 0 0,29-45-8157 0 0,-8 26 5260 0 0</inkml:trace>
+</inkml:ink>
+</file>
+
+<file path=ppt/ink/ink12.xml><?xml version="1.0" encoding="utf-8"?>
+<inkml:ink xmlns:inkml="http://www.w3.org/2003/InkML">
+  <inkml:definitions>
+    <inkml:context xml:id="ctx0">
+      <inkml:inkSource xml:id="inkSrc0">
+        <inkml:traceFormat>
+          <inkml:channel name="X" type="integer" min="-2.14748E9" max="2.14748E9" units="cm"/>
+          <inkml:channel name="Y" type="integer" min="-2.14748E9" max="2.14748E9" units="cm"/>
+          <inkml:channel name="F" type="integer" max="32767" units="dev"/>
+          <inkml:channel name="OA" type="integer" max="360" units="deg"/>
+          <inkml:channel name="OE" type="integer" max="90" units="deg"/>
+        </inkml:traceFormat>
+        <inkml:channelProperties>
+          <inkml:channelProperty channel="X" name="resolution" value="1000" units="1/cm"/>
+          <inkml:channelProperty channel="Y" name="resolution" value="1000" units="1/cm"/>
+          <inkml:channelProperty channel="F" name="resolution" value="0" units="1/dev"/>
+          <inkml:channelProperty channel="OA" name="resolution" value="1000" units="1/deg"/>
+          <inkml:channelProperty channel="OE" name="resolution" value="1000" units="1/deg"/>
+        </inkml:channelProperties>
+      </inkml:inkSource>
+      <inkml:timestamp xml:id="ts0" timeString="2026-07-04T09:22:56.317"/>
+    </inkml:context>
+    <inkml:brush xml:id="br0">
+      <inkml:brushProperty name="width" value="0.1" units="cm"/>
+      <inkml:brushProperty name="height" value="0.1" units="cm"/>
+      <inkml:brushProperty name="color" value="#FFC114"/>
+    </inkml:brush>
+  </inkml:definitions>
+  <inkml:trace contextRef="#ctx0" brushRef="#br0">331 119 6481 0 0,'-5'-47'-244'0'0,"5"39"669"0"0,-1-1-1 0 0,0 0 0 0 0,0 1 1 0 0,-1-1-1 0 0,-4-13 0 0 0,6 21-99 0 0,0 0-311 0 0,0 1-1 0 0,0 0 1 0 0,0 0 0 0 0,0 0-1 0 0,0-1 1 0 0,0 1 0 0 0,0 0-1 0 0,0 0 1 0 0,0-1 0 0 0,-1 1-1 0 0,1 0 1 0 0,0 0 0 0 0,0 0-1 0 0,0-1 1 0 0,0 1 0 0 0,0 0-1 0 0,0 0 1 0 0,-1 0 0 0 0,1 0-1 0 0,0-1 1 0 0,0 1 0 0 0,0 0-1 0 0,0 0 1 0 0,-1 0 0 0 0,1 0-1 0 0,0 0 1 0 0,0-1 0 0 0,-1 1-1 0 0,1 0 1 0 0,0 0 0 0 0,0 0-1 0 0,0 0 1 0 0,-1 0 0 0 0,1 0-1 0 0,0 0 1 0 0,0 0 0 0 0,-1 0-1 0 0,1 0 1 0 0,0 0 0 0 0,0 0-1 0 0,-1 0 1 0 0,1 0 0 0 0,0 0-1 0 0,0 0 1 0 0,0 0 0 0 0,-1 1-1 0 0,1-1 1 0 0,0 0 0 0 0,0 0-1 0 0,-1 0 1 0 0,-12 15 31 0 0,1-1-1 0 0,1 2 1 0 0,0 0 0 0 0,1 0-1 0 0,0 1 1 0 0,-9 24 0 0 0,-26 44 99 0 0,10-31 25 0 0,-66 99 858 0 0,65-93-335 0 0,35-58-631 0 0,1-2-53 0 0,0 0 0 0 0,0 1-1 0 0,-1-1 1 0 0,1 0 0 0 0,0 1 0 0 0,0-1-1 0 0,0 0 1 0 0,0 1 0 0 0,-1-1 0 0 0,1 0-1 0 0,0 1 1 0 0,0-1 0 0 0,0 1 0 0 0,0-1-1 0 0,0 0 1 0 0,0 1 0 0 0,0-1-1 0 0,0 0 1 0 0,0 1 0 0 0,0-1 0 0 0,0 1-1 0 0,1-1 1 0 0,-1 0 0 0 0,0 1 0 0 0,0-1-1 0 0,0 0 1 0 0,0 1 0 0 0,0-1 0 0 0,1 0-1 0 0,-1 1 1 0 0,8 2 11 0 0,-1-1-1 0 0,1 0 1 0 0,-1 0-1 0 0,1-1 1 0 0,0 0 0 0 0,-1 0-1 0 0,1-1 1 0 0,0 0-1 0 0,0-1 1 0 0,-1 1-1 0 0,1-2 1 0 0,13-2 0 0 0,7 0-1 0 0,460-75 178 0 0,-53 7 96 0 0,-416 70-236 0 0,-2 0 109 0 0,0 0 1 0 0,-1-1-1 0 0,0-1 0 0 0,18-6 1 0 0,-32 9-115 0 0,-2 1-92 0 0,1 0 1 0 0,-1 0 0 0 0,1 0-1 0 0,-1 0 1 0 0,0 0 0 0 0,1 0 0 0 0,-1 0-1 0 0,0 0 1 0 0,1 0 0 0 0,-1 0 0 0 0,0 0-1 0 0,1 0 1 0 0,-1 0 0 0 0,0 0-1 0 0,1 0 1 0 0,-1-1 0 0 0,0 1 0 0 0,1 0-1 0 0,-1 0 1 0 0,0 0 0 0 0,1 0-1 0 0,-1-1 1 0 0,0 1 0 0 0,0 0 0 0 0,1 0-1 0 0,-1-1 1 0 0,0 1 0 0 0,0 0-1 0 0,1-1 1 0 0,-1 1 0 0 0,0 0 0 0 0,0 0-1 0 0,0-1 1 0 0,0 1 0 0 0,1 0-1 0 0,-1-1 1 0 0,0 1 0 0 0,0-1 0 0 0,0 1-1 0 0,0 0 1 0 0,0-1 0 0 0,0 1-1 0 0,0 0 1 0 0,0-1 0 0 0,0 1 0 0 0,0 0-1 0 0,0-1 1 0 0,0 1 0 0 0,0 0-1 0 0,0-1 1 0 0,-1 1 0 0 0,1 0 0 0 0,0-1-1 0 0,-7-24-5355 0 0,5 19 3811 0 0,1-6-1535 0 0</inkml:trace>
+</inkml:ink>
+</file>
+
+<file path=ppt/ink/ink13.xml><?xml version="1.0" encoding="utf-8"?>
+<inkml:ink xmlns:inkml="http://www.w3.org/2003/InkML">
+  <inkml:definitions>
+    <inkml:context xml:id="ctx0">
+      <inkml:inkSource xml:id="inkSrc0">
+        <inkml:traceFormat>
+          <inkml:channel name="X" type="integer" min="-2.14748E9" max="2.14748E9" units="cm"/>
+          <inkml:channel name="Y" type="integer" min="-2.14748E9" max="2.14748E9" units="cm"/>
+          <inkml:channel name="F" type="integer" max="32767" units="dev"/>
+          <inkml:channel name="OA" type="integer" max="360" units="deg"/>
+          <inkml:channel name="OE" type="integer" max="90" units="deg"/>
+        </inkml:traceFormat>
+        <inkml:channelProperties>
+          <inkml:channelProperty channel="X" name="resolution" value="1000" units="1/cm"/>
+          <inkml:channelProperty channel="Y" name="resolution" value="1000" units="1/cm"/>
+          <inkml:channelProperty channel="F" name="resolution" value="0" units="1/dev"/>
+          <inkml:channelProperty channel="OA" name="resolution" value="1000" units="1/deg"/>
+          <inkml:channelProperty channel="OE" name="resolution" value="1000" units="1/deg"/>
+        </inkml:channelProperties>
+      </inkml:inkSource>
       <inkml:timestamp xml:id="ts0" timeString="2026-04-22T06:03:51.116"/>
     </inkml:context>
     <inkml:brush xml:id="br0">
@@ -370,7 +501,295 @@
 </inkml:ink>
 </file>
 
-<file path=ppt/ink/ink10.xml><?xml version="1.0" encoding="utf-8"?>
+<file path=ppt/ink/ink14.xml><?xml version="1.0" encoding="utf-8"?>
+<inkml:ink xmlns:inkml="http://www.w3.org/2003/InkML">
+  <inkml:definitions>
+    <inkml:context xml:id="ctx0">
+      <inkml:inkSource xml:id="inkSrc0">
+        <inkml:traceFormat>
+          <inkml:channel name="X" type="integer" min="-2.14748E9" max="2.14748E9" units="cm"/>
+          <inkml:channel name="Y" type="integer" min="-2.14748E9" max="2.14748E9" units="cm"/>
+          <inkml:channel name="F" type="integer" max="32767" units="dev"/>
+          <inkml:channel name="OA" type="integer" max="360" units="deg"/>
+          <inkml:channel name="OE" type="integer" max="90" units="deg"/>
+        </inkml:traceFormat>
+        <inkml:channelProperties>
+          <inkml:channelProperty channel="X" name="resolution" value="1000" units="1/cm"/>
+          <inkml:channelProperty channel="Y" name="resolution" value="1000" units="1/cm"/>
+          <inkml:channelProperty channel="F" name="resolution" value="0" units="1/dev"/>
+          <inkml:channelProperty channel="OA" name="resolution" value="1000" units="1/deg"/>
+          <inkml:channelProperty channel="OE" name="resolution" value="1000" units="1/deg"/>
+        </inkml:channelProperties>
+      </inkml:inkSource>
+      <inkml:timestamp xml:id="ts0" timeString="2026-04-22T06:03:51.835"/>
+    </inkml:context>
+    <inkml:brush xml:id="br0">
+      <inkml:brushProperty name="width" value="0.1" units="cm"/>
+      <inkml:brushProperty name="height" value="0.1" units="cm"/>
+      <inkml:brushProperty name="color" value="#33CCFF"/>
+    </inkml:brush>
+  </inkml:definitions>
+  <inkml:trace contextRef="#ctx0" brushRef="#br0">21 0 6673 0 0,'0'0'-260'0'0,"-14"4"206"0"0,7-1 694 0 0,12-3-51 0 0,655 6-47 0 0,-498 4 511 0 0,-159-10-844 0 0,-1-1-568 0 0,-1 1 14 0 0,0 0 1 0 0,1-1-1 0 0,-1 1 0 0 0,1 0 1 0 0,-1-1-1 0 0,0 0 0 0 0,1 1 1 0 0,-1-1-1 0 0,0 0 0 0 0,0 0 1 0 0,1 1-1 0 0,-1-1 0 0 0,2-2 1 0 0</inkml:trace>
+</inkml:ink>
+</file>
+
+<file path=ppt/ink/ink15.xml><?xml version="1.0" encoding="utf-8"?>
+<inkml:ink xmlns:inkml="http://www.w3.org/2003/InkML">
+  <inkml:definitions>
+    <inkml:context xml:id="ctx0">
+      <inkml:inkSource xml:id="inkSrc0">
+        <inkml:traceFormat>
+          <inkml:channel name="X" type="integer" min="-2.14748E9" max="2.14748E9" units="cm"/>
+          <inkml:channel name="Y" type="integer" min="-2.14748E9" max="2.14748E9" units="cm"/>
+          <inkml:channel name="F" type="integer" max="32767" units="dev"/>
+          <inkml:channel name="OA" type="integer" max="360" units="deg"/>
+          <inkml:channel name="OE" type="integer" max="90" units="deg"/>
+        </inkml:traceFormat>
+        <inkml:channelProperties>
+          <inkml:channelProperty channel="X" name="resolution" value="1000" units="1/cm"/>
+          <inkml:channelProperty channel="Y" name="resolution" value="1000" units="1/cm"/>
+          <inkml:channelProperty channel="F" name="resolution" value="0" units="1/dev"/>
+          <inkml:channelProperty channel="OA" name="resolution" value="1000" units="1/deg"/>
+          <inkml:channelProperty channel="OE" name="resolution" value="1000" units="1/deg"/>
+        </inkml:channelProperties>
+      </inkml:inkSource>
+      <inkml:timestamp xml:id="ts0" timeString="2026-04-22T06:03:53.006"/>
+    </inkml:context>
+    <inkml:brush xml:id="br0">
+      <inkml:brushProperty name="width" value="0.1" units="cm"/>
+      <inkml:brushProperty name="height" value="0.1" units="cm"/>
+      <inkml:brushProperty name="color" value="#33CCFF"/>
+    </inkml:brush>
+  </inkml:definitions>
+  <inkml:trace contextRef="#ctx0" brushRef="#br0">36 65 5913 0 0,'-9'-32'903'0'0,"-7"0"2382"0"0,5 70-3277 0 0,35 255 16 0 0,-9-174-7 0 0,-7-43-962 0 0,7-96-3118 0 0,-6 8 777 0 0</inkml:trace>
+</inkml:ink>
+</file>
+
+<file path=ppt/ink/ink16.xml><?xml version="1.0" encoding="utf-8"?>
+<inkml:ink xmlns:inkml="http://www.w3.org/2003/InkML">
+  <inkml:definitions>
+    <inkml:context xml:id="ctx0">
+      <inkml:inkSource xml:id="inkSrc0">
+        <inkml:traceFormat>
+          <inkml:channel name="X" type="integer" min="-2.14748E9" max="2.14748E9" units="cm"/>
+          <inkml:channel name="Y" type="integer" min="-2.14748E9" max="2.14748E9" units="cm"/>
+          <inkml:channel name="F" type="integer" max="32767" units="dev"/>
+          <inkml:channel name="OA" type="integer" max="360" units="deg"/>
+          <inkml:channel name="OE" type="integer" max="90" units="deg"/>
+        </inkml:traceFormat>
+        <inkml:channelProperties>
+          <inkml:channelProperty channel="X" name="resolution" value="1000" units="1/cm"/>
+          <inkml:channelProperty channel="Y" name="resolution" value="1000" units="1/cm"/>
+          <inkml:channelProperty channel="F" name="resolution" value="0" units="1/dev"/>
+          <inkml:channelProperty channel="OA" name="resolution" value="1000" units="1/deg"/>
+          <inkml:channelProperty channel="OE" name="resolution" value="1000" units="1/deg"/>
+        </inkml:channelProperties>
+      </inkml:inkSource>
+      <inkml:timestamp xml:id="ts0" timeString="2026-04-22T06:03:53.662"/>
+    </inkml:context>
+    <inkml:brush xml:id="br0">
+      <inkml:brushProperty name="width" value="0.1" units="cm"/>
+      <inkml:brushProperty name="height" value="0.1" units="cm"/>
+      <inkml:brushProperty name="color" value="#33CCFF"/>
+    </inkml:brush>
+  </inkml:definitions>
+  <inkml:trace contextRef="#ctx0" brushRef="#br0">0 13 6713 0 0,'0'0'-372'0'0,"42"-9"1322"0"0,273 5-715 0 0,-163 7-180 0 0,158 5 1259 0 0,-306-8-1169 0 0,-3 0-308 0 0,0 0-1 0 0,0 0 1 0 0,0 0 0 0 0,0 0-1 0 0,1-1 1 0 0,-1 1-1 0 0,0 0 1 0 0,0 0 0 0 0,0-1-1 0 0,0 1 1 0 0,0-1 0 0 0,0 1-1 0 0,0-1 1 0 0,0 1-1 0 0,0-1 1 0 0,0 0 0 0 0,0 1-1 0 0,1-2 1 0 0</inkml:trace>
+</inkml:ink>
+</file>
+
+<file path=ppt/ink/ink17.xml><?xml version="1.0" encoding="utf-8"?>
+<inkml:ink xmlns:inkml="http://www.w3.org/2003/InkML">
+  <inkml:definitions>
+    <inkml:context xml:id="ctx0">
+      <inkml:inkSource xml:id="inkSrc0">
+        <inkml:traceFormat>
+          <inkml:channel name="X" type="integer" min="-2.14748E9" max="2.14748E9" units="cm"/>
+          <inkml:channel name="Y" type="integer" min="-2.14748E9" max="2.14748E9" units="cm"/>
+          <inkml:channel name="F" type="integer" max="32767" units="dev"/>
+          <inkml:channel name="OA" type="integer" max="360" units="deg"/>
+          <inkml:channel name="OE" type="integer" max="90" units="deg"/>
+        </inkml:traceFormat>
+        <inkml:channelProperties>
+          <inkml:channelProperty channel="X" name="resolution" value="1000" units="1/cm"/>
+          <inkml:channelProperty channel="Y" name="resolution" value="1000" units="1/cm"/>
+          <inkml:channelProperty channel="F" name="resolution" value="0" units="1/dev"/>
+          <inkml:channelProperty channel="OA" name="resolution" value="1000" units="1/deg"/>
+          <inkml:channelProperty channel="OE" name="resolution" value="1000" units="1/deg"/>
+        </inkml:channelProperties>
+      </inkml:inkSource>
+      <inkml:timestamp xml:id="ts0" timeString="2026-04-22T06:06:58.170"/>
+    </inkml:context>
+    <inkml:brush xml:id="br0">
+      <inkml:brushProperty name="width" value="0.1" units="cm"/>
+      <inkml:brushProperty name="height" value="0.1" units="cm"/>
+      <inkml:brushProperty name="color" value="#33CCFF"/>
+    </inkml:brush>
+  </inkml:definitions>
+  <inkml:trace contextRef="#ctx0" brushRef="#br0">449 128 884 0 0,'-3'0'6286'0'0,"-18"-2"-6285"0"0,15 2 269 0 0,-5-2-152 0 0,3 1-86 0 0,-1 0-1 0 0,1 0 1 0 0,0 1-1 0 0,-1 0 0 0 0,1 0 1 0 0,0 1-1 0 0,-1 0 1 0 0,1 0-1 0 0,0 1 1 0 0,-13 5-1 0 0,17-6-27 0 0,-11 8-4 0 0,1 0 0 0 0,0 1 0 0 0,1 0-1 0 0,0 1 1 0 0,1 1 0 0 0,-20 23 0 0 0,-25 25-1 0 0,55-57 3 0 0,-45 104 4 0 0,39-92-4 0 0,-2 3 9 0 0,0 1-1 0 0,1 0 1 0 0,2 0-1 0 0,-11 35 0 0 0,17-50-4 0 0,-4 18 1 0 0,1 0 0 0 0,0 0 0 0 0,1 0-1 0 0,2 0 1 0 0,0 1 0 0 0,2-1 0 0 0,4 31-1 0 0,-1 26 16 0 0,-5-62-6 0 0,2 0 1 0 0,0 0-1 0 0,1 0 0 0 0,4 17 1 0 0,-4-29-4 0 0,0 1 0 0 0,1 0 0 0 0,0-1 0 0 0,0 1 1 0 0,0-1-1 0 0,1 0 0 0 0,0 0 0 0 0,0 0 0 0 0,0-1 1 0 0,0 1-1 0 0,1-1 0 0 0,0 0 0 0 0,0-1 0 0 0,0 1 0 0 0,0-1 1 0 0,0 0-1 0 0,1 0 0 0 0,0 0 0 0 0,-1-1 0 0 0,1 0 0 0 0,0 0 1 0 0,0 0-1 0 0,11 1 0 0 0,0 0 37 0 0,-1-1-1 0 0,1-1 1 0 0,0 0-1 0 0,0-1 1 0 0,0-1-1 0 0,0-1 1 0 0,22-4-1 0 0,-31 3-6 0 0,-1 0-1 0 0,1-1 0 0 0,-1 1 0 0 0,0-2 0 0 0,0 1 0 0 0,0-1 0 0 0,-1 0 0 0 0,1 0 0 0 0,-1-1 0 0 0,-1 0 1 0 0,10-11-1 0 0,10-10 75 0 0,-16 17-50 0 0,-1 0 0 0 0,-1-1 0 0 0,0 0 0 0 0,-1 0 0 0 0,0-1 1 0 0,0 0-1 0 0,-1 0 0 0 0,-1-1 0 0 0,5-17 0 0 0,-5 17 0 0 0,2-11 39 0 0,-2-1 0 0 0,0 0 0 0 0,1-46 0 0 0,0-1-75 0 0,14-48 16 0 0,-11 65 167 0 0,1-24 297 0 0,-9-18 78 0 0,-2 89-530 0 0,0 0-1 0 0,-1 0 0 0 0,0 0 0 0 0,-1 0 0 0 0,0 1 0 0 0,-7-12 0 0 0,7 12-4 0 0,-5-10 23 0 0,0 1-1 0 0,-1 0 1 0 0,-1 1 0 0 0,0 1 0 0 0,-20-21-1 0 0,30 34-70 0 0,-3-3 29 0 0,-9-6-879 0 0,29-7-6235 0 0,1 11 3874 0 0</inkml:trace>
+</inkml:ink>
+</file>
+
+<file path=ppt/ink/ink18.xml><?xml version="1.0" encoding="utf-8"?>
+<inkml:ink xmlns:inkml="http://www.w3.org/2003/InkML">
+  <inkml:definitions>
+    <inkml:context xml:id="ctx0">
+      <inkml:inkSource xml:id="inkSrc0">
+        <inkml:traceFormat>
+          <inkml:channel name="X" type="integer" min="-2.14748E9" max="2.14748E9" units="cm"/>
+          <inkml:channel name="Y" type="integer" min="-2.14748E9" max="2.14748E9" units="cm"/>
+          <inkml:channel name="F" type="integer" max="32767" units="dev"/>
+          <inkml:channel name="OA" type="integer" max="360" units="deg"/>
+          <inkml:channel name="OE" type="integer" max="90" units="deg"/>
+        </inkml:traceFormat>
+        <inkml:channelProperties>
+          <inkml:channelProperty channel="X" name="resolution" value="1000" units="1/cm"/>
+          <inkml:channelProperty channel="Y" name="resolution" value="1000" units="1/cm"/>
+          <inkml:channelProperty channel="F" name="resolution" value="0" units="1/dev"/>
+          <inkml:channelProperty channel="OA" name="resolution" value="1000" units="1/deg"/>
+          <inkml:channelProperty channel="OE" name="resolution" value="1000" units="1/deg"/>
+        </inkml:channelProperties>
+      </inkml:inkSource>
+      <inkml:timestamp xml:id="ts0" timeString="2026-04-22T06:07:01.352"/>
+    </inkml:context>
+    <inkml:brush xml:id="br0">
+      <inkml:brushProperty name="width" value="0.1" units="cm"/>
+      <inkml:brushProperty name="height" value="0.1" units="cm"/>
+      <inkml:brushProperty name="color" value="#33CCFF"/>
+    </inkml:brush>
+  </inkml:definitions>
+  <inkml:trace contextRef="#ctx0" brushRef="#br0">1129 114 6673 0 0,'0'0'-322'0'0,"-27"-20"-12"0"0,2 11 441 0 0,0 1 1 0 0,-1 1 0 0 0,0 2-1 0 0,-1 0 1 0 0,-35-1 0 0 0,22 2-37 0 0,-5 1 58 0 0,0 1 1 0 0,-74 8-1 0 0,88-4 0 0 0,-11 1-23 0 0,0 2 0 0 0,0 1 0 0 0,0 3 0 0 0,-76 25 0 0 0,79-23-78 0 0,34-10-22 0 0,-25 3 3 0 0,27-4-5 0 0,0 1 0 0 0,-1-1 0 0 0,1 1 0 0 0,-1 0 0 0 0,1 0 0 0 0,0 0 0 0 0,0 1 0 0 0,-6 2 0 0 0,-13 6-1 0 0,13-8-3 0 0,0 1 0 0 0,0 0 0 0 0,0 0 0 0 0,0 1 0 0 0,-10 6 0 0 0,5-1 5 0 0,-2 1-6 0 0,0 0 0 0 0,-24 22 0 0 0,37-29 1 0 0,0 0 0 0 0,0 0-1 0 0,0 1 1 0 0,0-1 0 0 0,1 1-1 0 0,-1 0 1 0 0,1-1 0 0 0,0 1 0 0 0,0 0-1 0 0,0 0 1 0 0,1 1 0 0 0,-1-1-1 0 0,1 0 1 0 0,0 0 0 0 0,0 1-1 0 0,0 7 1 0 0,-10 39-12 0 0,6-32 22 0 0,1 0 0 0 0,1 1-1 0 0,0-1 1 0 0,2 0 0 0 0,0 1 0 0 0,1 0 0 0 0,1-1-1 0 0,1 1 1 0 0,4 21 0 0 0,3 30 47 0 0,-7-44-35 0 0,1 1-1 0 0,13 47 0 0 0,0-35 51 0 0,1 0 0 0 0,33 53 0 0 0,-41-75-60 0 0,-4-13 0 0 0,0 1 0 0 0,-1-1 0 0 0,2 1-1 0 0,-1-2 1 0 0,0 1 0 0 0,1 0-1 0 0,0-1 1 0 0,0 0 0 0 0,0-1-1 0 0,1 1 1 0 0,-1-1 0 0 0,1 0-1 0 0,0-1 1 0 0,10 3 0 0 0,16 8 30 0 0,-16-7-27 0 0,0-1 0 0 0,0-1-1 0 0,0 0 1 0 0,25 1 0 0 0,-1 1 11 0 0,6 0 20 0 0,77 1 1 0 0,-49-4 22 0 0,-13-4-23 0 0,-5 2-37 0 0,120-5 40 0 0,-113 0-18 0 0,90-4 13 0 0,-105 5-49 0 0,35-1 33 0 0,-54 1 13 0 0,0-1-1 0 0,0-1 0 0 0,0-1 0 0 0,-1-2 0 0 0,47-20 0 0 0,5 1-16 0 0,-67 23 39 0 0,0-1 1 0 0,0 0 0 0 0,-1-1 0 0 0,0-1 0 0 0,0 0 0 0 0,-1-1 0 0 0,1 0 0 0 0,-2 0-1 0 0,1-2 1 0 0,10-10 0 0 0,-16 13 7 0 0,1 0 1 0 0,-1 0-1 0 0,-1 0 0 0 0,0-1 0 0 0,0 1 0 0 0,0-1 1 0 0,-1-1-1 0 0,0 1 0 0 0,0-1 0 0 0,-1 1 0 0 0,-1-1 1 0 0,1 0-1 0 0,-1 0 0 0 0,-1 0 0 0 0,1-1 0 0 0,-2 1 1 0 0,1 0-1 0 0,-1 0 0 0 0,-1-1 0 0 0,0 1 0 0 0,0 0 0 0 0,-1 0 1 0 0,0 0-1 0 0,0 0 0 0 0,-1 0 0 0 0,-7-14 0 0 0,-45-99 37 0 0,45 99-92 0 0,4 10-12 0 0,0 0-1 0 0,0 0 1 0 0,-1 1-1 0 0,-1-1 1 0 0,-14-16-1 0 0,-20-33-26 0 0,39 59 23 0 0,-115-117-15 0 0,103 104 2 0 0,-35-24-25 0 0,-18-13 18 0 0,-39-24-29 0 0,98 71 36 0 0,-2 2 1 0 0,1-1-1 0 0,0 1 0 0 0,-1 1 1 0 0,0 0-1 0 0,1 0 0 0 0,-1 1 1 0 0,-1 1-1 0 0,1 0 0 0 0,0 0 0 0 0,0 1 1 0 0,-13 2-1 0 0,8-2 6 0 0,-16 0 0 0 0,-19 1-28 0 0,-87 10 49 0 0,128-9-8 0 0,-47 1 1 0 0,54-3-9 0 0,-32-3-4303 0 0,43-10 1782 0 0,5 2-457 0 0</inkml:trace>
+</inkml:ink>
+</file>
+
+<file path=ppt/ink/ink19.xml><?xml version="1.0" encoding="utf-8"?>
+<inkml:ink xmlns:inkml="http://www.w3.org/2003/InkML">
+  <inkml:definitions>
+    <inkml:context xml:id="ctx0">
+      <inkml:inkSource xml:id="inkSrc0">
+        <inkml:traceFormat>
+          <inkml:channel name="X" type="integer" min="-2.14748E9" max="2.14748E9" units="cm"/>
+          <inkml:channel name="Y" type="integer" min="-2.14748E9" max="2.14748E9" units="cm"/>
+          <inkml:channel name="F" type="integer" max="32767" units="dev"/>
+          <inkml:channel name="OA" type="integer" max="360" units="deg"/>
+          <inkml:channel name="OE" type="integer" max="90" units="deg"/>
+        </inkml:traceFormat>
+        <inkml:channelProperties>
+          <inkml:channelProperty channel="X" name="resolution" value="1000" units="1/cm"/>
+          <inkml:channelProperty channel="Y" name="resolution" value="1000" units="1/cm"/>
+          <inkml:channelProperty channel="F" name="resolution" value="0" units="1/dev"/>
+          <inkml:channelProperty channel="OA" name="resolution" value="1000" units="1/deg"/>
+          <inkml:channelProperty channel="OE" name="resolution" value="1000" units="1/deg"/>
+        </inkml:channelProperties>
+      </inkml:inkSource>
+      <inkml:timestamp xml:id="ts0" timeString="2026-04-22T02:17:32.058"/>
+    </inkml:context>
+    <inkml:brush xml:id="br0">
+      <inkml:brushProperty name="width" value="0.05" units="cm"/>
+      <inkml:brushProperty name="height" value="0.05" units="cm"/>
+      <inkml:brushProperty name="color" value="#33CCFF"/>
+    </inkml:brush>
+  </inkml:definitions>
+  <inkml:trace contextRef="#ctx0" brushRef="#br0">1 534 5925 0 0,'0'0'1818'0'0,"3"-22"-1521"0"0,4 5-235 0 0,0 0 1 0 0,1 0-1 0 0,0 1 1 0 0,2 0-1 0 0,21-29 0 0 0,70-67-54 0 0,-95 105-10 0 0,31-29-10 0 0,2 2 0 0 0,1 2 1 0 0,58-36-1 0 0,-67 52-4 0 0,0 1 1 0 0,1 1 0 0 0,0 1-1 0 0,1 2 1 0 0,43-8 0 0 0,-67 17 0 0 0,0 0 0 0 0,0 1 0 0 0,0 0 1 0 0,0 1-1 0 0,0 0 0 0 0,0 0 0 0 0,0 1 1 0 0,0 0-1 0 0,0 0 0 0 0,-1 1 0 0 0,1 0 1 0 0,0 1-1 0 0,14 6 0 0 0,-14-4 1 0 0,0 1 0 0 0,0 0 0 0 0,0 1 0 0 0,-1 0 0 0 0,14 13-1 0 0,11 11 14 0 0,36 25-52 0 0,-53-39 45 0 0,-1 0 1 0 0,-1 1 0 0 0,-1 0-1 0 0,0 1 1 0 0,12 26 0 0 0,-3-11-5 0 0,-12-20 13 0 0,0 0 1 0 0,-1 2-1 0 0,-1-1 0 0 0,0 1 0 0 0,8 24 0 0 0,-15-36-1 0 0,0 1 0 0 0,1-1 0 0 0,0 0-1 0 0,-1 0 1 0 0,1 0 0 0 0,1 0 0 0 0,2 5 0 0 0,3 3 0 0 0,-1 0 1 0 0,-1 1-1 0 0,0 0 0 0 0,4 13 1 0 0,6 16 1969 0 0,-62-51-1755 0 0,0-3 1 0 0,0-2-1 0 0,-69-31 0 0 0,59 21-135 0 0,54 23-75 0 0,-6-3 34 0 0,30 20-607 0 0,-6-7 559 0 0,1 0 0 0 0,-1-1 0 0 0,22 7 1 0 0,66 29 27 0 0,-40-18 124 0 0,-62-25-56 0 0,-1-1-77 0 0,0 0-1 0 0,0 0 1 0 0,0 0 0 0 0,0 0 0 0 0,0-1 0 0 0,0 1 0 0 0,0 0 0 0 0,0 0 0 0 0,0-1 0 0 0,0 1 0 0 0,0-1 0 0 0,-1 1 0 0 0,1-1 0 0 0,0 1 0 0 0,0-1 0 0 0,0 1 0 0 0,-1-1-1 0 0,1 0 1 0 0,0 1 0 0 0,-1-1 0 0 0,1 0 0 0 0,-1 0 0 0 0,1 0 0 0 0,-1 1 0 0 0,1-1 0 0 0,-1 0 0 0 0,1 0 0 0 0,-1 0 0 0 0,1-1 0 0 0,6-21 2 0 0,0 1 1 0 0,2 0 0 0 0,1 1 0 0 0,1-1-1 0 0,0 2 1 0 0,20-27 0 0 0,-9 8-2 0 0,-21 37-19 0 0,12-23 44 0 0,-12 17-6279 0 0,-15-1 3428 0 0</inkml:trace>
+</inkml:ink>
+</file>
+
+<file path=ppt/ink/ink2.xml><?xml version="1.0" encoding="utf-8"?>
+<inkml:ink xmlns:inkml="http://www.w3.org/2003/InkML">
+  <inkml:definitions>
+    <inkml:context xml:id="ctx0">
+      <inkml:inkSource xml:id="inkSrc0">
+        <inkml:traceFormat>
+          <inkml:channel name="X" type="integer" min="-2.14748E9" max="2.14748E9" units="cm"/>
+          <inkml:channel name="Y" type="integer" min="-2.14748E9" max="2.14748E9" units="cm"/>
+          <inkml:channel name="F" type="integer" max="32767" units="dev"/>
+          <inkml:channel name="OA" type="integer" max="360" units="deg"/>
+          <inkml:channel name="OE" type="integer" max="90" units="deg"/>
+        </inkml:traceFormat>
+        <inkml:channelProperties>
+          <inkml:channelProperty channel="X" name="resolution" value="1000" units="1/cm"/>
+          <inkml:channelProperty channel="Y" name="resolution" value="1000" units="1/cm"/>
+          <inkml:channelProperty channel="F" name="resolution" value="0" units="1/dev"/>
+          <inkml:channelProperty channel="OA" name="resolution" value="1000" units="1/deg"/>
+          <inkml:channelProperty channel="OE" name="resolution" value="1000" units="1/deg"/>
+        </inkml:channelProperties>
+      </inkml:inkSource>
+      <inkml:timestamp xml:id="ts0" timeString="2026-07-04T09:19:25.234"/>
+    </inkml:context>
+    <inkml:brush xml:id="br0">
+      <inkml:brushProperty name="width" value="0.1" units="cm"/>
+      <inkml:brushProperty name="height" value="0.1" units="cm"/>
+      <inkml:brushProperty name="color" value="#FFC114"/>
+    </inkml:brush>
+  </inkml:definitions>
+  <inkml:trace contextRef="#ctx0" brushRef="#br0">207 161 5685 0 0,'-47'-33'1524'0'0,"29"21"-990"0"0,1 0-1 0 0,0-2 1 0 0,1 0 0 0 0,0 0 0 0 0,-14-19 0 0 0,26 30-412 0 0,1 0 1 0 0,-1 0-1 0 0,1 0 0 0 0,-1 0 1 0 0,0 1-1 0 0,0-1 1 0 0,0 1-1 0 0,-7-2 1 0 0,9 3-75 0 0,0 0 186 0 0,2 4-229 0 0,1 1-1 0 0,0-1 0 0 0,0 1 0 0 0,1-1 0 0 0,-1 0 0 0 0,1 0 0 0 0,-1 0 1 0 0,1 1-1 0 0,0-2 0 0 0,0 1 0 0 0,0 0 0 0 0,1 0 0 0 0,3 3 1 0 0,41 38-3 0 0,-34-33 2 0 0,521 407 76 0 0,31-45 5 0 0,-530-350-83 0 0,761 468 190 0 0,-777-479-160 0 0,39 20 553 0 0,-56-31-105 0 0,0-5-566 0 0,-1-3-240 0 0,0 0 0 0 0,0 0 0 0 0,0 0 0 0 0,-1 0 0 0 0,0 0 0 0 0,0 0 0 0 0,-1 1 0 0 0,0-1 0 0 0,-3-11 0 0 0,-20-70-4730 0 0,20 75 4418 0 0,-12-32-1783 0 0</inkml:trace>
+</inkml:ink>
+</file>
+
+<file path=ppt/ink/ink20.xml><?xml version="1.0" encoding="utf-8"?>
+<inkml:ink xmlns:inkml="http://www.w3.org/2003/InkML">
+  <inkml:definitions>
+    <inkml:context xml:id="ctx0">
+      <inkml:inkSource xml:id="inkSrc0">
+        <inkml:traceFormat>
+          <inkml:channel name="X" type="integer" min="-2.14748E9" max="2.14748E9" units="cm"/>
+          <inkml:channel name="Y" type="integer" min="-2.14748E9" max="2.14748E9" units="cm"/>
+          <inkml:channel name="F" type="integer" max="32767" units="dev"/>
+          <inkml:channel name="OA" type="integer" max="360" units="deg"/>
+          <inkml:channel name="OE" type="integer" max="90" units="deg"/>
+        </inkml:traceFormat>
+        <inkml:channelProperties>
+          <inkml:channelProperty channel="X" name="resolution" value="1000" units="1/cm"/>
+          <inkml:channelProperty channel="Y" name="resolution" value="1000" units="1/cm"/>
+          <inkml:channelProperty channel="F" name="resolution" value="0" units="1/dev"/>
+          <inkml:channelProperty channel="OA" name="resolution" value="1000" units="1/deg"/>
+          <inkml:channelProperty channel="OE" name="resolution" value="1000" units="1/deg"/>
+        </inkml:channelProperties>
+      </inkml:inkSource>
+      <inkml:timestamp xml:id="ts0" timeString="2026-04-22T02:17:36.568"/>
+    </inkml:context>
+    <inkml:brush xml:id="br0">
+      <inkml:brushProperty name="width" value="0.05" units="cm"/>
+      <inkml:brushProperty name="height" value="0.05" units="cm"/>
+      <inkml:brushProperty name="color" value="#33CCFF"/>
+    </inkml:brush>
+  </inkml:definitions>
+  <inkml:trace contextRef="#ctx0" brushRef="#br0">0 1155 5989 0 0,'0'0'-442'0'0,"14"-34"42"0"0,-12 17 587 0 0,1 1 0 0 0,0-1 0 0 0,2 1 1 0 0,-1 0-1 0 0,2 0 0 0 0,0 0 0 0 0,16-26 0 0 0,10-30 324 0 0,39-80 363 0 0,-56 122-805 0 0,1 2 1 0 0,1 0-1 0 0,22-28 0 0 0,5-7-12 0 0,-17 21-49 0 0,2 1 0 0 0,2 1 0 0 0,2 1-1 0 0,2 2 1 0 0,1 1 0 0 0,1 2 0 0 0,2 2 0 0 0,48-31 0 0 0,-38 33-22 0 0,2 2 1 0 0,1 2-1 0 0,79-27 0 0 0,-115 47 7 0 0,0 2 0 0 0,-1 0-1 0 0,1 1 1 0 0,30-3-1 0 0,4 1-1 0 0,67-2-47 0 0,-95 7 47 0 0,0 1-1 0 0,0 1 1 0 0,0 1 0 0 0,0 0 0 0 0,0 2-1 0 0,36 13 1 0 0,-14-5 6 0 0,-19-7 11 0 0,-3 0-21 0 0,0 0 0 0 0,0 2 0 0 0,36 17 0 0 0,-31-11 2 0 0,-1 0 1 0 0,0 2-1 0 0,41 33 1 0 0,-44-25-10 0 0,-1 2 0 0 0,18 28 0 0 0,-39-53 20 0 0,18 25 5 0 0,0 1-1 0 0,23 48 1 0 0,-28-42-21 0 0,17 68 0 0 0,-31-100 15 0 0,15 136 40 0 0,39 86-19 0 0,-45-180-23 0 0,-5-22 5 0 0,1-1-1 0 0,1 0 1 0 0,0 0-1 0 0,11 22 0 0 0,-16-39 6 0 0,2 7-9 0 0,26 60 11 0 0,-29-68-17 0 0,10 18-7 0 0,-5-16 12 0 0,-3-4 7 0 0,1 19-4 0 0,-1-12 4 0 0,0-2 191 0 0,8 15-461 0 0,-10-15 2997 0 0,-212-162-1833 0 0,145 102-764 0 0,48 38-535 0 0,16 15 283 0 0,5 4 45 0 0,29 28 41 0 0,6 5-17 0 0,0-3 61 0 0,1-2-1 0 0,2-1 1 0 0,64 35 0 0 0,-81-50 65 0 0,-21-13-29 0 0,-2 0-12 0 0,1-1 1 0 0,-1 0 0 0 0,1 1-1 0 0,-1-1 1 0 0,1 0 0 0 0,-1 0-1 0 0,1 1 1 0 0,-1-1 0 0 0,1 0-1 0 0,-1 0 1 0 0,1 1 0 0 0,-1-1-1 0 0,1 0 1 0 0,0 0 0 0 0,-1 0-1 0 0,1 0 1 0 0,-1 0 0 0 0,1 0-1 0 0,-1 0 1 0 0,1 0 0 0 0,0 0-1 0 0,-1 0 1 0 0,1-1 0 0 0,0 1-1 0 0,2-3 4 0 0,0 1-1 0 0,0-1 0 0 0,0 0 1 0 0,0 0-1 0 0,0-1 1 0 0,-1 1-1 0 0,0 0 0 0 0,1-1 1 0 0,-1 0-1 0 0,0 1 0 0 0,1-5 1 0 0,18-56 164 0 0,2-2-98 0 0,-10 41-203 0 0,-1-1 0 0 0,10-33 0 0 0,-22 58 18 0 0,8-39-4057 0 0,1 20 47 0 0,1 8 1547 0 0</inkml:trace>
+</inkml:ink>
+</file>
+
+<file path=ppt/ink/ink21.xml><?xml version="1.0" encoding="utf-8"?>
+<inkml:ink xmlns:inkml="http://www.w3.org/2003/InkML">
+  <inkml:definitions>
+    <inkml:context xml:id="ctx0">
+      <inkml:inkSource xml:id="inkSrc0">
+        <inkml:traceFormat>
+          <inkml:channel name="X" type="integer" min="-2.14748E9" max="2.14748E9" units="cm"/>
+          <inkml:channel name="Y" type="integer" min="-2.14748E9" max="2.14748E9" units="cm"/>
+          <inkml:channel name="F" type="integer" max="32767" units="dev"/>
+          <inkml:channel name="OA" type="integer" max="360" units="deg"/>
+          <inkml:channel name="OE" type="integer" max="90" units="deg"/>
+        </inkml:traceFormat>
+        <inkml:channelProperties>
+          <inkml:channelProperty channel="X" name="resolution" value="1000" units="1/cm"/>
+          <inkml:channelProperty channel="Y" name="resolution" value="1000" units="1/cm"/>
+          <inkml:channelProperty channel="F" name="resolution" value="0" units="1/dev"/>
+          <inkml:channelProperty channel="OA" name="resolution" value="1000" units="1/deg"/>
+          <inkml:channelProperty channel="OE" name="resolution" value="1000" units="1/deg"/>
+        </inkml:channelProperties>
+      </inkml:inkSource>
+      <inkml:timestamp xml:id="ts0" timeString="2026-04-22T02:17:40.252"/>
+    </inkml:context>
+    <inkml:brush xml:id="br0">
+      <inkml:brushProperty name="width" value="0.05" units="cm"/>
+      <inkml:brushProperty name="height" value="0.05" units="cm"/>
+      <inkml:brushProperty name="color" value="#33CCFF"/>
+    </inkml:brush>
+  </inkml:definitions>
+  <inkml:trace contextRef="#ctx0" brushRef="#br0">0 1629 5721 0 0,'0'0'596'0'0,"3"-5"-488"0"0,43-91 474 0 0,41-118 0 0 0,65-137-185 0 0,-75 185-50 0 0,-50 111-321 0 0,2 1 1 0 0,3 1-1 0 0,2 1 0 0 0,2 2 1 0 0,3 2-1 0 0,1 2 1 0 0,3 1-1 0 0,1 2 0 0 0,71-52 1 0 0,-66 57-39 0 0,3 3 0 0 0,0 2 0 0 0,110-51 0 0 0,-112 67-19 0 0,1 3 0 0 0,0 1 1 0 0,74-7-1 0 0,-114 19 24 0 0,13 0-2 0 0,9 3-4 0 0,17 3-3 0 0,-1 1-1 0 0,1 3 0 0 0,-2 2 0 0 0,1 2 1 0 0,71 30-1 0 0,-50-13 18 0 0,-1 3 0 0 0,123 81 0 0 0,-152-86-6 0 0,0 1 0 0 0,-2 1 0 0 0,-2 3 0 0 0,0 1 0 0 0,35 44-1 0 0,-55-59 10 0 0,1 0-1 0 0,1-2 0 0 0,38 29 1 0 0,-31-26-3 0 0,34 34 0 0 0,-24-15-6 0 0,-1 2 0 0 0,-3 1 0 0 0,31 54 0 0 0,7 6-2 0 0,-18-29 11 0 0,41 70-23 0 0,12 45 45 0 0,-37-81-22 0 0,-59-93 0 0 0,0-1 1 0 0,1-1-1 0 0,18 21 0 0 0,-15-18 9 0 0,0 0 0 0 0,14 24-1 0 0,-17-22-11 0 0,1-1 0 0 0,1 1 1 0 0,24 27-1 0 0,-19-23 24 0 0,11 15-36 0 0,-27-35 12 0 0,6 8-31 0 0,-6-9 51 0 0,0 0 1 0 0,0 0 0 0 0,0 0 0 0 0,1 0 0 0 0,-1 0 0 0 0,0 0 0 0 0,0 0 0 0 0,0 1 0 0 0,0-1 0 0 0,0 0 0 0 0,0 0 0 0 0,0 0 0 0 0,0 0 0 0 0,0 0 0 0 0,0 0-1 0 0,0 1 1 0 0,0-1 0 0 0,1 0 0 0 0,-1 0 0 0 0,0 0 0 0 0,0 0 0 0 0,0 0 0 0 0,0 1 0 0 0,0-1 0 0 0,0 0 0 0 0,0 0 0 0 0,-1 0 0 0 0,1 0 0 0 0,0 1 0 0 0,0-1-1 0 0,0 0 1 0 0,0 0 0 0 0,0 0 0 0 0,0 0 0 0 0,0 0 0 0 0,0 0 0 0 0,0 1 0 0 0,0-1 0 0 0,0 0 0 0 0,0 0 0 0 0,-1 0 0 0 0,1 0 0 0 0,0 0 0 0 0,0 0-1 0 0,0 0 1 0 0,0 0 0 0 0,0 1 0 0 0,0-1 0 0 0,0 0 0 0 0,-1 0 0 0 0,1 0 0 0 0,0 0 0 0 0,0 0 0 0 0,0 0 0 0 0,0 0 0 0 0,0 0 0 0 0,-1 0 0 0 0,1 0 0 0 0,0 0-1 0 0,0 0 1 0 0,0 0 0 0 0,0 0 0 0 0,0 0 0 0 0,-1 0 0 0 0,1 0 0 0 0,0 0 0 0 0,0 0 0 0 0,-44-21 122 0 0,1-1-1 0 0,1-2 1 0 0,2-2 0 0 0,-60-49 0 0 0,19 9-84 0 0,80 65-56 0 0,-1 0 0 0 0,-5-4-7 0 0,-7-4-138 0 0,24 18-143 0 0,9 6 288 0 0,24 20-17 0 0,88 54 0 0 0,-85-60 5 0 0,17 6 21 0 0,-62-34 22 0 0,16-1 364 0 0,-13-4-379 0 0,0 0-1 0 0,1 0 1 0 0,-2-1 0 0 0,1 1-1 0 0,-1-1 1 0 0,1 0 0 0 0,-1 0-1 0 0,0 0 1 0 0,-1 0 0 0 0,3-7-1 0 0,19-66 77 0 0,-3 8-15 0 0,-14 51-81 0 0,-1 0 0 0 0,-1-1 0 0 0,4-31 0 0 0,-9 50-12 0 0,0-36-3845 0 0,0 31 1456 0 0</inkml:trace>
+</inkml:ink>
+</file>
+
+<file path=ppt/ink/ink22.xml><?xml version="1.0" encoding="utf-8"?>
 <inkml:ink xmlns:inkml="http://www.w3.org/2003/InkML">
   <inkml:definitions>
     <inkml:context xml:id="ctx0">
@@ -402,7 +821,7 @@
 </inkml:ink>
 </file>
 
-<file path=ppt/ink/ink11.xml><?xml version="1.0" encoding="utf-8"?>
+<file path=ppt/ink/ink23.xml><?xml version="1.0" encoding="utf-8"?>
 <inkml:ink xmlns:inkml="http://www.w3.org/2003/InkML">
   <inkml:definitions>
     <inkml:context xml:id="ctx0">
@@ -434,7 +853,7 @@
 </inkml:ink>
 </file>
 
-<file path=ppt/ink/ink12.xml><?xml version="1.0" encoding="utf-8"?>
+<file path=ppt/ink/ink24.xml><?xml version="1.0" encoding="utf-8"?>
 <inkml:ink xmlns:inkml="http://www.w3.org/2003/InkML">
   <inkml:definitions>
     <inkml:context xml:id="ctx0">
@@ -466,7 +885,7 @@
 </inkml:ink>
 </file>
 
-<file path=ppt/ink/ink13.xml><?xml version="1.0" encoding="utf-8"?>
+<file path=ppt/ink/ink25.xml><?xml version="1.0" encoding="utf-8"?>
 <inkml:ink xmlns:inkml="http://www.w3.org/2003/InkML">
   <inkml:definitions>
     <inkml:context xml:id="ctx0">
@@ -498,7 +917,7 @@
 </inkml:ink>
 </file>
 
-<file path=ppt/ink/ink14.xml><?xml version="1.0" encoding="utf-8"?>
+<file path=ppt/ink/ink26.xml><?xml version="1.0" encoding="utf-8"?>
 <inkml:ink xmlns:inkml="http://www.w3.org/2003/InkML">
   <inkml:definitions>
     <inkml:context xml:id="ctx0">
@@ -530,7 +949,7 @@
 </inkml:ink>
 </file>
 
-<file path=ppt/ink/ink15.xml><?xml version="1.0" encoding="utf-8"?>
+<file path=ppt/ink/ink27.xml><?xml version="1.0" encoding="utf-8"?>
 <inkml:ink xmlns:inkml="http://www.w3.org/2003/InkML">
   <inkml:definitions>
     <inkml:context xml:id="ctx0">
@@ -562,7 +981,7 @@
 </inkml:ink>
 </file>
 
-<file path=ppt/ink/ink16.xml><?xml version="1.0" encoding="utf-8"?>
+<file path=ppt/ink/ink28.xml><?xml version="1.0" encoding="utf-8"?>
 <inkml:ink xmlns:inkml="http://www.w3.org/2003/InkML">
   <inkml:definitions>
     <inkml:context xml:id="ctx0">
@@ -594,7 +1013,7 @@
 </inkml:ink>
 </file>
 
-<file path=ppt/ink/ink17.xml><?xml version="1.0" encoding="utf-8"?>
+<file path=ppt/ink/ink29.xml><?xml version="1.0" encoding="utf-8"?>
 <inkml:ink xmlns:inkml="http://www.w3.org/2003/InkML">
   <inkml:definitions>
     <inkml:context xml:id="ctx0">
@@ -626,7 +1045,39 @@
 </inkml:ink>
 </file>
 
-<file path=ppt/ink/ink18.xml><?xml version="1.0" encoding="utf-8"?>
+<file path=ppt/ink/ink3.xml><?xml version="1.0" encoding="utf-8"?>
+<inkml:ink xmlns:inkml="http://www.w3.org/2003/InkML">
+  <inkml:definitions>
+    <inkml:context xml:id="ctx0">
+      <inkml:inkSource xml:id="inkSrc0">
+        <inkml:traceFormat>
+          <inkml:channel name="X" type="integer" min="-2.14748E9" max="2.14748E9" units="cm"/>
+          <inkml:channel name="Y" type="integer" min="-2.14748E9" max="2.14748E9" units="cm"/>
+          <inkml:channel name="F" type="integer" max="32767" units="dev"/>
+          <inkml:channel name="OA" type="integer" max="360" units="deg"/>
+          <inkml:channel name="OE" type="integer" max="90" units="deg"/>
+        </inkml:traceFormat>
+        <inkml:channelProperties>
+          <inkml:channelProperty channel="X" name="resolution" value="1000" units="1/cm"/>
+          <inkml:channelProperty channel="Y" name="resolution" value="1000" units="1/cm"/>
+          <inkml:channelProperty channel="F" name="resolution" value="0" units="1/dev"/>
+          <inkml:channelProperty channel="OA" name="resolution" value="1000" units="1/deg"/>
+          <inkml:channelProperty channel="OE" name="resolution" value="1000" units="1/deg"/>
+        </inkml:channelProperties>
+      </inkml:inkSource>
+      <inkml:timestamp xml:id="ts0" timeString="2026-07-04T09:19:25.767"/>
+    </inkml:context>
+    <inkml:brush xml:id="br0">
+      <inkml:brushProperty name="width" value="0.1" units="cm"/>
+      <inkml:brushProperty name="height" value="0.1" units="cm"/>
+      <inkml:brushProperty name="color" value="#FFC114"/>
+    </inkml:brush>
+  </inkml:definitions>
+  <inkml:trace contextRef="#ctx0" brushRef="#br0">2489 80 6413 0 0,'0'-3'35'0'0,"1"1"0"0"0,0-1 1 0 0,-1 0-1 0 0,0 1 1 0 0,1-1-1 0 0,-1 0 1 0 0,0 1-1 0 0,-1-1 1 0 0,1 0-1 0 0,0 0 1 0 0,-1 1-1 0 0,0-1 0 0 0,1 1 1 0 0,-1-1-1 0 0,0 0 1 0 0,0 1-1 0 0,0 0 1 0 0,-1-1-1 0 0,1 1 1 0 0,-1 0-1 0 0,1-1 1 0 0,-1 1-1 0 0,-2-2 0 0 0,0 1 14 0 0,1 1 0 0 0,-1 0-1 0 0,0 1 1 0 0,1-1-1 0 0,-1 1 1 0 0,0-1-1 0 0,0 1 1 0 0,0 0-1 0 0,0 1 1 0 0,0-1-1 0 0,0 1 1 0 0,0 0-1 0 0,0 0 1 0 0,0 0 0 0 0,-6 1-1 0 0,-3 0-17 0 0,0 2 0 0 0,0 0 0 0 0,1 0 0 0 0,-1 1 0 0 0,1 0 0 0 0,0 1 0 0 0,-14 8 0 0 0,-76 51 62 0 0,81-49-69 0 0,-287 227 184 0 0,20 26 8 0 0,173-158-116 0 0,-473 418 338 0 0,-147 142 597 0 0,617-549-189 0 0,103-110-959 0 0,18-23-2068 0 0,20-24-1867 0 0,-2 3 998 0 0</inkml:trace>
+</inkml:ink>
+</file>
+
+<file path=ppt/ink/ink30.xml><?xml version="1.0" encoding="utf-8"?>
 <inkml:ink xmlns:inkml="http://www.w3.org/2003/InkML">
   <inkml:definitions>
     <inkml:context xml:id="ctx0">
@@ -658,7 +1109,7 @@
 </inkml:ink>
 </file>
 
-<file path=ppt/ink/ink19.xml><?xml version="1.0" encoding="utf-8"?>
+<file path=ppt/ink/ink31.xml><?xml version="1.0" encoding="utf-8"?>
 <inkml:ink xmlns:inkml="http://www.w3.org/2003/InkML">
   <inkml:definitions>
     <inkml:context xml:id="ctx0">
@@ -690,39 +1141,7 @@
 </inkml:ink>
 </file>
 
-<file path=ppt/ink/ink2.xml><?xml version="1.0" encoding="utf-8"?>
-<inkml:ink xmlns:inkml="http://www.w3.org/2003/InkML">
-  <inkml:definitions>
-    <inkml:context xml:id="ctx0">
-      <inkml:inkSource xml:id="inkSrc0">
-        <inkml:traceFormat>
-          <inkml:channel name="X" type="integer" min="-2.14748E9" max="2.14748E9" units="cm"/>
-          <inkml:channel name="Y" type="integer" min="-2.14748E9" max="2.14748E9" units="cm"/>
-          <inkml:channel name="F" type="integer" max="32767" units="dev"/>
-          <inkml:channel name="OA" type="integer" max="360" units="deg"/>
-          <inkml:channel name="OE" type="integer" max="90" units="deg"/>
-        </inkml:traceFormat>
-        <inkml:channelProperties>
-          <inkml:channelProperty channel="X" name="resolution" value="1000" units="1/cm"/>
-          <inkml:channelProperty channel="Y" name="resolution" value="1000" units="1/cm"/>
-          <inkml:channelProperty channel="F" name="resolution" value="0" units="1/dev"/>
-          <inkml:channelProperty channel="OA" name="resolution" value="1000" units="1/deg"/>
-          <inkml:channelProperty channel="OE" name="resolution" value="1000" units="1/deg"/>
-        </inkml:channelProperties>
-      </inkml:inkSource>
-      <inkml:timestamp xml:id="ts0" timeString="2026-04-22T06:03:51.835"/>
-    </inkml:context>
-    <inkml:brush xml:id="br0">
-      <inkml:brushProperty name="width" value="0.1" units="cm"/>
-      <inkml:brushProperty name="height" value="0.1" units="cm"/>
-      <inkml:brushProperty name="color" value="#33CCFF"/>
-    </inkml:brush>
-  </inkml:definitions>
-  <inkml:trace contextRef="#ctx0" brushRef="#br0">21 0 6673 0 0,'0'0'-260'0'0,"-14"4"206"0"0,7-1 694 0 0,12-3-51 0 0,655 6-47 0 0,-498 4 511 0 0,-159-10-844 0 0,-1-1-568 0 0,-1 1 14 0 0,0 0 1 0 0,1-1-1 0 0,-1 1 0 0 0,1 0 1 0 0,-1-1-1 0 0,0 0 0 0 0,1 1 1 0 0,-1-1-1 0 0,0 0 0 0 0,0 0 1 0 0,1 1-1 0 0,-1-1 0 0 0,2-2 1 0 0</inkml:trace>
-</inkml:ink>
-</file>
-
-<file path=ppt/ink/ink20.xml><?xml version="1.0" encoding="utf-8"?>
+<file path=ppt/ink/ink32.xml><?xml version="1.0" encoding="utf-8"?>
 <inkml:ink xmlns:inkml="http://www.w3.org/2003/InkML">
   <inkml:definitions>
     <inkml:context xml:id="ctx0">
@@ -754,7 +1173,7 @@
 </inkml:ink>
 </file>
 
-<file path=ppt/ink/ink21.xml><?xml version="1.0" encoding="utf-8"?>
+<file path=ppt/ink/ink33.xml><?xml version="1.0" encoding="utf-8"?>
 <inkml:ink xmlns:inkml="http://www.w3.org/2003/InkML">
   <inkml:definitions>
     <inkml:context xml:id="ctx0">
@@ -786,7 +1205,7 @@
 </inkml:ink>
 </file>
 
-<file path=ppt/ink/ink22.xml><?xml version="1.0" encoding="utf-8"?>
+<file path=ppt/ink/ink34.xml><?xml version="1.0" encoding="utf-8"?>
 <inkml:ink xmlns:inkml="http://www.w3.org/2003/InkML">
   <inkml:definitions>
     <inkml:context xml:id="ctx0">
@@ -818,7 +1237,7 @@
 </inkml:ink>
 </file>
 
-<file path=ppt/ink/ink23.xml><?xml version="1.0" encoding="utf-8"?>
+<file path=ppt/ink/ink35.xml><?xml version="1.0" encoding="utf-8"?>
 <inkml:ink xmlns:inkml="http://www.w3.org/2003/InkML">
   <inkml:definitions>
     <inkml:context xml:id="ctx0">
@@ -850,7 +1269,7 @@
 </inkml:ink>
 </file>
 
-<file path=ppt/ink/ink24.xml><?xml version="1.0" encoding="utf-8"?>
+<file path=ppt/ink/ink36.xml><?xml version="1.0" encoding="utf-8"?>
 <inkml:ink xmlns:inkml="http://www.w3.org/2003/InkML">
   <inkml:definitions>
     <inkml:context xml:id="ctx0">
@@ -882,7 +1301,7 @@
 </inkml:ink>
 </file>
 
-<file path=ppt/ink/ink25.xml><?xml version="1.0" encoding="utf-8"?>
+<file path=ppt/ink/ink37.xml><?xml version="1.0" encoding="utf-8"?>
 <inkml:ink xmlns:inkml="http://www.w3.org/2003/InkML">
   <inkml:definitions>
     <inkml:context xml:id="ctx0">
@@ -914,7 +1333,7 @@
 </inkml:ink>
 </file>
 
-<file path=ppt/ink/ink26.xml><?xml version="1.0" encoding="utf-8"?>
+<file path=ppt/ink/ink38.xml><?xml version="1.0" encoding="utf-8"?>
 <inkml:ink xmlns:inkml="http://www.w3.org/2003/InkML">
   <inkml:definitions>
     <inkml:context xml:id="ctx0">
@@ -946,7 +1365,7 @@
 </inkml:ink>
 </file>
 
-<file path=ppt/ink/ink27.xml><?xml version="1.0" encoding="utf-8"?>
+<file path=ppt/ink/ink39.xml><?xml version="1.0" encoding="utf-8"?>
 <inkml:ink xmlns:inkml="http://www.w3.org/2003/InkML">
   <inkml:definitions>
     <inkml:context xml:id="ctx0">
@@ -978,7 +1397,39 @@
 </inkml:ink>
 </file>
 
-<file path=ppt/ink/ink28.xml><?xml version="1.0" encoding="utf-8"?>
+<file path=ppt/ink/ink4.xml><?xml version="1.0" encoding="utf-8"?>
+<inkml:ink xmlns:inkml="http://www.w3.org/2003/InkML">
+  <inkml:definitions>
+    <inkml:context xml:id="ctx0">
+      <inkml:inkSource xml:id="inkSrc0">
+        <inkml:traceFormat>
+          <inkml:channel name="X" type="integer" min="-2.14748E9" max="2.14748E9" units="cm"/>
+          <inkml:channel name="Y" type="integer" min="-2.14748E9" max="2.14748E9" units="cm"/>
+          <inkml:channel name="F" type="integer" max="32767" units="dev"/>
+          <inkml:channel name="OA" type="integer" max="360" units="deg"/>
+          <inkml:channel name="OE" type="integer" max="90" units="deg"/>
+        </inkml:traceFormat>
+        <inkml:channelProperties>
+          <inkml:channelProperty channel="X" name="resolution" value="1000" units="1/cm"/>
+          <inkml:channelProperty channel="Y" name="resolution" value="1000" units="1/cm"/>
+          <inkml:channelProperty channel="F" name="resolution" value="0" units="1/dev"/>
+          <inkml:channelProperty channel="OA" name="resolution" value="1000" units="1/deg"/>
+          <inkml:channelProperty channel="OE" name="resolution" value="1000" units="1/deg"/>
+        </inkml:channelProperties>
+      </inkml:inkSource>
+      <inkml:timestamp xml:id="ts0" timeString="2026-07-04T09:20:10.647"/>
+    </inkml:context>
+    <inkml:brush xml:id="br0">
+      <inkml:brushProperty name="width" value="0.1" units="cm"/>
+      <inkml:brushProperty name="height" value="0.1" units="cm"/>
+      <inkml:brushProperty name="color" value="#FFC114"/>
+    </inkml:brush>
+  </inkml:definitions>
+  <inkml:trace contextRef="#ctx0" brushRef="#br0">1639 34 2792 0 0,'0'0'1285'0'0,"6"-3"-1236"0"0,20-5 74 0 0,0 2 0 0 0,0 0 1 0 0,1 2-1 0 0,-1 0 1 0 0,1 2-1 0 0,0 1 0 0 0,43 4 1 0 0,-1 4 209 0 0,126 29 1 0 0,-21 15-76 0 0,-151-41-220 0 0,0 0-1 0 0,0 1 1 0 0,-1 2 0 0 0,0 0 0 0 0,21 17 0 0 0,-37-23-22 0 0,0-1 0 0 0,0 1 0 0 0,-1 0 0 0 0,1 1-1 0 0,-2-1 1 0 0,1 1 0 0 0,-1 0 0 0 0,0 0 0 0 0,-1 0 0 0 0,0 1 0 0 0,0-1 0 0 0,-1 1 0 0 0,0 0 0 0 0,0-1 0 0 0,-1 1 0 0 0,0 0 0 0 0,-1 0 0 0 0,-1 18 0 0 0,-1 5 32 0 0,-2 1-1 0 0,-1-1 1 0 0,-16 58-1 0 0,-3-13 11 0 0,-3 0 1 0 0,-4-3-1 0 0,-2 0 0 0 0,-4-2 1 0 0,-3-2-1 0 0,-77 103 1 0 0,84-133 2 0 0,-2-2 1 0 0,-2-2-1 0 0,-1-1 0 0 0,-2-2 1 0 0,-45 30-1 0 0,1-10 99 0 0,-147 69 0 0 0,12-22 42 0 0,-144 71-51 0 0,273-123-126 0 0,-161 114-1 0 0,163-93 4 0 0,-113 115-1 0 0,152-132-4 0 0,2 2 0 0 0,3 2-1 0 0,-52 85 1 0 0,53-71 32 0 0,-51 65 0 0 0,48-78 1456 0 0,45-80-6437 0 0,2 9 1684 0 0</inkml:trace>
+</inkml:ink>
+</file>
+
+<file path=ppt/ink/ink40.xml><?xml version="1.0" encoding="utf-8"?>
 <inkml:ink xmlns:inkml="http://www.w3.org/2003/InkML">
   <inkml:definitions>
     <inkml:context xml:id="ctx0">
@@ -1010,7 +1461,7 @@
 </inkml:ink>
 </file>
 
-<file path=ppt/ink/ink29.xml><?xml version="1.0" encoding="utf-8"?>
+<file path=ppt/ink/ink41.xml><?xml version="1.0" encoding="utf-8"?>
 <inkml:ink xmlns:inkml="http://www.w3.org/2003/InkML">
   <inkml:definitions>
     <inkml:context xml:id="ctx0">
@@ -1042,39 +1493,7 @@
 </inkml:ink>
 </file>
 
-<file path=ppt/ink/ink3.xml><?xml version="1.0" encoding="utf-8"?>
-<inkml:ink xmlns:inkml="http://www.w3.org/2003/InkML">
-  <inkml:definitions>
-    <inkml:context xml:id="ctx0">
-      <inkml:inkSource xml:id="inkSrc0">
-        <inkml:traceFormat>
-          <inkml:channel name="X" type="integer" min="-2.14748E9" max="2.14748E9" units="cm"/>
-          <inkml:channel name="Y" type="integer" min="-2.14748E9" max="2.14748E9" units="cm"/>
-          <inkml:channel name="F" type="integer" max="32767" units="dev"/>
-          <inkml:channel name="OA" type="integer" max="360" units="deg"/>
-          <inkml:channel name="OE" type="integer" max="90" units="deg"/>
-        </inkml:traceFormat>
-        <inkml:channelProperties>
-          <inkml:channelProperty channel="X" name="resolution" value="1000" units="1/cm"/>
-          <inkml:channelProperty channel="Y" name="resolution" value="1000" units="1/cm"/>
-          <inkml:channelProperty channel="F" name="resolution" value="0" units="1/dev"/>
-          <inkml:channelProperty channel="OA" name="resolution" value="1000" units="1/deg"/>
-          <inkml:channelProperty channel="OE" name="resolution" value="1000" units="1/deg"/>
-        </inkml:channelProperties>
-      </inkml:inkSource>
-      <inkml:timestamp xml:id="ts0" timeString="2026-04-22T06:03:53.006"/>
-    </inkml:context>
-    <inkml:brush xml:id="br0">
-      <inkml:brushProperty name="width" value="0.1" units="cm"/>
-      <inkml:brushProperty name="height" value="0.1" units="cm"/>
-      <inkml:brushProperty name="color" value="#33CCFF"/>
-    </inkml:brush>
-  </inkml:definitions>
-  <inkml:trace contextRef="#ctx0" brushRef="#br0">36 65 5913 0 0,'-9'-32'903'0'0,"-7"0"2382"0"0,5 70-3277 0 0,35 255 16 0 0,-9-174-7 0 0,-7-43-962 0 0,7-96-3118 0 0,-6 8 777 0 0</inkml:trace>
-</inkml:ink>
-</file>
-
-<file path=ppt/ink/ink30.xml><?xml version="1.0" encoding="utf-8"?>
+<file path=ppt/ink/ink42.xml><?xml version="1.0" encoding="utf-8"?>
 <inkml:ink xmlns:inkml="http://www.w3.org/2003/InkML">
   <inkml:definitions>
     <inkml:context xml:id="ctx0">
@@ -1106,7 +1525,7 @@
 </inkml:ink>
 </file>
 
-<file path=ppt/ink/ink31.xml><?xml version="1.0" encoding="utf-8"?>
+<file path=ppt/ink/ink43.xml><?xml version="1.0" encoding="utf-8"?>
 <inkml:ink xmlns:inkml="http://www.w3.org/2003/InkML">
   <inkml:definitions>
     <inkml:context xml:id="ctx0">
@@ -1138,7 +1557,7 @@
 </inkml:ink>
 </file>
 
-<file path=ppt/ink/ink32.xml><?xml version="1.0" encoding="utf-8"?>
+<file path=ppt/ink/ink44.xml><?xml version="1.0" encoding="utf-8"?>
 <inkml:ink xmlns:inkml="http://www.w3.org/2003/InkML">
   <inkml:definitions>
     <inkml:context xml:id="ctx0">
@@ -1170,7 +1589,7 @@
 </inkml:ink>
 </file>
 
-<file path=ppt/ink/ink33.xml><?xml version="1.0" encoding="utf-8"?>
+<file path=ppt/ink/ink45.xml><?xml version="1.0" encoding="utf-8"?>
 <inkml:ink xmlns:inkml="http://www.w3.org/2003/InkML">
   <inkml:definitions>
     <inkml:context xml:id="ctx0">
@@ -1202,38 +1621,6 @@
 </inkml:ink>
 </file>
 
-<file path=ppt/ink/ink4.xml><?xml version="1.0" encoding="utf-8"?>
-<inkml:ink xmlns:inkml="http://www.w3.org/2003/InkML">
-  <inkml:definitions>
-    <inkml:context xml:id="ctx0">
-      <inkml:inkSource xml:id="inkSrc0">
-        <inkml:traceFormat>
-          <inkml:channel name="X" type="integer" min="-2.14748E9" max="2.14748E9" units="cm"/>
-          <inkml:channel name="Y" type="integer" min="-2.14748E9" max="2.14748E9" units="cm"/>
-          <inkml:channel name="F" type="integer" max="32767" units="dev"/>
-          <inkml:channel name="OA" type="integer" max="360" units="deg"/>
-          <inkml:channel name="OE" type="integer" max="90" units="deg"/>
-        </inkml:traceFormat>
-        <inkml:channelProperties>
-          <inkml:channelProperty channel="X" name="resolution" value="1000" units="1/cm"/>
-          <inkml:channelProperty channel="Y" name="resolution" value="1000" units="1/cm"/>
-          <inkml:channelProperty channel="F" name="resolution" value="0" units="1/dev"/>
-          <inkml:channelProperty channel="OA" name="resolution" value="1000" units="1/deg"/>
-          <inkml:channelProperty channel="OE" name="resolution" value="1000" units="1/deg"/>
-        </inkml:channelProperties>
-      </inkml:inkSource>
-      <inkml:timestamp xml:id="ts0" timeString="2026-04-22T06:03:53.662"/>
-    </inkml:context>
-    <inkml:brush xml:id="br0">
-      <inkml:brushProperty name="width" value="0.1" units="cm"/>
-      <inkml:brushProperty name="height" value="0.1" units="cm"/>
-      <inkml:brushProperty name="color" value="#33CCFF"/>
-    </inkml:brush>
-  </inkml:definitions>
-  <inkml:trace contextRef="#ctx0" brushRef="#br0">0 13 6713 0 0,'0'0'-372'0'0,"42"-9"1322"0"0,273 5-715 0 0,-163 7-180 0 0,158 5 1259 0 0,-306-8-1169 0 0,-3 0-308 0 0,0 0-1 0 0,0 0 1 0 0,0 0 0 0 0,0 0-1 0 0,1-1 1 0 0,-1 1-1 0 0,0 0 1 0 0,0 0 0 0 0,0-1-1 0 0,0 1 1 0 0,0-1 0 0 0,0 1-1 0 0,0-1 1 0 0,0 1-1 0 0,0-1 1 0 0,0 0 0 0 0,0 1-1 0 0,1-2 1 0 0</inkml:trace>
-</inkml:ink>
-</file>
-
 <file path=ppt/ink/ink5.xml><?xml version="1.0" encoding="utf-8"?>
 <inkml:ink xmlns:inkml="http://www.w3.org/2003/InkML">
   <inkml:definitions>
@@ -1254,15 +1641,15 @@
           <inkml:channelProperty channel="OE" name="resolution" value="1000" units="1/deg"/>
         </inkml:channelProperties>
       </inkml:inkSource>
-      <inkml:timestamp xml:id="ts0" timeString="2026-04-22T06:06:58.170"/>
+      <inkml:timestamp xml:id="ts0" timeString="2026-07-04T09:20:11.387"/>
     </inkml:context>
     <inkml:brush xml:id="br0">
       <inkml:brushProperty name="width" value="0.1" units="cm"/>
       <inkml:brushProperty name="height" value="0.1" units="cm"/>
-      <inkml:brushProperty name="color" value="#33CCFF"/>
+      <inkml:brushProperty name="color" value="#FFC114"/>
     </inkml:brush>
   </inkml:definitions>
-  <inkml:trace contextRef="#ctx0" brushRef="#br0">449 128 884 0 0,'-3'0'6286'0'0,"-18"-2"-6285"0"0,15 2 269 0 0,-5-2-152 0 0,3 1-86 0 0,-1 0-1 0 0,1 0 1 0 0,0 1-1 0 0,-1 0 0 0 0,1 0 1 0 0,0 1-1 0 0,-1 0 1 0 0,1 0-1 0 0,0 1 1 0 0,-13 5-1 0 0,17-6-27 0 0,-11 8-4 0 0,1 0 0 0 0,0 1 0 0 0,1 0-1 0 0,0 1 1 0 0,1 1 0 0 0,-20 23 0 0 0,-25 25-1 0 0,55-57 3 0 0,-45 104 4 0 0,39-92-4 0 0,-2 3 9 0 0,0 1-1 0 0,1 0 1 0 0,2 0-1 0 0,-11 35 0 0 0,17-50-4 0 0,-4 18 1 0 0,1 0 0 0 0,0 0 0 0 0,1 0-1 0 0,2 0 1 0 0,0 1 0 0 0,2-1 0 0 0,4 31-1 0 0,-1 26 16 0 0,-5-62-6 0 0,2 0 1 0 0,0 0-1 0 0,1 0 0 0 0,4 17 1 0 0,-4-29-4 0 0,0 1 0 0 0,1 0 0 0 0,0-1 0 0 0,0 1 1 0 0,0-1-1 0 0,1 0 0 0 0,0 0 0 0 0,0 0 0 0 0,0-1 1 0 0,0 1-1 0 0,1-1 0 0 0,0 0 0 0 0,0-1 0 0 0,0 1 0 0 0,0-1 1 0 0,0 0-1 0 0,1 0 0 0 0,0 0 0 0 0,-1-1 0 0 0,1 0 0 0 0,0 0 1 0 0,0 0-1 0 0,11 1 0 0 0,0 0 37 0 0,-1-1-1 0 0,1-1 1 0 0,0 0-1 0 0,0-1 1 0 0,0-1-1 0 0,0-1 1 0 0,22-4-1 0 0,-31 3-6 0 0,-1 0-1 0 0,1-1 0 0 0,-1 1 0 0 0,0-2 0 0 0,0 1 0 0 0,0-1 0 0 0,-1 0 0 0 0,1 0 0 0 0,-1-1 0 0 0,-1 0 1 0 0,10-11-1 0 0,10-10 75 0 0,-16 17-50 0 0,-1 0 0 0 0,-1-1 0 0 0,0 0 0 0 0,-1 0 0 0 0,0-1 1 0 0,0 0-1 0 0,-1 0 0 0 0,-1-1 0 0 0,5-17 0 0 0,-5 17 0 0 0,2-11 39 0 0,-2-1 0 0 0,0 0 0 0 0,1-46 0 0 0,0-1-75 0 0,14-48 16 0 0,-11 65 167 0 0,1-24 297 0 0,-9-18 78 0 0,-2 89-530 0 0,0 0-1 0 0,-1 0 0 0 0,0 0 0 0 0,-1 0 0 0 0,0 1 0 0 0,-7-12 0 0 0,7 12-4 0 0,-5-10 23 0 0,0 1-1 0 0,-1 0 1 0 0,-1 1 0 0 0,0 1 0 0 0,-20-21-1 0 0,30 34-70 0 0,-3-3 29 0 0,-9-6-879 0 0,29-7-6235 0 0,1 11 3874 0 0</inkml:trace>
+  <inkml:trace contextRef="#ctx0" brushRef="#br0">30 77 7093 0 0,'6'-7'70'0'0,"-1"0"0"0"0,0-1 0 0 0,0 0 0 0 0,-1 0 0 0 0,1 0 0 0 0,-2-1 0 0 0,4-11 0 0 0,-6 19 62 0 0,-4 27 595 0 0,-62 392-98 0 0,64-411-589 0 0,0-1 0 0 0,1 0 0 0 0,0 0 1 0 0,0 0-1 0 0,0 1 0 0 0,1-1 0 0 0,0 0 0 0 0,2 9 0 0 0,-2-13-20 0 0,1 0 0 0 0,-1-1 0 0 0,0 1 0 0 0,0 0 0 0 0,1 0 0 0 0,-1 0 0 0 0,1-1-1 0 0,-1 1 1 0 0,1-1 0 0 0,0 1 0 0 0,0-1 0 0 0,-1 0 0 0 0,1 0 0 0 0,0 0-1 0 0,0 0 1 0 0,0 0 0 0 0,0 0 0 0 0,1 0 0 0 0,-1-1 0 0 0,0 1 0 0 0,0-1 0 0 0,0 1-1 0 0,1-1 1 0 0,-1 0 0 0 0,0 0 0 0 0,3 0 0 0 0,37-1 100 0 0,1-3 1 0 0,-1-1-1 0 0,0-1 0 0 0,67-21 1 0 0,-50 13-52 0 0,515-111 632 0 0,-540 118-634 0 0,-31 6-171 0 0,0-26-9414 0 0</inkml:trace>
 </inkml:ink>
 </file>
 
@@ -1286,15 +1673,15 @@
           <inkml:channelProperty channel="OE" name="resolution" value="1000" units="1/deg"/>
         </inkml:channelProperties>
       </inkml:inkSource>
-      <inkml:timestamp xml:id="ts0" timeString="2026-04-22T06:07:01.352"/>
+      <inkml:timestamp xml:id="ts0" timeString="2026-07-04T09:19:20.094"/>
     </inkml:context>
     <inkml:brush xml:id="br0">
       <inkml:brushProperty name="width" value="0.1" units="cm"/>
       <inkml:brushProperty name="height" value="0.1" units="cm"/>
-      <inkml:brushProperty name="color" value="#33CCFF"/>
+      <inkml:brushProperty name="color" value="#5B2D90"/>
     </inkml:brush>
   </inkml:definitions>
-  <inkml:trace contextRef="#ctx0" brushRef="#br0">1129 114 6673 0 0,'0'0'-322'0'0,"-27"-20"-12"0"0,2 11 441 0 0,0 1 1 0 0,-1 1 0 0 0,0 2-1 0 0,-1 0 1 0 0,-35-1 0 0 0,22 2-37 0 0,-5 1 58 0 0,0 1 1 0 0,-74 8-1 0 0,88-4 0 0 0,-11 1-23 0 0,0 2 0 0 0,0 1 0 0 0,0 3 0 0 0,-76 25 0 0 0,79-23-78 0 0,34-10-22 0 0,-25 3 3 0 0,27-4-5 0 0,0 1 0 0 0,-1-1 0 0 0,1 1 0 0 0,-1 0 0 0 0,1 0 0 0 0,0 0 0 0 0,0 1 0 0 0,-6 2 0 0 0,-13 6-1 0 0,13-8-3 0 0,0 1 0 0 0,0 0 0 0 0,0 0 0 0 0,0 1 0 0 0,-10 6 0 0 0,5-1 5 0 0,-2 1-6 0 0,0 0 0 0 0,-24 22 0 0 0,37-29 1 0 0,0 0 0 0 0,0 0-1 0 0,0 1 1 0 0,0-1 0 0 0,1 1-1 0 0,-1 0 1 0 0,1-1 0 0 0,0 1 0 0 0,0 0-1 0 0,0 0 1 0 0,1 1 0 0 0,-1-1-1 0 0,1 0 1 0 0,0 0 0 0 0,0 1-1 0 0,0 7 1 0 0,-10 39-12 0 0,6-32 22 0 0,1 0 0 0 0,1 1-1 0 0,0-1 1 0 0,2 0 0 0 0,0 1 0 0 0,1 0 0 0 0,1-1-1 0 0,1 1 1 0 0,4 21 0 0 0,3 30 47 0 0,-7-44-35 0 0,1 1-1 0 0,13 47 0 0 0,0-35 51 0 0,1 0 0 0 0,33 53 0 0 0,-41-75-60 0 0,-4-13 0 0 0,0 1 0 0 0,-1-1 0 0 0,2 1-1 0 0,-1-2 1 0 0,0 1 0 0 0,1 0-1 0 0,0-1 1 0 0,0 0 0 0 0,0-1-1 0 0,1 1 1 0 0,-1-1 0 0 0,1 0-1 0 0,0-1 1 0 0,10 3 0 0 0,16 8 30 0 0,-16-7-27 0 0,0-1 0 0 0,0-1-1 0 0,0 0 1 0 0,25 1 0 0 0,-1 1 11 0 0,6 0 20 0 0,77 1 1 0 0,-49-4 22 0 0,-13-4-23 0 0,-5 2-37 0 0,120-5 40 0 0,-113 0-18 0 0,90-4 13 0 0,-105 5-49 0 0,35-1 33 0 0,-54 1 13 0 0,0-1-1 0 0,0-1 0 0 0,0-1 0 0 0,-1-2 0 0 0,47-20 0 0 0,5 1-16 0 0,-67 23 39 0 0,0-1 1 0 0,0 0 0 0 0,-1-1 0 0 0,0-1 0 0 0,0 0 0 0 0,-1-1 0 0 0,1 0 0 0 0,-2 0-1 0 0,1-2 1 0 0,10-10 0 0 0,-16 13 7 0 0,1 0 1 0 0,-1 0-1 0 0,-1 0 0 0 0,0-1 0 0 0,0 1 0 0 0,0-1 1 0 0,-1-1-1 0 0,0 1 0 0 0,0-1 0 0 0,-1 1 0 0 0,-1-1 1 0 0,1 0-1 0 0,-1 0 0 0 0,-1 0 0 0 0,1-1 0 0 0,-2 1 1 0 0,1 0-1 0 0,-1 0 0 0 0,-1-1 0 0 0,0 1 0 0 0,0 0 0 0 0,-1 0 1 0 0,0 0-1 0 0,0 0 0 0 0,-1 0 0 0 0,-7-14 0 0 0,-45-99 37 0 0,45 99-92 0 0,4 10-12 0 0,0 0-1 0 0,0 0 1 0 0,-1 1-1 0 0,-1-1 1 0 0,-14-16-1 0 0,-20-33-26 0 0,39 59 23 0 0,-115-117-15 0 0,103 104 2 0 0,-35-24-25 0 0,-18-13 18 0 0,-39-24-29 0 0,98 71 36 0 0,-2 2 1 0 0,1-1-1 0 0,0 1 0 0 0,-1 1 1 0 0,0 0-1 0 0,1 0 0 0 0,-1 1 1 0 0,-1 1-1 0 0,1 0 0 0 0,0 0 0 0 0,0 1 1 0 0,-13 2-1 0 0,8-2 6 0 0,-16 0 0 0 0,-19 1-28 0 0,-87 10 49 0 0,128-9-8 0 0,-47 1 1 0 0,54-3-9 0 0,-32-3-4303 0 0,43-10 1782 0 0,5 2-457 0 0</inkml:trace>
+  <inkml:trace contextRef="#ctx0" brushRef="#br0">25 1 628 0 0,'0'0'-216'0'0,"-24"19"72"0"0</inkml:trace>
 </inkml:ink>
 </file>
 
@@ -1318,15 +1705,15 @@
           <inkml:channelProperty channel="OE" name="resolution" value="1000" units="1/deg"/>
         </inkml:channelProperties>
       </inkml:inkSource>
-      <inkml:timestamp xml:id="ts0" timeString="2026-04-22T02:17:32.058"/>
+      <inkml:timestamp xml:id="ts0" timeString="2026-07-04T09:22:02.178"/>
     </inkml:context>
     <inkml:brush xml:id="br0">
-      <inkml:brushProperty name="width" value="0.05" units="cm"/>
-      <inkml:brushProperty name="height" value="0.05" units="cm"/>
-      <inkml:brushProperty name="color" value="#33CCFF"/>
+      <inkml:brushProperty name="width" value="0.1" units="cm"/>
+      <inkml:brushProperty name="height" value="0.1" units="cm"/>
+      <inkml:brushProperty name="color" value="#FFC114"/>
     </inkml:brush>
   </inkml:definitions>
-  <inkml:trace contextRef="#ctx0" brushRef="#br0">1 534 5925 0 0,'0'0'1818'0'0,"3"-22"-1521"0"0,4 5-235 0 0,0 0 1 0 0,1 0-1 0 0,0 1 1 0 0,2 0-1 0 0,21-29 0 0 0,70-67-54 0 0,-95 105-10 0 0,31-29-10 0 0,2 2 0 0 0,1 2 1 0 0,58-36-1 0 0,-67 52-4 0 0,0 1 1 0 0,1 1 0 0 0,0 1-1 0 0,1 2 1 0 0,43-8 0 0 0,-67 17 0 0 0,0 0 0 0 0,0 1 0 0 0,0 0 1 0 0,0 1-1 0 0,0 0 0 0 0,0 0 0 0 0,0 1 1 0 0,0 0-1 0 0,0 0 0 0 0,-1 1 0 0 0,1 0 1 0 0,0 1-1 0 0,14 6 0 0 0,-14-4 1 0 0,0 1 0 0 0,0 0 0 0 0,0 1 0 0 0,-1 0 0 0 0,14 13-1 0 0,11 11 14 0 0,36 25-52 0 0,-53-39 45 0 0,-1 0 1 0 0,-1 1 0 0 0,-1 0-1 0 0,0 1 1 0 0,12 26 0 0 0,-3-11-5 0 0,-12-20 13 0 0,0 0 1 0 0,-1 2-1 0 0,-1-1 0 0 0,0 1 0 0 0,8 24 0 0 0,-15-36-1 0 0,0 1 0 0 0,1-1 0 0 0,0 0-1 0 0,-1 0 1 0 0,1 0 0 0 0,1 0 0 0 0,2 5 0 0 0,3 3 0 0 0,-1 0 1 0 0,-1 1-1 0 0,0 0 0 0 0,4 13 1 0 0,6 16 1969 0 0,-62-51-1755 0 0,0-3 1 0 0,0-2-1 0 0,-69-31 0 0 0,59 21-135 0 0,54 23-75 0 0,-6-3 34 0 0,30 20-607 0 0,-6-7 559 0 0,1 0 0 0 0,-1-1 0 0 0,22 7 1 0 0,66 29 27 0 0,-40-18 124 0 0,-62-25-56 0 0,-1-1-77 0 0,0 0-1 0 0,0 0 1 0 0,0 0 0 0 0,0 0 0 0 0,0-1 0 0 0,0 1 0 0 0,0 0 0 0 0,0 0 0 0 0,0-1 0 0 0,0 1 0 0 0,0-1 0 0 0,-1 1 0 0 0,1-1 0 0 0,0 1 0 0 0,0-1 0 0 0,0 1 0 0 0,-1-1-1 0 0,1 0 1 0 0,0 1 0 0 0,-1-1 0 0 0,1 0 0 0 0,-1 0 0 0 0,1 0 0 0 0,-1 1 0 0 0,1-1 0 0 0,-1 0 0 0 0,1 0 0 0 0,-1 0 0 0 0,1-1 0 0 0,6-21 2 0 0,0 1 1 0 0,2 0 0 0 0,1 1 0 0 0,1-1-1 0 0,0 2 1 0 0,20-27 0 0 0,-9 8-2 0 0,-21 37-19 0 0,12-23 44 0 0,-12 17-6279 0 0,-15-1 3428 0 0</inkml:trace>
+  <inkml:trace contextRef="#ctx0" brushRef="#br0">111 82 3844 0 0,'-25'-25'1398'0'0,"-23"-20"2533"0"0,47 44-3458 0 0,-3-1 109 0 0,0 0 0 0 0,1 1 0 0 0,-1 0 1 0 0,0 0-1 0 0,0 0 0 0 0,0 0 1 0 0,-6 0-1 0 0,10 3-581 0 0,1 1 0 0 0,-1 0 0 0 0,1-1 0 0 0,-1 1 0 0 0,1 0 0 0 0,0-1 0 0 0,0 1 0 0 0,0-1 0 0 0,0 0 0 0 0,0 1 0 0 0,1-1 0 0 0,-1 0 0 0 0,1 1 0 0 0,-1-1 0 0 0,1 0 0 0 0,0 0 0 0 0,0-1 0 0 0,0 1 0 0 0,0 0 0 0 0,0-1 0 0 0,0 1 0 0 0,3 1 0 0 0,62 43 62 0 0,-59-40-58 0 0,420 234 72 0 0,115-4-58 0 0,18-37 74 0 0,-414-149-69 0 0,192 62 17 0 0,-301-96-29 0 0,13 6 774 0 0,-49-21-677 0 0,-3-11-1987 0 0,-1 0 626 0 0,-1 0 1 0 0,0 0-1 0 0,0 0 0 0 0,-8-14 1 0 0,2 2-1351 0 0,3 0-360 0 0</inkml:trace>
 </inkml:ink>
 </file>
 
@@ -1350,15 +1737,15 @@
           <inkml:channelProperty channel="OE" name="resolution" value="1000" units="1/deg"/>
         </inkml:channelProperties>
       </inkml:inkSource>
-      <inkml:timestamp xml:id="ts0" timeString="2026-04-22T02:17:36.568"/>
+      <inkml:timestamp xml:id="ts0" timeString="2026-07-04T09:22:02.791"/>
     </inkml:context>
     <inkml:brush xml:id="br0">
-      <inkml:brushProperty name="width" value="0.05" units="cm"/>
-      <inkml:brushProperty name="height" value="0.05" units="cm"/>
-      <inkml:brushProperty name="color" value="#33CCFF"/>
+      <inkml:brushProperty name="width" value="0.1" units="cm"/>
+      <inkml:brushProperty name="height" value="0.1" units="cm"/>
+      <inkml:brushProperty name="color" value="#FFC114"/>
     </inkml:brush>
   </inkml:definitions>
-  <inkml:trace contextRef="#ctx0" brushRef="#br0">0 1155 5989 0 0,'0'0'-442'0'0,"14"-34"42"0"0,-12 17 587 0 0,1 1 0 0 0,0-1 0 0 0,2 1 1 0 0,-1 0-1 0 0,2 0 0 0 0,0 0 0 0 0,16-26 0 0 0,10-30 324 0 0,39-80 363 0 0,-56 122-805 0 0,1 2 1 0 0,1 0-1 0 0,22-28 0 0 0,5-7-12 0 0,-17 21-49 0 0,2 1 0 0 0,2 1 0 0 0,2 1-1 0 0,2 2 1 0 0,1 1 0 0 0,1 2 0 0 0,2 2 0 0 0,48-31 0 0 0,-38 33-22 0 0,2 2 1 0 0,1 2-1 0 0,79-27 0 0 0,-115 47 7 0 0,0 2 0 0 0,-1 0-1 0 0,1 1 1 0 0,30-3-1 0 0,4 1-1 0 0,67-2-47 0 0,-95 7 47 0 0,0 1-1 0 0,0 1 1 0 0,0 1 0 0 0,0 0 0 0 0,0 2-1 0 0,36 13 1 0 0,-14-5 6 0 0,-19-7 11 0 0,-3 0-21 0 0,0 0 0 0 0,0 2 0 0 0,36 17 0 0 0,-31-11 2 0 0,-1 0 1 0 0,0 2-1 0 0,41 33 1 0 0,-44-25-10 0 0,-1 2 0 0 0,18 28 0 0 0,-39-53 20 0 0,18 25 5 0 0,0 1-1 0 0,23 48 1 0 0,-28-42-21 0 0,17 68 0 0 0,-31-100 15 0 0,15 136 40 0 0,39 86-19 0 0,-45-180-23 0 0,-5-22 5 0 0,1-1-1 0 0,1 0 1 0 0,0 0-1 0 0,11 22 0 0 0,-16-39 6 0 0,2 7-9 0 0,26 60 11 0 0,-29-68-17 0 0,10 18-7 0 0,-5-16 12 0 0,-3-4 7 0 0,1 19-4 0 0,-1-12 4 0 0,0-2 191 0 0,8 15-461 0 0,-10-15 2997 0 0,-212-162-1833 0 0,145 102-764 0 0,48 38-535 0 0,16 15 283 0 0,5 4 45 0 0,29 28 41 0 0,6 5-17 0 0,0-3 61 0 0,1-2-1 0 0,2-1 1 0 0,64 35 0 0 0,-81-50 65 0 0,-21-13-29 0 0,-2 0-12 0 0,1-1 1 0 0,-1 0 0 0 0,1 1-1 0 0,-1-1 1 0 0,1 0 0 0 0,-1 0-1 0 0,1 1 1 0 0,-1-1 0 0 0,1 0-1 0 0,-1 0 1 0 0,1 1 0 0 0,-1-1-1 0 0,1 0 1 0 0,0 0 0 0 0,-1 0-1 0 0,1 0 1 0 0,-1 0 0 0 0,1 0-1 0 0,-1 0 1 0 0,1 0 0 0 0,0 0-1 0 0,-1 0 1 0 0,1-1 0 0 0,0 1-1 0 0,2-3 4 0 0,0 1-1 0 0,0-1 0 0 0,0 0 1 0 0,0 0-1 0 0,0-1 1 0 0,-1 1-1 0 0,0 0 0 0 0,1-1 1 0 0,-1 0-1 0 0,0 1 0 0 0,1-5 1 0 0,18-56 164 0 0,2-2-98 0 0,-10 41-203 0 0,-1-1 0 0 0,10-33 0 0 0,-22 58 18 0 0,8-39-4057 0 0,1 20 47 0 0,1 8 1547 0 0</inkml:trace>
+  <inkml:trace contextRef="#ctx0" brushRef="#br0">2253 186 6845 0 0,'-3'-11'123'0'0,"0"1"0"0"0,0 0 0 0 0,-1 1 0 0 0,0-1 0 0 0,0 1 0 0 0,-1-1 1 0 0,-1 1-1 0 0,0 1 0 0 0,0-1 0 0 0,0 1 0 0 0,-1 0 0 0 0,0 1 0 0 0,-1-1 0 0 0,0 1 1 0 0,0 1-1 0 0,0 0 0 0 0,-1 0 0 0 0,0 0 0 0 0,0 1 0 0 0,0 0 0 0 0,-1 1 1 0 0,0 0-1 0 0,1 1 0 0 0,-20-4 0 0 0,21 6-81 0 0,0 1 1 0 0,0 0-1 0 0,0 1 0 0 0,1 0 1 0 0,-1 0-1 0 0,0 0 0 0 0,0 1 1 0 0,-9 4-1 0 0,-59 25 108 0 0,65-26-119 0 0,-58 29 59 0 0,2 4 1 0 0,1 2 0 0 0,2 4-1 0 0,2 2 1 0 0,2 3-1 0 0,-54 57 1 0 0,-300 360 251 0 0,255-275-190 0 0,15-29 414 0 0,-323 278 1 0 0,413-393-336 0 0,-58 44 2547 0 0,69-58-2174 0 0,45-59-3983 0 0,1 19 2514 0 0,1-1 0 0 0,0 1 0 0 0,0-1 0 0 0,0 1 0 0 0,9-10 0 0 0,2-5-1331 0 0,7-14-1542 0 0</inkml:trace>
 </inkml:ink>
 </file>
 
@@ -1382,15 +1769,15 @@
           <inkml:channelProperty channel="OE" name="resolution" value="1000" units="1/deg"/>
         </inkml:channelProperties>
       </inkml:inkSource>
-      <inkml:timestamp xml:id="ts0" timeString="2026-04-22T02:17:40.252"/>
+      <inkml:timestamp xml:id="ts0" timeString="2026-07-04T09:22:06.821"/>
     </inkml:context>
     <inkml:brush xml:id="br0">
-      <inkml:brushProperty name="width" value="0.05" units="cm"/>
-      <inkml:brushProperty name="height" value="0.05" units="cm"/>
-      <inkml:brushProperty name="color" value="#33CCFF"/>
+      <inkml:brushProperty name="width" value="0.1" units="cm"/>
+      <inkml:brushProperty name="height" value="0.1" units="cm"/>
+      <inkml:brushProperty name="color" value="#FFC114"/>
     </inkml:brush>
   </inkml:definitions>
-  <inkml:trace contextRef="#ctx0" brushRef="#br0">0 1629 5721 0 0,'0'0'596'0'0,"3"-5"-488"0"0,43-91 474 0 0,41-118 0 0 0,65-137-185 0 0,-75 185-50 0 0,-50 111-321 0 0,2 1 1 0 0,3 1-1 0 0,2 1 0 0 0,2 2 1 0 0,3 2-1 0 0,1 2 1 0 0,3 1-1 0 0,1 2 0 0 0,71-52 1 0 0,-66 57-39 0 0,3 3 0 0 0,0 2 0 0 0,110-51 0 0 0,-112 67-19 0 0,1 3 0 0 0,0 1 1 0 0,74-7-1 0 0,-114 19 24 0 0,13 0-2 0 0,9 3-4 0 0,17 3-3 0 0,-1 1-1 0 0,1 3 0 0 0,-2 2 0 0 0,1 2 1 0 0,71 30-1 0 0,-50-13 18 0 0,-1 3 0 0 0,123 81 0 0 0,-152-86-6 0 0,0 1 0 0 0,-2 1 0 0 0,-2 3 0 0 0,0 1 0 0 0,35 44-1 0 0,-55-59 10 0 0,1 0-1 0 0,1-2 0 0 0,38 29 1 0 0,-31-26-3 0 0,34 34 0 0 0,-24-15-6 0 0,-1 2 0 0 0,-3 1 0 0 0,31 54 0 0 0,7 6-2 0 0,-18-29 11 0 0,41 70-23 0 0,12 45 45 0 0,-37-81-22 0 0,-59-93 0 0 0,0-1 1 0 0,1-1-1 0 0,18 21 0 0 0,-15-18 9 0 0,0 0 0 0 0,14 24-1 0 0,-17-22-11 0 0,1-1 0 0 0,1 1 1 0 0,24 27-1 0 0,-19-23 24 0 0,11 15-36 0 0,-27-35 12 0 0,6 8-31 0 0,-6-9 51 0 0,0 0 1 0 0,0 0 0 0 0,0 0 0 0 0,1 0 0 0 0,-1 0 0 0 0,0 0 0 0 0,0 0 0 0 0,0 1 0 0 0,0-1 0 0 0,0 0 0 0 0,0 0 0 0 0,0 0 0 0 0,0 0 0 0 0,0 0 0 0 0,0 0-1 0 0,0 1 1 0 0,0-1 0 0 0,1 0 0 0 0,-1 0 0 0 0,0 0 0 0 0,0 0 0 0 0,0 0 0 0 0,0 1 0 0 0,0-1 0 0 0,0 0 0 0 0,0 0 0 0 0,-1 0 0 0 0,1 0 0 0 0,0 1 0 0 0,0-1-1 0 0,0 0 1 0 0,0 0 0 0 0,0 0 0 0 0,0 0 0 0 0,0 0 0 0 0,0 0 0 0 0,0 1 0 0 0,0-1 0 0 0,0 0 0 0 0,0 0 0 0 0,-1 0 0 0 0,1 0 0 0 0,0 0 0 0 0,0 0-1 0 0,0 0 1 0 0,0 0 0 0 0,0 1 0 0 0,0-1 0 0 0,0 0 0 0 0,-1 0 0 0 0,1 0 0 0 0,0 0 0 0 0,0 0 0 0 0,0 0 0 0 0,0 0 0 0 0,0 0 0 0 0,-1 0 0 0 0,1 0 0 0 0,0 0-1 0 0,0 0 1 0 0,0 0 0 0 0,0 0 0 0 0,0 0 0 0 0,-1 0 0 0 0,1 0 0 0 0,0 0 0 0 0,0 0 0 0 0,-44-21 122 0 0,1-1-1 0 0,1-2 1 0 0,2-2 0 0 0,-60-49 0 0 0,19 9-84 0 0,80 65-56 0 0,-1 0 0 0 0,-5-4-7 0 0,-7-4-138 0 0,24 18-143 0 0,9 6 288 0 0,24 20-17 0 0,88 54 0 0 0,-85-60 5 0 0,17 6 21 0 0,-62-34 22 0 0,16-1 364 0 0,-13-4-379 0 0,0 0-1 0 0,1 0 1 0 0,-2-1 0 0 0,1 1-1 0 0,-1-1 1 0 0,1 0 0 0 0,-1 0-1 0 0,0 0 1 0 0,-1 0 0 0 0,3-7-1 0 0,19-66 77 0 0,-3 8-15 0 0,-14 51-81 0 0,-1 0 0 0 0,-1-1 0 0 0,4-31 0 0 0,-9 50-12 0 0,0-36-3845 0 0,0 31 1456 0 0</inkml:trace>
+  <inkml:trace contextRef="#ctx0" brushRef="#br0">1307 27 7425 0 0,'0'0'870'0'0,"31"-9"-749"0"0,15 2-95 0 0,0 1 0 0 0,1 3 0 0 0,0 2 0 0 0,0 1 0 0 0,0 3 0 0 0,-1 2 0 0 0,1 2 0 0 0,-1 2 0 0 0,-1 1 0 0 0,76 30 0 0 0,-111-36-18 0 0,-1 0-1 0 0,0 1 0 0 0,0 0 1 0 0,0 0-1 0 0,0 1 1 0 0,-1 0-1 0 0,0 1 0 0 0,0 0 1 0 0,-1 0-1 0 0,0 0 1 0 0,0 1-1 0 0,-1 0 0 0 0,0 1 1 0 0,0-1-1 0 0,-1 1 0 0 0,0 0 1 0 0,0 1-1 0 0,-1-1 1 0 0,-1 1-1 0 0,1 0 0 0 0,-1 0 1 0 0,-1 0-1 0 0,0 0 1 0 0,-1 0-1 0 0,0 0 0 0 0,0 1 1 0 0,-1-1-1 0 0,0 0 1 0 0,-1 1-1 0 0,-3 15 0 0 0,-6 33 72 0 0,-2-1-1 0 0,-2-1 1 0 0,-3-1-1 0 0,-2 0 0 0 0,-3-1 1 0 0,-56 100-1 0 0,54-115 11 0 0,-2-2 1 0 0,-2 0-1 0 0,-1-2 1 0 0,-2-1-1 0 0,-1-2 0 0 0,-2-1 1 0 0,-1-1-1 0 0,-1-2 0 0 0,-55 33 1 0 0,39-33 28 0 0,-1-3 0 0 0,-1-2 1 0 0,-108 32-1 0 0,-180 23 95 0 0,90-24-146 0 0,222-46-62 0 0,-1 1 0 0 0,2 2 0 0 0,-1 1 0 0 0,-50 31 0 0 0,30-12 7 0 0,-75 65 1 0 0,100-74-4 0 0,2 2 1 0 0,0 0-1 0 0,1 2 1 0 0,2 0-1 0 0,1 2 0 0 0,1 0 1 0 0,1 1-1 0 0,-22 58 1 0 0,3 17 157 0 0,35-97 1 0 0,5-12-443 0 0,15-24-1318 0 0,21-45-3774 0 0,-28 45 2861 0 0</inkml:trace>
 </inkml:ink>
 </file>
 
@@ -1476,7 +1863,7 @@
           <a:p>
             <a:fld id="{CB233BD1-3BA8-448D-9D08-7846095EA517}" type="datetimeFigureOut">
               <a:rPr lang="en-US" smtClean="0"/>
-              <a:t>7/2/2026</a:t>
+              <a:t>7/5/2026</a:t>
             </a:fld>
             <a:endParaRPr lang="en-US"/>
           </a:p>
@@ -1743,6 +2130,115 @@
 </p:notesMaster>
 </file>
 
+<file path=ppt/notesSlides/notesSlide1.xml><?xml version="1.0" encoding="utf-8"?>
+<p:notes xmlns:a="http://schemas.openxmlformats.org/drawingml/2006/main" xmlns:r="http://schemas.openxmlformats.org/officeDocument/2006/relationships" xmlns:p="http://schemas.openxmlformats.org/presentationml/2006/main" showMasterSp="0" showMasterPhAnim="0">
+  <p:cSld>
+    <p:spTree>
+      <p:nvGrpSpPr>
+        <p:cNvPr id="1" name="Shape 70"/>
+        <p:cNvGrpSpPr/>
+        <p:nvPr/>
+      </p:nvGrpSpPr>
+      <p:grpSpPr>
+        <a:xfrm>
+          <a:off x="0" y="0"/>
+          <a:ext cx="0" cy="0"/>
+          <a:chOff x="0" y="0"/>
+          <a:chExt cx="0" cy="0"/>
+        </a:xfrm>
+      </p:grpSpPr>
+      <p:sp>
+        <p:nvSpPr>
+          <p:cNvPr id="71" name="Google Shape;71;g3f0400b1c6c_0_10:notes"/>
+          <p:cNvSpPr>
+            <a:spLocks noGrp="1" noRot="1" noChangeAspect="1"/>
+          </p:cNvSpPr>
+          <p:nvPr>
+            <p:ph type="sldImg" idx="2"/>
+          </p:nvPr>
+        </p:nvSpPr>
+        <p:spPr>
+          <a:xfrm>
+            <a:off x="381000" y="685800"/>
+            <a:ext cx="6096000" cy="3429000"/>
+          </a:xfrm>
+          <a:custGeom>
+            <a:avLst/>
+            <a:gdLst/>
+            <a:ahLst/>
+            <a:cxnLst/>
+            <a:rect l="l" t="t" r="r" b="b"/>
+            <a:pathLst>
+              <a:path w="120000" h="120000" extrusionOk="0">
+                <a:moveTo>
+                  <a:pt x="0" y="0"/>
+                </a:moveTo>
+                <a:lnTo>
+                  <a:pt x="120000" y="0"/>
+                </a:lnTo>
+                <a:lnTo>
+                  <a:pt x="120000" y="120000"/>
+                </a:lnTo>
+                <a:lnTo>
+                  <a:pt x="0" y="120000"/>
+                </a:lnTo>
+                <a:close/>
+              </a:path>
+            </a:pathLst>
+          </a:custGeom>
+        </p:spPr>
+      </p:sp>
+      <p:sp>
+        <p:nvSpPr>
+          <p:cNvPr id="72" name="Google Shape;72;g3f0400b1c6c_0_10:notes"/>
+          <p:cNvSpPr txBox="1">
+            <a:spLocks noGrp="1"/>
+          </p:cNvSpPr>
+          <p:nvPr>
+            <p:ph type="body" idx="1"/>
+          </p:nvPr>
+        </p:nvSpPr>
+        <p:spPr>
+          <a:xfrm>
+            <a:off x="685800" y="4343400"/>
+            <a:ext cx="5486400" cy="4114800"/>
+          </a:xfrm>
+          <a:prstGeom prst="rect">
+            <a:avLst/>
+          </a:prstGeom>
+        </p:spPr>
+        <p:txBody>
+          <a:bodyPr spcFirstLastPara="1" wrap="square" lIns="91425" tIns="91425" rIns="91425" bIns="91425" anchor="t" anchorCtr="0">
+            <a:noAutofit/>
+          </a:bodyPr>
+          <a:lstStyle/>
+          <a:p>
+            <a:pPr marL="0" lvl="0" indent="0" algn="l" rtl="0">
+              <a:spcBef>
+                <a:spcPts val="0"/>
+              </a:spcBef>
+              <a:spcAft>
+                <a:spcPts val="0"/>
+              </a:spcAft>
+              <a:buNone/>
+            </a:pPr>
+            <a:endParaRPr/>
+          </a:p>
+        </p:txBody>
+      </p:sp>
+    </p:spTree>
+    <p:extLst>
+      <p:ext uri="{BB962C8B-B14F-4D97-AF65-F5344CB8AC3E}">
+        <p14:creationId xmlns:p14="http://schemas.microsoft.com/office/powerpoint/2010/main" val="447419631"/>
+      </p:ext>
+    </p:extLst>
+  </p:cSld>
+  <p:clrMapOvr>
+    <a:masterClrMapping/>
+  </p:clrMapOvr>
+</p:notes>
+</file>
+
 <file path=ppt/slideLayouts/slideLayout1.xml><?xml version="1.0" encoding="utf-8"?>
 <p:sldLayout xmlns:a="http://schemas.openxmlformats.org/drawingml/2006/main" xmlns:r="http://schemas.openxmlformats.org/officeDocument/2006/relationships" xmlns:p="http://schemas.openxmlformats.org/presentationml/2006/main" type="title" preserve="1">
   <p:cSld name="Title Slide">
@@ -1890,7 +2386,7 @@
           <a:p>
             <a:fld id="{6383FAE1-13DE-4511-8C1B-C8AFB720664C}" type="datetimeFigureOut">
               <a:rPr lang="en-US" smtClean="0"/>
-              <a:t>7/2/2026</a:t>
+              <a:t>7/5/2026</a:t>
             </a:fld>
             <a:endParaRPr lang="en-US"/>
           </a:p>
@@ -2088,7 +2584,7 @@
           <a:p>
             <a:fld id="{6383FAE1-13DE-4511-8C1B-C8AFB720664C}" type="datetimeFigureOut">
               <a:rPr lang="en-US" smtClean="0"/>
-              <a:t>7/2/2026</a:t>
+              <a:t>7/5/2026</a:t>
             </a:fld>
             <a:endParaRPr lang="en-US"/>
           </a:p>
@@ -2296,7 +2792,7 @@
           <a:p>
             <a:fld id="{6383FAE1-13DE-4511-8C1B-C8AFB720664C}" type="datetimeFigureOut">
               <a:rPr lang="en-US" smtClean="0"/>
-              <a:t>7/2/2026</a:t>
+              <a:t>7/5/2026</a:t>
             </a:fld>
             <a:endParaRPr lang="en-US"/>
           </a:p>
@@ -2360,6 +2856,365 @@
     <p:extLst>
       <p:ext uri="{BB962C8B-B14F-4D97-AF65-F5344CB8AC3E}">
         <p14:creationId xmlns:p14="http://schemas.microsoft.com/office/powerpoint/2010/main" val="2612998807"/>
+      </p:ext>
+    </p:extLst>
+  </p:cSld>
+  <p:clrMapOvr>
+    <a:masterClrMapping/>
+  </p:clrMapOvr>
+</p:sldLayout>
+</file>
+
+<file path=ppt/slideLayouts/slideLayout12.xml><?xml version="1.0" encoding="utf-8"?>
+<p:sldLayout xmlns:a="http://schemas.openxmlformats.org/drawingml/2006/main" xmlns:r="http://schemas.openxmlformats.org/officeDocument/2006/relationships" xmlns:p="http://schemas.openxmlformats.org/presentationml/2006/main" matchingName="Title and body" type="tx">
+  <p:cSld name="Title and body">
+    <p:spTree>
+      <p:nvGrpSpPr>
+        <p:cNvPr id="1" name="Shape 16"/>
+        <p:cNvGrpSpPr/>
+        <p:nvPr/>
+      </p:nvGrpSpPr>
+      <p:grpSpPr>
+        <a:xfrm>
+          <a:off x="0" y="0"/>
+          <a:ext cx="0" cy="0"/>
+          <a:chOff x="0" y="0"/>
+          <a:chExt cx="0" cy="0"/>
+        </a:xfrm>
+      </p:grpSpPr>
+      <p:sp>
+        <p:nvSpPr>
+          <p:cNvPr id="17" name="Google Shape;17;p4"/>
+          <p:cNvSpPr txBox="1">
+            <a:spLocks noGrp="1"/>
+          </p:cNvSpPr>
+          <p:nvPr>
+            <p:ph type="title"/>
+          </p:nvPr>
+        </p:nvSpPr>
+        <p:spPr>
+          <a:xfrm>
+            <a:off x="415600" y="593367"/>
+            <a:ext cx="11360800" cy="763600"/>
+          </a:xfrm>
+          <a:prstGeom prst="rect">
+            <a:avLst/>
+          </a:prstGeom>
+        </p:spPr>
+        <p:txBody>
+          <a:bodyPr spcFirstLastPara="1" wrap="square" lIns="91425" tIns="91425" rIns="91425" bIns="91425" anchor="t" anchorCtr="0">
+            <a:normAutofit/>
+          </a:bodyPr>
+          <a:lstStyle>
+            <a:lvl1pPr lvl="0">
+              <a:spcBef>
+                <a:spcPts val="0"/>
+              </a:spcBef>
+              <a:spcAft>
+                <a:spcPts val="0"/>
+              </a:spcAft>
+              <a:buSzPts val="2800"/>
+              <a:buNone/>
+              <a:defRPr/>
+            </a:lvl1pPr>
+            <a:lvl2pPr lvl="1">
+              <a:spcBef>
+                <a:spcPts val="0"/>
+              </a:spcBef>
+              <a:spcAft>
+                <a:spcPts val="0"/>
+              </a:spcAft>
+              <a:buSzPts val="2800"/>
+              <a:buNone/>
+              <a:defRPr/>
+            </a:lvl2pPr>
+            <a:lvl3pPr lvl="2">
+              <a:spcBef>
+                <a:spcPts val="0"/>
+              </a:spcBef>
+              <a:spcAft>
+                <a:spcPts val="0"/>
+              </a:spcAft>
+              <a:buSzPts val="2800"/>
+              <a:buNone/>
+              <a:defRPr/>
+            </a:lvl3pPr>
+            <a:lvl4pPr lvl="3">
+              <a:spcBef>
+                <a:spcPts val="0"/>
+              </a:spcBef>
+              <a:spcAft>
+                <a:spcPts val="0"/>
+              </a:spcAft>
+              <a:buSzPts val="2800"/>
+              <a:buNone/>
+              <a:defRPr/>
+            </a:lvl4pPr>
+            <a:lvl5pPr lvl="4">
+              <a:spcBef>
+                <a:spcPts val="0"/>
+              </a:spcBef>
+              <a:spcAft>
+                <a:spcPts val="0"/>
+              </a:spcAft>
+              <a:buSzPts val="2800"/>
+              <a:buNone/>
+              <a:defRPr/>
+            </a:lvl5pPr>
+            <a:lvl6pPr lvl="5">
+              <a:spcBef>
+                <a:spcPts val="0"/>
+              </a:spcBef>
+              <a:spcAft>
+                <a:spcPts val="0"/>
+              </a:spcAft>
+              <a:buSzPts val="2800"/>
+              <a:buNone/>
+              <a:defRPr/>
+            </a:lvl6pPr>
+            <a:lvl7pPr lvl="6">
+              <a:spcBef>
+                <a:spcPts val="0"/>
+              </a:spcBef>
+              <a:spcAft>
+                <a:spcPts val="0"/>
+              </a:spcAft>
+              <a:buSzPts val="2800"/>
+              <a:buNone/>
+              <a:defRPr/>
+            </a:lvl7pPr>
+            <a:lvl8pPr lvl="7">
+              <a:spcBef>
+                <a:spcPts val="0"/>
+              </a:spcBef>
+              <a:spcAft>
+                <a:spcPts val="0"/>
+              </a:spcAft>
+              <a:buSzPts val="2800"/>
+              <a:buNone/>
+              <a:defRPr/>
+            </a:lvl8pPr>
+            <a:lvl9pPr lvl="8">
+              <a:spcBef>
+                <a:spcPts val="0"/>
+              </a:spcBef>
+              <a:spcAft>
+                <a:spcPts val="0"/>
+              </a:spcAft>
+              <a:buSzPts val="2800"/>
+              <a:buNone/>
+              <a:defRPr/>
+            </a:lvl9pPr>
+          </a:lstStyle>
+          <a:p>
+            <a:endParaRPr/>
+          </a:p>
+        </p:txBody>
+      </p:sp>
+      <p:sp>
+        <p:nvSpPr>
+          <p:cNvPr id="18" name="Google Shape;18;p4"/>
+          <p:cNvSpPr txBox="1">
+            <a:spLocks noGrp="1"/>
+          </p:cNvSpPr>
+          <p:nvPr>
+            <p:ph type="body" idx="1"/>
+          </p:nvPr>
+        </p:nvSpPr>
+        <p:spPr>
+          <a:xfrm>
+            <a:off x="415600" y="1536633"/>
+            <a:ext cx="11360800" cy="4555200"/>
+          </a:xfrm>
+          <a:prstGeom prst="rect">
+            <a:avLst/>
+          </a:prstGeom>
+        </p:spPr>
+        <p:txBody>
+          <a:bodyPr spcFirstLastPara="1" wrap="square" lIns="91425" tIns="91425" rIns="91425" bIns="91425" anchor="t" anchorCtr="0">
+            <a:normAutofit/>
+          </a:bodyPr>
+          <a:lstStyle>
+            <a:lvl1pPr marL="609585" lvl="0" indent="-457189">
+              <a:spcBef>
+                <a:spcPts val="0"/>
+              </a:spcBef>
+              <a:spcAft>
+                <a:spcPts val="0"/>
+              </a:spcAft>
+              <a:buSzPts val="1800"/>
+              <a:buChar char="●"/>
+              <a:defRPr/>
+            </a:lvl1pPr>
+            <a:lvl2pPr marL="1219170" lvl="1" indent="-423323">
+              <a:spcBef>
+                <a:spcPts val="0"/>
+              </a:spcBef>
+              <a:spcAft>
+                <a:spcPts val="0"/>
+              </a:spcAft>
+              <a:buSzPts val="1400"/>
+              <a:buChar char="○"/>
+              <a:defRPr/>
+            </a:lvl2pPr>
+            <a:lvl3pPr marL="1828754" lvl="2" indent="-423323">
+              <a:spcBef>
+                <a:spcPts val="0"/>
+              </a:spcBef>
+              <a:spcAft>
+                <a:spcPts val="0"/>
+              </a:spcAft>
+              <a:buSzPts val="1400"/>
+              <a:buChar char="■"/>
+              <a:defRPr/>
+            </a:lvl3pPr>
+            <a:lvl4pPr marL="2438339" lvl="3" indent="-423323">
+              <a:spcBef>
+                <a:spcPts val="0"/>
+              </a:spcBef>
+              <a:spcAft>
+                <a:spcPts val="0"/>
+              </a:spcAft>
+              <a:buSzPts val="1400"/>
+              <a:buChar char="●"/>
+              <a:defRPr/>
+            </a:lvl4pPr>
+            <a:lvl5pPr marL="3047924" lvl="4" indent="-423323">
+              <a:spcBef>
+                <a:spcPts val="0"/>
+              </a:spcBef>
+              <a:spcAft>
+                <a:spcPts val="0"/>
+              </a:spcAft>
+              <a:buSzPts val="1400"/>
+              <a:buChar char="○"/>
+              <a:defRPr/>
+            </a:lvl5pPr>
+            <a:lvl6pPr marL="3657509" lvl="5" indent="-423323">
+              <a:spcBef>
+                <a:spcPts val="0"/>
+              </a:spcBef>
+              <a:spcAft>
+                <a:spcPts val="0"/>
+              </a:spcAft>
+              <a:buSzPts val="1400"/>
+              <a:buChar char="■"/>
+              <a:defRPr/>
+            </a:lvl6pPr>
+            <a:lvl7pPr marL="4267093" lvl="6" indent="-423323">
+              <a:spcBef>
+                <a:spcPts val="0"/>
+              </a:spcBef>
+              <a:spcAft>
+                <a:spcPts val="0"/>
+              </a:spcAft>
+              <a:buSzPts val="1400"/>
+              <a:buChar char="●"/>
+              <a:defRPr/>
+            </a:lvl7pPr>
+            <a:lvl8pPr marL="4876678" lvl="7" indent="-423323">
+              <a:spcBef>
+                <a:spcPts val="0"/>
+              </a:spcBef>
+              <a:spcAft>
+                <a:spcPts val="0"/>
+              </a:spcAft>
+              <a:buSzPts val="1400"/>
+              <a:buChar char="○"/>
+              <a:defRPr/>
+            </a:lvl8pPr>
+            <a:lvl9pPr marL="5486263" lvl="8" indent="-423323">
+              <a:spcBef>
+                <a:spcPts val="0"/>
+              </a:spcBef>
+              <a:spcAft>
+                <a:spcPts val="0"/>
+              </a:spcAft>
+              <a:buSzPts val="1400"/>
+              <a:buChar char="■"/>
+              <a:defRPr/>
+            </a:lvl9pPr>
+          </a:lstStyle>
+          <a:p>
+            <a:endParaRPr/>
+          </a:p>
+        </p:txBody>
+      </p:sp>
+      <p:sp>
+        <p:nvSpPr>
+          <p:cNvPr id="19" name="Google Shape;19;p4"/>
+          <p:cNvSpPr txBox="1">
+            <a:spLocks noGrp="1"/>
+          </p:cNvSpPr>
+          <p:nvPr>
+            <p:ph type="sldNum" idx="12"/>
+          </p:nvPr>
+        </p:nvSpPr>
+        <p:spPr>
+          <a:xfrm>
+            <a:off x="11296611" y="6217623"/>
+            <a:ext cx="731600" cy="524800"/>
+          </a:xfrm>
+          <a:prstGeom prst="rect">
+            <a:avLst/>
+          </a:prstGeom>
+        </p:spPr>
+        <p:txBody>
+          <a:bodyPr spcFirstLastPara="1" wrap="square" lIns="91425" tIns="91425" rIns="91425" bIns="91425" anchor="ctr" anchorCtr="0">
+            <a:normAutofit/>
+          </a:bodyPr>
+          <a:lstStyle>
+            <a:lvl1pPr lvl="0">
+              <a:buNone/>
+              <a:defRPr/>
+            </a:lvl1pPr>
+            <a:lvl2pPr lvl="1">
+              <a:buNone/>
+              <a:defRPr/>
+            </a:lvl2pPr>
+            <a:lvl3pPr lvl="2">
+              <a:buNone/>
+              <a:defRPr/>
+            </a:lvl3pPr>
+            <a:lvl4pPr lvl="3">
+              <a:buNone/>
+              <a:defRPr/>
+            </a:lvl4pPr>
+            <a:lvl5pPr lvl="4">
+              <a:buNone/>
+              <a:defRPr/>
+            </a:lvl5pPr>
+            <a:lvl6pPr lvl="5">
+              <a:buNone/>
+              <a:defRPr/>
+            </a:lvl6pPr>
+            <a:lvl7pPr lvl="6">
+              <a:buNone/>
+              <a:defRPr/>
+            </a:lvl7pPr>
+            <a:lvl8pPr lvl="7">
+              <a:buNone/>
+              <a:defRPr/>
+            </a:lvl8pPr>
+            <a:lvl9pPr lvl="8">
+              <a:buNone/>
+              <a:defRPr/>
+            </a:lvl9pPr>
+          </a:lstStyle>
+          <a:p>
+            <a:fld id="{00000000-1234-1234-1234-123412341234}" type="slidenum">
+              <a:rPr lang="en" smtClean="0"/>
+              <a:pPr/>
+              <a:t>‹#›</a:t>
+            </a:fld>
+            <a:endParaRPr lang="en"/>
+          </a:p>
+        </p:txBody>
+      </p:sp>
+    </p:spTree>
+    <p:extLst>
+      <p:ext uri="{BB962C8B-B14F-4D97-AF65-F5344CB8AC3E}">
+        <p14:creationId xmlns:p14="http://schemas.microsoft.com/office/powerpoint/2010/main" val="2009435387"/>
       </p:ext>
     </p:extLst>
   </p:cSld>
@@ -2494,7 +3349,7 @@
           <a:p>
             <a:fld id="{6383FAE1-13DE-4511-8C1B-C8AFB720664C}" type="datetimeFigureOut">
               <a:rPr lang="en-US" smtClean="0"/>
-              <a:t>7/2/2026</a:t>
+              <a:t>7/5/2026</a:t>
             </a:fld>
             <a:endParaRPr lang="en-US"/>
           </a:p>
@@ -2769,7 +3624,7 @@
           <a:p>
             <a:fld id="{6383FAE1-13DE-4511-8C1B-C8AFB720664C}" type="datetimeFigureOut">
               <a:rPr lang="en-US" smtClean="0"/>
-              <a:t>7/2/2026</a:t>
+              <a:t>7/5/2026</a:t>
             </a:fld>
             <a:endParaRPr lang="en-US"/>
           </a:p>
@@ -3034,7 +3889,7 @@
           <a:p>
             <a:fld id="{6383FAE1-13DE-4511-8C1B-C8AFB720664C}" type="datetimeFigureOut">
               <a:rPr lang="en-US" smtClean="0"/>
-              <a:t>7/2/2026</a:t>
+              <a:t>7/5/2026</a:t>
             </a:fld>
             <a:endParaRPr lang="en-US"/>
           </a:p>
@@ -3446,7 +4301,7 @@
           <a:p>
             <a:fld id="{6383FAE1-13DE-4511-8C1B-C8AFB720664C}" type="datetimeFigureOut">
               <a:rPr lang="en-US" smtClean="0"/>
-              <a:t>7/2/2026</a:t>
+              <a:t>7/5/2026</a:t>
             </a:fld>
             <a:endParaRPr lang="en-US"/>
           </a:p>
@@ -3587,7 +4442,7 @@
           <a:p>
             <a:fld id="{6383FAE1-13DE-4511-8C1B-C8AFB720664C}" type="datetimeFigureOut">
               <a:rPr lang="en-US" smtClean="0"/>
-              <a:t>7/2/2026</a:t>
+              <a:t>7/5/2026</a:t>
             </a:fld>
             <a:endParaRPr lang="en-US"/>
           </a:p>
@@ -3700,7 +4555,7 @@
           <a:p>
             <a:fld id="{6383FAE1-13DE-4511-8C1B-C8AFB720664C}" type="datetimeFigureOut">
               <a:rPr lang="en-US" smtClean="0"/>
-              <a:t>7/2/2026</a:t>
+              <a:t>7/5/2026</a:t>
             </a:fld>
             <a:endParaRPr lang="en-US"/>
           </a:p>
@@ -4011,7 +4866,7 @@
           <a:p>
             <a:fld id="{6383FAE1-13DE-4511-8C1B-C8AFB720664C}" type="datetimeFigureOut">
               <a:rPr lang="en-US" smtClean="0"/>
-              <a:t>7/2/2026</a:t>
+              <a:t>7/5/2026</a:t>
             </a:fld>
             <a:endParaRPr lang="en-US"/>
           </a:p>
@@ -4302,7 +5157,7 @@
           <a:p>
             <a:fld id="{6383FAE1-13DE-4511-8C1B-C8AFB720664C}" type="datetimeFigureOut">
               <a:rPr lang="en-US" smtClean="0"/>
-              <a:t>7/2/2026</a:t>
+              <a:t>7/5/2026</a:t>
             </a:fld>
             <a:endParaRPr lang="en-US"/>
           </a:p>
@@ -4546,7 +5401,7 @@
           <a:p>
             <a:fld id="{6383FAE1-13DE-4511-8C1B-C8AFB720664C}" type="datetimeFigureOut">
               <a:rPr lang="en-US" smtClean="0"/>
-              <a:t>7/2/2026</a:t>
+              <a:t>7/5/2026</a:t>
             </a:fld>
             <a:endParaRPr lang="en-US"/>
           </a:p>
@@ -4657,7 +5512,7 @@
           <p:nvPr userDrawn="1"/>
         </p:nvPicPr>
         <p:blipFill>
-          <a:blip r:embed="rId13">
+          <a:blip r:embed="rId14">
             <a:alphaModFix amt="50000"/>
             <a:extLst>
               <a:ext uri="{28A0092B-C50C-407E-A947-70E740481C1C}">
@@ -4719,7 +5574,7 @@
           <p:nvPr userDrawn="1"/>
         </p:nvPicPr>
         <p:blipFill>
-          <a:blip r:embed="rId13">
+          <a:blip r:embed="rId14">
             <a:alphaModFix/>
             <a:extLst>
               <a:ext uri="{28A0092B-C50C-407E-A947-70E740481C1C}">
@@ -4786,6 +5641,7 @@
     <p:sldLayoutId id="2147483657" r:id="rId9"/>
     <p:sldLayoutId id="2147483658" r:id="rId10"/>
     <p:sldLayoutId id="2147483659" r:id="rId11"/>
+    <p:sldLayoutId id="2147483660" r:id="rId12"/>
   </p:sldLayoutIdLst>
   <p:txStyles>
     <p:titleStyle>
@@ -5145,6 +6001,203 @@
   <p:cSld>
     <p:spTree>
       <p:nvGrpSpPr>
+        <p:cNvPr id="1" name=""/>
+        <p:cNvGrpSpPr/>
+        <p:nvPr/>
+      </p:nvGrpSpPr>
+      <p:grpSpPr>
+        <a:xfrm>
+          <a:off x="0" y="0"/>
+          <a:ext cx="0" cy="0"/>
+          <a:chOff x="0" y="0"/>
+          <a:chExt cx="0" cy="0"/>
+        </a:xfrm>
+      </p:grpSpPr>
+      <p:sp>
+        <p:nvSpPr>
+          <p:cNvPr id="5" name="TextBox 4">
+            <a:extLst>
+              <a:ext uri="{FF2B5EF4-FFF2-40B4-BE49-F238E27FC236}">
+                <a16:creationId xmlns:a16="http://schemas.microsoft.com/office/drawing/2014/main" id="{DC1E3151-BBC1-B76C-848D-AAF87366B8DE}"/>
+              </a:ext>
+            </a:extLst>
+          </p:cNvPr>
+          <p:cNvSpPr txBox="1"/>
+          <p:nvPr/>
+        </p:nvSpPr>
+        <p:spPr>
+          <a:xfrm>
+            <a:off x="192024" y="969925"/>
+            <a:ext cx="10561320" cy="2677656"/>
+          </a:xfrm>
+          <a:prstGeom prst="rect">
+            <a:avLst/>
+          </a:prstGeom>
+          <a:noFill/>
+        </p:spPr>
+        <p:txBody>
+          <a:bodyPr wrap="square">
+            <a:spAutoFit/>
+          </a:bodyPr>
+          <a:lstStyle/>
+          <a:p>
+            <a:r>
+              <a:rPr lang="en-US" sz="2400" b="1" dirty="0">
+                <a:solidFill>
+                  <a:schemeClr val="accent6">
+                    <a:lumMod val="60000"/>
+                    <a:lumOff val="40000"/>
+                  </a:schemeClr>
+                </a:solidFill>
+              </a:rPr>
+              <a:t>Key Concepts of Transformers</a:t>
+            </a:r>
+          </a:p>
+          <a:p>
+            <a:endParaRPr lang="en-US" sz="2400" dirty="0">
+              <a:solidFill>
+                <a:schemeClr val="accent6">
+                  <a:lumMod val="60000"/>
+                  <a:lumOff val="40000"/>
+                </a:schemeClr>
+              </a:solidFill>
+            </a:endParaRPr>
+          </a:p>
+          <a:p>
+            <a:pPr marL="342900" indent="-342900">
+              <a:buFont typeface="Arial" panose="020B0604020202020204" pitchFamily="34" charset="0"/>
+              <a:buChar char="•"/>
+            </a:pPr>
+            <a:r>
+              <a:rPr lang="en-US" sz="2400" dirty="0">
+                <a:solidFill>
+                  <a:schemeClr val="accent6">
+                    <a:lumMod val="60000"/>
+                    <a:lumOff val="40000"/>
+                  </a:schemeClr>
+                </a:solidFill>
+              </a:rPr>
+              <a:t>Self-Attention</a:t>
+            </a:r>
+          </a:p>
+          <a:p>
+            <a:pPr marL="342900" indent="-342900">
+              <a:buFont typeface="Arial" panose="020B0604020202020204" pitchFamily="34" charset="0"/>
+              <a:buChar char="•"/>
+            </a:pPr>
+            <a:r>
+              <a:rPr lang="en-US" sz="2400" dirty="0">
+                <a:solidFill>
+                  <a:schemeClr val="accent6">
+                    <a:lumMod val="60000"/>
+                    <a:lumOff val="40000"/>
+                  </a:schemeClr>
+                </a:solidFill>
+              </a:rPr>
+              <a:t>Parallel Processing</a:t>
+            </a:r>
+          </a:p>
+          <a:p>
+            <a:pPr marL="342900" indent="-342900">
+              <a:buFont typeface="Arial" panose="020B0604020202020204" pitchFamily="34" charset="0"/>
+              <a:buChar char="•"/>
+            </a:pPr>
+            <a:r>
+              <a:rPr lang="en-US" sz="2400" dirty="0">
+                <a:solidFill>
+                  <a:schemeClr val="accent6">
+                    <a:lumMod val="60000"/>
+                    <a:lumOff val="40000"/>
+                  </a:schemeClr>
+                </a:solidFill>
+              </a:rPr>
+              <a:t>Encoder-Decoder Structure</a:t>
+            </a:r>
+          </a:p>
+          <a:p>
+            <a:pPr marL="342900" indent="-342900">
+              <a:buFont typeface="Arial" panose="020B0604020202020204" pitchFamily="34" charset="0"/>
+              <a:buChar char="•"/>
+            </a:pPr>
+            <a:r>
+              <a:rPr lang="en-US" sz="2400" dirty="0">
+                <a:solidFill>
+                  <a:schemeClr val="accent6">
+                    <a:lumMod val="60000"/>
+                    <a:lumOff val="40000"/>
+                  </a:schemeClr>
+                </a:solidFill>
+              </a:rPr>
+              <a:t>Positional Encoding </a:t>
+            </a:r>
+          </a:p>
+          <a:p>
+            <a:pPr marL="342900" indent="-342900">
+              <a:buFont typeface="Arial" panose="020B0604020202020204" pitchFamily="34" charset="0"/>
+              <a:buChar char="•"/>
+            </a:pPr>
+            <a:r>
+              <a:rPr lang="en-US" sz="2400" dirty="0">
+                <a:solidFill>
+                  <a:schemeClr val="accent6">
+                    <a:lumMod val="60000"/>
+                    <a:lumOff val="40000"/>
+                  </a:schemeClr>
+                </a:solidFill>
+              </a:rPr>
+              <a:t>Multi-Head Attention</a:t>
+            </a:r>
+          </a:p>
+        </p:txBody>
+      </p:sp>
+      <p:pic>
+        <p:nvPicPr>
+          <p:cNvPr id="2" name="Picture 1">
+            <a:extLst>
+              <a:ext uri="{FF2B5EF4-FFF2-40B4-BE49-F238E27FC236}">
+                <a16:creationId xmlns:a16="http://schemas.microsoft.com/office/drawing/2014/main" id="{5BDE5055-6755-6223-64B9-44FB5DC9D83D}"/>
+              </a:ext>
+            </a:extLst>
+          </p:cNvPr>
+          <p:cNvPicPr>
+            <a:picLocks noChangeAspect="1"/>
+          </p:cNvPicPr>
+          <p:nvPr/>
+        </p:nvPicPr>
+        <p:blipFill>
+          <a:blip r:embed="rId2"/>
+          <a:stretch>
+            <a:fillRect/>
+          </a:stretch>
+        </p:blipFill>
+        <p:spPr>
+          <a:xfrm>
+            <a:off x="5472684" y="425058"/>
+            <a:ext cx="5157397" cy="6153912"/>
+          </a:xfrm>
+          <a:prstGeom prst="rect">
+            <a:avLst/>
+          </a:prstGeom>
+        </p:spPr>
+      </p:pic>
+    </p:spTree>
+    <p:extLst>
+      <p:ext uri="{BB962C8B-B14F-4D97-AF65-F5344CB8AC3E}">
+        <p14:creationId xmlns:p14="http://schemas.microsoft.com/office/powerpoint/2010/main" val="1007131688"/>
+      </p:ext>
+    </p:extLst>
+  </p:cSld>
+  <p:clrMapOvr>
+    <a:masterClrMapping/>
+  </p:clrMapOvr>
+</p:sld>
+</file>
+
+<file path=ppt/slides/slide11.xml><?xml version="1.0" encoding="utf-8"?>
+<p:sld xmlns:a="http://schemas.openxmlformats.org/drawingml/2006/main" xmlns:r="http://schemas.openxmlformats.org/officeDocument/2006/relationships" xmlns:p="http://schemas.openxmlformats.org/presentationml/2006/main">
+  <p:cSld>
+    <p:spTree>
+      <p:nvGrpSpPr>
         <p:cNvPr id="1" name="">
           <a:extLst>
             <a:ext uri="{FF2B5EF4-FFF2-40B4-BE49-F238E27FC236}">
@@ -5177,7 +6230,7 @@
         </p:nvSpPr>
         <p:spPr>
           <a:xfrm>
-            <a:off x="100584" y="1132185"/>
+            <a:off x="100584" y="692157"/>
             <a:ext cx="10561320" cy="1938992"/>
           </a:xfrm>
           <a:prstGeom prst="rect">
@@ -5284,7 +6337,7 @@
                   </a:schemeClr>
                 </a:solidFill>
               </a:rPr>
-              <a:t> (e.g., BERT – understanding tasks)</a:t>
+              <a:t> (e.g., BERT – understanding tasks) – sentiment analysis</a:t>
             </a:r>
           </a:p>
           <a:p>
@@ -5393,7 +6446,7 @@
         </p:nvSpPr>
         <p:spPr>
           <a:xfrm>
-            <a:off x="2990088" y="3429000"/>
+            <a:off x="2459736" y="3099816"/>
             <a:ext cx="4197096" cy="1467612"/>
           </a:xfrm>
           <a:prstGeom prst="rect">
@@ -5439,7 +6492,7 @@
         </p:nvSpPr>
         <p:spPr>
           <a:xfrm>
-            <a:off x="3195828" y="3480453"/>
+            <a:off x="2665476" y="3151269"/>
             <a:ext cx="1618488" cy="722376"/>
           </a:xfrm>
           <a:prstGeom prst="rect">
@@ -5498,7 +6551,7 @@
         </p:nvSpPr>
         <p:spPr>
           <a:xfrm>
-            <a:off x="5381244" y="3480453"/>
+            <a:off x="4850892" y="3151269"/>
             <a:ext cx="1618488" cy="722376"/>
           </a:xfrm>
           <a:prstGeom prst="rect">
@@ -5557,7 +6610,7 @@
         </p:nvSpPr>
         <p:spPr>
           <a:xfrm>
-            <a:off x="4498848" y="4527280"/>
+            <a:off x="3968496" y="4198096"/>
             <a:ext cx="1325619" cy="369332"/>
           </a:xfrm>
           <a:prstGeom prst="rect">
@@ -5599,7 +6652,7 @@
         </p:nvSpPr>
         <p:spPr>
           <a:xfrm>
-            <a:off x="1917454" y="5559552"/>
+            <a:off x="1387102" y="5230368"/>
             <a:ext cx="2926080" cy="675995"/>
           </a:xfrm>
           <a:prstGeom prst="ellipse">
@@ -5629,7 +6682,7 @@
             <a:pPr algn="ctr"/>
             <a:r>
               <a:rPr lang="en-US" dirty="0"/>
-              <a:t>How are you ?</a:t>
+              <a:t>I am feeling awesome ?</a:t>
             </a:r>
           </a:p>
         </p:txBody>
@@ -5648,7 +6701,7 @@
         </p:nvSpPr>
         <p:spPr>
           <a:xfrm rot="16200000">
-            <a:off x="2892183" y="5043416"/>
+            <a:off x="2361831" y="4714232"/>
             <a:ext cx="565142" cy="369332"/>
           </a:xfrm>
           <a:prstGeom prst="rightArrow">
@@ -5694,7 +6747,7 @@
         </p:nvSpPr>
         <p:spPr>
           <a:xfrm>
-            <a:off x="8060436" y="3526834"/>
+            <a:off x="7530084" y="3197650"/>
             <a:ext cx="2926080" cy="675995"/>
           </a:xfrm>
           <a:prstGeom prst="ellipse">
@@ -5724,15 +6777,7 @@
             <a:pPr algn="ctr"/>
             <a:r>
               <a:rPr lang="en-US" dirty="0"/>
-              <a:t>Como </a:t>
-            </a:r>
-            <a:r>
-              <a:rPr lang="en-US" dirty="0" err="1"/>
-              <a:t>Estas</a:t>
-            </a:r>
-            <a:r>
-              <a:rPr lang="en-US" dirty="0"/>
-              <a:t> ?</a:t>
+              <a:t>Positive</a:t>
             </a:r>
           </a:p>
         </p:txBody>
@@ -5751,7 +6796,7 @@
         </p:nvSpPr>
         <p:spPr>
           <a:xfrm>
-            <a:off x="7324344" y="3758184"/>
+            <a:off x="6793992" y="3429000"/>
             <a:ext cx="539496" cy="301752"/>
           </a:xfrm>
           <a:prstGeom prst="rightArrow">
@@ -5797,7 +6842,7 @@
         </p:nvSpPr>
         <p:spPr>
           <a:xfrm>
-            <a:off x="2310094" y="5042022"/>
+            <a:off x="1779742" y="4712838"/>
             <a:ext cx="679994" cy="369332"/>
           </a:xfrm>
           <a:prstGeom prst="rect">
@@ -5839,7 +6884,7 @@
         </p:nvSpPr>
         <p:spPr>
           <a:xfrm>
-            <a:off x="7324344" y="4157948"/>
+            <a:off x="6793992" y="3828764"/>
             <a:ext cx="825867" cy="369332"/>
           </a:xfrm>
           <a:prstGeom prst="rect">
@@ -5881,7 +6926,7 @@
         </p:nvSpPr>
         <p:spPr>
           <a:xfrm>
-            <a:off x="5523528" y="5482050"/>
+            <a:off x="4993176" y="5152866"/>
             <a:ext cx="6190488" cy="830997"/>
           </a:xfrm>
           <a:prstGeom prst="rect">
@@ -5956,7 +7001,7 @@
         </p:nvSpPr>
         <p:spPr>
           <a:xfrm>
-            <a:off x="4914900" y="3630614"/>
+            <a:off x="4384548" y="3301430"/>
             <a:ext cx="466344" cy="422053"/>
           </a:xfrm>
           <a:prstGeom prst="rightArrow">
@@ -5991,6 +7036,303 @@
           </a:p>
         </p:txBody>
       </p:sp>
+      <mc:AlternateContent xmlns:mc="http://schemas.openxmlformats.org/markup-compatibility/2006" xmlns:p14="http://schemas.microsoft.com/office/powerpoint/2010/main">
+        <mc:Choice Requires="p14">
+          <p:contentPart p14:bwMode="auto" r:id="rId2">
+            <p14:nvContentPartPr>
+              <p14:cNvPr id="14" name="Ink 13">
+                <a:extLst>
+                  <a:ext uri="{FF2B5EF4-FFF2-40B4-BE49-F238E27FC236}">
+                    <a16:creationId xmlns:a16="http://schemas.microsoft.com/office/drawing/2014/main" id="{68B046BB-C3C5-B6C2-F695-609A26ED8839}"/>
+                  </a:ext>
+                </a:extLst>
+              </p14:cNvPr>
+              <p14:cNvContentPartPr/>
+              <p14:nvPr/>
+            </p14:nvContentPartPr>
+            <p14:xfrm>
+              <a:off x="4887504" y="1194696"/>
+              <a:ext cx="9360" cy="7560"/>
+            </p14:xfrm>
+          </p:contentPart>
+        </mc:Choice>
+        <mc:Fallback xmlns="">
+          <p:pic>
+            <p:nvPicPr>
+              <p:cNvPr id="14" name="Ink 13">
+                <a:extLst>
+                  <a:ext uri="{FF2B5EF4-FFF2-40B4-BE49-F238E27FC236}">
+                    <a16:creationId xmlns:a16="http://schemas.microsoft.com/office/drawing/2014/main" id="{68B046BB-C3C5-B6C2-F695-609A26ED8839}"/>
+                  </a:ext>
+                </a:extLst>
+              </p:cNvPr>
+              <p:cNvPicPr/>
+              <p:nvPr/>
+            </p:nvPicPr>
+            <p:blipFill>
+              <a:blip r:embed="rId3"/>
+              <a:stretch>
+                <a:fillRect/>
+              </a:stretch>
+            </p:blipFill>
+            <p:spPr>
+              <a:xfrm>
+                <a:off x="4869864" y="1177056"/>
+                <a:ext cx="45000" cy="43200"/>
+              </a:xfrm>
+              <a:prstGeom prst="rect">
+                <a:avLst/>
+              </a:prstGeom>
+            </p:spPr>
+          </p:pic>
+        </mc:Fallback>
+      </mc:AlternateContent>
+      <p:grpSp>
+        <p:nvGrpSpPr>
+          <p:cNvPr id="19" name="Group 18">
+            <a:extLst>
+              <a:ext uri="{FF2B5EF4-FFF2-40B4-BE49-F238E27FC236}">
+                <a16:creationId xmlns:a16="http://schemas.microsoft.com/office/drawing/2014/main" id="{91EEFDFC-3858-0027-A780-F746E82120EE}"/>
+              </a:ext>
+            </a:extLst>
+          </p:cNvPr>
+          <p:cNvGrpSpPr/>
+          <p:nvPr/>
+        </p:nvGrpSpPr>
+        <p:grpSpPr>
+          <a:xfrm>
+            <a:off x="5108544" y="3275496"/>
+            <a:ext cx="897120" cy="744120"/>
+            <a:chOff x="5108544" y="3275496"/>
+            <a:chExt cx="897120" cy="744120"/>
+          </a:xfrm>
+        </p:grpSpPr>
+        <mc:AlternateContent xmlns:mc="http://schemas.openxmlformats.org/markup-compatibility/2006" xmlns:p14="http://schemas.microsoft.com/office/powerpoint/2010/main">
+          <mc:Choice Requires="p14">
+            <p:contentPart p14:bwMode="auto" r:id="rId4">
+              <p14:nvContentPartPr>
+                <p14:cNvPr id="17" name="Ink 16">
+                  <a:extLst>
+                    <a:ext uri="{FF2B5EF4-FFF2-40B4-BE49-F238E27FC236}">
+                      <a16:creationId xmlns:a16="http://schemas.microsoft.com/office/drawing/2014/main" id="{43F931F8-C35B-B68E-34B9-B16FDC91A062}"/>
+                    </a:ext>
+                  </a:extLst>
+                </p14:cNvPr>
+                <p14:cNvContentPartPr/>
+                <p14:nvPr/>
+              </p14:nvContentPartPr>
+              <p14:xfrm>
+                <a:off x="5217264" y="3290616"/>
+                <a:ext cx="756720" cy="523080"/>
+              </p14:xfrm>
+            </p:contentPart>
+          </mc:Choice>
+          <mc:Fallback xmlns="">
+            <p:pic>
+              <p:nvPicPr>
+                <p:cNvPr id="17" name="Ink 16">
+                  <a:extLst>
+                    <a:ext uri="{FF2B5EF4-FFF2-40B4-BE49-F238E27FC236}">
+                      <a16:creationId xmlns:a16="http://schemas.microsoft.com/office/drawing/2014/main" id="{43F931F8-C35B-B68E-34B9-B16FDC91A062}"/>
+                    </a:ext>
+                  </a:extLst>
+                </p:cNvPr>
+                <p:cNvPicPr/>
+                <p:nvPr/>
+              </p:nvPicPr>
+              <p:blipFill>
+                <a:blip r:embed="rId5"/>
+                <a:stretch>
+                  <a:fillRect/>
+                </a:stretch>
+              </p:blipFill>
+              <p:spPr>
+                <a:xfrm>
+                  <a:off x="5199624" y="3272976"/>
+                  <a:ext cx="792360" cy="558720"/>
+                </a:xfrm>
+                <a:prstGeom prst="rect">
+                  <a:avLst/>
+                </a:prstGeom>
+              </p:spPr>
+            </p:pic>
+          </mc:Fallback>
+        </mc:AlternateContent>
+        <mc:AlternateContent xmlns:mc="http://schemas.openxmlformats.org/markup-compatibility/2006" xmlns:p14="http://schemas.microsoft.com/office/powerpoint/2010/main">
+          <mc:Choice Requires="p14">
+            <p:contentPart p14:bwMode="auto" r:id="rId6">
+              <p14:nvContentPartPr>
+                <p14:cNvPr id="18" name="Ink 17">
+                  <a:extLst>
+                    <a:ext uri="{FF2B5EF4-FFF2-40B4-BE49-F238E27FC236}">
+                      <a16:creationId xmlns:a16="http://schemas.microsoft.com/office/drawing/2014/main" id="{4A1ACBE1-4021-86BD-2034-EEC92946E817}"/>
+                    </a:ext>
+                  </a:extLst>
+                </p14:cNvPr>
+                <p14:cNvContentPartPr/>
+                <p14:nvPr/>
+              </p14:nvContentPartPr>
+              <p14:xfrm>
+                <a:off x="5108544" y="3275496"/>
+                <a:ext cx="897120" cy="744120"/>
+              </p14:xfrm>
+            </p:contentPart>
+          </mc:Choice>
+          <mc:Fallback xmlns="">
+            <p:pic>
+              <p:nvPicPr>
+                <p:cNvPr id="18" name="Ink 17">
+                  <a:extLst>
+                    <a:ext uri="{FF2B5EF4-FFF2-40B4-BE49-F238E27FC236}">
+                      <a16:creationId xmlns:a16="http://schemas.microsoft.com/office/drawing/2014/main" id="{4A1ACBE1-4021-86BD-2034-EEC92946E817}"/>
+                    </a:ext>
+                  </a:extLst>
+                </p:cNvPr>
+                <p:cNvPicPr/>
+                <p:nvPr/>
+              </p:nvPicPr>
+              <p:blipFill>
+                <a:blip r:embed="rId7"/>
+                <a:stretch>
+                  <a:fillRect/>
+                </a:stretch>
+              </p:blipFill>
+              <p:spPr>
+                <a:xfrm>
+                  <a:off x="5090904" y="3257856"/>
+                  <a:ext cx="932760" cy="779760"/>
+                </a:xfrm>
+                <a:prstGeom prst="rect">
+                  <a:avLst/>
+                </a:prstGeom>
+              </p:spPr>
+            </p:pic>
+          </mc:Fallback>
+        </mc:AlternateContent>
+      </p:grpSp>
+      <p:grpSp>
+        <p:nvGrpSpPr>
+          <p:cNvPr id="22" name="Group 21">
+            <a:extLst>
+              <a:ext uri="{FF2B5EF4-FFF2-40B4-BE49-F238E27FC236}">
+                <a16:creationId xmlns:a16="http://schemas.microsoft.com/office/drawing/2014/main" id="{8AB8BD39-6B61-23FD-8529-1F3781177C14}"/>
+              </a:ext>
+            </a:extLst>
+          </p:cNvPr>
+          <p:cNvGrpSpPr/>
+          <p:nvPr/>
+        </p:nvGrpSpPr>
+        <p:grpSpPr>
+          <a:xfrm>
+            <a:off x="8196624" y="1709856"/>
+            <a:ext cx="937080" cy="1068120"/>
+            <a:chOff x="8196624" y="1709856"/>
+            <a:chExt cx="937080" cy="1068120"/>
+          </a:xfrm>
+        </p:grpSpPr>
+        <mc:AlternateContent xmlns:mc="http://schemas.openxmlformats.org/markup-compatibility/2006" xmlns:p14="http://schemas.microsoft.com/office/powerpoint/2010/main">
+          <mc:Choice Requires="p14">
+            <p:contentPart p14:bwMode="auto" r:id="rId8">
+              <p14:nvContentPartPr>
+                <p14:cNvPr id="20" name="Ink 19">
+                  <a:extLst>
+                    <a:ext uri="{FF2B5EF4-FFF2-40B4-BE49-F238E27FC236}">
+                      <a16:creationId xmlns:a16="http://schemas.microsoft.com/office/drawing/2014/main" id="{D4C82C39-87A7-AC16-3706-77226915056D}"/>
+                    </a:ext>
+                  </a:extLst>
+                </p14:cNvPr>
+                <p14:cNvContentPartPr/>
+                <p14:nvPr/>
+              </p14:nvContentPartPr>
+              <p14:xfrm>
+                <a:off x="8212824" y="1709856"/>
+                <a:ext cx="920880" cy="1036440"/>
+              </p14:xfrm>
+            </p:contentPart>
+          </mc:Choice>
+          <mc:Fallback xmlns="">
+            <p:pic>
+              <p:nvPicPr>
+                <p:cNvPr id="20" name="Ink 19">
+                  <a:extLst>
+                    <a:ext uri="{FF2B5EF4-FFF2-40B4-BE49-F238E27FC236}">
+                      <a16:creationId xmlns:a16="http://schemas.microsoft.com/office/drawing/2014/main" id="{D4C82C39-87A7-AC16-3706-77226915056D}"/>
+                    </a:ext>
+                  </a:extLst>
+                </p:cNvPr>
+                <p:cNvPicPr/>
+                <p:nvPr/>
+              </p:nvPicPr>
+              <p:blipFill>
+                <a:blip r:embed="rId9"/>
+                <a:stretch>
+                  <a:fillRect/>
+                </a:stretch>
+              </p:blipFill>
+              <p:spPr>
+                <a:xfrm>
+                  <a:off x="8194824" y="1691856"/>
+                  <a:ext cx="956520" cy="1072080"/>
+                </a:xfrm>
+                <a:prstGeom prst="rect">
+                  <a:avLst/>
+                </a:prstGeom>
+              </p:spPr>
+            </p:pic>
+          </mc:Fallback>
+        </mc:AlternateContent>
+        <mc:AlternateContent xmlns:mc="http://schemas.openxmlformats.org/markup-compatibility/2006" xmlns:p14="http://schemas.microsoft.com/office/powerpoint/2010/main">
+          <mc:Choice Requires="p14">
+            <p:contentPart p14:bwMode="auto" r:id="rId10">
+              <p14:nvContentPartPr>
+                <p14:cNvPr id="21" name="Ink 20">
+                  <a:extLst>
+                    <a:ext uri="{FF2B5EF4-FFF2-40B4-BE49-F238E27FC236}">
+                      <a16:creationId xmlns:a16="http://schemas.microsoft.com/office/drawing/2014/main" id="{97C49442-BBAE-A0EB-1B35-809877ABF871}"/>
+                    </a:ext>
+                  </a:extLst>
+                </p14:cNvPr>
+                <p14:cNvContentPartPr/>
+                <p14:nvPr/>
+              </p14:nvContentPartPr>
+              <p14:xfrm>
+                <a:off x="8196624" y="2583936"/>
+                <a:ext cx="363240" cy="194040"/>
+              </p14:xfrm>
+            </p:contentPart>
+          </mc:Choice>
+          <mc:Fallback xmlns="">
+            <p:pic>
+              <p:nvPicPr>
+                <p:cNvPr id="21" name="Ink 20">
+                  <a:extLst>
+                    <a:ext uri="{FF2B5EF4-FFF2-40B4-BE49-F238E27FC236}">
+                      <a16:creationId xmlns:a16="http://schemas.microsoft.com/office/drawing/2014/main" id="{97C49442-BBAE-A0EB-1B35-809877ABF871}"/>
+                    </a:ext>
+                  </a:extLst>
+                </p:cNvPr>
+                <p:cNvPicPr/>
+                <p:nvPr/>
+              </p:nvPicPr>
+              <p:blipFill>
+                <a:blip r:embed="rId11"/>
+                <a:stretch>
+                  <a:fillRect/>
+                </a:stretch>
+              </p:blipFill>
+              <p:spPr>
+                <a:xfrm>
+                  <a:off x="8178984" y="2566296"/>
+                  <a:ext cx="398880" cy="229680"/>
+                </a:xfrm>
+                <a:prstGeom prst="rect">
+                  <a:avLst/>
+                </a:prstGeom>
+              </p:spPr>
+            </p:pic>
+          </mc:Fallback>
+        </mc:AlternateContent>
+      </p:grpSp>
     </p:spTree>
     <p:extLst>
       <p:ext uri="{BB962C8B-B14F-4D97-AF65-F5344CB8AC3E}">
@@ -6004,7 +7346,2147 @@
 </p:sld>
 </file>
 
-<file path=ppt/slides/slide11.xml><?xml version="1.0" encoding="utf-8"?>
+<file path=ppt/slides/slide12.xml><?xml version="1.0" encoding="utf-8"?>
+<p:sld xmlns:a="http://schemas.openxmlformats.org/drawingml/2006/main" xmlns:r="http://schemas.openxmlformats.org/officeDocument/2006/relationships" xmlns:p="http://schemas.openxmlformats.org/presentationml/2006/main">
+  <p:cSld>
+    <p:spTree>
+      <p:nvGrpSpPr>
+        <p:cNvPr id="1" name="">
+          <a:extLst>
+            <a:ext uri="{FF2B5EF4-FFF2-40B4-BE49-F238E27FC236}">
+              <a16:creationId xmlns:a16="http://schemas.microsoft.com/office/drawing/2014/main" id="{1A3EE6CE-E66C-6C41-B159-26187BD9A971}"/>
+            </a:ext>
+          </a:extLst>
+        </p:cNvPr>
+        <p:cNvGrpSpPr/>
+        <p:nvPr/>
+      </p:nvGrpSpPr>
+      <p:grpSpPr>
+        <a:xfrm>
+          <a:off x="0" y="0"/>
+          <a:ext cx="0" cy="0"/>
+          <a:chOff x="0" y="0"/>
+          <a:chExt cx="0" cy="0"/>
+        </a:xfrm>
+      </p:grpSpPr>
+      <p:sp>
+        <p:nvSpPr>
+          <p:cNvPr id="5" name="TextBox 4">
+            <a:extLst>
+              <a:ext uri="{FF2B5EF4-FFF2-40B4-BE49-F238E27FC236}">
+                <a16:creationId xmlns:a16="http://schemas.microsoft.com/office/drawing/2014/main" id="{D63D427B-5061-9CBA-6514-20DA589EE924}"/>
+              </a:ext>
+            </a:extLst>
+          </p:cNvPr>
+          <p:cNvSpPr txBox="1"/>
+          <p:nvPr/>
+        </p:nvSpPr>
+        <p:spPr>
+          <a:xfrm>
+            <a:off x="100584" y="692157"/>
+            <a:ext cx="10561320" cy="1938992"/>
+          </a:xfrm>
+          <a:prstGeom prst="rect">
+            <a:avLst/>
+          </a:prstGeom>
+          <a:noFill/>
+        </p:spPr>
+        <p:txBody>
+          <a:bodyPr wrap="square">
+            <a:spAutoFit/>
+          </a:bodyPr>
+          <a:lstStyle/>
+          <a:p>
+            <a:pPr marL="0" indent="0">
+              <a:buNone/>
+            </a:pPr>
+            <a:r>
+              <a:rPr lang="en-US" sz="2400" dirty="0">
+                <a:solidFill>
+                  <a:schemeClr val="accent6">
+                    <a:lumMod val="60000"/>
+                    <a:lumOff val="40000"/>
+                  </a:schemeClr>
+                </a:solidFill>
+              </a:rPr>
+              <a:t>Transformers consist of </a:t>
+            </a:r>
+            <a:r>
+              <a:rPr lang="en-US" sz="2400" b="1" dirty="0">
+                <a:solidFill>
+                  <a:schemeClr val="accent6">
+                    <a:lumMod val="60000"/>
+                    <a:lumOff val="40000"/>
+                  </a:schemeClr>
+                </a:solidFill>
+              </a:rPr>
+              <a:t>encoder</a:t>
+            </a:r>
+            <a:r>
+              <a:rPr lang="en-US" sz="2400" dirty="0">
+                <a:solidFill>
+                  <a:schemeClr val="accent6">
+                    <a:lumMod val="60000"/>
+                    <a:lumOff val="40000"/>
+                  </a:schemeClr>
+                </a:solidFill>
+              </a:rPr>
+              <a:t> and </a:t>
+            </a:r>
+            <a:r>
+              <a:rPr lang="en-US" sz="2400" b="1" dirty="0">
+                <a:solidFill>
+                  <a:schemeClr val="accent6">
+                    <a:lumMod val="60000"/>
+                    <a:lumOff val="40000"/>
+                  </a:schemeClr>
+                </a:solidFill>
+              </a:rPr>
+              <a:t>decoder</a:t>
+            </a:r>
+            <a:r>
+              <a:rPr lang="en-US" sz="2400" dirty="0">
+                <a:solidFill>
+                  <a:schemeClr val="accent6">
+                    <a:lumMod val="60000"/>
+                    <a:lumOff val="40000"/>
+                  </a:schemeClr>
+                </a:solidFill>
+              </a:rPr>
+              <a:t> stacks. Most models use either:</a:t>
+            </a:r>
+          </a:p>
+          <a:p>
+            <a:pPr marL="0" indent="0">
+              <a:buNone/>
+            </a:pPr>
+            <a:endParaRPr lang="en-US" sz="2400" dirty="0">
+              <a:solidFill>
+                <a:schemeClr val="accent6">
+                  <a:lumMod val="60000"/>
+                  <a:lumOff val="40000"/>
+                </a:schemeClr>
+              </a:solidFill>
+            </a:endParaRPr>
+          </a:p>
+          <a:p>
+            <a:r>
+              <a:rPr lang="en-US" sz="2400" b="1" dirty="0">
+                <a:solidFill>
+                  <a:schemeClr val="accent6">
+                    <a:lumMod val="60000"/>
+                    <a:lumOff val="40000"/>
+                  </a:schemeClr>
+                </a:solidFill>
+              </a:rPr>
+              <a:t>Encoder-only</a:t>
+            </a:r>
+            <a:r>
+              <a:rPr lang="en-US" sz="2400" dirty="0">
+                <a:solidFill>
+                  <a:schemeClr val="accent6">
+                    <a:lumMod val="60000"/>
+                    <a:lumOff val="40000"/>
+                  </a:schemeClr>
+                </a:solidFill>
+              </a:rPr>
+              <a:t> (e.g., BERT – understanding tasks) </a:t>
+            </a:r>
+          </a:p>
+          <a:p>
+            <a:r>
+              <a:rPr lang="en-US" sz="2400" b="1" dirty="0">
+                <a:solidFill>
+                  <a:schemeClr val="accent6">
+                    <a:lumMod val="60000"/>
+                    <a:lumOff val="40000"/>
+                  </a:schemeClr>
+                </a:solidFill>
+              </a:rPr>
+              <a:t>Decoder-only</a:t>
+            </a:r>
+            <a:r>
+              <a:rPr lang="en-US" sz="2400" dirty="0">
+                <a:solidFill>
+                  <a:schemeClr val="accent6">
+                    <a:lumMod val="60000"/>
+                    <a:lumOff val="40000"/>
+                  </a:schemeClr>
+                </a:solidFill>
+              </a:rPr>
+              <a:t> (e.g., GPT – generation tasks) – Write a python code</a:t>
+            </a:r>
+          </a:p>
+          <a:p>
+            <a:r>
+              <a:rPr lang="en-US" sz="2400" b="1" dirty="0">
+                <a:solidFill>
+                  <a:schemeClr val="accent6">
+                    <a:lumMod val="60000"/>
+                    <a:lumOff val="40000"/>
+                  </a:schemeClr>
+                </a:solidFill>
+              </a:rPr>
+              <a:t>Both</a:t>
+            </a:r>
+            <a:r>
+              <a:rPr lang="en-US" sz="2400" dirty="0">
+                <a:solidFill>
+                  <a:schemeClr val="accent6">
+                    <a:lumMod val="60000"/>
+                    <a:lumOff val="40000"/>
+                  </a:schemeClr>
+                </a:solidFill>
+              </a:rPr>
+              <a:t> (e.g., T5 – translation/summarization)</a:t>
+            </a:r>
+          </a:p>
+        </p:txBody>
+      </p:sp>
+      <p:sp>
+        <p:nvSpPr>
+          <p:cNvPr id="7" name="TextBox 6">
+            <a:extLst>
+              <a:ext uri="{FF2B5EF4-FFF2-40B4-BE49-F238E27FC236}">
+                <a16:creationId xmlns:a16="http://schemas.microsoft.com/office/drawing/2014/main" id="{B6A0AFAC-3AB7-E1B6-7437-8295D02B9DB3}"/>
+              </a:ext>
+            </a:extLst>
+          </p:cNvPr>
+          <p:cNvSpPr txBox="1"/>
+          <p:nvPr/>
+        </p:nvSpPr>
+        <p:spPr>
+          <a:xfrm>
+            <a:off x="100584" y="85082"/>
+            <a:ext cx="6190488" cy="461665"/>
+          </a:xfrm>
+          <a:prstGeom prst="rect">
+            <a:avLst/>
+          </a:prstGeom>
+          <a:noFill/>
+        </p:spPr>
+        <p:txBody>
+          <a:bodyPr wrap="square">
+            <a:spAutoFit/>
+          </a:bodyPr>
+          <a:lstStyle/>
+          <a:p>
+            <a:r>
+              <a:rPr lang="en-US" sz="2400" b="1" dirty="0">
+                <a:solidFill>
+                  <a:schemeClr val="accent6">
+                    <a:lumMod val="60000"/>
+                    <a:lumOff val="40000"/>
+                  </a:schemeClr>
+                </a:solidFill>
+              </a:rPr>
+              <a:t>Core Components of a Transformer</a:t>
+            </a:r>
+          </a:p>
+        </p:txBody>
+      </p:sp>
+      <p:sp>
+        <p:nvSpPr>
+          <p:cNvPr id="2" name="Rectangle 1">
+            <a:extLst>
+              <a:ext uri="{FF2B5EF4-FFF2-40B4-BE49-F238E27FC236}">
+                <a16:creationId xmlns:a16="http://schemas.microsoft.com/office/drawing/2014/main" id="{FBCA5322-398F-E2CA-4DB7-686E2F79C861}"/>
+              </a:ext>
+            </a:extLst>
+          </p:cNvPr>
+          <p:cNvSpPr/>
+          <p:nvPr/>
+        </p:nvSpPr>
+        <p:spPr>
+          <a:xfrm>
+            <a:off x="2459736" y="3099816"/>
+            <a:ext cx="4197096" cy="1467612"/>
+          </a:xfrm>
+          <a:prstGeom prst="rect">
+            <a:avLst/>
+          </a:prstGeom>
+        </p:spPr>
+        <p:style>
+          <a:lnRef idx="2">
+            <a:schemeClr val="accent1">
+              <a:shade val="15000"/>
+            </a:schemeClr>
+          </a:lnRef>
+          <a:fillRef idx="1">
+            <a:schemeClr val="accent1"/>
+          </a:fillRef>
+          <a:effectRef idx="0">
+            <a:schemeClr val="accent1"/>
+          </a:effectRef>
+          <a:fontRef idx="minor">
+            <a:schemeClr val="lt1"/>
+          </a:fontRef>
+        </p:style>
+        <p:txBody>
+          <a:bodyPr rtlCol="0" anchor="ctr"/>
+          <a:lstStyle/>
+          <a:p>
+            <a:pPr algn="ctr"/>
+            <a:endParaRPr lang="en-US" dirty="0"/>
+          </a:p>
+        </p:txBody>
+      </p:sp>
+      <p:sp>
+        <p:nvSpPr>
+          <p:cNvPr id="3" name="Rectangle 2">
+            <a:extLst>
+              <a:ext uri="{FF2B5EF4-FFF2-40B4-BE49-F238E27FC236}">
+                <a16:creationId xmlns:a16="http://schemas.microsoft.com/office/drawing/2014/main" id="{7E297848-3B47-4BCB-7399-910F6CD29DA1}"/>
+              </a:ext>
+            </a:extLst>
+          </p:cNvPr>
+          <p:cNvSpPr/>
+          <p:nvPr/>
+        </p:nvSpPr>
+        <p:spPr>
+          <a:xfrm>
+            <a:off x="2665476" y="3151269"/>
+            <a:ext cx="1618488" cy="722376"/>
+          </a:xfrm>
+          <a:prstGeom prst="rect">
+            <a:avLst/>
+          </a:prstGeom>
+          <a:solidFill>
+            <a:srgbClr val="00B050"/>
+          </a:solidFill>
+        </p:spPr>
+        <p:style>
+          <a:lnRef idx="2">
+            <a:schemeClr val="accent1">
+              <a:shade val="15000"/>
+            </a:schemeClr>
+          </a:lnRef>
+          <a:fillRef idx="1">
+            <a:schemeClr val="accent1"/>
+          </a:fillRef>
+          <a:effectRef idx="0">
+            <a:schemeClr val="accent1"/>
+          </a:effectRef>
+          <a:fontRef idx="minor">
+            <a:schemeClr val="lt1"/>
+          </a:fontRef>
+        </p:style>
+        <p:txBody>
+          <a:bodyPr rtlCol="0" anchor="ctr"/>
+          <a:lstStyle/>
+          <a:p>
+            <a:pPr algn="ctr"/>
+            <a:r>
+              <a:rPr lang="en-US" dirty="0"/>
+              <a:t>Encoder</a:t>
+            </a:r>
+          </a:p>
+          <a:p>
+            <a:pPr algn="ctr"/>
+            <a:r>
+              <a:rPr lang="en-US" dirty="0"/>
+              <a:t>layer</a:t>
+            </a:r>
+          </a:p>
+        </p:txBody>
+      </p:sp>
+      <p:sp>
+        <p:nvSpPr>
+          <p:cNvPr id="4" name="Rectangle 3">
+            <a:extLst>
+              <a:ext uri="{FF2B5EF4-FFF2-40B4-BE49-F238E27FC236}">
+                <a16:creationId xmlns:a16="http://schemas.microsoft.com/office/drawing/2014/main" id="{97836009-34FD-1F70-748B-B2524AE8323D}"/>
+              </a:ext>
+            </a:extLst>
+          </p:cNvPr>
+          <p:cNvSpPr/>
+          <p:nvPr/>
+        </p:nvSpPr>
+        <p:spPr>
+          <a:xfrm>
+            <a:off x="4850892" y="3151269"/>
+            <a:ext cx="1618488" cy="722376"/>
+          </a:xfrm>
+          <a:prstGeom prst="rect">
+            <a:avLst/>
+          </a:prstGeom>
+          <a:solidFill>
+            <a:srgbClr val="00B050"/>
+          </a:solidFill>
+        </p:spPr>
+        <p:style>
+          <a:lnRef idx="2">
+            <a:schemeClr val="accent1">
+              <a:shade val="15000"/>
+            </a:schemeClr>
+          </a:lnRef>
+          <a:fillRef idx="1">
+            <a:schemeClr val="accent1"/>
+          </a:fillRef>
+          <a:effectRef idx="0">
+            <a:schemeClr val="accent1"/>
+          </a:effectRef>
+          <a:fontRef idx="minor">
+            <a:schemeClr val="lt1"/>
+          </a:fontRef>
+        </p:style>
+        <p:txBody>
+          <a:bodyPr rtlCol="0" anchor="ctr"/>
+          <a:lstStyle/>
+          <a:p>
+            <a:pPr algn="ctr"/>
+            <a:r>
+              <a:rPr lang="en-US" dirty="0"/>
+              <a:t>Decoder</a:t>
+            </a:r>
+          </a:p>
+          <a:p>
+            <a:pPr algn="ctr"/>
+            <a:r>
+              <a:rPr lang="en-US" dirty="0"/>
+              <a:t>layer</a:t>
+            </a:r>
+          </a:p>
+        </p:txBody>
+      </p:sp>
+      <p:sp>
+        <p:nvSpPr>
+          <p:cNvPr id="6" name="TextBox 5">
+            <a:extLst>
+              <a:ext uri="{FF2B5EF4-FFF2-40B4-BE49-F238E27FC236}">
+                <a16:creationId xmlns:a16="http://schemas.microsoft.com/office/drawing/2014/main" id="{8C0D3D23-0572-9783-5368-7B8CD0DE1F74}"/>
+              </a:ext>
+            </a:extLst>
+          </p:cNvPr>
+          <p:cNvSpPr txBox="1"/>
+          <p:nvPr/>
+        </p:nvSpPr>
+        <p:spPr>
+          <a:xfrm>
+            <a:off x="3968496" y="4198096"/>
+            <a:ext cx="1325619" cy="369332"/>
+          </a:xfrm>
+          <a:prstGeom prst="rect">
+            <a:avLst/>
+          </a:prstGeom>
+          <a:noFill/>
+        </p:spPr>
+        <p:txBody>
+          <a:bodyPr wrap="none" rtlCol="0">
+            <a:spAutoFit/>
+          </a:bodyPr>
+          <a:lstStyle/>
+          <a:p>
+            <a:r>
+              <a:rPr lang="en-US" dirty="0">
+                <a:solidFill>
+                  <a:schemeClr val="accent6">
+                    <a:lumMod val="40000"/>
+                    <a:lumOff val="60000"/>
+                  </a:schemeClr>
+                </a:solidFill>
+              </a:rPr>
+              <a:t>Transformer</a:t>
+            </a:r>
+          </a:p>
+        </p:txBody>
+      </p:sp>
+      <p:sp>
+        <p:nvSpPr>
+          <p:cNvPr id="8" name="Oval 7">
+            <a:extLst>
+              <a:ext uri="{FF2B5EF4-FFF2-40B4-BE49-F238E27FC236}">
+                <a16:creationId xmlns:a16="http://schemas.microsoft.com/office/drawing/2014/main" id="{91A77B49-93B5-F938-DB94-5E4B7FAEC3F4}"/>
+              </a:ext>
+            </a:extLst>
+          </p:cNvPr>
+          <p:cNvSpPr/>
+          <p:nvPr/>
+        </p:nvSpPr>
+        <p:spPr>
+          <a:xfrm>
+            <a:off x="1387102" y="5230368"/>
+            <a:ext cx="2926080" cy="675995"/>
+          </a:xfrm>
+          <a:prstGeom prst="ellipse">
+            <a:avLst/>
+          </a:prstGeom>
+        </p:spPr>
+        <p:style>
+          <a:lnRef idx="2">
+            <a:schemeClr val="accent1">
+              <a:shade val="15000"/>
+            </a:schemeClr>
+          </a:lnRef>
+          <a:fillRef idx="1">
+            <a:schemeClr val="accent1"/>
+          </a:fillRef>
+          <a:effectRef idx="0">
+            <a:schemeClr val="accent1"/>
+          </a:effectRef>
+          <a:fontRef idx="minor">
+            <a:schemeClr val="lt1"/>
+          </a:fontRef>
+        </p:style>
+        <p:txBody>
+          <a:bodyPr rtlCol="0" anchor="ctr"/>
+          <a:lstStyle/>
+          <a:p>
+            <a:pPr algn="ctr"/>
+            <a:r>
+              <a:rPr lang="en-US" dirty="0"/>
+              <a:t>Write python code to read CSV file ?</a:t>
+            </a:r>
+          </a:p>
+        </p:txBody>
+      </p:sp>
+      <p:sp>
+        <p:nvSpPr>
+          <p:cNvPr id="9" name="Arrow: Right 8">
+            <a:extLst>
+              <a:ext uri="{FF2B5EF4-FFF2-40B4-BE49-F238E27FC236}">
+                <a16:creationId xmlns:a16="http://schemas.microsoft.com/office/drawing/2014/main" id="{CA51F9C0-BE58-DE41-FFE1-9E2D41781F96}"/>
+              </a:ext>
+            </a:extLst>
+          </p:cNvPr>
+          <p:cNvSpPr/>
+          <p:nvPr/>
+        </p:nvSpPr>
+        <p:spPr>
+          <a:xfrm rot="16200000">
+            <a:off x="2361831" y="4714232"/>
+            <a:ext cx="565142" cy="369332"/>
+          </a:xfrm>
+          <a:prstGeom prst="rightArrow">
+            <a:avLst/>
+          </a:prstGeom>
+        </p:spPr>
+        <p:style>
+          <a:lnRef idx="2">
+            <a:schemeClr val="accent1">
+              <a:shade val="15000"/>
+            </a:schemeClr>
+          </a:lnRef>
+          <a:fillRef idx="1">
+            <a:schemeClr val="accent1"/>
+          </a:fillRef>
+          <a:effectRef idx="0">
+            <a:schemeClr val="accent1"/>
+          </a:effectRef>
+          <a:fontRef idx="minor">
+            <a:schemeClr val="lt1"/>
+          </a:fontRef>
+        </p:style>
+        <p:txBody>
+          <a:bodyPr rtlCol="0" anchor="ctr"/>
+          <a:lstStyle/>
+          <a:p>
+            <a:pPr algn="ctr"/>
+            <a:endParaRPr lang="en-US"/>
+          </a:p>
+        </p:txBody>
+      </p:sp>
+      <p:sp>
+        <p:nvSpPr>
+          <p:cNvPr id="10" name="Oval 9">
+            <a:extLst>
+              <a:ext uri="{FF2B5EF4-FFF2-40B4-BE49-F238E27FC236}">
+                <a16:creationId xmlns:a16="http://schemas.microsoft.com/office/drawing/2014/main" id="{06D5B30C-B814-2C5F-F4AC-A48463B3154C}"/>
+              </a:ext>
+            </a:extLst>
+          </p:cNvPr>
+          <p:cNvSpPr/>
+          <p:nvPr/>
+        </p:nvSpPr>
+        <p:spPr>
+          <a:xfrm>
+            <a:off x="7530084" y="3197650"/>
+            <a:ext cx="2926080" cy="675995"/>
+          </a:xfrm>
+          <a:prstGeom prst="ellipse">
+            <a:avLst/>
+          </a:prstGeom>
+        </p:spPr>
+        <p:style>
+          <a:lnRef idx="2">
+            <a:schemeClr val="accent1">
+              <a:shade val="15000"/>
+            </a:schemeClr>
+          </a:lnRef>
+          <a:fillRef idx="1">
+            <a:schemeClr val="accent1"/>
+          </a:fillRef>
+          <a:effectRef idx="0">
+            <a:schemeClr val="accent1"/>
+          </a:effectRef>
+          <a:fontRef idx="minor">
+            <a:schemeClr val="lt1"/>
+          </a:fontRef>
+        </p:style>
+        <p:txBody>
+          <a:bodyPr rtlCol="0" anchor="ctr"/>
+          <a:lstStyle/>
+          <a:p>
+            <a:pPr algn="ctr"/>
+            <a:r>
+              <a:rPr lang="en-US" dirty="0"/>
+              <a:t>CODE</a:t>
+            </a:r>
+          </a:p>
+        </p:txBody>
+      </p:sp>
+      <p:sp>
+        <p:nvSpPr>
+          <p:cNvPr id="11" name="Arrow: Right 10">
+            <a:extLst>
+              <a:ext uri="{FF2B5EF4-FFF2-40B4-BE49-F238E27FC236}">
+                <a16:creationId xmlns:a16="http://schemas.microsoft.com/office/drawing/2014/main" id="{11EB2FF8-DC3F-EFD5-EBDE-42236455EBF3}"/>
+              </a:ext>
+            </a:extLst>
+          </p:cNvPr>
+          <p:cNvSpPr/>
+          <p:nvPr/>
+        </p:nvSpPr>
+        <p:spPr>
+          <a:xfrm>
+            <a:off x="6793992" y="3429000"/>
+            <a:ext cx="539496" cy="301752"/>
+          </a:xfrm>
+          <a:prstGeom prst="rightArrow">
+            <a:avLst/>
+          </a:prstGeom>
+        </p:spPr>
+        <p:style>
+          <a:lnRef idx="2">
+            <a:schemeClr val="accent1">
+              <a:shade val="15000"/>
+            </a:schemeClr>
+          </a:lnRef>
+          <a:fillRef idx="1">
+            <a:schemeClr val="accent1"/>
+          </a:fillRef>
+          <a:effectRef idx="0">
+            <a:schemeClr val="accent1"/>
+          </a:effectRef>
+          <a:fontRef idx="minor">
+            <a:schemeClr val="lt1"/>
+          </a:fontRef>
+        </p:style>
+        <p:txBody>
+          <a:bodyPr rtlCol="0" anchor="ctr"/>
+          <a:lstStyle/>
+          <a:p>
+            <a:pPr algn="ctr"/>
+            <a:endParaRPr lang="en-US"/>
+          </a:p>
+        </p:txBody>
+      </p:sp>
+      <p:sp>
+        <p:nvSpPr>
+          <p:cNvPr id="12" name="TextBox 11">
+            <a:extLst>
+              <a:ext uri="{FF2B5EF4-FFF2-40B4-BE49-F238E27FC236}">
+                <a16:creationId xmlns:a16="http://schemas.microsoft.com/office/drawing/2014/main" id="{9D44B68B-4944-7FA1-0C69-B74C4E2576ED}"/>
+              </a:ext>
+            </a:extLst>
+          </p:cNvPr>
+          <p:cNvSpPr txBox="1"/>
+          <p:nvPr/>
+        </p:nvSpPr>
+        <p:spPr>
+          <a:xfrm>
+            <a:off x="1779742" y="4712838"/>
+            <a:ext cx="679994" cy="369332"/>
+          </a:xfrm>
+          <a:prstGeom prst="rect">
+            <a:avLst/>
+          </a:prstGeom>
+          <a:noFill/>
+        </p:spPr>
+        <p:txBody>
+          <a:bodyPr wrap="none" rtlCol="0">
+            <a:spAutoFit/>
+          </a:bodyPr>
+          <a:lstStyle/>
+          <a:p>
+            <a:r>
+              <a:rPr lang="en-US" dirty="0">
+                <a:solidFill>
+                  <a:schemeClr val="accent6">
+                    <a:lumMod val="40000"/>
+                    <a:lumOff val="60000"/>
+                  </a:schemeClr>
+                </a:solidFill>
+              </a:rPr>
+              <a:t>input</a:t>
+            </a:r>
+          </a:p>
+        </p:txBody>
+      </p:sp>
+      <p:sp>
+        <p:nvSpPr>
+          <p:cNvPr id="13" name="TextBox 12">
+            <a:extLst>
+              <a:ext uri="{FF2B5EF4-FFF2-40B4-BE49-F238E27FC236}">
+                <a16:creationId xmlns:a16="http://schemas.microsoft.com/office/drawing/2014/main" id="{3F734679-9434-7CAD-5550-26B0B82F5A8E}"/>
+              </a:ext>
+            </a:extLst>
+          </p:cNvPr>
+          <p:cNvSpPr txBox="1"/>
+          <p:nvPr/>
+        </p:nvSpPr>
+        <p:spPr>
+          <a:xfrm>
+            <a:off x="6793992" y="3828764"/>
+            <a:ext cx="825867" cy="369332"/>
+          </a:xfrm>
+          <a:prstGeom prst="rect">
+            <a:avLst/>
+          </a:prstGeom>
+          <a:noFill/>
+        </p:spPr>
+        <p:txBody>
+          <a:bodyPr wrap="none" rtlCol="0">
+            <a:spAutoFit/>
+          </a:bodyPr>
+          <a:lstStyle/>
+          <a:p>
+            <a:r>
+              <a:rPr lang="en-US" dirty="0">
+                <a:solidFill>
+                  <a:schemeClr val="accent6">
+                    <a:lumMod val="40000"/>
+                    <a:lumOff val="60000"/>
+                  </a:schemeClr>
+                </a:solidFill>
+              </a:rPr>
+              <a:t>output</a:t>
+            </a:r>
+          </a:p>
+        </p:txBody>
+      </p:sp>
+      <p:sp>
+        <p:nvSpPr>
+          <p:cNvPr id="15" name="TextBox 14">
+            <a:extLst>
+              <a:ext uri="{FF2B5EF4-FFF2-40B4-BE49-F238E27FC236}">
+                <a16:creationId xmlns:a16="http://schemas.microsoft.com/office/drawing/2014/main" id="{66D5B17A-54FF-34C5-7B23-137E5BDADDD1}"/>
+              </a:ext>
+            </a:extLst>
+          </p:cNvPr>
+          <p:cNvSpPr txBox="1"/>
+          <p:nvPr/>
+        </p:nvSpPr>
+        <p:spPr>
+          <a:xfrm>
+            <a:off x="4993176" y="5152866"/>
+            <a:ext cx="6190488" cy="830997"/>
+          </a:xfrm>
+          <a:prstGeom prst="rect">
+            <a:avLst/>
+          </a:prstGeom>
+          <a:noFill/>
+        </p:spPr>
+        <p:txBody>
+          <a:bodyPr wrap="square">
+            <a:spAutoFit/>
+          </a:bodyPr>
+          <a:lstStyle/>
+          <a:p>
+            <a:r>
+              <a:rPr lang="en-US" sz="2400" b="1" dirty="0">
+                <a:solidFill>
+                  <a:schemeClr val="accent6">
+                    <a:lumMod val="60000"/>
+                    <a:lumOff val="40000"/>
+                  </a:schemeClr>
+                </a:solidFill>
+              </a:rPr>
+              <a:t>Stacking Layers: </a:t>
+            </a:r>
+            <a:r>
+              <a:rPr lang="en-US" sz="2400" dirty="0">
+                <a:solidFill>
+                  <a:schemeClr val="accent6">
+                    <a:lumMod val="60000"/>
+                    <a:lumOff val="40000"/>
+                  </a:schemeClr>
+                </a:solidFill>
+              </a:rPr>
+              <a:t>A typical transformer model stacks </a:t>
+            </a:r>
+            <a:r>
+              <a:rPr lang="en-US" sz="2400" b="1" dirty="0">
+                <a:solidFill>
+                  <a:schemeClr val="accent6">
+                    <a:lumMod val="60000"/>
+                    <a:lumOff val="40000"/>
+                  </a:schemeClr>
+                </a:solidFill>
+              </a:rPr>
+              <a:t>6–96</a:t>
+            </a:r>
+            <a:r>
+              <a:rPr lang="en-US" sz="2400" dirty="0">
+                <a:solidFill>
+                  <a:schemeClr val="accent6">
+                    <a:lumMod val="60000"/>
+                    <a:lumOff val="40000"/>
+                  </a:schemeClr>
+                </a:solidFill>
+              </a:rPr>
+              <a:t> of these encoder or decoder blocks.</a:t>
+            </a:r>
+          </a:p>
+        </p:txBody>
+      </p:sp>
+      <p:sp>
+        <p:nvSpPr>
+          <p:cNvPr id="16" name="Arrow: Right 15">
+            <a:extLst>
+              <a:ext uri="{FF2B5EF4-FFF2-40B4-BE49-F238E27FC236}">
+                <a16:creationId xmlns:a16="http://schemas.microsoft.com/office/drawing/2014/main" id="{D5B6056E-8DEF-B1BA-0AC1-AF902EE4A9D2}"/>
+              </a:ext>
+            </a:extLst>
+          </p:cNvPr>
+          <p:cNvSpPr/>
+          <p:nvPr/>
+        </p:nvSpPr>
+        <p:spPr>
+          <a:xfrm>
+            <a:off x="4384548" y="3301430"/>
+            <a:ext cx="466344" cy="422053"/>
+          </a:xfrm>
+          <a:prstGeom prst="rightArrow">
+            <a:avLst/>
+          </a:prstGeom>
+          <a:solidFill>
+            <a:srgbClr val="00B050"/>
+          </a:solidFill>
+        </p:spPr>
+        <p:style>
+          <a:lnRef idx="2">
+            <a:schemeClr val="accent1">
+              <a:shade val="15000"/>
+            </a:schemeClr>
+          </a:lnRef>
+          <a:fillRef idx="1">
+            <a:schemeClr val="accent1"/>
+          </a:fillRef>
+          <a:effectRef idx="0">
+            <a:schemeClr val="accent1"/>
+          </a:effectRef>
+          <a:fontRef idx="minor">
+            <a:schemeClr val="lt1"/>
+          </a:fontRef>
+        </p:style>
+        <p:txBody>
+          <a:bodyPr rtlCol="0" anchor="ctr"/>
+          <a:lstStyle/>
+          <a:p>
+            <a:pPr algn="ctr"/>
+            <a:endParaRPr lang="en-US"/>
+          </a:p>
+        </p:txBody>
+      </p:sp>
+      <mc:AlternateContent xmlns:mc="http://schemas.openxmlformats.org/markup-compatibility/2006" xmlns:p14="http://schemas.microsoft.com/office/powerpoint/2010/main">
+        <mc:Choice Requires="p14">
+          <p:contentPart p14:bwMode="auto" r:id="rId2">
+            <p14:nvContentPartPr>
+              <p14:cNvPr id="14" name="Ink 13">
+                <a:extLst>
+                  <a:ext uri="{FF2B5EF4-FFF2-40B4-BE49-F238E27FC236}">
+                    <a16:creationId xmlns:a16="http://schemas.microsoft.com/office/drawing/2014/main" id="{366E56BE-1D14-D068-8CE8-300175179A71}"/>
+                  </a:ext>
+                </a:extLst>
+              </p14:cNvPr>
+              <p14:cNvContentPartPr/>
+              <p14:nvPr/>
+            </p14:nvContentPartPr>
+            <p14:xfrm>
+              <a:off x="4887504" y="1194696"/>
+              <a:ext cx="9360" cy="7560"/>
+            </p14:xfrm>
+          </p:contentPart>
+        </mc:Choice>
+        <mc:Fallback xmlns="">
+          <p:pic>
+            <p:nvPicPr>
+              <p:cNvPr id="14" name="Ink 13">
+                <a:extLst>
+                  <a:ext uri="{FF2B5EF4-FFF2-40B4-BE49-F238E27FC236}">
+                    <a16:creationId xmlns:a16="http://schemas.microsoft.com/office/drawing/2014/main" id="{366E56BE-1D14-D068-8CE8-300175179A71}"/>
+                  </a:ext>
+                </a:extLst>
+              </p:cNvPr>
+              <p:cNvPicPr/>
+              <p:nvPr/>
+            </p:nvPicPr>
+            <p:blipFill>
+              <a:blip r:embed="rId3"/>
+              <a:stretch>
+                <a:fillRect/>
+              </a:stretch>
+            </p:blipFill>
+            <p:spPr>
+              <a:xfrm>
+                <a:off x="4868784" y="1175796"/>
+                <a:ext cx="46426" cy="44982"/>
+              </a:xfrm>
+              <a:prstGeom prst="rect">
+                <a:avLst/>
+              </a:prstGeom>
+            </p:spPr>
+          </p:pic>
+        </mc:Fallback>
+      </mc:AlternateContent>
+      <p:grpSp>
+        <p:nvGrpSpPr>
+          <p:cNvPr id="25" name="Group 24">
+            <a:extLst>
+              <a:ext uri="{FF2B5EF4-FFF2-40B4-BE49-F238E27FC236}">
+                <a16:creationId xmlns:a16="http://schemas.microsoft.com/office/drawing/2014/main" id="{DDFBB90A-35BE-A8E0-0C0F-F601FA33322E}"/>
+              </a:ext>
+            </a:extLst>
+          </p:cNvPr>
+          <p:cNvGrpSpPr/>
+          <p:nvPr/>
+        </p:nvGrpSpPr>
+        <p:grpSpPr>
+          <a:xfrm>
+            <a:off x="3071664" y="3204576"/>
+            <a:ext cx="835920" cy="660960"/>
+            <a:chOff x="3071664" y="3204576"/>
+            <a:chExt cx="835920" cy="660960"/>
+          </a:xfrm>
+        </p:grpSpPr>
+        <mc:AlternateContent xmlns:mc="http://schemas.openxmlformats.org/markup-compatibility/2006" xmlns:p14="http://schemas.microsoft.com/office/powerpoint/2010/main">
+          <mc:Choice Requires="p14">
+            <p:contentPart p14:bwMode="auto" r:id="rId4">
+              <p14:nvContentPartPr>
+                <p14:cNvPr id="23" name="Ink 22">
+                  <a:extLst>
+                    <a:ext uri="{FF2B5EF4-FFF2-40B4-BE49-F238E27FC236}">
+                      <a16:creationId xmlns:a16="http://schemas.microsoft.com/office/drawing/2014/main" id="{044DC9FD-2C96-1924-6FAF-63B6D823B0E7}"/>
+                    </a:ext>
+                  </a:extLst>
+                </p14:cNvPr>
+                <p14:cNvContentPartPr/>
+                <p14:nvPr/>
+              </p14:nvContentPartPr>
+              <p14:xfrm>
+                <a:off x="3109104" y="3263976"/>
+                <a:ext cx="798480" cy="353160"/>
+              </p14:xfrm>
+            </p:contentPart>
+          </mc:Choice>
+          <mc:Fallback xmlns="">
+            <p:pic>
+              <p:nvPicPr>
+                <p:cNvPr id="23" name="Ink 22">
+                  <a:extLst>
+                    <a:ext uri="{FF2B5EF4-FFF2-40B4-BE49-F238E27FC236}">
+                      <a16:creationId xmlns:a16="http://schemas.microsoft.com/office/drawing/2014/main" id="{044DC9FD-2C96-1924-6FAF-63B6D823B0E7}"/>
+                    </a:ext>
+                  </a:extLst>
+                </p:cNvPr>
+                <p:cNvPicPr/>
+                <p:nvPr/>
+              </p:nvPicPr>
+              <p:blipFill>
+                <a:blip r:embed="rId5"/>
+                <a:stretch>
+                  <a:fillRect/>
+                </a:stretch>
+              </p:blipFill>
+              <p:spPr>
+                <a:xfrm>
+                  <a:off x="3091104" y="3246336"/>
+                  <a:ext cx="834120" cy="388800"/>
+                </a:xfrm>
+                <a:prstGeom prst="rect">
+                  <a:avLst/>
+                </a:prstGeom>
+              </p:spPr>
+            </p:pic>
+          </mc:Fallback>
+        </mc:AlternateContent>
+        <mc:AlternateContent xmlns:mc="http://schemas.openxmlformats.org/markup-compatibility/2006" xmlns:p14="http://schemas.microsoft.com/office/powerpoint/2010/main">
+          <mc:Choice Requires="p14">
+            <p:contentPart p14:bwMode="auto" r:id="rId6">
+              <p14:nvContentPartPr>
+                <p14:cNvPr id="24" name="Ink 23">
+                  <a:extLst>
+                    <a:ext uri="{FF2B5EF4-FFF2-40B4-BE49-F238E27FC236}">
+                      <a16:creationId xmlns:a16="http://schemas.microsoft.com/office/drawing/2014/main" id="{991134A2-BE51-3279-539E-1B69680460B3}"/>
+                    </a:ext>
+                  </a:extLst>
+                </p14:cNvPr>
+                <p14:cNvContentPartPr/>
+                <p14:nvPr/>
+              </p14:nvContentPartPr>
+              <p14:xfrm>
+                <a:off x="3071664" y="3204576"/>
+                <a:ext cx="811080" cy="660960"/>
+              </p14:xfrm>
+            </p:contentPart>
+          </mc:Choice>
+          <mc:Fallback xmlns="">
+            <p:pic>
+              <p:nvPicPr>
+                <p:cNvPr id="24" name="Ink 23">
+                  <a:extLst>
+                    <a:ext uri="{FF2B5EF4-FFF2-40B4-BE49-F238E27FC236}">
+                      <a16:creationId xmlns:a16="http://schemas.microsoft.com/office/drawing/2014/main" id="{991134A2-BE51-3279-539E-1B69680460B3}"/>
+                    </a:ext>
+                  </a:extLst>
+                </p:cNvPr>
+                <p:cNvPicPr/>
+                <p:nvPr/>
+              </p:nvPicPr>
+              <p:blipFill>
+                <a:blip r:embed="rId7"/>
+                <a:stretch>
+                  <a:fillRect/>
+                </a:stretch>
+              </p:blipFill>
+              <p:spPr>
+                <a:xfrm>
+                  <a:off x="3054024" y="3186576"/>
+                  <a:ext cx="846720" cy="696600"/>
+                </a:xfrm>
+                <a:prstGeom prst="rect">
+                  <a:avLst/>
+                </a:prstGeom>
+              </p:spPr>
+            </p:pic>
+          </mc:Fallback>
+        </mc:AlternateContent>
+      </p:grpSp>
+      <p:grpSp>
+        <p:nvGrpSpPr>
+          <p:cNvPr id="28" name="Group 27">
+            <a:extLst>
+              <a:ext uri="{FF2B5EF4-FFF2-40B4-BE49-F238E27FC236}">
+                <a16:creationId xmlns:a16="http://schemas.microsoft.com/office/drawing/2014/main" id="{A5A878A0-296B-25C5-85AE-10EDF9E68626}"/>
+              </a:ext>
+            </a:extLst>
+          </p:cNvPr>
+          <p:cNvGrpSpPr/>
+          <p:nvPr/>
+        </p:nvGrpSpPr>
+        <p:grpSpPr>
+          <a:xfrm>
+            <a:off x="7794504" y="2025936"/>
+            <a:ext cx="888480" cy="817200"/>
+            <a:chOff x="7794504" y="2025936"/>
+            <a:chExt cx="888480" cy="817200"/>
+          </a:xfrm>
+        </p:grpSpPr>
+        <mc:AlternateContent xmlns:mc="http://schemas.openxmlformats.org/markup-compatibility/2006" xmlns:p14="http://schemas.microsoft.com/office/powerpoint/2010/main">
+          <mc:Choice Requires="p14">
+            <p:contentPart p14:bwMode="auto" r:id="rId8">
+              <p14:nvContentPartPr>
+                <p14:cNvPr id="26" name="Ink 25">
+                  <a:extLst>
+                    <a:ext uri="{FF2B5EF4-FFF2-40B4-BE49-F238E27FC236}">
+                      <a16:creationId xmlns:a16="http://schemas.microsoft.com/office/drawing/2014/main" id="{BE9F146E-B046-F817-3C0E-30CD93D77EEC}"/>
+                    </a:ext>
+                  </a:extLst>
+                </p14:cNvPr>
+                <p14:cNvContentPartPr/>
+                <p14:nvPr/>
+              </p14:nvContentPartPr>
+              <p14:xfrm>
+                <a:off x="7935264" y="2025936"/>
+                <a:ext cx="747720" cy="762480"/>
+              </p14:xfrm>
+            </p:contentPart>
+          </mc:Choice>
+          <mc:Fallback xmlns="">
+            <p:pic>
+              <p:nvPicPr>
+                <p:cNvPr id="26" name="Ink 25">
+                  <a:extLst>
+                    <a:ext uri="{FF2B5EF4-FFF2-40B4-BE49-F238E27FC236}">
+                      <a16:creationId xmlns:a16="http://schemas.microsoft.com/office/drawing/2014/main" id="{BE9F146E-B046-F817-3C0E-30CD93D77EEC}"/>
+                    </a:ext>
+                  </a:extLst>
+                </p:cNvPr>
+                <p:cNvPicPr/>
+                <p:nvPr/>
+              </p:nvPicPr>
+              <p:blipFill>
+                <a:blip r:embed="rId9"/>
+                <a:stretch>
+                  <a:fillRect/>
+                </a:stretch>
+              </p:blipFill>
+              <p:spPr>
+                <a:xfrm>
+                  <a:off x="7917624" y="2008296"/>
+                  <a:ext cx="783360" cy="798120"/>
+                </a:xfrm>
+                <a:prstGeom prst="rect">
+                  <a:avLst/>
+                </a:prstGeom>
+              </p:spPr>
+            </p:pic>
+          </mc:Fallback>
+        </mc:AlternateContent>
+        <mc:AlternateContent xmlns:mc="http://schemas.openxmlformats.org/markup-compatibility/2006" xmlns:p14="http://schemas.microsoft.com/office/powerpoint/2010/main">
+          <mc:Choice Requires="p14">
+            <p:contentPart p14:bwMode="auto" r:id="rId10">
+              <p14:nvContentPartPr>
+                <p14:cNvPr id="27" name="Ink 26">
+                  <a:extLst>
+                    <a:ext uri="{FF2B5EF4-FFF2-40B4-BE49-F238E27FC236}">
+                      <a16:creationId xmlns:a16="http://schemas.microsoft.com/office/drawing/2014/main" id="{DD5CCA13-870A-88BE-24BF-98CD047FD53E}"/>
+                    </a:ext>
+                  </a:extLst>
+                </p14:cNvPr>
+                <p14:cNvContentPartPr/>
+                <p14:nvPr/>
+              </p14:nvContentPartPr>
+              <p14:xfrm>
+                <a:off x="7794504" y="2596896"/>
+                <a:ext cx="480600" cy="246240"/>
+              </p14:xfrm>
+            </p:contentPart>
+          </mc:Choice>
+          <mc:Fallback xmlns="">
+            <p:pic>
+              <p:nvPicPr>
+                <p:cNvPr id="27" name="Ink 26">
+                  <a:extLst>
+                    <a:ext uri="{FF2B5EF4-FFF2-40B4-BE49-F238E27FC236}">
+                      <a16:creationId xmlns:a16="http://schemas.microsoft.com/office/drawing/2014/main" id="{DD5CCA13-870A-88BE-24BF-98CD047FD53E}"/>
+                    </a:ext>
+                  </a:extLst>
+                </p:cNvPr>
+                <p:cNvPicPr/>
+                <p:nvPr/>
+              </p:nvPicPr>
+              <p:blipFill>
+                <a:blip r:embed="rId11"/>
+                <a:stretch>
+                  <a:fillRect/>
+                </a:stretch>
+              </p:blipFill>
+              <p:spPr>
+                <a:xfrm>
+                  <a:off x="7776504" y="2578896"/>
+                  <a:ext cx="516240" cy="281880"/>
+                </a:xfrm>
+                <a:prstGeom prst="rect">
+                  <a:avLst/>
+                </a:prstGeom>
+              </p:spPr>
+            </p:pic>
+          </mc:Fallback>
+        </mc:AlternateContent>
+      </p:grpSp>
+    </p:spTree>
+    <p:extLst>
+      <p:ext uri="{BB962C8B-B14F-4D97-AF65-F5344CB8AC3E}">
+        <p14:creationId xmlns:p14="http://schemas.microsoft.com/office/powerpoint/2010/main" val="2944711974"/>
+      </p:ext>
+    </p:extLst>
+  </p:cSld>
+  <p:clrMapOvr>
+    <a:masterClrMapping/>
+  </p:clrMapOvr>
+</p:sld>
+</file>
+
+<file path=ppt/slides/slide13.xml><?xml version="1.0" encoding="utf-8"?>
+<p:sld xmlns:a="http://schemas.openxmlformats.org/drawingml/2006/main" xmlns:r="http://schemas.openxmlformats.org/officeDocument/2006/relationships" xmlns:p="http://schemas.openxmlformats.org/presentationml/2006/main">
+  <p:cSld>
+    <p:spTree>
+      <p:nvGrpSpPr>
+        <p:cNvPr id="1" name="">
+          <a:extLst>
+            <a:ext uri="{FF2B5EF4-FFF2-40B4-BE49-F238E27FC236}">
+              <a16:creationId xmlns:a16="http://schemas.microsoft.com/office/drawing/2014/main" id="{54696D74-E760-75D9-18E3-85430A87507E}"/>
+            </a:ext>
+          </a:extLst>
+        </p:cNvPr>
+        <p:cNvGrpSpPr/>
+        <p:nvPr/>
+      </p:nvGrpSpPr>
+      <p:grpSpPr>
+        <a:xfrm>
+          <a:off x="0" y="0"/>
+          <a:ext cx="0" cy="0"/>
+          <a:chOff x="0" y="0"/>
+          <a:chExt cx="0" cy="0"/>
+        </a:xfrm>
+      </p:grpSpPr>
+      <p:sp>
+        <p:nvSpPr>
+          <p:cNvPr id="5" name="TextBox 4">
+            <a:extLst>
+              <a:ext uri="{FF2B5EF4-FFF2-40B4-BE49-F238E27FC236}">
+                <a16:creationId xmlns:a16="http://schemas.microsoft.com/office/drawing/2014/main" id="{D00A72CE-9220-2309-6B0F-31C4CBA286EF}"/>
+              </a:ext>
+            </a:extLst>
+          </p:cNvPr>
+          <p:cNvSpPr txBox="1"/>
+          <p:nvPr/>
+        </p:nvSpPr>
+        <p:spPr>
+          <a:xfrm>
+            <a:off x="100584" y="692157"/>
+            <a:ext cx="10561320" cy="1938992"/>
+          </a:xfrm>
+          <a:prstGeom prst="rect">
+            <a:avLst/>
+          </a:prstGeom>
+          <a:noFill/>
+        </p:spPr>
+        <p:txBody>
+          <a:bodyPr wrap="square">
+            <a:spAutoFit/>
+          </a:bodyPr>
+          <a:lstStyle/>
+          <a:p>
+            <a:pPr marL="0" indent="0">
+              <a:buNone/>
+            </a:pPr>
+            <a:r>
+              <a:rPr lang="en-US" sz="2400" dirty="0">
+                <a:solidFill>
+                  <a:schemeClr val="accent6">
+                    <a:lumMod val="60000"/>
+                    <a:lumOff val="40000"/>
+                  </a:schemeClr>
+                </a:solidFill>
+              </a:rPr>
+              <a:t>Transformers consist of </a:t>
+            </a:r>
+            <a:r>
+              <a:rPr lang="en-US" sz="2400" b="1" dirty="0">
+                <a:solidFill>
+                  <a:schemeClr val="accent6">
+                    <a:lumMod val="60000"/>
+                    <a:lumOff val="40000"/>
+                  </a:schemeClr>
+                </a:solidFill>
+              </a:rPr>
+              <a:t>encoder</a:t>
+            </a:r>
+            <a:r>
+              <a:rPr lang="en-US" sz="2400" dirty="0">
+                <a:solidFill>
+                  <a:schemeClr val="accent6">
+                    <a:lumMod val="60000"/>
+                    <a:lumOff val="40000"/>
+                  </a:schemeClr>
+                </a:solidFill>
+              </a:rPr>
+              <a:t> and </a:t>
+            </a:r>
+            <a:r>
+              <a:rPr lang="en-US" sz="2400" b="1" dirty="0">
+                <a:solidFill>
+                  <a:schemeClr val="accent6">
+                    <a:lumMod val="60000"/>
+                    <a:lumOff val="40000"/>
+                  </a:schemeClr>
+                </a:solidFill>
+              </a:rPr>
+              <a:t>decoder</a:t>
+            </a:r>
+            <a:r>
+              <a:rPr lang="en-US" sz="2400" dirty="0">
+                <a:solidFill>
+                  <a:schemeClr val="accent6">
+                    <a:lumMod val="60000"/>
+                    <a:lumOff val="40000"/>
+                  </a:schemeClr>
+                </a:solidFill>
+              </a:rPr>
+              <a:t> stacks. Most models use either:</a:t>
+            </a:r>
+          </a:p>
+          <a:p>
+            <a:pPr marL="0" indent="0">
+              <a:buNone/>
+            </a:pPr>
+            <a:endParaRPr lang="en-US" sz="2400" dirty="0">
+              <a:solidFill>
+                <a:schemeClr val="accent6">
+                  <a:lumMod val="60000"/>
+                  <a:lumOff val="40000"/>
+                </a:schemeClr>
+              </a:solidFill>
+            </a:endParaRPr>
+          </a:p>
+          <a:p>
+            <a:r>
+              <a:rPr lang="en-US" sz="2400" b="1" dirty="0">
+                <a:solidFill>
+                  <a:schemeClr val="accent6">
+                    <a:lumMod val="60000"/>
+                    <a:lumOff val="40000"/>
+                  </a:schemeClr>
+                </a:solidFill>
+              </a:rPr>
+              <a:t>Encoder-only</a:t>
+            </a:r>
+            <a:r>
+              <a:rPr lang="en-US" sz="2400" dirty="0">
+                <a:solidFill>
+                  <a:schemeClr val="accent6">
+                    <a:lumMod val="60000"/>
+                    <a:lumOff val="40000"/>
+                  </a:schemeClr>
+                </a:solidFill>
+              </a:rPr>
+              <a:t> (e.g., BERT – understanding tasks)</a:t>
+            </a:r>
+          </a:p>
+          <a:p>
+            <a:r>
+              <a:rPr lang="en-US" sz="2400" b="1" dirty="0">
+                <a:solidFill>
+                  <a:schemeClr val="accent6">
+                    <a:lumMod val="60000"/>
+                    <a:lumOff val="40000"/>
+                  </a:schemeClr>
+                </a:solidFill>
+              </a:rPr>
+              <a:t>Decoder-only</a:t>
+            </a:r>
+            <a:r>
+              <a:rPr lang="en-US" sz="2400" dirty="0">
+                <a:solidFill>
+                  <a:schemeClr val="accent6">
+                    <a:lumMod val="60000"/>
+                    <a:lumOff val="40000"/>
+                  </a:schemeClr>
+                </a:solidFill>
+              </a:rPr>
+              <a:t> (e.g., GPT – generation tasks)</a:t>
+            </a:r>
+          </a:p>
+          <a:p>
+            <a:r>
+              <a:rPr lang="en-US" sz="2400" b="1" dirty="0">
+                <a:solidFill>
+                  <a:schemeClr val="accent6">
+                    <a:lumMod val="60000"/>
+                    <a:lumOff val="40000"/>
+                  </a:schemeClr>
+                </a:solidFill>
+              </a:rPr>
+              <a:t>Both</a:t>
+            </a:r>
+            <a:r>
+              <a:rPr lang="en-US" sz="2400" dirty="0">
+                <a:solidFill>
+                  <a:schemeClr val="accent6">
+                    <a:lumMod val="60000"/>
+                    <a:lumOff val="40000"/>
+                  </a:schemeClr>
+                </a:solidFill>
+              </a:rPr>
+              <a:t> (e.g., T5 – translation/summarization) – Translate into Spanish</a:t>
+            </a:r>
+          </a:p>
+        </p:txBody>
+      </p:sp>
+      <p:sp>
+        <p:nvSpPr>
+          <p:cNvPr id="7" name="TextBox 6">
+            <a:extLst>
+              <a:ext uri="{FF2B5EF4-FFF2-40B4-BE49-F238E27FC236}">
+                <a16:creationId xmlns:a16="http://schemas.microsoft.com/office/drawing/2014/main" id="{751FE2F9-4110-AE45-9CA3-547B2338E0D2}"/>
+              </a:ext>
+            </a:extLst>
+          </p:cNvPr>
+          <p:cNvSpPr txBox="1"/>
+          <p:nvPr/>
+        </p:nvSpPr>
+        <p:spPr>
+          <a:xfrm>
+            <a:off x="100584" y="85082"/>
+            <a:ext cx="6190488" cy="461665"/>
+          </a:xfrm>
+          <a:prstGeom prst="rect">
+            <a:avLst/>
+          </a:prstGeom>
+          <a:noFill/>
+        </p:spPr>
+        <p:txBody>
+          <a:bodyPr wrap="square">
+            <a:spAutoFit/>
+          </a:bodyPr>
+          <a:lstStyle/>
+          <a:p>
+            <a:r>
+              <a:rPr lang="en-US" sz="2400" b="1" dirty="0">
+                <a:solidFill>
+                  <a:schemeClr val="accent6">
+                    <a:lumMod val="60000"/>
+                    <a:lumOff val="40000"/>
+                  </a:schemeClr>
+                </a:solidFill>
+              </a:rPr>
+              <a:t>Core Components of a Transformer</a:t>
+            </a:r>
+          </a:p>
+        </p:txBody>
+      </p:sp>
+      <p:sp>
+        <p:nvSpPr>
+          <p:cNvPr id="2" name="Rectangle 1">
+            <a:extLst>
+              <a:ext uri="{FF2B5EF4-FFF2-40B4-BE49-F238E27FC236}">
+                <a16:creationId xmlns:a16="http://schemas.microsoft.com/office/drawing/2014/main" id="{2F684BFD-1652-767D-23D4-ADE24CA76082}"/>
+              </a:ext>
+            </a:extLst>
+          </p:cNvPr>
+          <p:cNvSpPr/>
+          <p:nvPr/>
+        </p:nvSpPr>
+        <p:spPr>
+          <a:xfrm>
+            <a:off x="2459736" y="3099816"/>
+            <a:ext cx="4197096" cy="1467612"/>
+          </a:xfrm>
+          <a:prstGeom prst="rect">
+            <a:avLst/>
+          </a:prstGeom>
+        </p:spPr>
+        <p:style>
+          <a:lnRef idx="2">
+            <a:schemeClr val="accent1">
+              <a:shade val="15000"/>
+            </a:schemeClr>
+          </a:lnRef>
+          <a:fillRef idx="1">
+            <a:schemeClr val="accent1"/>
+          </a:fillRef>
+          <a:effectRef idx="0">
+            <a:schemeClr val="accent1"/>
+          </a:effectRef>
+          <a:fontRef idx="minor">
+            <a:schemeClr val="lt1"/>
+          </a:fontRef>
+        </p:style>
+        <p:txBody>
+          <a:bodyPr rtlCol="0" anchor="ctr"/>
+          <a:lstStyle/>
+          <a:p>
+            <a:pPr algn="ctr"/>
+            <a:endParaRPr lang="en-US" dirty="0"/>
+          </a:p>
+        </p:txBody>
+      </p:sp>
+      <p:sp>
+        <p:nvSpPr>
+          <p:cNvPr id="3" name="Rectangle 2">
+            <a:extLst>
+              <a:ext uri="{FF2B5EF4-FFF2-40B4-BE49-F238E27FC236}">
+                <a16:creationId xmlns:a16="http://schemas.microsoft.com/office/drawing/2014/main" id="{2F41DAD4-5107-7F8B-18E6-C26AC093DC39}"/>
+              </a:ext>
+            </a:extLst>
+          </p:cNvPr>
+          <p:cNvSpPr/>
+          <p:nvPr/>
+        </p:nvSpPr>
+        <p:spPr>
+          <a:xfrm>
+            <a:off x="2665476" y="3151269"/>
+            <a:ext cx="1618488" cy="722376"/>
+          </a:xfrm>
+          <a:prstGeom prst="rect">
+            <a:avLst/>
+          </a:prstGeom>
+          <a:solidFill>
+            <a:srgbClr val="00B050"/>
+          </a:solidFill>
+        </p:spPr>
+        <p:style>
+          <a:lnRef idx="2">
+            <a:schemeClr val="accent1">
+              <a:shade val="15000"/>
+            </a:schemeClr>
+          </a:lnRef>
+          <a:fillRef idx="1">
+            <a:schemeClr val="accent1"/>
+          </a:fillRef>
+          <a:effectRef idx="0">
+            <a:schemeClr val="accent1"/>
+          </a:effectRef>
+          <a:fontRef idx="minor">
+            <a:schemeClr val="lt1"/>
+          </a:fontRef>
+        </p:style>
+        <p:txBody>
+          <a:bodyPr rtlCol="0" anchor="ctr"/>
+          <a:lstStyle/>
+          <a:p>
+            <a:pPr algn="ctr"/>
+            <a:r>
+              <a:rPr lang="en-US" dirty="0"/>
+              <a:t>Encoder</a:t>
+            </a:r>
+          </a:p>
+          <a:p>
+            <a:pPr algn="ctr"/>
+            <a:r>
+              <a:rPr lang="en-US" dirty="0"/>
+              <a:t>layer</a:t>
+            </a:r>
+          </a:p>
+        </p:txBody>
+      </p:sp>
+      <p:sp>
+        <p:nvSpPr>
+          <p:cNvPr id="4" name="Rectangle 3">
+            <a:extLst>
+              <a:ext uri="{FF2B5EF4-FFF2-40B4-BE49-F238E27FC236}">
+                <a16:creationId xmlns:a16="http://schemas.microsoft.com/office/drawing/2014/main" id="{94242D4B-BEDF-7693-1CC8-F872E39CD5A9}"/>
+              </a:ext>
+            </a:extLst>
+          </p:cNvPr>
+          <p:cNvSpPr/>
+          <p:nvPr/>
+        </p:nvSpPr>
+        <p:spPr>
+          <a:xfrm>
+            <a:off x="4850892" y="3151269"/>
+            <a:ext cx="1618488" cy="722376"/>
+          </a:xfrm>
+          <a:prstGeom prst="rect">
+            <a:avLst/>
+          </a:prstGeom>
+          <a:solidFill>
+            <a:srgbClr val="00B050"/>
+          </a:solidFill>
+        </p:spPr>
+        <p:style>
+          <a:lnRef idx="2">
+            <a:schemeClr val="accent1">
+              <a:shade val="15000"/>
+            </a:schemeClr>
+          </a:lnRef>
+          <a:fillRef idx="1">
+            <a:schemeClr val="accent1"/>
+          </a:fillRef>
+          <a:effectRef idx="0">
+            <a:schemeClr val="accent1"/>
+          </a:effectRef>
+          <a:fontRef idx="minor">
+            <a:schemeClr val="lt1"/>
+          </a:fontRef>
+        </p:style>
+        <p:txBody>
+          <a:bodyPr rtlCol="0" anchor="ctr"/>
+          <a:lstStyle/>
+          <a:p>
+            <a:pPr algn="ctr"/>
+            <a:r>
+              <a:rPr lang="en-US" dirty="0"/>
+              <a:t>Decoder</a:t>
+            </a:r>
+          </a:p>
+          <a:p>
+            <a:pPr algn="ctr"/>
+            <a:r>
+              <a:rPr lang="en-US" dirty="0"/>
+              <a:t>layer</a:t>
+            </a:r>
+          </a:p>
+        </p:txBody>
+      </p:sp>
+      <p:sp>
+        <p:nvSpPr>
+          <p:cNvPr id="6" name="TextBox 5">
+            <a:extLst>
+              <a:ext uri="{FF2B5EF4-FFF2-40B4-BE49-F238E27FC236}">
+                <a16:creationId xmlns:a16="http://schemas.microsoft.com/office/drawing/2014/main" id="{719CA1F5-0068-A516-A2E2-21AB3BFEC8F1}"/>
+              </a:ext>
+            </a:extLst>
+          </p:cNvPr>
+          <p:cNvSpPr txBox="1"/>
+          <p:nvPr/>
+        </p:nvSpPr>
+        <p:spPr>
+          <a:xfrm>
+            <a:off x="3968496" y="4198096"/>
+            <a:ext cx="1325619" cy="369332"/>
+          </a:xfrm>
+          <a:prstGeom prst="rect">
+            <a:avLst/>
+          </a:prstGeom>
+          <a:noFill/>
+        </p:spPr>
+        <p:txBody>
+          <a:bodyPr wrap="none" rtlCol="0">
+            <a:spAutoFit/>
+          </a:bodyPr>
+          <a:lstStyle/>
+          <a:p>
+            <a:r>
+              <a:rPr lang="en-US" dirty="0">
+                <a:solidFill>
+                  <a:schemeClr val="accent6">
+                    <a:lumMod val="40000"/>
+                    <a:lumOff val="60000"/>
+                  </a:schemeClr>
+                </a:solidFill>
+              </a:rPr>
+              <a:t>Transformer</a:t>
+            </a:r>
+          </a:p>
+        </p:txBody>
+      </p:sp>
+      <p:sp>
+        <p:nvSpPr>
+          <p:cNvPr id="8" name="Oval 7">
+            <a:extLst>
+              <a:ext uri="{FF2B5EF4-FFF2-40B4-BE49-F238E27FC236}">
+                <a16:creationId xmlns:a16="http://schemas.microsoft.com/office/drawing/2014/main" id="{EFCC8899-8260-6A4A-5659-476CC982263F}"/>
+              </a:ext>
+            </a:extLst>
+          </p:cNvPr>
+          <p:cNvSpPr/>
+          <p:nvPr/>
+        </p:nvSpPr>
+        <p:spPr>
+          <a:xfrm>
+            <a:off x="1387102" y="5230368"/>
+            <a:ext cx="2926080" cy="675995"/>
+          </a:xfrm>
+          <a:prstGeom prst="ellipse">
+            <a:avLst/>
+          </a:prstGeom>
+        </p:spPr>
+        <p:style>
+          <a:lnRef idx="2">
+            <a:schemeClr val="accent1">
+              <a:shade val="15000"/>
+            </a:schemeClr>
+          </a:lnRef>
+          <a:fillRef idx="1">
+            <a:schemeClr val="accent1"/>
+          </a:fillRef>
+          <a:effectRef idx="0">
+            <a:schemeClr val="accent1"/>
+          </a:effectRef>
+          <a:fontRef idx="minor">
+            <a:schemeClr val="lt1"/>
+          </a:fontRef>
+        </p:style>
+        <p:txBody>
+          <a:bodyPr rtlCol="0" anchor="ctr"/>
+          <a:lstStyle/>
+          <a:p>
+            <a:pPr algn="ctr"/>
+            <a:r>
+              <a:rPr lang="en-US" dirty="0"/>
+              <a:t>How are you ?</a:t>
+            </a:r>
+          </a:p>
+        </p:txBody>
+      </p:sp>
+      <p:sp>
+        <p:nvSpPr>
+          <p:cNvPr id="9" name="Arrow: Right 8">
+            <a:extLst>
+              <a:ext uri="{FF2B5EF4-FFF2-40B4-BE49-F238E27FC236}">
+                <a16:creationId xmlns:a16="http://schemas.microsoft.com/office/drawing/2014/main" id="{83FE17D2-2E09-24F0-BE85-D3664732B2BC}"/>
+              </a:ext>
+            </a:extLst>
+          </p:cNvPr>
+          <p:cNvSpPr/>
+          <p:nvPr/>
+        </p:nvSpPr>
+        <p:spPr>
+          <a:xfrm rot="16200000">
+            <a:off x="2361831" y="4714232"/>
+            <a:ext cx="565142" cy="369332"/>
+          </a:xfrm>
+          <a:prstGeom prst="rightArrow">
+            <a:avLst/>
+          </a:prstGeom>
+        </p:spPr>
+        <p:style>
+          <a:lnRef idx="2">
+            <a:schemeClr val="accent1">
+              <a:shade val="15000"/>
+            </a:schemeClr>
+          </a:lnRef>
+          <a:fillRef idx="1">
+            <a:schemeClr val="accent1"/>
+          </a:fillRef>
+          <a:effectRef idx="0">
+            <a:schemeClr val="accent1"/>
+          </a:effectRef>
+          <a:fontRef idx="minor">
+            <a:schemeClr val="lt1"/>
+          </a:fontRef>
+        </p:style>
+        <p:txBody>
+          <a:bodyPr rtlCol="0" anchor="ctr"/>
+          <a:lstStyle/>
+          <a:p>
+            <a:pPr algn="ctr"/>
+            <a:endParaRPr lang="en-US"/>
+          </a:p>
+        </p:txBody>
+      </p:sp>
+      <p:sp>
+        <p:nvSpPr>
+          <p:cNvPr id="10" name="Oval 9">
+            <a:extLst>
+              <a:ext uri="{FF2B5EF4-FFF2-40B4-BE49-F238E27FC236}">
+                <a16:creationId xmlns:a16="http://schemas.microsoft.com/office/drawing/2014/main" id="{C75D883B-26C9-0860-FAC3-36CF69415F55}"/>
+              </a:ext>
+            </a:extLst>
+          </p:cNvPr>
+          <p:cNvSpPr/>
+          <p:nvPr/>
+        </p:nvSpPr>
+        <p:spPr>
+          <a:xfrm>
+            <a:off x="7530084" y="3197650"/>
+            <a:ext cx="2926080" cy="675995"/>
+          </a:xfrm>
+          <a:prstGeom prst="ellipse">
+            <a:avLst/>
+          </a:prstGeom>
+        </p:spPr>
+        <p:style>
+          <a:lnRef idx="2">
+            <a:schemeClr val="accent1">
+              <a:shade val="15000"/>
+            </a:schemeClr>
+          </a:lnRef>
+          <a:fillRef idx="1">
+            <a:schemeClr val="accent1"/>
+          </a:fillRef>
+          <a:effectRef idx="0">
+            <a:schemeClr val="accent1"/>
+          </a:effectRef>
+          <a:fontRef idx="minor">
+            <a:schemeClr val="lt1"/>
+          </a:fontRef>
+        </p:style>
+        <p:txBody>
+          <a:bodyPr rtlCol="0" anchor="ctr"/>
+          <a:lstStyle/>
+          <a:p>
+            <a:pPr algn="ctr"/>
+            <a:r>
+              <a:rPr lang="en-US" dirty="0"/>
+              <a:t>Como </a:t>
+            </a:r>
+            <a:r>
+              <a:rPr lang="en-US" dirty="0" err="1"/>
+              <a:t>Estas</a:t>
+            </a:r>
+            <a:r>
+              <a:rPr lang="en-US" dirty="0"/>
+              <a:t> ?</a:t>
+            </a:r>
+          </a:p>
+        </p:txBody>
+      </p:sp>
+      <p:sp>
+        <p:nvSpPr>
+          <p:cNvPr id="11" name="Arrow: Right 10">
+            <a:extLst>
+              <a:ext uri="{FF2B5EF4-FFF2-40B4-BE49-F238E27FC236}">
+                <a16:creationId xmlns:a16="http://schemas.microsoft.com/office/drawing/2014/main" id="{2A220383-0591-753D-653F-4C301E3ABA1E}"/>
+              </a:ext>
+            </a:extLst>
+          </p:cNvPr>
+          <p:cNvSpPr/>
+          <p:nvPr/>
+        </p:nvSpPr>
+        <p:spPr>
+          <a:xfrm>
+            <a:off x="6793992" y="3429000"/>
+            <a:ext cx="539496" cy="301752"/>
+          </a:xfrm>
+          <a:prstGeom prst="rightArrow">
+            <a:avLst/>
+          </a:prstGeom>
+        </p:spPr>
+        <p:style>
+          <a:lnRef idx="2">
+            <a:schemeClr val="accent1">
+              <a:shade val="15000"/>
+            </a:schemeClr>
+          </a:lnRef>
+          <a:fillRef idx="1">
+            <a:schemeClr val="accent1"/>
+          </a:fillRef>
+          <a:effectRef idx="0">
+            <a:schemeClr val="accent1"/>
+          </a:effectRef>
+          <a:fontRef idx="minor">
+            <a:schemeClr val="lt1"/>
+          </a:fontRef>
+        </p:style>
+        <p:txBody>
+          <a:bodyPr rtlCol="0" anchor="ctr"/>
+          <a:lstStyle/>
+          <a:p>
+            <a:pPr algn="ctr"/>
+            <a:endParaRPr lang="en-US"/>
+          </a:p>
+        </p:txBody>
+      </p:sp>
+      <p:sp>
+        <p:nvSpPr>
+          <p:cNvPr id="12" name="TextBox 11">
+            <a:extLst>
+              <a:ext uri="{FF2B5EF4-FFF2-40B4-BE49-F238E27FC236}">
+                <a16:creationId xmlns:a16="http://schemas.microsoft.com/office/drawing/2014/main" id="{2B45A640-5D83-7A64-3B35-C6BD8FF39333}"/>
+              </a:ext>
+            </a:extLst>
+          </p:cNvPr>
+          <p:cNvSpPr txBox="1"/>
+          <p:nvPr/>
+        </p:nvSpPr>
+        <p:spPr>
+          <a:xfrm>
+            <a:off x="1779742" y="4712838"/>
+            <a:ext cx="679994" cy="369332"/>
+          </a:xfrm>
+          <a:prstGeom prst="rect">
+            <a:avLst/>
+          </a:prstGeom>
+          <a:noFill/>
+        </p:spPr>
+        <p:txBody>
+          <a:bodyPr wrap="none" rtlCol="0">
+            <a:spAutoFit/>
+          </a:bodyPr>
+          <a:lstStyle/>
+          <a:p>
+            <a:r>
+              <a:rPr lang="en-US" dirty="0">
+                <a:solidFill>
+                  <a:schemeClr val="accent6">
+                    <a:lumMod val="40000"/>
+                    <a:lumOff val="60000"/>
+                  </a:schemeClr>
+                </a:solidFill>
+              </a:rPr>
+              <a:t>input</a:t>
+            </a:r>
+          </a:p>
+        </p:txBody>
+      </p:sp>
+      <p:sp>
+        <p:nvSpPr>
+          <p:cNvPr id="13" name="TextBox 12">
+            <a:extLst>
+              <a:ext uri="{FF2B5EF4-FFF2-40B4-BE49-F238E27FC236}">
+                <a16:creationId xmlns:a16="http://schemas.microsoft.com/office/drawing/2014/main" id="{2CE16CBE-2FFE-2C0E-58A4-D01460F4A7A0}"/>
+              </a:ext>
+            </a:extLst>
+          </p:cNvPr>
+          <p:cNvSpPr txBox="1"/>
+          <p:nvPr/>
+        </p:nvSpPr>
+        <p:spPr>
+          <a:xfrm>
+            <a:off x="6793992" y="3828764"/>
+            <a:ext cx="825867" cy="369332"/>
+          </a:xfrm>
+          <a:prstGeom prst="rect">
+            <a:avLst/>
+          </a:prstGeom>
+          <a:noFill/>
+        </p:spPr>
+        <p:txBody>
+          <a:bodyPr wrap="none" rtlCol="0">
+            <a:spAutoFit/>
+          </a:bodyPr>
+          <a:lstStyle/>
+          <a:p>
+            <a:r>
+              <a:rPr lang="en-US" dirty="0">
+                <a:solidFill>
+                  <a:schemeClr val="accent6">
+                    <a:lumMod val="40000"/>
+                    <a:lumOff val="60000"/>
+                  </a:schemeClr>
+                </a:solidFill>
+              </a:rPr>
+              <a:t>output</a:t>
+            </a:r>
+          </a:p>
+        </p:txBody>
+      </p:sp>
+      <p:sp>
+        <p:nvSpPr>
+          <p:cNvPr id="15" name="TextBox 14">
+            <a:extLst>
+              <a:ext uri="{FF2B5EF4-FFF2-40B4-BE49-F238E27FC236}">
+                <a16:creationId xmlns:a16="http://schemas.microsoft.com/office/drawing/2014/main" id="{DB74DE44-4156-7148-A0B5-5DAA50ABC45C}"/>
+              </a:ext>
+            </a:extLst>
+          </p:cNvPr>
+          <p:cNvSpPr txBox="1"/>
+          <p:nvPr/>
+        </p:nvSpPr>
+        <p:spPr>
+          <a:xfrm>
+            <a:off x="4993176" y="5152866"/>
+            <a:ext cx="6190488" cy="830997"/>
+          </a:xfrm>
+          <a:prstGeom prst="rect">
+            <a:avLst/>
+          </a:prstGeom>
+          <a:noFill/>
+        </p:spPr>
+        <p:txBody>
+          <a:bodyPr wrap="square">
+            <a:spAutoFit/>
+          </a:bodyPr>
+          <a:lstStyle/>
+          <a:p>
+            <a:r>
+              <a:rPr lang="en-US" sz="2400" b="1" dirty="0">
+                <a:solidFill>
+                  <a:schemeClr val="accent6">
+                    <a:lumMod val="60000"/>
+                    <a:lumOff val="40000"/>
+                  </a:schemeClr>
+                </a:solidFill>
+              </a:rPr>
+              <a:t>Stacking Layers: </a:t>
+            </a:r>
+            <a:r>
+              <a:rPr lang="en-US" sz="2400" dirty="0">
+                <a:solidFill>
+                  <a:schemeClr val="accent6">
+                    <a:lumMod val="60000"/>
+                    <a:lumOff val="40000"/>
+                  </a:schemeClr>
+                </a:solidFill>
+              </a:rPr>
+              <a:t>A typical transformer model stacks </a:t>
+            </a:r>
+            <a:r>
+              <a:rPr lang="en-US" sz="2400" b="1" dirty="0">
+                <a:solidFill>
+                  <a:schemeClr val="accent6">
+                    <a:lumMod val="60000"/>
+                    <a:lumOff val="40000"/>
+                  </a:schemeClr>
+                </a:solidFill>
+              </a:rPr>
+              <a:t>6–96</a:t>
+            </a:r>
+            <a:r>
+              <a:rPr lang="en-US" sz="2400" dirty="0">
+                <a:solidFill>
+                  <a:schemeClr val="accent6">
+                    <a:lumMod val="60000"/>
+                    <a:lumOff val="40000"/>
+                  </a:schemeClr>
+                </a:solidFill>
+              </a:rPr>
+              <a:t> of these encoder or decoder blocks.</a:t>
+            </a:r>
+          </a:p>
+        </p:txBody>
+      </p:sp>
+      <p:sp>
+        <p:nvSpPr>
+          <p:cNvPr id="16" name="Arrow: Right 15">
+            <a:extLst>
+              <a:ext uri="{FF2B5EF4-FFF2-40B4-BE49-F238E27FC236}">
+                <a16:creationId xmlns:a16="http://schemas.microsoft.com/office/drawing/2014/main" id="{2B755772-C2C7-EBFF-6C6C-731746C35B43}"/>
+              </a:ext>
+            </a:extLst>
+          </p:cNvPr>
+          <p:cNvSpPr/>
+          <p:nvPr/>
+        </p:nvSpPr>
+        <p:spPr>
+          <a:xfrm>
+            <a:off x="4384548" y="3301430"/>
+            <a:ext cx="466344" cy="422053"/>
+          </a:xfrm>
+          <a:prstGeom prst="rightArrow">
+            <a:avLst/>
+          </a:prstGeom>
+          <a:solidFill>
+            <a:srgbClr val="00B050"/>
+          </a:solidFill>
+        </p:spPr>
+        <p:style>
+          <a:lnRef idx="2">
+            <a:schemeClr val="accent1">
+              <a:shade val="15000"/>
+            </a:schemeClr>
+          </a:lnRef>
+          <a:fillRef idx="1">
+            <a:schemeClr val="accent1"/>
+          </a:fillRef>
+          <a:effectRef idx="0">
+            <a:schemeClr val="accent1"/>
+          </a:effectRef>
+          <a:fontRef idx="minor">
+            <a:schemeClr val="lt1"/>
+          </a:fontRef>
+        </p:style>
+        <p:txBody>
+          <a:bodyPr rtlCol="0" anchor="ctr"/>
+          <a:lstStyle/>
+          <a:p>
+            <a:pPr algn="ctr"/>
+            <a:endParaRPr lang="en-US"/>
+          </a:p>
+        </p:txBody>
+      </p:sp>
+      <p:grpSp>
+        <p:nvGrpSpPr>
+          <p:cNvPr id="18" name="Group 17">
+            <a:extLst>
+              <a:ext uri="{FF2B5EF4-FFF2-40B4-BE49-F238E27FC236}">
+                <a16:creationId xmlns:a16="http://schemas.microsoft.com/office/drawing/2014/main" id="{8BF4A11A-67D8-E22D-FAC3-032A2B467D52}"/>
+              </a:ext>
+            </a:extLst>
+          </p:cNvPr>
+          <p:cNvGrpSpPr/>
+          <p:nvPr/>
+        </p:nvGrpSpPr>
+        <p:grpSpPr>
+          <a:xfrm>
+            <a:off x="8623944" y="2336256"/>
+            <a:ext cx="450720" cy="479880"/>
+            <a:chOff x="8623944" y="2336256"/>
+            <a:chExt cx="450720" cy="479880"/>
+          </a:xfrm>
+        </p:grpSpPr>
+        <mc:AlternateContent xmlns:mc="http://schemas.openxmlformats.org/markup-compatibility/2006" xmlns:p14="http://schemas.microsoft.com/office/powerpoint/2010/main">
+          <mc:Choice Requires="p14">
+            <p:contentPart p14:bwMode="auto" r:id="rId2">
+              <p14:nvContentPartPr>
+                <p14:cNvPr id="14" name="Ink 13">
+                  <a:extLst>
+                    <a:ext uri="{FF2B5EF4-FFF2-40B4-BE49-F238E27FC236}">
+                      <a16:creationId xmlns:a16="http://schemas.microsoft.com/office/drawing/2014/main" id="{A033B9CD-6432-8AA2-006E-D66737210E02}"/>
+                    </a:ext>
+                  </a:extLst>
+                </p14:cNvPr>
+                <p14:cNvContentPartPr/>
+                <p14:nvPr/>
+              </p14:nvContentPartPr>
+              <p14:xfrm>
+                <a:off x="8623944" y="2336256"/>
+                <a:ext cx="450720" cy="412200"/>
+              </p14:xfrm>
+            </p:contentPart>
+          </mc:Choice>
+          <mc:Fallback xmlns="">
+            <p:pic>
+              <p:nvPicPr>
+                <p:cNvPr id="14" name="Ink 13">
+                  <a:extLst>
+                    <a:ext uri="{FF2B5EF4-FFF2-40B4-BE49-F238E27FC236}">
+                      <a16:creationId xmlns:a16="http://schemas.microsoft.com/office/drawing/2014/main" id="{A033B9CD-6432-8AA2-006E-D66737210E02}"/>
+                    </a:ext>
+                  </a:extLst>
+                </p:cNvPr>
+                <p:cNvPicPr/>
+                <p:nvPr/>
+              </p:nvPicPr>
+              <p:blipFill>
+                <a:blip r:embed="rId3"/>
+                <a:stretch>
+                  <a:fillRect/>
+                </a:stretch>
+              </p:blipFill>
+              <p:spPr>
+                <a:xfrm>
+                  <a:off x="8605944" y="2318256"/>
+                  <a:ext cx="486360" cy="447840"/>
+                </a:xfrm>
+                <a:prstGeom prst="rect">
+                  <a:avLst/>
+                </a:prstGeom>
+              </p:spPr>
+            </p:pic>
+          </mc:Fallback>
+        </mc:AlternateContent>
+        <mc:AlternateContent xmlns:mc="http://schemas.openxmlformats.org/markup-compatibility/2006" xmlns:p14="http://schemas.microsoft.com/office/powerpoint/2010/main">
+          <mc:Choice Requires="p14">
+            <p:contentPart p14:bwMode="auto" r:id="rId4">
+              <p14:nvContentPartPr>
+                <p14:cNvPr id="17" name="Ink 16">
+                  <a:extLst>
+                    <a:ext uri="{FF2B5EF4-FFF2-40B4-BE49-F238E27FC236}">
+                      <a16:creationId xmlns:a16="http://schemas.microsoft.com/office/drawing/2014/main" id="{F4C430ED-12A6-2A6E-A2FE-95896EB45D76}"/>
+                    </a:ext>
+                  </a:extLst>
+                </p14:cNvPr>
+                <p14:cNvContentPartPr/>
+                <p14:nvPr/>
+              </p14:nvContentPartPr>
+              <p14:xfrm>
+                <a:off x="8634024" y="2631096"/>
+                <a:ext cx="431640" cy="185040"/>
+              </p14:xfrm>
+            </p:contentPart>
+          </mc:Choice>
+          <mc:Fallback xmlns="">
+            <p:pic>
+              <p:nvPicPr>
+                <p:cNvPr id="17" name="Ink 16">
+                  <a:extLst>
+                    <a:ext uri="{FF2B5EF4-FFF2-40B4-BE49-F238E27FC236}">
+                      <a16:creationId xmlns:a16="http://schemas.microsoft.com/office/drawing/2014/main" id="{F4C430ED-12A6-2A6E-A2FE-95896EB45D76}"/>
+                    </a:ext>
+                  </a:extLst>
+                </p:cNvPr>
+                <p:cNvPicPr/>
+                <p:nvPr/>
+              </p:nvPicPr>
+              <p:blipFill>
+                <a:blip r:embed="rId5"/>
+                <a:stretch>
+                  <a:fillRect/>
+                </a:stretch>
+              </p:blipFill>
+              <p:spPr>
+                <a:xfrm>
+                  <a:off x="8616024" y="2613096"/>
+                  <a:ext cx="467280" cy="220680"/>
+                </a:xfrm>
+                <a:prstGeom prst="rect">
+                  <a:avLst/>
+                </a:prstGeom>
+              </p:spPr>
+            </p:pic>
+          </mc:Fallback>
+        </mc:AlternateContent>
+      </p:grpSp>
+    </p:spTree>
+    <p:extLst>
+      <p:ext uri="{BB962C8B-B14F-4D97-AF65-F5344CB8AC3E}">
+        <p14:creationId xmlns:p14="http://schemas.microsoft.com/office/powerpoint/2010/main" val="4005996769"/>
+      </p:ext>
+    </p:extLst>
+  </p:cSld>
+  <p:clrMapOvr>
+    <a:masterClrMapping/>
+  </p:clrMapOvr>
+</p:sld>
+</file>
+
+<file path=ppt/slides/slide14.xml><?xml version="1.0" encoding="utf-8"?>
 <p:sld xmlns:a="http://schemas.openxmlformats.org/drawingml/2006/main" xmlns:r="http://schemas.openxmlformats.org/officeDocument/2006/relationships" xmlns:p="http://schemas.openxmlformats.org/presentationml/2006/main">
   <p:cSld>
     <p:spTree>
@@ -6248,7 +9730,7 @@
 </p:sld>
 </file>
 
-<file path=ppt/slides/slide12.xml><?xml version="1.0" encoding="utf-8"?>
+<file path=ppt/slides/slide15.xml><?xml version="1.0" encoding="utf-8"?>
 <p:sld xmlns:a="http://schemas.openxmlformats.org/drawingml/2006/main" xmlns:r="http://schemas.openxmlformats.org/officeDocument/2006/relationships" xmlns:p="http://schemas.openxmlformats.org/presentationml/2006/main">
   <p:cSld>
     <p:spTree>
@@ -7201,7 +10683,7 @@
 </p:sld>
 </file>
 
-<file path=ppt/slides/slide13.xml><?xml version="1.0" encoding="utf-8"?>
+<file path=ppt/slides/slide16.xml><?xml version="1.0" encoding="utf-8"?>
 <p:sld xmlns:a="http://schemas.openxmlformats.org/drawingml/2006/main" xmlns:r="http://schemas.openxmlformats.org/officeDocument/2006/relationships" xmlns:p="http://schemas.openxmlformats.org/presentationml/2006/main">
   <p:cSld>
     <p:spTree>
@@ -7327,7 +10809,7 @@
 </p:sld>
 </file>
 
-<file path=ppt/slides/slide14.xml><?xml version="1.0" encoding="utf-8"?>
+<file path=ppt/slides/slide17.xml><?xml version="1.0" encoding="utf-8"?>
 <p:sld xmlns:a="http://schemas.openxmlformats.org/drawingml/2006/main" xmlns:r="http://schemas.openxmlformats.org/officeDocument/2006/relationships" xmlns:p="http://schemas.openxmlformats.org/presentationml/2006/main">
   <p:cSld>
     <p:spTree>
@@ -7423,7 +10905,7 @@
 </p:sld>
 </file>
 
-<file path=ppt/slides/slide15.xml><?xml version="1.0" encoding="utf-8"?>
+<file path=ppt/slides/slide18.xml><?xml version="1.0" encoding="utf-8"?>
 <p:sld xmlns:a="http://schemas.openxmlformats.org/drawingml/2006/main" xmlns:r="http://schemas.openxmlformats.org/officeDocument/2006/relationships" xmlns:p="http://schemas.openxmlformats.org/presentationml/2006/main">
   <p:cSld>
     <p:spTree>
@@ -7483,7 +10965,7 @@
                   </a:schemeClr>
                 </a:solidFill>
               </a:rPr>
-              <a:t>Word embeddings -&gt; positional embeddings</a:t>
+              <a:t>Positional embeddings</a:t>
             </a:r>
           </a:p>
           <a:p>
@@ -7742,7 +11224,7 @@
 </p:sld>
 </file>
 
-<file path=ppt/slides/slide16.xml><?xml version="1.0" encoding="utf-8"?>
+<file path=ppt/slides/slide19.xml><?xml version="1.0" encoding="utf-8"?>
 <p:sld xmlns:a="http://schemas.openxmlformats.org/drawingml/2006/main" xmlns:r="http://schemas.openxmlformats.org/officeDocument/2006/relationships" xmlns:p="http://schemas.openxmlformats.org/presentationml/2006/main">
   <p:cSld>
     <p:spTree>
@@ -10323,7 +13805,376 @@
 </p:sld>
 </file>
 
-<file path=ppt/slides/slide17.xml><?xml version="1.0" encoding="utf-8"?>
+<file path=ppt/slides/slide2.xml><?xml version="1.0" encoding="utf-8"?>
+<p:sld xmlns:a="http://schemas.openxmlformats.org/drawingml/2006/main" xmlns:r="http://schemas.openxmlformats.org/officeDocument/2006/relationships" xmlns:p="http://schemas.openxmlformats.org/presentationml/2006/main">
+  <p:cSld>
+    <p:spTree>
+      <p:nvGrpSpPr>
+        <p:cNvPr id="1" name=""/>
+        <p:cNvGrpSpPr/>
+        <p:nvPr/>
+      </p:nvGrpSpPr>
+      <p:grpSpPr>
+        <a:xfrm>
+          <a:off x="0" y="0"/>
+          <a:ext cx="0" cy="0"/>
+          <a:chOff x="0" y="0"/>
+          <a:chExt cx="0" cy="0"/>
+        </a:xfrm>
+      </p:grpSpPr>
+      <p:sp>
+        <p:nvSpPr>
+          <p:cNvPr id="4" name="TextBox 3">
+            <a:extLst>
+              <a:ext uri="{FF2B5EF4-FFF2-40B4-BE49-F238E27FC236}">
+                <a16:creationId xmlns:a16="http://schemas.microsoft.com/office/drawing/2014/main" id="{29D68720-C308-BDDC-262A-F5640C4C8FED}"/>
+              </a:ext>
+            </a:extLst>
+          </p:cNvPr>
+          <p:cNvSpPr txBox="1"/>
+          <p:nvPr/>
+        </p:nvSpPr>
+        <p:spPr>
+          <a:xfrm>
+            <a:off x="777618" y="1245090"/>
+            <a:ext cx="10268712" cy="5632311"/>
+          </a:xfrm>
+          <a:prstGeom prst="rect">
+            <a:avLst/>
+          </a:prstGeom>
+          <a:noFill/>
+        </p:spPr>
+        <p:txBody>
+          <a:bodyPr wrap="square">
+            <a:spAutoFit/>
+          </a:bodyPr>
+          <a:lstStyle/>
+          <a:p>
+            <a:r>
+              <a:rPr lang="en-US" sz="2400" u="sng" dirty="0">
+                <a:solidFill>
+                  <a:schemeClr val="accent6">
+                    <a:lumMod val="40000"/>
+                    <a:lumOff val="60000"/>
+                  </a:schemeClr>
+                </a:solidFill>
+                <a:hlinkClick r:id="rId2">
+                  <a:extLst>
+                    <a:ext uri="{A12FA001-AC4F-418D-AE19-62706E023703}">
+                      <ahyp:hlinkClr xmlns:ahyp="http://schemas.microsoft.com/office/drawing/2018/hyperlinkcolor" val="tx"/>
+                    </a:ext>
+                  </a:extLst>
+                </a:hlinkClick>
+              </a:rPr>
+              <a:t>Playground:  </a:t>
+            </a:r>
+            <a:r>
+              <a:rPr lang="en-US" sz="2400" dirty="0">
+                <a:solidFill>
+                  <a:schemeClr val="accent6">
+                    <a:lumMod val="40000"/>
+                    <a:lumOff val="60000"/>
+                  </a:schemeClr>
+                </a:solidFill>
+                <a:hlinkClick r:id="rId2">
+                  <a:extLst>
+                    <a:ext uri="{A12FA001-AC4F-418D-AE19-62706E023703}">
+                      <ahyp:hlinkClr xmlns:ahyp="http://schemas.microsoft.com/office/drawing/2018/hyperlinkcolor" val="tx"/>
+                    </a:ext>
+                  </a:extLst>
+                </a:hlinkClick>
+              </a:rPr>
+              <a:t>https://poloclub.github.io/transformer-explainer/</a:t>
+            </a:r>
+          </a:p>
+          <a:p>
+            <a:endParaRPr lang="en-US" sz="2400" dirty="0">
+              <a:solidFill>
+                <a:schemeClr val="accent6">
+                  <a:lumMod val="40000"/>
+                  <a:lumOff val="60000"/>
+                </a:schemeClr>
+              </a:solidFill>
+              <a:hlinkClick r:id="rId2">
+                <a:extLst>
+                  <a:ext uri="{A12FA001-AC4F-418D-AE19-62706E023703}">
+                    <ahyp:hlinkClr xmlns:ahyp="http://schemas.microsoft.com/office/drawing/2018/hyperlinkcolor" val="tx"/>
+                  </a:ext>
+                </a:extLst>
+              </a:hlinkClick>
+            </a:endParaRPr>
+          </a:p>
+          <a:p>
+            <a:r>
+              <a:rPr lang="en-US" sz="2400" dirty="0">
+                <a:solidFill>
+                  <a:schemeClr val="accent6">
+                    <a:lumMod val="40000"/>
+                    <a:lumOff val="60000"/>
+                  </a:schemeClr>
+                </a:solidFill>
+                <a:hlinkClick r:id="rId2">
+                  <a:extLst>
+                    <a:ext uri="{A12FA001-AC4F-418D-AE19-62706E023703}">
+                      <ahyp:hlinkClr xmlns:ahyp="http://schemas.microsoft.com/office/drawing/2018/hyperlinkcolor" val="tx"/>
+                    </a:ext>
+                  </a:extLst>
+                </a:hlinkClick>
+              </a:rPr>
+              <a:t>Source:</a:t>
+            </a:r>
+          </a:p>
+          <a:p>
+            <a:r>
+              <a:rPr lang="en-US" sz="2400" dirty="0">
+                <a:solidFill>
+                  <a:schemeClr val="accent6">
+                    <a:lumMod val="40000"/>
+                    <a:lumOff val="60000"/>
+                  </a:schemeClr>
+                </a:solidFill>
+                <a:hlinkClick r:id="rId2">
+                  <a:extLst>
+                    <a:ext uri="{A12FA001-AC4F-418D-AE19-62706E023703}">
+                      <ahyp:hlinkClr xmlns:ahyp="http://schemas.microsoft.com/office/drawing/2018/hyperlinkcolor" val="tx"/>
+                    </a:ext>
+                  </a:extLst>
+                </a:hlinkClick>
+              </a:rPr>
+              <a:t>https://youtu.be/ZhAz268Hdpw?si=jQXkVM058uJkEWCw</a:t>
+            </a:r>
+            <a:endParaRPr lang="en-US" sz="2400" dirty="0">
+              <a:solidFill>
+                <a:schemeClr val="accent6">
+                  <a:lumMod val="40000"/>
+                  <a:lumOff val="60000"/>
+                </a:schemeClr>
+              </a:solidFill>
+            </a:endParaRPr>
+          </a:p>
+          <a:p>
+            <a:r>
+              <a:rPr lang="en-US" sz="2400" dirty="0">
+                <a:solidFill>
+                  <a:schemeClr val="accent6">
+                    <a:lumMod val="40000"/>
+                    <a:lumOff val="60000"/>
+                  </a:schemeClr>
+                </a:solidFill>
+                <a:hlinkClick r:id="rId3">
+                  <a:extLst>
+                    <a:ext uri="{A12FA001-AC4F-418D-AE19-62706E023703}">
+                      <ahyp:hlinkClr xmlns:ahyp="http://schemas.microsoft.com/office/drawing/2018/hyperlinkcolor" val="tx"/>
+                    </a:ext>
+                  </a:extLst>
+                </a:hlinkClick>
+              </a:rPr>
+              <a:t>https://youtu.be/zxQyTK8quyY?si=C-flWWBSxwrqWao7</a:t>
+            </a:r>
+            <a:endParaRPr lang="en-US" sz="2400" dirty="0">
+              <a:solidFill>
+                <a:schemeClr val="accent6">
+                  <a:lumMod val="40000"/>
+                  <a:lumOff val="60000"/>
+                </a:schemeClr>
+              </a:solidFill>
+            </a:endParaRPr>
+          </a:p>
+          <a:p>
+            <a:endParaRPr lang="en-US" sz="2400" dirty="0">
+              <a:solidFill>
+                <a:schemeClr val="accent6">
+                  <a:lumMod val="40000"/>
+                  <a:lumOff val="60000"/>
+                </a:schemeClr>
+              </a:solidFill>
+            </a:endParaRPr>
+          </a:p>
+          <a:p>
+            <a:pPr marL="0" indent="0">
+              <a:buNone/>
+            </a:pPr>
+            <a:endParaRPr lang="en-US" sz="2400" dirty="0">
+              <a:solidFill>
+                <a:schemeClr val="accent6">
+                  <a:lumMod val="40000"/>
+                  <a:lumOff val="60000"/>
+                </a:schemeClr>
+              </a:solidFill>
+            </a:endParaRPr>
+          </a:p>
+          <a:p>
+            <a:pPr marL="0" indent="0">
+              <a:buNone/>
+            </a:pPr>
+            <a:r>
+              <a:rPr lang="en-US" sz="2400" dirty="0">
+                <a:solidFill>
+                  <a:schemeClr val="accent6">
+                    <a:lumMod val="40000"/>
+                    <a:lumOff val="60000"/>
+                  </a:schemeClr>
+                </a:solidFill>
+              </a:rPr>
+              <a:t>3 parts:</a:t>
+            </a:r>
+          </a:p>
+          <a:p>
+            <a:pPr marL="0" indent="0">
+              <a:buNone/>
+            </a:pPr>
+            <a:r>
+              <a:rPr lang="en-US" sz="2400" dirty="0">
+                <a:solidFill>
+                  <a:schemeClr val="accent6">
+                    <a:lumMod val="40000"/>
+                    <a:lumOff val="60000"/>
+                  </a:schemeClr>
+                </a:solidFill>
+                <a:hlinkClick r:id="rId4">
+                  <a:extLst>
+                    <a:ext uri="{A12FA001-AC4F-418D-AE19-62706E023703}">
+                      <ahyp:hlinkClr xmlns:ahyp="http://schemas.microsoft.com/office/drawing/2018/hyperlinkcolor" val="tx"/>
+                    </a:ext>
+                  </a:extLst>
+                </a:hlinkClick>
+              </a:rPr>
+              <a:t>1) https://youtu.be/OxCpWwDCDFQ?si=xo2r5jOoc3YQgji6</a:t>
+            </a:r>
+          </a:p>
+          <a:p>
+            <a:pPr marL="0" indent="0">
+              <a:buNone/>
+            </a:pPr>
+            <a:r>
+              <a:rPr lang="en-US" sz="2400" dirty="0">
+                <a:solidFill>
+                  <a:schemeClr val="accent6">
+                    <a:lumMod val="40000"/>
+                    <a:lumOff val="60000"/>
+                  </a:schemeClr>
+                </a:solidFill>
+                <a:hlinkClick r:id="rId4">
+                  <a:extLst>
+                    <a:ext uri="{A12FA001-AC4F-418D-AE19-62706E023703}">
+                      <ahyp:hlinkClr xmlns:ahyp="http://schemas.microsoft.com/office/drawing/2018/hyperlinkcolor" val="tx"/>
+                    </a:ext>
+                  </a:extLst>
+                </a:hlinkClick>
+              </a:rPr>
+              <a:t>2) https://youtu.be/UPtG_38Oq8o?si=fYUN8D7y1fvW2vCw</a:t>
+            </a:r>
+            <a:endParaRPr lang="en-US" sz="2400" dirty="0">
+              <a:solidFill>
+                <a:schemeClr val="accent6">
+                  <a:lumMod val="40000"/>
+                  <a:lumOff val="60000"/>
+                </a:schemeClr>
+              </a:solidFill>
+            </a:endParaRPr>
+          </a:p>
+          <a:p>
+            <a:pPr marL="0" indent="0">
+              <a:buNone/>
+            </a:pPr>
+            <a:r>
+              <a:rPr lang="en-US" sz="2400" dirty="0">
+                <a:solidFill>
+                  <a:schemeClr val="accent6">
+                    <a:lumMod val="40000"/>
+                    <a:lumOff val="60000"/>
+                  </a:schemeClr>
+                </a:solidFill>
+                <a:hlinkClick r:id="rId5">
+                  <a:extLst>
+                    <a:ext uri="{A12FA001-AC4F-418D-AE19-62706E023703}">
+                      <ahyp:hlinkClr xmlns:ahyp="http://schemas.microsoft.com/office/drawing/2018/hyperlinkcolor" val="tx"/>
+                    </a:ext>
+                  </a:extLst>
+                </a:hlinkClick>
+              </a:rPr>
+              <a:t>3) https://youtu.be/qaWMOYf4ri8?si=iA8GmBLLFfcZgCQk</a:t>
+            </a:r>
+            <a:endParaRPr lang="en-US" sz="2400" dirty="0">
+              <a:solidFill>
+                <a:schemeClr val="accent6">
+                  <a:lumMod val="40000"/>
+                  <a:lumOff val="60000"/>
+                </a:schemeClr>
+              </a:solidFill>
+            </a:endParaRPr>
+          </a:p>
+          <a:p>
+            <a:pPr marL="514350" indent="-514350">
+              <a:buAutoNum type="arabicParenR" startAt="3"/>
+            </a:pPr>
+            <a:endParaRPr lang="en-US" sz="2400" dirty="0">
+              <a:solidFill>
+                <a:schemeClr val="accent6">
+                  <a:lumMod val="40000"/>
+                  <a:lumOff val="60000"/>
+                </a:schemeClr>
+              </a:solidFill>
+            </a:endParaRPr>
+          </a:p>
+          <a:p>
+            <a:pPr marL="0" indent="0">
+              <a:buNone/>
+            </a:pPr>
+            <a:r>
+              <a:rPr lang="en-US" sz="2400" dirty="0">
+                <a:solidFill>
+                  <a:schemeClr val="accent6">
+                    <a:lumMod val="40000"/>
+                    <a:lumOff val="60000"/>
+                  </a:schemeClr>
+                </a:solidFill>
+              </a:rPr>
+              <a:t>https://www.datacamp.com/tutorial/how-transformers-work</a:t>
+            </a:r>
+          </a:p>
+          <a:p>
+            <a:pPr marL="0" indent="0">
+              <a:buNone/>
+            </a:pPr>
+            <a:endParaRPr lang="en-US" sz="2400" dirty="0">
+              <a:solidFill>
+                <a:schemeClr val="accent6">
+                  <a:lumMod val="40000"/>
+                  <a:lumOff val="60000"/>
+                </a:schemeClr>
+              </a:solidFill>
+            </a:endParaRPr>
+          </a:p>
+          <a:p>
+            <a:pPr marL="514350" indent="-514350">
+              <a:buAutoNum type="arabicParenR" startAt="3"/>
+            </a:pPr>
+            <a:endParaRPr lang="en-US" sz="2400" dirty="0">
+              <a:solidFill>
+                <a:schemeClr val="accent6">
+                  <a:lumMod val="40000"/>
+                  <a:lumOff val="60000"/>
+                </a:schemeClr>
+              </a:solidFill>
+            </a:endParaRPr>
+          </a:p>
+        </p:txBody>
+      </p:sp>
+    </p:spTree>
+    <p:extLst>
+      <p:ext uri="{BB962C8B-B14F-4D97-AF65-F5344CB8AC3E}">
+        <p14:creationId xmlns:p14="http://schemas.microsoft.com/office/powerpoint/2010/main" val="1193052763"/>
+      </p:ext>
+    </p:extLst>
+  </p:cSld>
+  <p:clrMapOvr>
+    <a:masterClrMapping/>
+  </p:clrMapOvr>
+</p:sld>
+</file>
+
+<file path=ppt/slides/slide20.xml><?xml version="1.0" encoding="utf-8"?>
 <p:sld xmlns:a="http://schemas.openxmlformats.org/drawingml/2006/main" xmlns:r="http://schemas.openxmlformats.org/officeDocument/2006/relationships" xmlns:p="http://schemas.openxmlformats.org/presentationml/2006/main">
   <p:cSld>
     <p:spTree>
@@ -10706,7 +14557,7 @@
 </p:sld>
 </file>
 
-<file path=ppt/slides/slide18.xml><?xml version="1.0" encoding="utf-8"?>
+<file path=ppt/slides/slide21.xml><?xml version="1.0" encoding="utf-8"?>
 <p:sld xmlns:a="http://schemas.openxmlformats.org/drawingml/2006/main" xmlns:r="http://schemas.openxmlformats.org/officeDocument/2006/relationships" xmlns:p="http://schemas.openxmlformats.org/presentationml/2006/main">
   <p:cSld>
     <p:spTree>
@@ -12626,7 +16477,7 @@
 </p:sld>
 </file>
 
-<file path=ppt/slides/slide19.xml><?xml version="1.0" encoding="utf-8"?>
+<file path=ppt/slides/slide22.xml><?xml version="1.0" encoding="utf-8"?>
 <p:sld xmlns:a="http://schemas.openxmlformats.org/drawingml/2006/main" xmlns:r="http://schemas.openxmlformats.org/officeDocument/2006/relationships" xmlns:p="http://schemas.openxmlformats.org/presentationml/2006/main">
   <p:cSld>
     <p:spTree>
@@ -12913,376 +16764,7 @@
 </p:sld>
 </file>
 
-<file path=ppt/slides/slide2.xml><?xml version="1.0" encoding="utf-8"?>
-<p:sld xmlns:a="http://schemas.openxmlformats.org/drawingml/2006/main" xmlns:r="http://schemas.openxmlformats.org/officeDocument/2006/relationships" xmlns:p="http://schemas.openxmlformats.org/presentationml/2006/main">
-  <p:cSld>
-    <p:spTree>
-      <p:nvGrpSpPr>
-        <p:cNvPr id="1" name=""/>
-        <p:cNvGrpSpPr/>
-        <p:nvPr/>
-      </p:nvGrpSpPr>
-      <p:grpSpPr>
-        <a:xfrm>
-          <a:off x="0" y="0"/>
-          <a:ext cx="0" cy="0"/>
-          <a:chOff x="0" y="0"/>
-          <a:chExt cx="0" cy="0"/>
-        </a:xfrm>
-      </p:grpSpPr>
-      <p:sp>
-        <p:nvSpPr>
-          <p:cNvPr id="4" name="TextBox 3">
-            <a:extLst>
-              <a:ext uri="{FF2B5EF4-FFF2-40B4-BE49-F238E27FC236}">
-                <a16:creationId xmlns:a16="http://schemas.microsoft.com/office/drawing/2014/main" id="{29D68720-C308-BDDC-262A-F5640C4C8FED}"/>
-              </a:ext>
-            </a:extLst>
-          </p:cNvPr>
-          <p:cNvSpPr txBox="1"/>
-          <p:nvPr/>
-        </p:nvSpPr>
-        <p:spPr>
-          <a:xfrm>
-            <a:off x="777618" y="1245090"/>
-            <a:ext cx="10268712" cy="5632311"/>
-          </a:xfrm>
-          <a:prstGeom prst="rect">
-            <a:avLst/>
-          </a:prstGeom>
-          <a:noFill/>
-        </p:spPr>
-        <p:txBody>
-          <a:bodyPr wrap="square">
-            <a:spAutoFit/>
-          </a:bodyPr>
-          <a:lstStyle/>
-          <a:p>
-            <a:r>
-              <a:rPr lang="en-US" sz="2400" u="sng" dirty="0">
-                <a:solidFill>
-                  <a:schemeClr val="accent6">
-                    <a:lumMod val="40000"/>
-                    <a:lumOff val="60000"/>
-                  </a:schemeClr>
-                </a:solidFill>
-                <a:hlinkClick r:id="rId2">
-                  <a:extLst>
-                    <a:ext uri="{A12FA001-AC4F-418D-AE19-62706E023703}">
-                      <ahyp:hlinkClr xmlns:ahyp="http://schemas.microsoft.com/office/drawing/2018/hyperlinkcolor" val="tx"/>
-                    </a:ext>
-                  </a:extLst>
-                </a:hlinkClick>
-              </a:rPr>
-              <a:t>Playground:  </a:t>
-            </a:r>
-            <a:r>
-              <a:rPr lang="en-US" sz="2400" dirty="0">
-                <a:solidFill>
-                  <a:schemeClr val="accent6">
-                    <a:lumMod val="40000"/>
-                    <a:lumOff val="60000"/>
-                  </a:schemeClr>
-                </a:solidFill>
-                <a:hlinkClick r:id="rId2">
-                  <a:extLst>
-                    <a:ext uri="{A12FA001-AC4F-418D-AE19-62706E023703}">
-                      <ahyp:hlinkClr xmlns:ahyp="http://schemas.microsoft.com/office/drawing/2018/hyperlinkcolor" val="tx"/>
-                    </a:ext>
-                  </a:extLst>
-                </a:hlinkClick>
-              </a:rPr>
-              <a:t>https://poloclub.github.io/transformer-explainer/</a:t>
-            </a:r>
-          </a:p>
-          <a:p>
-            <a:endParaRPr lang="en-US" sz="2400" dirty="0">
-              <a:solidFill>
-                <a:schemeClr val="accent6">
-                  <a:lumMod val="40000"/>
-                  <a:lumOff val="60000"/>
-                </a:schemeClr>
-              </a:solidFill>
-              <a:hlinkClick r:id="rId2">
-                <a:extLst>
-                  <a:ext uri="{A12FA001-AC4F-418D-AE19-62706E023703}">
-                    <ahyp:hlinkClr xmlns:ahyp="http://schemas.microsoft.com/office/drawing/2018/hyperlinkcolor" val="tx"/>
-                  </a:ext>
-                </a:extLst>
-              </a:hlinkClick>
-            </a:endParaRPr>
-          </a:p>
-          <a:p>
-            <a:r>
-              <a:rPr lang="en-US" sz="2400" dirty="0">
-                <a:solidFill>
-                  <a:schemeClr val="accent6">
-                    <a:lumMod val="40000"/>
-                    <a:lumOff val="60000"/>
-                  </a:schemeClr>
-                </a:solidFill>
-                <a:hlinkClick r:id="rId2">
-                  <a:extLst>
-                    <a:ext uri="{A12FA001-AC4F-418D-AE19-62706E023703}">
-                      <ahyp:hlinkClr xmlns:ahyp="http://schemas.microsoft.com/office/drawing/2018/hyperlinkcolor" val="tx"/>
-                    </a:ext>
-                  </a:extLst>
-                </a:hlinkClick>
-              </a:rPr>
-              <a:t>Source:</a:t>
-            </a:r>
-          </a:p>
-          <a:p>
-            <a:r>
-              <a:rPr lang="en-US" sz="2400" dirty="0">
-                <a:solidFill>
-                  <a:schemeClr val="accent6">
-                    <a:lumMod val="40000"/>
-                    <a:lumOff val="60000"/>
-                  </a:schemeClr>
-                </a:solidFill>
-                <a:hlinkClick r:id="rId2">
-                  <a:extLst>
-                    <a:ext uri="{A12FA001-AC4F-418D-AE19-62706E023703}">
-                      <ahyp:hlinkClr xmlns:ahyp="http://schemas.microsoft.com/office/drawing/2018/hyperlinkcolor" val="tx"/>
-                    </a:ext>
-                  </a:extLst>
-                </a:hlinkClick>
-              </a:rPr>
-              <a:t>https://youtu.be/ZhAz268Hdpw?si=jQXkVM058uJkEWCw</a:t>
-            </a:r>
-            <a:endParaRPr lang="en-US" sz="2400" dirty="0">
-              <a:solidFill>
-                <a:schemeClr val="accent6">
-                  <a:lumMod val="40000"/>
-                  <a:lumOff val="60000"/>
-                </a:schemeClr>
-              </a:solidFill>
-            </a:endParaRPr>
-          </a:p>
-          <a:p>
-            <a:r>
-              <a:rPr lang="en-US" sz="2400" dirty="0">
-                <a:solidFill>
-                  <a:schemeClr val="accent6">
-                    <a:lumMod val="40000"/>
-                    <a:lumOff val="60000"/>
-                  </a:schemeClr>
-                </a:solidFill>
-                <a:hlinkClick r:id="rId3">
-                  <a:extLst>
-                    <a:ext uri="{A12FA001-AC4F-418D-AE19-62706E023703}">
-                      <ahyp:hlinkClr xmlns:ahyp="http://schemas.microsoft.com/office/drawing/2018/hyperlinkcolor" val="tx"/>
-                    </a:ext>
-                  </a:extLst>
-                </a:hlinkClick>
-              </a:rPr>
-              <a:t>https://youtu.be/zxQyTK8quyY?si=C-flWWBSxwrqWao7</a:t>
-            </a:r>
-            <a:endParaRPr lang="en-US" sz="2400" dirty="0">
-              <a:solidFill>
-                <a:schemeClr val="accent6">
-                  <a:lumMod val="40000"/>
-                  <a:lumOff val="60000"/>
-                </a:schemeClr>
-              </a:solidFill>
-            </a:endParaRPr>
-          </a:p>
-          <a:p>
-            <a:endParaRPr lang="en-US" sz="2400" dirty="0">
-              <a:solidFill>
-                <a:schemeClr val="accent6">
-                  <a:lumMod val="40000"/>
-                  <a:lumOff val="60000"/>
-                </a:schemeClr>
-              </a:solidFill>
-            </a:endParaRPr>
-          </a:p>
-          <a:p>
-            <a:pPr marL="0" indent="0">
-              <a:buNone/>
-            </a:pPr>
-            <a:endParaRPr lang="en-US" sz="2400" dirty="0">
-              <a:solidFill>
-                <a:schemeClr val="accent6">
-                  <a:lumMod val="40000"/>
-                  <a:lumOff val="60000"/>
-                </a:schemeClr>
-              </a:solidFill>
-            </a:endParaRPr>
-          </a:p>
-          <a:p>
-            <a:pPr marL="0" indent="0">
-              <a:buNone/>
-            </a:pPr>
-            <a:r>
-              <a:rPr lang="en-US" sz="2400" dirty="0">
-                <a:solidFill>
-                  <a:schemeClr val="accent6">
-                    <a:lumMod val="40000"/>
-                    <a:lumOff val="60000"/>
-                  </a:schemeClr>
-                </a:solidFill>
-              </a:rPr>
-              <a:t>3 parts:</a:t>
-            </a:r>
-          </a:p>
-          <a:p>
-            <a:pPr marL="0" indent="0">
-              <a:buNone/>
-            </a:pPr>
-            <a:r>
-              <a:rPr lang="en-US" sz="2400" dirty="0">
-                <a:solidFill>
-                  <a:schemeClr val="accent6">
-                    <a:lumMod val="40000"/>
-                    <a:lumOff val="60000"/>
-                  </a:schemeClr>
-                </a:solidFill>
-                <a:hlinkClick r:id="rId4">
-                  <a:extLst>
-                    <a:ext uri="{A12FA001-AC4F-418D-AE19-62706E023703}">
-                      <ahyp:hlinkClr xmlns:ahyp="http://schemas.microsoft.com/office/drawing/2018/hyperlinkcolor" val="tx"/>
-                    </a:ext>
-                  </a:extLst>
-                </a:hlinkClick>
-              </a:rPr>
-              <a:t>1) https://youtu.be/OxCpWwDCDFQ?si=xo2r5jOoc3YQgji6</a:t>
-            </a:r>
-          </a:p>
-          <a:p>
-            <a:pPr marL="0" indent="0">
-              <a:buNone/>
-            </a:pPr>
-            <a:r>
-              <a:rPr lang="en-US" sz="2400" dirty="0">
-                <a:solidFill>
-                  <a:schemeClr val="accent6">
-                    <a:lumMod val="40000"/>
-                    <a:lumOff val="60000"/>
-                  </a:schemeClr>
-                </a:solidFill>
-                <a:hlinkClick r:id="rId4">
-                  <a:extLst>
-                    <a:ext uri="{A12FA001-AC4F-418D-AE19-62706E023703}">
-                      <ahyp:hlinkClr xmlns:ahyp="http://schemas.microsoft.com/office/drawing/2018/hyperlinkcolor" val="tx"/>
-                    </a:ext>
-                  </a:extLst>
-                </a:hlinkClick>
-              </a:rPr>
-              <a:t>2) https://youtu.be/UPtG_38Oq8o?si=fYUN8D7y1fvW2vCw</a:t>
-            </a:r>
-            <a:endParaRPr lang="en-US" sz="2400" dirty="0">
-              <a:solidFill>
-                <a:schemeClr val="accent6">
-                  <a:lumMod val="40000"/>
-                  <a:lumOff val="60000"/>
-                </a:schemeClr>
-              </a:solidFill>
-            </a:endParaRPr>
-          </a:p>
-          <a:p>
-            <a:pPr marL="0" indent="0">
-              <a:buNone/>
-            </a:pPr>
-            <a:r>
-              <a:rPr lang="en-US" sz="2400" dirty="0">
-                <a:solidFill>
-                  <a:schemeClr val="accent6">
-                    <a:lumMod val="40000"/>
-                    <a:lumOff val="60000"/>
-                  </a:schemeClr>
-                </a:solidFill>
-                <a:hlinkClick r:id="rId5">
-                  <a:extLst>
-                    <a:ext uri="{A12FA001-AC4F-418D-AE19-62706E023703}">
-                      <ahyp:hlinkClr xmlns:ahyp="http://schemas.microsoft.com/office/drawing/2018/hyperlinkcolor" val="tx"/>
-                    </a:ext>
-                  </a:extLst>
-                </a:hlinkClick>
-              </a:rPr>
-              <a:t>3) https://youtu.be/qaWMOYf4ri8?si=iA8GmBLLFfcZgCQk</a:t>
-            </a:r>
-            <a:endParaRPr lang="en-US" sz="2400" dirty="0">
-              <a:solidFill>
-                <a:schemeClr val="accent6">
-                  <a:lumMod val="40000"/>
-                  <a:lumOff val="60000"/>
-                </a:schemeClr>
-              </a:solidFill>
-            </a:endParaRPr>
-          </a:p>
-          <a:p>
-            <a:pPr marL="514350" indent="-514350">
-              <a:buAutoNum type="arabicParenR" startAt="3"/>
-            </a:pPr>
-            <a:endParaRPr lang="en-US" sz="2400" dirty="0">
-              <a:solidFill>
-                <a:schemeClr val="accent6">
-                  <a:lumMod val="40000"/>
-                  <a:lumOff val="60000"/>
-                </a:schemeClr>
-              </a:solidFill>
-            </a:endParaRPr>
-          </a:p>
-          <a:p>
-            <a:pPr marL="0" indent="0">
-              <a:buNone/>
-            </a:pPr>
-            <a:r>
-              <a:rPr lang="en-US" sz="2400" dirty="0">
-                <a:solidFill>
-                  <a:schemeClr val="accent6">
-                    <a:lumMod val="40000"/>
-                    <a:lumOff val="60000"/>
-                  </a:schemeClr>
-                </a:solidFill>
-              </a:rPr>
-              <a:t>https://www.datacamp.com/tutorial/how-transformers-work</a:t>
-            </a:r>
-          </a:p>
-          <a:p>
-            <a:pPr marL="0" indent="0">
-              <a:buNone/>
-            </a:pPr>
-            <a:endParaRPr lang="en-US" sz="2400" dirty="0">
-              <a:solidFill>
-                <a:schemeClr val="accent6">
-                  <a:lumMod val="40000"/>
-                  <a:lumOff val="60000"/>
-                </a:schemeClr>
-              </a:solidFill>
-            </a:endParaRPr>
-          </a:p>
-          <a:p>
-            <a:pPr marL="514350" indent="-514350">
-              <a:buAutoNum type="arabicParenR" startAt="3"/>
-            </a:pPr>
-            <a:endParaRPr lang="en-US" sz="2400" dirty="0">
-              <a:solidFill>
-                <a:schemeClr val="accent6">
-                  <a:lumMod val="40000"/>
-                  <a:lumOff val="60000"/>
-                </a:schemeClr>
-              </a:solidFill>
-            </a:endParaRPr>
-          </a:p>
-        </p:txBody>
-      </p:sp>
-    </p:spTree>
-    <p:extLst>
-      <p:ext uri="{BB962C8B-B14F-4D97-AF65-F5344CB8AC3E}">
-        <p14:creationId xmlns:p14="http://schemas.microsoft.com/office/powerpoint/2010/main" val="1193052763"/>
-      </p:ext>
-    </p:extLst>
-  </p:cSld>
-  <p:clrMapOvr>
-    <a:masterClrMapping/>
-  </p:clrMapOvr>
-</p:sld>
-</file>
-
-<file path=ppt/slides/slide20.xml><?xml version="1.0" encoding="utf-8"?>
+<file path=ppt/slides/slide23.xml><?xml version="1.0" encoding="utf-8"?>
 <p:sld xmlns:a="http://schemas.openxmlformats.org/drawingml/2006/main" xmlns:r="http://schemas.openxmlformats.org/officeDocument/2006/relationships" xmlns:p="http://schemas.openxmlformats.org/presentationml/2006/main">
   <p:cSld>
     <p:spTree>
@@ -13402,7 +16884,7 @@
         </p:blipFill>
         <p:spPr>
           <a:xfrm>
-            <a:off x="5430531" y="628239"/>
+            <a:off x="4101758" y="593804"/>
             <a:ext cx="5652691" cy="1997633"/>
           </a:xfrm>
           <a:prstGeom prst="rect">
@@ -13432,8 +16914,8 @@
         </p:blipFill>
         <p:spPr>
           <a:xfrm>
-            <a:off x="45800" y="3017042"/>
-            <a:ext cx="6662892" cy="1937553"/>
+            <a:off x="192024" y="3227302"/>
+            <a:ext cx="5812580" cy="1690284"/>
           </a:xfrm>
           <a:prstGeom prst="rect">
             <a:avLst/>
@@ -13492,7 +16974,7 @@
         </p:blipFill>
         <p:spPr>
           <a:xfrm>
-            <a:off x="7380514" y="5278720"/>
+            <a:off x="7856002" y="5165161"/>
             <a:ext cx="1752727" cy="1579280"/>
           </a:xfrm>
           <a:prstGeom prst="rect">
@@ -13522,7 +17004,7 @@
         </p:blipFill>
         <p:spPr>
           <a:xfrm>
-            <a:off x="6928104" y="3839055"/>
+            <a:off x="6800088" y="3991603"/>
             <a:ext cx="4236720" cy="549921"/>
           </a:xfrm>
           <a:prstGeom prst="rect">
@@ -13543,7 +17025,7 @@
 </p:sld>
 </file>
 
-<file path=ppt/slides/slide21.xml><?xml version="1.0" encoding="utf-8"?>
+<file path=ppt/slides/slide24.xml><?xml version="1.0" encoding="utf-8"?>
 <p:sld xmlns:a="http://schemas.openxmlformats.org/drawingml/2006/main" xmlns:r="http://schemas.openxmlformats.org/officeDocument/2006/relationships" xmlns:p="http://schemas.openxmlformats.org/presentationml/2006/main">
   <p:cSld>
     <p:spTree>
@@ -13729,7 +17211,7 @@
 </p:sld>
 </file>
 
-<file path=ppt/slides/slide22.xml><?xml version="1.0" encoding="utf-8"?>
+<file path=ppt/slides/slide25.xml><?xml version="1.0" encoding="utf-8"?>
 <p:sld xmlns:a="http://schemas.openxmlformats.org/drawingml/2006/main" xmlns:r="http://schemas.openxmlformats.org/officeDocument/2006/relationships" xmlns:p="http://schemas.openxmlformats.org/presentationml/2006/main">
   <p:cSld>
     <p:spTree>
@@ -13885,7 +17367,7 @@
 </p:sld>
 </file>
 
-<file path=ppt/slides/slide23.xml><?xml version="1.0" encoding="utf-8"?>
+<file path=ppt/slides/slide26.xml><?xml version="1.0" encoding="utf-8"?>
 <p:sld xmlns:a="http://schemas.openxmlformats.org/drawingml/2006/main" xmlns:r="http://schemas.openxmlformats.org/officeDocument/2006/relationships" xmlns:p="http://schemas.openxmlformats.org/presentationml/2006/main">
   <p:cSld>
     <p:spTree>
@@ -14159,7 +17641,631 @@
 </p:sld>
 </file>
 
-<file path=ppt/slides/slide24.xml><?xml version="1.0" encoding="utf-8"?>
+<file path=ppt/slides/slide27.xml><?xml version="1.0" encoding="utf-8"?>
+<p:sld xmlns:a="http://schemas.openxmlformats.org/drawingml/2006/main" xmlns:r="http://schemas.openxmlformats.org/officeDocument/2006/relationships" xmlns:p="http://schemas.openxmlformats.org/presentationml/2006/main">
+  <p:cSld>
+    <p:spTree>
+      <p:nvGrpSpPr>
+        <p:cNvPr id="1" name=""/>
+        <p:cNvGrpSpPr/>
+        <p:nvPr/>
+      </p:nvGrpSpPr>
+      <p:grpSpPr>
+        <a:xfrm>
+          <a:off x="0" y="0"/>
+          <a:ext cx="0" cy="0"/>
+          <a:chOff x="0" y="0"/>
+          <a:chExt cx="0" cy="0"/>
+        </a:xfrm>
+      </p:grpSpPr>
+      <p:sp>
+        <p:nvSpPr>
+          <p:cNvPr id="4" name="Rectangle 3"/>
+          <p:cNvSpPr/>
+          <p:nvPr/>
+        </p:nvSpPr>
+        <p:spPr>
+          <a:xfrm>
+            <a:off x="161544" y="735118"/>
+            <a:ext cx="11594591" cy="3785652"/>
+          </a:xfrm>
+          <a:prstGeom prst="rect">
+            <a:avLst/>
+          </a:prstGeom>
+        </p:spPr>
+        <p:txBody>
+          <a:bodyPr wrap="square">
+            <a:spAutoFit/>
+          </a:bodyPr>
+          <a:lstStyle/>
+          <a:p>
+            <a:r>
+              <a:rPr lang="en-US" sz="2400" b="1" dirty="0">
+                <a:solidFill>
+                  <a:schemeClr val="accent6">
+                    <a:lumMod val="60000"/>
+                    <a:lumOff val="40000"/>
+                  </a:schemeClr>
+                </a:solidFill>
+              </a:rPr>
+              <a:t>Output Process</a:t>
+            </a:r>
+          </a:p>
+          <a:p>
+            <a:endParaRPr lang="en-US" sz="2400" b="1" dirty="0">
+              <a:solidFill>
+                <a:schemeClr val="accent6">
+                  <a:lumMod val="60000"/>
+                  <a:lumOff val="40000"/>
+                </a:schemeClr>
+              </a:solidFill>
+            </a:endParaRPr>
+          </a:p>
+          <a:p>
+            <a:pPr>
+              <a:buFont typeface="Arial" panose="020B0604020202020204" pitchFamily="34" charset="0"/>
+              <a:buChar char="•"/>
+            </a:pPr>
+            <a:r>
+              <a:rPr lang="en-US" sz="2400" dirty="0">
+                <a:solidFill>
+                  <a:schemeClr val="accent6">
+                    <a:lumMod val="60000"/>
+                    <a:lumOff val="40000"/>
+                  </a:schemeClr>
+                </a:solidFill>
+              </a:rPr>
+              <a:t> For classification tasks (like BERT), the final token representations are passed to a classifier.</a:t>
+            </a:r>
+          </a:p>
+          <a:p>
+            <a:r>
+              <a:rPr lang="en-US" sz="2400" b="1" dirty="0">
+                <a:solidFill>
+                  <a:schemeClr val="accent6">
+                    <a:lumMod val="60000"/>
+                    <a:lumOff val="40000"/>
+                  </a:schemeClr>
+                </a:solidFill>
+              </a:rPr>
+              <a:t>In BERT</a:t>
+            </a:r>
+          </a:p>
+          <a:p>
+            <a:r>
+              <a:rPr lang="en-US" sz="2400" dirty="0">
+                <a:solidFill>
+                  <a:schemeClr val="accent6">
+                    <a:lumMod val="60000"/>
+                    <a:lumOff val="40000"/>
+                  </a:schemeClr>
+                </a:solidFill>
+              </a:rPr>
+              <a:t>Output = contextual embeddings </a:t>
+            </a:r>
+          </a:p>
+          <a:p>
+            <a:r>
+              <a:rPr lang="en-US" sz="2400" dirty="0">
+                <a:solidFill>
+                  <a:schemeClr val="accent6">
+                    <a:lumMod val="60000"/>
+                    <a:lumOff val="40000"/>
+                  </a:schemeClr>
+                </a:solidFill>
+              </a:rPr>
+              <a:t>Used for: classification ,  NER , QA </a:t>
+            </a:r>
+          </a:p>
+          <a:p>
+            <a:pPr>
+              <a:buFont typeface="Arial" panose="020B0604020202020204" pitchFamily="34" charset="0"/>
+              <a:buChar char="•"/>
+            </a:pPr>
+            <a:endParaRPr lang="en-US" sz="2400" dirty="0">
+              <a:solidFill>
+                <a:schemeClr val="accent6">
+                  <a:lumMod val="60000"/>
+                  <a:lumOff val="40000"/>
+                </a:schemeClr>
+              </a:solidFill>
+            </a:endParaRPr>
+          </a:p>
+          <a:p>
+            <a:endParaRPr lang="en-US" sz="2400" dirty="0">
+              <a:solidFill>
+                <a:schemeClr val="accent6">
+                  <a:lumMod val="60000"/>
+                  <a:lumOff val="40000"/>
+                </a:schemeClr>
+              </a:solidFill>
+            </a:endParaRPr>
+          </a:p>
+          <a:p>
+            <a:pPr>
+              <a:buFont typeface="Arial" panose="020B0604020202020204" pitchFamily="34" charset="0"/>
+              <a:buChar char="•"/>
+            </a:pPr>
+            <a:r>
+              <a:rPr lang="en-US" sz="2400" dirty="0">
+                <a:solidFill>
+                  <a:schemeClr val="accent6">
+                    <a:lumMod val="60000"/>
+                    <a:lumOff val="40000"/>
+                  </a:schemeClr>
+                </a:solidFill>
+              </a:rPr>
+              <a:t> For generation tasks (like GPT), the decoder predicts the next word/token step-by-step.</a:t>
+            </a:r>
+          </a:p>
+          <a:p>
+            <a:r>
+              <a:rPr lang="en-US" sz="2400" dirty="0">
+                <a:solidFill>
+                  <a:schemeClr val="accent6">
+                    <a:lumMod val="60000"/>
+                    <a:lumOff val="40000"/>
+                  </a:schemeClr>
+                </a:solidFill>
+              </a:rPr>
+              <a:t>GPT predicts next word</a:t>
+            </a:r>
+          </a:p>
+        </p:txBody>
+      </p:sp>
+      <p:sp>
+        <p:nvSpPr>
+          <p:cNvPr id="7" name="TextBox 6">
+            <a:extLst>
+              <a:ext uri="{FF2B5EF4-FFF2-40B4-BE49-F238E27FC236}">
+                <a16:creationId xmlns:a16="http://schemas.microsoft.com/office/drawing/2014/main" id="{1B2597C5-96F5-DCCD-796D-740C696EE3B4}"/>
+              </a:ext>
+            </a:extLst>
+          </p:cNvPr>
+          <p:cNvSpPr txBox="1"/>
+          <p:nvPr/>
+        </p:nvSpPr>
+        <p:spPr>
+          <a:xfrm>
+            <a:off x="100584" y="85082"/>
+            <a:ext cx="6190488" cy="461665"/>
+          </a:xfrm>
+          <a:prstGeom prst="rect">
+            <a:avLst/>
+          </a:prstGeom>
+          <a:noFill/>
+        </p:spPr>
+        <p:txBody>
+          <a:bodyPr wrap="square">
+            <a:spAutoFit/>
+          </a:bodyPr>
+          <a:lstStyle/>
+          <a:p>
+            <a:r>
+              <a:rPr lang="en-US" sz="2400" b="1" dirty="0">
+                <a:solidFill>
+                  <a:schemeClr val="accent6">
+                    <a:lumMod val="60000"/>
+                    <a:lumOff val="40000"/>
+                  </a:schemeClr>
+                </a:solidFill>
+              </a:rPr>
+              <a:t>Core Components of a Transformer</a:t>
+            </a:r>
+          </a:p>
+        </p:txBody>
+      </p:sp>
+    </p:spTree>
+    <p:extLst>
+      <p:ext uri="{BB962C8B-B14F-4D97-AF65-F5344CB8AC3E}">
+        <p14:creationId xmlns:p14="http://schemas.microsoft.com/office/powerpoint/2010/main" val="2993750714"/>
+      </p:ext>
+    </p:extLst>
+  </p:cSld>
+  <p:clrMapOvr>
+    <a:masterClrMapping/>
+  </p:clrMapOvr>
+</p:sld>
+</file>
+
+<file path=ppt/slides/slide28.xml><?xml version="1.0" encoding="utf-8"?>
+<p:sld xmlns:a="http://schemas.openxmlformats.org/drawingml/2006/main" xmlns:r="http://schemas.openxmlformats.org/officeDocument/2006/relationships" xmlns:p="http://schemas.openxmlformats.org/presentationml/2006/main">
+  <p:cSld>
+    <p:spTree>
+      <p:nvGrpSpPr>
+        <p:cNvPr id="1" name=""/>
+        <p:cNvGrpSpPr/>
+        <p:nvPr/>
+      </p:nvGrpSpPr>
+      <p:grpSpPr>
+        <a:xfrm>
+          <a:off x="0" y="0"/>
+          <a:ext cx="0" cy="0"/>
+          <a:chOff x="0" y="0"/>
+          <a:chExt cx="0" cy="0"/>
+        </a:xfrm>
+      </p:grpSpPr>
+      <p:sp>
+        <p:nvSpPr>
+          <p:cNvPr id="2" name="Title 1"/>
+          <p:cNvSpPr>
+            <a:spLocks noGrp="1"/>
+          </p:cNvSpPr>
+          <p:nvPr>
+            <p:ph type="title"/>
+          </p:nvPr>
+        </p:nvSpPr>
+        <p:spPr/>
+        <p:txBody>
+          <a:bodyPr/>
+          <a:lstStyle/>
+          <a:p>
+            <a:r>
+              <a:rPr lang="en-US" b="1" dirty="0"/>
+              <a:t>Pros &amp; Cons Of Transformers</a:t>
+            </a:r>
+            <a:endParaRPr lang="en-US" dirty="0"/>
+          </a:p>
+        </p:txBody>
+      </p:sp>
+      <p:sp>
+        <p:nvSpPr>
+          <p:cNvPr id="5" name="TextBox 4">
+            <a:extLst>
+              <a:ext uri="{FF2B5EF4-FFF2-40B4-BE49-F238E27FC236}">
+                <a16:creationId xmlns:a16="http://schemas.microsoft.com/office/drawing/2014/main" id="{9806A2B2-24A5-AFBA-2BD7-EF5767037CDE}"/>
+              </a:ext>
+            </a:extLst>
+          </p:cNvPr>
+          <p:cNvSpPr txBox="1"/>
+          <p:nvPr/>
+        </p:nvSpPr>
+        <p:spPr>
+          <a:xfrm>
+            <a:off x="1321308" y="1873842"/>
+            <a:ext cx="6190488" cy="2677656"/>
+          </a:xfrm>
+          <a:prstGeom prst="rect">
+            <a:avLst/>
+          </a:prstGeom>
+          <a:noFill/>
+        </p:spPr>
+        <p:txBody>
+          <a:bodyPr wrap="square">
+            <a:spAutoFit/>
+          </a:bodyPr>
+          <a:lstStyle/>
+          <a:p>
+            <a:pPr marL="0" indent="0">
+              <a:buNone/>
+            </a:pPr>
+            <a:r>
+              <a:rPr lang="en-US" sz="2400" b="1" dirty="0">
+                <a:solidFill>
+                  <a:schemeClr val="accent6">
+                    <a:lumMod val="60000"/>
+                    <a:lumOff val="40000"/>
+                  </a:schemeClr>
+                </a:solidFill>
+              </a:rPr>
+              <a:t>Pros</a:t>
+            </a:r>
+          </a:p>
+          <a:p>
+            <a:pPr marL="342900" indent="-342900">
+              <a:buFont typeface="Arial" panose="020B0604020202020204" pitchFamily="34" charset="0"/>
+              <a:buChar char="•"/>
+            </a:pPr>
+            <a:r>
+              <a:rPr lang="en-US" sz="2400" dirty="0">
+                <a:solidFill>
+                  <a:schemeClr val="accent6">
+                    <a:lumMod val="60000"/>
+                    <a:lumOff val="40000"/>
+                  </a:schemeClr>
+                </a:solidFill>
+              </a:rPr>
+              <a:t>Parallel processing</a:t>
+            </a:r>
+          </a:p>
+          <a:p>
+            <a:pPr marL="342900" indent="-342900">
+              <a:buFont typeface="Arial" panose="020B0604020202020204" pitchFamily="34" charset="0"/>
+              <a:buChar char="•"/>
+            </a:pPr>
+            <a:r>
+              <a:rPr lang="en-US" sz="2400" dirty="0">
+                <a:solidFill>
+                  <a:schemeClr val="accent6">
+                    <a:lumMod val="60000"/>
+                    <a:lumOff val="40000"/>
+                  </a:schemeClr>
+                </a:solidFill>
+              </a:rPr>
+              <a:t>Better long-range understanding</a:t>
+            </a:r>
+          </a:p>
+          <a:p>
+            <a:pPr marL="0" indent="0">
+              <a:buNone/>
+            </a:pPr>
+            <a:endParaRPr lang="en-US" sz="2400" dirty="0">
+              <a:solidFill>
+                <a:schemeClr val="accent6">
+                  <a:lumMod val="60000"/>
+                  <a:lumOff val="40000"/>
+                </a:schemeClr>
+              </a:solidFill>
+            </a:endParaRPr>
+          </a:p>
+          <a:p>
+            <a:pPr marL="0" indent="0">
+              <a:buNone/>
+            </a:pPr>
+            <a:r>
+              <a:rPr lang="en-US" sz="2400" b="1" dirty="0">
+                <a:solidFill>
+                  <a:schemeClr val="accent6">
+                    <a:lumMod val="60000"/>
+                    <a:lumOff val="40000"/>
+                  </a:schemeClr>
+                </a:solidFill>
+              </a:rPr>
+              <a:t>Cons</a:t>
+            </a:r>
+          </a:p>
+          <a:p>
+            <a:pPr marL="342900" indent="-342900">
+              <a:buFont typeface="Arial" panose="020B0604020202020204" pitchFamily="34" charset="0"/>
+              <a:buChar char="•"/>
+            </a:pPr>
+            <a:r>
+              <a:rPr lang="en-US" sz="2400" dirty="0">
+                <a:solidFill>
+                  <a:schemeClr val="accent6">
+                    <a:lumMod val="60000"/>
+                    <a:lumOff val="40000"/>
+                  </a:schemeClr>
+                </a:solidFill>
+              </a:rPr>
+              <a:t>Requires large data</a:t>
+            </a:r>
+          </a:p>
+          <a:p>
+            <a:pPr marL="342900" indent="-342900">
+              <a:buFont typeface="Arial" panose="020B0604020202020204" pitchFamily="34" charset="0"/>
+              <a:buChar char="•"/>
+            </a:pPr>
+            <a:r>
+              <a:rPr lang="en-US" sz="2400" dirty="0">
+                <a:solidFill>
+                  <a:schemeClr val="accent6">
+                    <a:lumMod val="60000"/>
+                    <a:lumOff val="40000"/>
+                  </a:schemeClr>
+                </a:solidFill>
+              </a:rPr>
+              <a:t>Expensive training (GPU/TPU)</a:t>
+            </a:r>
+          </a:p>
+        </p:txBody>
+      </p:sp>
+    </p:spTree>
+    <p:extLst>
+      <p:ext uri="{BB962C8B-B14F-4D97-AF65-F5344CB8AC3E}">
+        <p14:creationId xmlns:p14="http://schemas.microsoft.com/office/powerpoint/2010/main" val="2909068381"/>
+      </p:ext>
+    </p:extLst>
+  </p:cSld>
+  <p:clrMapOvr>
+    <a:masterClrMapping/>
+  </p:clrMapOvr>
+</p:sld>
+</file>
+
+<file path=ppt/slides/slide29.xml><?xml version="1.0" encoding="utf-8"?>
+<p:sld xmlns:a="http://schemas.openxmlformats.org/drawingml/2006/main" xmlns:r="http://schemas.openxmlformats.org/officeDocument/2006/relationships" xmlns:p="http://schemas.openxmlformats.org/presentationml/2006/main">
+  <p:cSld>
+    <p:spTree>
+      <p:nvGrpSpPr>
+        <p:cNvPr id="1" name=""/>
+        <p:cNvGrpSpPr/>
+        <p:nvPr/>
+      </p:nvGrpSpPr>
+      <p:grpSpPr>
+        <a:xfrm>
+          <a:off x="0" y="0"/>
+          <a:ext cx="0" cy="0"/>
+          <a:chOff x="0" y="0"/>
+          <a:chExt cx="0" cy="0"/>
+        </a:xfrm>
+      </p:grpSpPr>
+    </p:spTree>
+    <p:extLst>
+      <p:ext uri="{BB962C8B-B14F-4D97-AF65-F5344CB8AC3E}">
+        <p14:creationId xmlns:p14="http://schemas.microsoft.com/office/powerpoint/2010/main" val="2532122546"/>
+      </p:ext>
+    </p:extLst>
+  </p:cSld>
+  <p:clrMapOvr>
+    <a:masterClrMapping/>
+  </p:clrMapOvr>
+</p:sld>
+</file>
+
+<file path=ppt/slides/slide3.xml><?xml version="1.0" encoding="utf-8"?>
+<p:sld xmlns:a="http://schemas.openxmlformats.org/drawingml/2006/main" xmlns:r="http://schemas.openxmlformats.org/officeDocument/2006/relationships" xmlns:p="http://schemas.openxmlformats.org/presentationml/2006/main">
+  <p:cSld>
+    <p:spTree>
+      <p:nvGrpSpPr>
+        <p:cNvPr id="1" name="">
+          <a:extLst>
+            <a:ext uri="{FF2B5EF4-FFF2-40B4-BE49-F238E27FC236}">
+              <a16:creationId xmlns:a16="http://schemas.microsoft.com/office/drawing/2014/main" id="{B87EE058-2E56-38C2-7DCF-3597C457BA32}"/>
+            </a:ext>
+          </a:extLst>
+        </p:cNvPr>
+        <p:cNvGrpSpPr/>
+        <p:nvPr/>
+      </p:nvGrpSpPr>
+      <p:grpSpPr>
+        <a:xfrm>
+          <a:off x="0" y="0"/>
+          <a:ext cx="0" cy="0"/>
+          <a:chOff x="0" y="0"/>
+          <a:chExt cx="0" cy="0"/>
+        </a:xfrm>
+      </p:grpSpPr>
+      <p:sp>
+        <p:nvSpPr>
+          <p:cNvPr id="5" name="TextBox 4">
+            <a:extLst>
+              <a:ext uri="{FF2B5EF4-FFF2-40B4-BE49-F238E27FC236}">
+                <a16:creationId xmlns:a16="http://schemas.microsoft.com/office/drawing/2014/main" id="{94D65004-F7E4-A2B4-8851-B290CA8E7D23}"/>
+              </a:ext>
+            </a:extLst>
+          </p:cNvPr>
+          <p:cNvSpPr txBox="1"/>
+          <p:nvPr/>
+        </p:nvSpPr>
+        <p:spPr>
+          <a:xfrm>
+            <a:off x="326136" y="1276784"/>
+            <a:ext cx="11539728" cy="1938992"/>
+          </a:xfrm>
+          <a:prstGeom prst="rect">
+            <a:avLst/>
+          </a:prstGeom>
+          <a:noFill/>
+        </p:spPr>
+        <p:txBody>
+          <a:bodyPr wrap="square">
+            <a:spAutoFit/>
+          </a:bodyPr>
+          <a:lstStyle/>
+          <a:p>
+            <a:pPr marL="0" indent="0">
+              <a:buNone/>
+            </a:pPr>
+            <a:r>
+              <a:rPr lang="en-US" sz="2400" b="1" dirty="0">
+                <a:solidFill>
+                  <a:schemeClr val="accent6">
+                    <a:lumMod val="60000"/>
+                    <a:lumOff val="40000"/>
+                  </a:schemeClr>
+                </a:solidFill>
+              </a:rPr>
+              <a:t>What are Transformers?</a:t>
+            </a:r>
+          </a:p>
+          <a:p>
+            <a:pPr marL="0" indent="0">
+              <a:buNone/>
+            </a:pPr>
+            <a:endParaRPr lang="en-US" sz="2400" b="1" dirty="0">
+              <a:solidFill>
+                <a:schemeClr val="accent6">
+                  <a:lumMod val="60000"/>
+                  <a:lumOff val="40000"/>
+                </a:schemeClr>
+              </a:solidFill>
+            </a:endParaRPr>
+          </a:p>
+          <a:p>
+            <a:pPr marL="342900" indent="-342900">
+              <a:buFont typeface="Arial" panose="020B0604020202020204" pitchFamily="34" charset="0"/>
+              <a:buChar char="•"/>
+            </a:pPr>
+            <a:r>
+              <a:rPr lang="en-US" sz="2400" dirty="0">
+                <a:solidFill>
+                  <a:schemeClr val="accent6">
+                    <a:lumMod val="60000"/>
+                    <a:lumOff val="40000"/>
+                  </a:schemeClr>
+                </a:solidFill>
+              </a:rPr>
+              <a:t>Definition: Neural Network that learns the context of sequential data and </a:t>
+            </a:r>
+            <a:r>
+              <a:rPr lang="en-US" sz="2400" b="1" dirty="0">
+                <a:solidFill>
+                  <a:schemeClr val="accent6">
+                    <a:lumMod val="60000"/>
+                    <a:lumOff val="40000"/>
+                  </a:schemeClr>
+                </a:solidFill>
+              </a:rPr>
+              <a:t>generates new data</a:t>
+            </a:r>
+            <a:r>
+              <a:rPr lang="en-US" sz="2400" dirty="0">
+                <a:solidFill>
+                  <a:schemeClr val="accent6">
+                    <a:lumMod val="60000"/>
+                    <a:lumOff val="40000"/>
+                  </a:schemeClr>
+                </a:solidFill>
+              </a:rPr>
+              <a:t> out of it. </a:t>
+            </a:r>
+          </a:p>
+          <a:p>
+            <a:pPr marL="342900" indent="-342900">
+              <a:buFont typeface="Arial" panose="020B0604020202020204" pitchFamily="34" charset="0"/>
+              <a:buChar char="•"/>
+            </a:pPr>
+            <a:r>
+              <a:rPr lang="en-US" sz="2400" dirty="0">
+                <a:solidFill>
+                  <a:schemeClr val="accent6">
+                    <a:lumMod val="60000"/>
+                    <a:lumOff val="40000"/>
+                  </a:schemeClr>
+                </a:solidFill>
+              </a:rPr>
+              <a:t>Origin: </a:t>
+            </a:r>
+            <a:r>
+              <a:rPr lang="en-US" sz="2400" i="1" dirty="0">
+                <a:solidFill>
+                  <a:schemeClr val="accent6">
+                    <a:lumMod val="60000"/>
+                    <a:lumOff val="40000"/>
+                  </a:schemeClr>
+                </a:solidFill>
+              </a:rPr>
+              <a:t>“Attention is All You Need”</a:t>
+            </a:r>
+            <a:r>
+              <a:rPr lang="en-US" sz="2400" dirty="0">
+                <a:solidFill>
+                  <a:schemeClr val="accent6">
+                    <a:lumMod val="60000"/>
+                    <a:lumOff val="40000"/>
+                  </a:schemeClr>
+                </a:solidFill>
+              </a:rPr>
+              <a:t> by Vaswani et al. (2017)</a:t>
+            </a:r>
+          </a:p>
+        </p:txBody>
+      </p:sp>
+    </p:spTree>
+    <p:extLst>
+      <p:ext uri="{BB962C8B-B14F-4D97-AF65-F5344CB8AC3E}">
+        <p14:creationId xmlns:p14="http://schemas.microsoft.com/office/powerpoint/2010/main" val="623873989"/>
+      </p:ext>
+    </p:extLst>
+  </p:cSld>
+  <p:clrMapOvr>
+    <a:masterClrMapping/>
+  </p:clrMapOvr>
+</p:sld>
+</file>
+
+<file path=ppt/slides/slide30.xml><?xml version="1.0" encoding="utf-8"?>
 <p:sld xmlns:a="http://schemas.openxmlformats.org/drawingml/2006/main" xmlns:r="http://schemas.openxmlformats.org/officeDocument/2006/relationships" xmlns:p="http://schemas.openxmlformats.org/presentationml/2006/main">
   <p:cSld>
     <p:spTree>
@@ -14446,7 +18552,7 @@
 </p:sld>
 </file>
 
-<file path=ppt/slides/slide25.xml><?xml version="1.0" encoding="utf-8"?>
+<file path=ppt/slides/slide31.xml><?xml version="1.0" encoding="utf-8"?>
 <p:sld xmlns:a="http://schemas.openxmlformats.org/drawingml/2006/main" xmlns:r="http://schemas.openxmlformats.org/officeDocument/2006/relationships" xmlns:p="http://schemas.openxmlformats.org/presentationml/2006/main">
   <p:cSld>
     <p:spTree>
@@ -14618,518 +18724,7 @@
 </p:sld>
 </file>
 
-<file path=ppt/slides/slide26.xml><?xml version="1.0" encoding="utf-8"?>
-<p:sld xmlns:a="http://schemas.openxmlformats.org/drawingml/2006/main" xmlns:r="http://schemas.openxmlformats.org/officeDocument/2006/relationships" xmlns:p="http://schemas.openxmlformats.org/presentationml/2006/main">
-  <p:cSld>
-    <p:spTree>
-      <p:nvGrpSpPr>
-        <p:cNvPr id="1" name=""/>
-        <p:cNvGrpSpPr/>
-        <p:nvPr/>
-      </p:nvGrpSpPr>
-      <p:grpSpPr>
-        <a:xfrm>
-          <a:off x="0" y="0"/>
-          <a:ext cx="0" cy="0"/>
-          <a:chOff x="0" y="0"/>
-          <a:chExt cx="0" cy="0"/>
-        </a:xfrm>
-      </p:grpSpPr>
-      <p:sp>
-        <p:nvSpPr>
-          <p:cNvPr id="4" name="Rectangle 3"/>
-          <p:cNvSpPr/>
-          <p:nvPr/>
-        </p:nvSpPr>
-        <p:spPr>
-          <a:xfrm>
-            <a:off x="161544" y="735118"/>
-            <a:ext cx="11594591" cy="3785652"/>
-          </a:xfrm>
-          <a:prstGeom prst="rect">
-            <a:avLst/>
-          </a:prstGeom>
-        </p:spPr>
-        <p:txBody>
-          <a:bodyPr wrap="square">
-            <a:spAutoFit/>
-          </a:bodyPr>
-          <a:lstStyle/>
-          <a:p>
-            <a:r>
-              <a:rPr lang="en-US" sz="2400" b="1" dirty="0">
-                <a:solidFill>
-                  <a:schemeClr val="accent6">
-                    <a:lumMod val="60000"/>
-                    <a:lumOff val="40000"/>
-                  </a:schemeClr>
-                </a:solidFill>
-              </a:rPr>
-              <a:t>Output Process</a:t>
-            </a:r>
-          </a:p>
-          <a:p>
-            <a:endParaRPr lang="en-US" sz="2400" b="1" dirty="0">
-              <a:solidFill>
-                <a:schemeClr val="accent6">
-                  <a:lumMod val="60000"/>
-                  <a:lumOff val="40000"/>
-                </a:schemeClr>
-              </a:solidFill>
-            </a:endParaRPr>
-          </a:p>
-          <a:p>
-            <a:pPr>
-              <a:buFont typeface="Arial" panose="020B0604020202020204" pitchFamily="34" charset="0"/>
-              <a:buChar char="•"/>
-            </a:pPr>
-            <a:r>
-              <a:rPr lang="en-US" sz="2400" dirty="0">
-                <a:solidFill>
-                  <a:schemeClr val="accent6">
-                    <a:lumMod val="60000"/>
-                    <a:lumOff val="40000"/>
-                  </a:schemeClr>
-                </a:solidFill>
-              </a:rPr>
-              <a:t> For classification tasks (like BERT), the final token representations are passed to a classifier.</a:t>
-            </a:r>
-          </a:p>
-          <a:p>
-            <a:r>
-              <a:rPr lang="en-US" sz="2400" b="1" dirty="0">
-                <a:solidFill>
-                  <a:schemeClr val="accent6">
-                    <a:lumMod val="60000"/>
-                    <a:lumOff val="40000"/>
-                  </a:schemeClr>
-                </a:solidFill>
-              </a:rPr>
-              <a:t>In BERT</a:t>
-            </a:r>
-          </a:p>
-          <a:p>
-            <a:r>
-              <a:rPr lang="en-US" sz="2400" dirty="0">
-                <a:solidFill>
-                  <a:schemeClr val="accent6">
-                    <a:lumMod val="60000"/>
-                    <a:lumOff val="40000"/>
-                  </a:schemeClr>
-                </a:solidFill>
-              </a:rPr>
-              <a:t>Output = contextual embeddings </a:t>
-            </a:r>
-          </a:p>
-          <a:p>
-            <a:r>
-              <a:rPr lang="en-US" sz="2400" dirty="0">
-                <a:solidFill>
-                  <a:schemeClr val="accent6">
-                    <a:lumMod val="60000"/>
-                    <a:lumOff val="40000"/>
-                  </a:schemeClr>
-                </a:solidFill>
-              </a:rPr>
-              <a:t>Used for: classification ,  NER , QA </a:t>
-            </a:r>
-          </a:p>
-          <a:p>
-            <a:pPr>
-              <a:buFont typeface="Arial" panose="020B0604020202020204" pitchFamily="34" charset="0"/>
-              <a:buChar char="•"/>
-            </a:pPr>
-            <a:endParaRPr lang="en-US" sz="2400" dirty="0">
-              <a:solidFill>
-                <a:schemeClr val="accent6">
-                  <a:lumMod val="60000"/>
-                  <a:lumOff val="40000"/>
-                </a:schemeClr>
-              </a:solidFill>
-            </a:endParaRPr>
-          </a:p>
-          <a:p>
-            <a:endParaRPr lang="en-US" sz="2400" dirty="0">
-              <a:solidFill>
-                <a:schemeClr val="accent6">
-                  <a:lumMod val="60000"/>
-                  <a:lumOff val="40000"/>
-                </a:schemeClr>
-              </a:solidFill>
-            </a:endParaRPr>
-          </a:p>
-          <a:p>
-            <a:pPr>
-              <a:buFont typeface="Arial" panose="020B0604020202020204" pitchFamily="34" charset="0"/>
-              <a:buChar char="•"/>
-            </a:pPr>
-            <a:r>
-              <a:rPr lang="en-US" sz="2400" dirty="0">
-                <a:solidFill>
-                  <a:schemeClr val="accent6">
-                    <a:lumMod val="60000"/>
-                    <a:lumOff val="40000"/>
-                  </a:schemeClr>
-                </a:solidFill>
-              </a:rPr>
-              <a:t> For generation tasks (like GPT), the decoder predicts the next word/token step-by-step.</a:t>
-            </a:r>
-          </a:p>
-          <a:p>
-            <a:r>
-              <a:rPr lang="en-US" sz="2400" dirty="0">
-                <a:solidFill>
-                  <a:schemeClr val="accent6">
-                    <a:lumMod val="60000"/>
-                    <a:lumOff val="40000"/>
-                  </a:schemeClr>
-                </a:solidFill>
-              </a:rPr>
-              <a:t>GPT predicts next word</a:t>
-            </a:r>
-          </a:p>
-        </p:txBody>
-      </p:sp>
-      <p:sp>
-        <p:nvSpPr>
-          <p:cNvPr id="7" name="TextBox 6">
-            <a:extLst>
-              <a:ext uri="{FF2B5EF4-FFF2-40B4-BE49-F238E27FC236}">
-                <a16:creationId xmlns:a16="http://schemas.microsoft.com/office/drawing/2014/main" id="{1B2597C5-96F5-DCCD-796D-740C696EE3B4}"/>
-              </a:ext>
-            </a:extLst>
-          </p:cNvPr>
-          <p:cNvSpPr txBox="1"/>
-          <p:nvPr/>
-        </p:nvSpPr>
-        <p:spPr>
-          <a:xfrm>
-            <a:off x="100584" y="85082"/>
-            <a:ext cx="6190488" cy="461665"/>
-          </a:xfrm>
-          <a:prstGeom prst="rect">
-            <a:avLst/>
-          </a:prstGeom>
-          <a:noFill/>
-        </p:spPr>
-        <p:txBody>
-          <a:bodyPr wrap="square">
-            <a:spAutoFit/>
-          </a:bodyPr>
-          <a:lstStyle/>
-          <a:p>
-            <a:r>
-              <a:rPr lang="en-US" sz="2400" b="1" dirty="0">
-                <a:solidFill>
-                  <a:schemeClr val="accent6">
-                    <a:lumMod val="60000"/>
-                    <a:lumOff val="40000"/>
-                  </a:schemeClr>
-                </a:solidFill>
-              </a:rPr>
-              <a:t>Core Components of a Transformer</a:t>
-            </a:r>
-          </a:p>
-        </p:txBody>
-      </p:sp>
-    </p:spTree>
-    <p:extLst>
-      <p:ext uri="{BB962C8B-B14F-4D97-AF65-F5344CB8AC3E}">
-        <p14:creationId xmlns:p14="http://schemas.microsoft.com/office/powerpoint/2010/main" val="2993750714"/>
-      </p:ext>
-    </p:extLst>
-  </p:cSld>
-  <p:clrMapOvr>
-    <a:masterClrMapping/>
-  </p:clrMapOvr>
-</p:sld>
-</file>
-
-<file path=ppt/slides/slide27.xml><?xml version="1.0" encoding="utf-8"?>
-<p:sld xmlns:a="http://schemas.openxmlformats.org/drawingml/2006/main" xmlns:r="http://schemas.openxmlformats.org/officeDocument/2006/relationships" xmlns:p="http://schemas.openxmlformats.org/presentationml/2006/main">
-  <p:cSld>
-    <p:spTree>
-      <p:nvGrpSpPr>
-        <p:cNvPr id="1" name=""/>
-        <p:cNvGrpSpPr/>
-        <p:nvPr/>
-      </p:nvGrpSpPr>
-      <p:grpSpPr>
-        <a:xfrm>
-          <a:off x="0" y="0"/>
-          <a:ext cx="0" cy="0"/>
-          <a:chOff x="0" y="0"/>
-          <a:chExt cx="0" cy="0"/>
-        </a:xfrm>
-      </p:grpSpPr>
-      <p:sp>
-        <p:nvSpPr>
-          <p:cNvPr id="2" name="Title 1"/>
-          <p:cNvSpPr>
-            <a:spLocks noGrp="1"/>
-          </p:cNvSpPr>
-          <p:nvPr>
-            <p:ph type="title"/>
-          </p:nvPr>
-        </p:nvSpPr>
-        <p:spPr>
-          <a:xfrm>
-            <a:off x="429827" y="365126"/>
-            <a:ext cx="8181513" cy="797850"/>
-          </a:xfrm>
-        </p:spPr>
-        <p:txBody>
-          <a:bodyPr/>
-          <a:lstStyle/>
-          <a:p>
-            <a:r>
-              <a:rPr lang="en-US" b="1" dirty="0"/>
-              <a:t>Transformer Families</a:t>
-            </a:r>
-            <a:endParaRPr lang="en-US" dirty="0"/>
-          </a:p>
-        </p:txBody>
-      </p:sp>
-      <p:sp>
-        <p:nvSpPr>
-          <p:cNvPr id="3" name="Content Placeholder 2"/>
-          <p:cNvSpPr>
-            <a:spLocks noGrp="1"/>
-          </p:cNvSpPr>
-          <p:nvPr>
-            <p:ph idx="1"/>
-          </p:nvPr>
-        </p:nvSpPr>
-        <p:spPr>
-          <a:xfrm>
-            <a:off x="838200" y="1825625"/>
-            <a:ext cx="10515600" cy="2923928"/>
-          </a:xfrm>
-        </p:spPr>
-        <p:txBody>
-          <a:bodyPr/>
-          <a:lstStyle/>
-          <a:p>
-            <a:r>
-              <a:rPr lang="en-US" b="1" dirty="0"/>
-              <a:t>BERT</a:t>
-            </a:r>
-            <a:r>
-              <a:rPr lang="en-US" dirty="0"/>
-              <a:t> – Encoder-only (understanding)</a:t>
-            </a:r>
-          </a:p>
-          <a:p>
-            <a:r>
-              <a:rPr lang="en-US" b="1" dirty="0"/>
-              <a:t>GPT</a:t>
-            </a:r>
-            <a:r>
-              <a:rPr lang="en-US" dirty="0"/>
-              <a:t> – Decoder-only (generation)</a:t>
-            </a:r>
-          </a:p>
-          <a:p>
-            <a:r>
-              <a:rPr lang="en-US" b="1" dirty="0"/>
-              <a:t>T5 / BART</a:t>
-            </a:r>
-            <a:r>
-              <a:rPr lang="en-US" dirty="0"/>
-              <a:t> – Encoder-decoder (translation, summarization)</a:t>
-            </a:r>
-          </a:p>
-          <a:p>
-            <a:r>
-              <a:rPr lang="en-US" b="1" dirty="0" err="1"/>
-              <a:t>ViT</a:t>
-            </a:r>
-            <a:r>
-              <a:rPr lang="en-US" dirty="0"/>
-              <a:t> – Transformer in vision</a:t>
-            </a:r>
-          </a:p>
-          <a:p>
-            <a:r>
-              <a:rPr lang="en-US" b="1" dirty="0"/>
-              <a:t>Recent Giants</a:t>
-            </a:r>
-            <a:r>
-              <a:rPr lang="en-US" dirty="0"/>
-              <a:t> – GPT-3, GPT-4, </a:t>
-            </a:r>
-            <a:r>
-              <a:rPr lang="en-US" dirty="0" err="1"/>
-              <a:t>PaLM</a:t>
-            </a:r>
-            <a:r>
-              <a:rPr lang="en-US" dirty="0"/>
-              <a:t>, Gemini, </a:t>
-            </a:r>
-            <a:r>
-              <a:rPr lang="en-US" dirty="0" err="1"/>
-              <a:t>LLaMA</a:t>
-            </a:r>
-            <a:r>
-              <a:rPr lang="en-US" dirty="0"/>
-              <a:t>, Claude</a:t>
-            </a:r>
-          </a:p>
-          <a:p>
-            <a:endParaRPr lang="en-US" dirty="0"/>
-          </a:p>
-        </p:txBody>
-      </p:sp>
-    </p:spTree>
-    <p:extLst>
-      <p:ext uri="{BB962C8B-B14F-4D97-AF65-F5344CB8AC3E}">
-        <p14:creationId xmlns:p14="http://schemas.microsoft.com/office/powerpoint/2010/main" val="2532122546"/>
-      </p:ext>
-    </p:extLst>
-  </p:cSld>
-  <p:clrMapOvr>
-    <a:masterClrMapping/>
-  </p:clrMapOvr>
-</p:sld>
-</file>
-
-<file path=ppt/slides/slide28.xml><?xml version="1.0" encoding="utf-8"?>
-<p:sld xmlns:a="http://schemas.openxmlformats.org/drawingml/2006/main" xmlns:r="http://schemas.openxmlformats.org/officeDocument/2006/relationships" xmlns:p="http://schemas.openxmlformats.org/presentationml/2006/main">
-  <p:cSld>
-    <p:spTree>
-      <p:nvGrpSpPr>
-        <p:cNvPr id="1" name=""/>
-        <p:cNvGrpSpPr/>
-        <p:nvPr/>
-      </p:nvGrpSpPr>
-      <p:grpSpPr>
-        <a:xfrm>
-          <a:off x="0" y="0"/>
-          <a:ext cx="0" cy="0"/>
-          <a:chOff x="0" y="0"/>
-          <a:chExt cx="0" cy="0"/>
-        </a:xfrm>
-      </p:grpSpPr>
-      <p:sp>
-        <p:nvSpPr>
-          <p:cNvPr id="2" name="Title 1"/>
-          <p:cNvSpPr>
-            <a:spLocks noGrp="1"/>
-          </p:cNvSpPr>
-          <p:nvPr>
-            <p:ph type="title"/>
-          </p:nvPr>
-        </p:nvSpPr>
-        <p:spPr/>
-        <p:txBody>
-          <a:bodyPr/>
-          <a:lstStyle/>
-          <a:p>
-            <a:r>
-              <a:rPr lang="en-US" b="1" dirty="0"/>
-              <a:t>Pros &amp; Cons (5 </a:t>
-            </a:r>
-            <a:r>
-              <a:rPr lang="en-US" b="1" dirty="0" err="1"/>
-              <a:t>mins</a:t>
-            </a:r>
-            <a:r>
-              <a:rPr lang="en-US" b="1" dirty="0"/>
-              <a:t>)</a:t>
-            </a:r>
-            <a:endParaRPr lang="en-US" dirty="0"/>
-          </a:p>
-        </p:txBody>
-      </p:sp>
-      <p:sp>
-        <p:nvSpPr>
-          <p:cNvPr id="3" name="Content Placeholder 2"/>
-          <p:cNvSpPr>
-            <a:spLocks noGrp="1"/>
-          </p:cNvSpPr>
-          <p:nvPr>
-            <p:ph idx="1"/>
-          </p:nvPr>
-        </p:nvSpPr>
-        <p:spPr/>
-        <p:txBody>
-          <a:bodyPr>
-            <a:normAutofit/>
-          </a:bodyPr>
-          <a:lstStyle/>
-          <a:p>
-            <a:pPr marL="0" indent="0">
-              <a:buNone/>
-            </a:pPr>
-            <a:r>
-              <a:rPr lang="en-US" b="1" dirty="0"/>
-              <a:t>Pros</a:t>
-            </a:r>
-          </a:p>
-          <a:p>
-            <a:r>
-              <a:rPr lang="en-US" dirty="0"/>
-              <a:t>Parallel processing</a:t>
-            </a:r>
-          </a:p>
-          <a:p>
-            <a:r>
-              <a:rPr lang="en-US" dirty="0"/>
-              <a:t>Better long-range understanding</a:t>
-            </a:r>
-          </a:p>
-          <a:p>
-            <a:r>
-              <a:rPr lang="en-US" dirty="0"/>
-              <a:t>Scalable</a:t>
-            </a:r>
-          </a:p>
-          <a:p>
-            <a:pPr marL="0" indent="0">
-              <a:buNone/>
-            </a:pPr>
-            <a:r>
-              <a:rPr lang="en-US" b="1" dirty="0"/>
-              <a:t>Cons</a:t>
-            </a:r>
-          </a:p>
-          <a:p>
-            <a:r>
-              <a:rPr lang="en-US" dirty="0"/>
-              <a:t>Requires large data</a:t>
-            </a:r>
-          </a:p>
-          <a:p>
-            <a:r>
-              <a:rPr lang="en-US" dirty="0"/>
-              <a:t>Expensive training (GPU/TPU)</a:t>
-            </a:r>
-          </a:p>
-          <a:p>
-            <a:r>
-              <a:rPr lang="en-US" dirty="0"/>
-              <a:t>Not interpretable out of the box</a:t>
-            </a:r>
-          </a:p>
-          <a:p>
-            <a:endParaRPr lang="en-US" dirty="0"/>
-          </a:p>
-        </p:txBody>
-      </p:sp>
-    </p:spTree>
-    <p:extLst>
-      <p:ext uri="{BB962C8B-B14F-4D97-AF65-F5344CB8AC3E}">
-        <p14:creationId xmlns:p14="http://schemas.microsoft.com/office/powerpoint/2010/main" val="2909068381"/>
-      </p:ext>
-    </p:extLst>
-  </p:cSld>
-  <p:clrMapOvr>
-    <a:masterClrMapping/>
-  </p:clrMapOvr>
-</p:sld>
-</file>
-
-<file path=ppt/slides/slide29.xml><?xml version="1.0" encoding="utf-8"?>
+<file path=ppt/slides/slide32.xml><?xml version="1.0" encoding="utf-8"?>
 <p:sld xmlns:a="http://schemas.openxmlformats.org/drawingml/2006/main" xmlns:r="http://schemas.openxmlformats.org/officeDocument/2006/relationships" xmlns:p="http://schemas.openxmlformats.org/presentationml/2006/main">
   <p:cSld>
     <p:spTree>
@@ -15152,118 +18747,6 @@
           <a:chExt cx="0" cy="0"/>
         </a:xfrm>
       </p:grpSpPr>
-      <p:sp>
-        <p:nvSpPr>
-          <p:cNvPr id="2" name="Title 1">
-            <a:extLst>
-              <a:ext uri="{FF2B5EF4-FFF2-40B4-BE49-F238E27FC236}">
-                <a16:creationId xmlns:a16="http://schemas.microsoft.com/office/drawing/2014/main" id="{795E1B75-886E-0812-B2FD-DD250C225521}"/>
-              </a:ext>
-            </a:extLst>
-          </p:cNvPr>
-          <p:cNvSpPr>
-            <a:spLocks noGrp="1"/>
-          </p:cNvSpPr>
-          <p:nvPr>
-            <p:ph type="title"/>
-          </p:nvPr>
-        </p:nvSpPr>
-        <p:spPr>
-          <a:xfrm>
-            <a:off x="274320" y="136525"/>
-            <a:ext cx="11466576" cy="832739"/>
-          </a:xfrm>
-        </p:spPr>
-        <p:txBody>
-          <a:bodyPr>
-            <a:normAutofit/>
-          </a:bodyPr>
-          <a:lstStyle/>
-          <a:p>
-            <a:r>
-              <a:rPr lang="en-US" sz="3600" dirty="0"/>
-              <a:t>EXTRA</a:t>
-            </a:r>
-          </a:p>
-        </p:txBody>
-      </p:sp>
-      <p:sp>
-        <p:nvSpPr>
-          <p:cNvPr id="4" name="TextBox 3">
-            <a:extLst>
-              <a:ext uri="{FF2B5EF4-FFF2-40B4-BE49-F238E27FC236}">
-                <a16:creationId xmlns:a16="http://schemas.microsoft.com/office/drawing/2014/main" id="{902F8BE4-9CEA-0DAD-0357-E0A8215F169D}"/>
-              </a:ext>
-            </a:extLst>
-          </p:cNvPr>
-          <p:cNvSpPr txBox="1"/>
-          <p:nvPr/>
-        </p:nvSpPr>
-        <p:spPr>
-          <a:xfrm>
-            <a:off x="274320" y="933117"/>
-            <a:ext cx="11658600" cy="646331"/>
-          </a:xfrm>
-          <a:prstGeom prst="rect">
-            <a:avLst/>
-          </a:prstGeom>
-          <a:noFill/>
-        </p:spPr>
-        <p:txBody>
-          <a:bodyPr wrap="square">
-            <a:spAutoFit/>
-          </a:bodyPr>
-          <a:lstStyle/>
-          <a:p>
-            <a:pPr marL="0" indent="0">
-              <a:buNone/>
-            </a:pPr>
-            <a:r>
-              <a:rPr lang="en-US" dirty="0" err="1">
-                <a:solidFill>
-                  <a:schemeClr val="accent6">
-                    <a:lumMod val="60000"/>
-                    <a:lumOff val="40000"/>
-                  </a:schemeClr>
-                </a:solidFill>
-              </a:rPr>
-              <a:t>Xxxxxxxxxxx</a:t>
-            </a:r>
-            <a:endParaRPr lang="en-US" dirty="0">
-              <a:solidFill>
-                <a:schemeClr val="accent6">
-                  <a:lumMod val="60000"/>
-                  <a:lumOff val="40000"/>
-                </a:schemeClr>
-              </a:solidFill>
-            </a:endParaRPr>
-          </a:p>
-          <a:p>
-            <a:pPr marL="0" indent="0">
-              <a:buNone/>
-            </a:pPr>
-            <a:r>
-              <a:rPr lang="en-US" dirty="0" err="1">
-                <a:solidFill>
-                  <a:schemeClr val="accent6">
-                    <a:lumMod val="60000"/>
-                    <a:lumOff val="40000"/>
-                  </a:schemeClr>
-                </a:solidFill>
-              </a:rPr>
-              <a:t>xxxxxxxxxxxx</a:t>
-            </a:r>
-            <a:endParaRPr lang="en-US" dirty="0">
-              <a:solidFill>
-                <a:schemeClr val="accent6">
-                  <a:lumMod val="60000"/>
-                  <a:lumOff val="40000"/>
-                </a:schemeClr>
-              </a:solidFill>
-            </a:endParaRPr>
-          </a:p>
-        </p:txBody>
-      </p:sp>
     </p:spTree>
     <p:extLst>
       <p:ext uri="{BB962C8B-B14F-4D97-AF65-F5344CB8AC3E}">
@@ -15277,18 +18760,12 @@
 </p:sld>
 </file>
 
-<file path=ppt/slides/slide3.xml><?xml version="1.0" encoding="utf-8"?>
+<file path=ppt/slides/slide4.xml><?xml version="1.0" encoding="utf-8"?>
 <p:sld xmlns:a="http://schemas.openxmlformats.org/drawingml/2006/main" xmlns:r="http://schemas.openxmlformats.org/officeDocument/2006/relationships" xmlns:p="http://schemas.openxmlformats.org/presentationml/2006/main">
   <p:cSld>
     <p:spTree>
       <p:nvGrpSpPr>
-        <p:cNvPr id="1" name="">
-          <a:extLst>
-            <a:ext uri="{FF2B5EF4-FFF2-40B4-BE49-F238E27FC236}">
-              <a16:creationId xmlns:a16="http://schemas.microsoft.com/office/drawing/2014/main" id="{B87EE058-2E56-38C2-7DCF-3597C457BA32}"/>
-            </a:ext>
-          </a:extLst>
-        </p:cNvPr>
+        <p:cNvPr id="1" name=""/>
         <p:cNvGrpSpPr/>
         <p:nvPr/>
       </p:nvGrpSpPr>
@@ -15305,7 +18782,7 @@
           <p:cNvPr id="5" name="TextBox 4">
             <a:extLst>
               <a:ext uri="{FF2B5EF4-FFF2-40B4-BE49-F238E27FC236}">
-                <a16:creationId xmlns:a16="http://schemas.microsoft.com/office/drawing/2014/main" id="{94D65004-F7E4-A2B4-8851-B290CA8E7D23}"/>
+                <a16:creationId xmlns:a16="http://schemas.microsoft.com/office/drawing/2014/main" id="{EBE40E0B-1ABC-C627-0738-854645894156}"/>
               </a:ext>
             </a:extLst>
           </p:cNvPr>
@@ -15314,8 +18791,8 @@
         </p:nvSpPr>
         <p:spPr>
           <a:xfrm>
-            <a:off x="146304" y="243512"/>
-            <a:ext cx="11539728" cy="1938992"/>
+            <a:off x="301840" y="1443841"/>
+            <a:ext cx="4663352" cy="4524315"/>
           </a:xfrm>
           <a:prstGeom prst="rect">
             <a:avLst/>
@@ -15340,14 +18817,123 @@
                   </a:schemeClr>
                 </a:solidFill>
               </a:rPr>
-              <a:t>What are Transformers?</a:t>
-            </a:r>
-          </a:p>
-          <a:p>
-            <a:pPr marL="0" indent="0">
-              <a:buNone/>
+              <a:t>NLP</a:t>
+            </a:r>
+          </a:p>
+          <a:p>
+            <a:pPr marL="342900" indent="-342900">
+              <a:buFont typeface="Arial" panose="020B0604020202020204" pitchFamily="34" charset="0"/>
+              <a:buChar char="•"/>
             </a:pPr>
-            <a:endParaRPr lang="en-US" sz="2400" b="1" dirty="0">
+            <a:r>
+              <a:rPr lang="en-US" sz="2400" dirty="0">
+                <a:solidFill>
+                  <a:schemeClr val="accent6">
+                    <a:lumMod val="60000"/>
+                    <a:lumOff val="40000"/>
+                  </a:schemeClr>
+                </a:solidFill>
+              </a:rPr>
+              <a:t>Text classification (BERT)</a:t>
+            </a:r>
+          </a:p>
+          <a:p>
+            <a:pPr marL="342900" indent="-342900">
+              <a:buFont typeface="Arial" panose="020B0604020202020204" pitchFamily="34" charset="0"/>
+              <a:buChar char="•"/>
+            </a:pPr>
+            <a:r>
+              <a:rPr lang="en-US" sz="2400" dirty="0">
+                <a:solidFill>
+                  <a:schemeClr val="accent6">
+                    <a:lumMod val="60000"/>
+                    <a:lumOff val="40000"/>
+                  </a:schemeClr>
+                </a:solidFill>
+              </a:rPr>
+              <a:t>Text generation (GPT)</a:t>
+            </a:r>
+          </a:p>
+          <a:p>
+            <a:pPr marL="342900" indent="-342900">
+              <a:buFont typeface="Arial" panose="020B0604020202020204" pitchFamily="34" charset="0"/>
+              <a:buChar char="•"/>
+            </a:pPr>
+            <a:r>
+              <a:rPr lang="en-US" sz="2400" dirty="0">
+                <a:solidFill>
+                  <a:schemeClr val="accent6">
+                    <a:lumMod val="60000"/>
+                    <a:lumOff val="40000"/>
+                  </a:schemeClr>
+                </a:solidFill>
+              </a:rPr>
+              <a:t>Translation (T5, </a:t>
+            </a:r>
+            <a:r>
+              <a:rPr lang="en-US" sz="2400" dirty="0" err="1">
+                <a:solidFill>
+                  <a:schemeClr val="accent6">
+                    <a:lumMod val="60000"/>
+                    <a:lumOff val="40000"/>
+                  </a:schemeClr>
+                </a:solidFill>
+              </a:rPr>
+              <a:t>MarianMT</a:t>
+            </a:r>
+            <a:r>
+              <a:rPr lang="en-US" sz="2400" dirty="0">
+                <a:solidFill>
+                  <a:schemeClr val="accent6">
+                    <a:lumMod val="60000"/>
+                    <a:lumOff val="40000"/>
+                  </a:schemeClr>
+                </a:solidFill>
+              </a:rPr>
+              <a:t>)</a:t>
+            </a:r>
+          </a:p>
+          <a:p>
+            <a:pPr marL="342900" indent="-342900">
+              <a:buFont typeface="Arial" panose="020B0604020202020204" pitchFamily="34" charset="0"/>
+              <a:buChar char="•"/>
+            </a:pPr>
+            <a:r>
+              <a:rPr lang="en-US" sz="2400" dirty="0">
+                <a:solidFill>
+                  <a:schemeClr val="accent6">
+                    <a:lumMod val="60000"/>
+                    <a:lumOff val="40000"/>
+                  </a:schemeClr>
+                </a:solidFill>
+              </a:rPr>
+              <a:t>Question answering (</a:t>
+            </a:r>
+            <a:r>
+              <a:rPr lang="en-US" sz="2400" dirty="0" err="1">
+                <a:solidFill>
+                  <a:schemeClr val="accent6">
+                    <a:lumMod val="60000"/>
+                    <a:lumOff val="40000"/>
+                  </a:schemeClr>
+                </a:solidFill>
+              </a:rPr>
+              <a:t>RoBERTa</a:t>
+            </a:r>
+            <a:r>
+              <a:rPr lang="en-US" sz="2400" dirty="0">
+                <a:solidFill>
+                  <a:schemeClr val="accent6">
+                    <a:lumMod val="60000"/>
+                    <a:lumOff val="40000"/>
+                  </a:schemeClr>
+                </a:solidFill>
+              </a:rPr>
+              <a:t>)</a:t>
+            </a:r>
+          </a:p>
+          <a:p>
+            <a:endParaRPr lang="en-US" sz="2400" dirty="0">
               <a:solidFill>
                 <a:schemeClr val="accent6">
                   <a:lumMod val="60000"/>
@@ -15357,6 +18943,22 @@
             </a:endParaRPr>
           </a:p>
           <a:p>
+            <a:pPr marL="0" indent="0">
+              <a:buNone/>
+            </a:pPr>
+            <a:r>
+              <a:rPr lang="en-US" sz="2400" b="1" dirty="0">
+                <a:solidFill>
+                  <a:schemeClr val="accent6">
+                    <a:lumMod val="60000"/>
+                    <a:lumOff val="40000"/>
+                  </a:schemeClr>
+                </a:solidFill>
+              </a:rPr>
+              <a:t> Vision</a:t>
+            </a:r>
+          </a:p>
+          <a:p>
             <a:pPr marL="342900" indent="-342900">
               <a:buFont typeface="Arial" panose="020B0604020202020204" pitchFamily="34" charset="0"/>
               <a:buChar char="•"/>
@@ -15370,18 +18972,18 @@
                   </a:schemeClr>
                 </a:solidFill>
               </a:rPr>
-              <a:t>Definition: Neural Network that learns the context of sequential data and </a:t>
-            </a:r>
-            <a:r>
-              <a:rPr lang="en-US" sz="2400" b="1" dirty="0">
-                <a:solidFill>
-                  <a:schemeClr val="accent6">
-                    <a:lumMod val="60000"/>
-                    <a:lumOff val="40000"/>
-                  </a:schemeClr>
-                </a:solidFill>
-              </a:rPr>
-              <a:t>generates new data</a:t>
+              <a:t>Vision Transformers (</a:t>
+            </a:r>
+            <a:r>
+              <a:rPr lang="en-US" sz="2400" dirty="0" err="1">
+                <a:solidFill>
+                  <a:schemeClr val="accent6">
+                    <a:lumMod val="60000"/>
+                    <a:lumOff val="40000"/>
+                  </a:schemeClr>
+                </a:solidFill>
+              </a:rPr>
+              <a:t>ViT</a:t>
             </a:r>
             <a:r>
               <a:rPr lang="en-US" sz="2400" dirty="0">
@@ -15392,7 +18994,7 @@
                   </a:schemeClr>
                 </a:solidFill>
               </a:rPr>
-              <a:t> out of it. </a:t>
+              <a:t>)</a:t>
             </a:r>
           </a:p>
           <a:p>
@@ -15409,19 +19011,40 @@
                   </a:schemeClr>
                 </a:solidFill>
               </a:rPr>
-              <a:t>Origin: </a:t>
-            </a:r>
-            <a:r>
-              <a:rPr lang="en-US" sz="2400" i="1" dirty="0">
-                <a:solidFill>
-                  <a:schemeClr val="accent6">
-                    <a:lumMod val="60000"/>
-                    <a:lumOff val="40000"/>
-                  </a:schemeClr>
-                </a:solidFill>
-              </a:rPr>
-              <a:t>“Attention is All You Need”</a:t>
-            </a:r>
+              <a:t>Object detection, segmentation</a:t>
+            </a:r>
+          </a:p>
+          <a:p>
+            <a:endParaRPr lang="en-US" sz="2400" dirty="0">
+              <a:solidFill>
+                <a:schemeClr val="accent6">
+                  <a:lumMod val="60000"/>
+                  <a:lumOff val="40000"/>
+                </a:schemeClr>
+              </a:solidFill>
+            </a:endParaRPr>
+          </a:p>
+          <a:p>
+            <a:pPr marL="0" indent="0">
+              <a:buNone/>
+            </a:pPr>
+            <a:r>
+              <a:rPr lang="en-US" sz="2400" b="1" dirty="0">
+                <a:solidFill>
+                  <a:schemeClr val="accent6">
+                    <a:lumMod val="60000"/>
+                    <a:lumOff val="40000"/>
+                  </a:schemeClr>
+                </a:solidFill>
+              </a:rPr>
+              <a:t>Speech</a:t>
+            </a:r>
+          </a:p>
+          <a:p>
+            <a:pPr marL="342900" indent="-342900">
+              <a:buFont typeface="Arial" panose="020B0604020202020204" pitchFamily="34" charset="0"/>
+              <a:buChar char="•"/>
+            </a:pPr>
             <a:r>
               <a:rPr lang="en-US" sz="2400" dirty="0">
                 <a:solidFill>
@@ -15431,15 +19054,154 @@
                   </a:schemeClr>
                 </a:solidFill>
               </a:rPr>
-              <a:t> by Vaswani et al. (2017)</a:t>
-            </a:r>
+              <a:t>Whisper, wav2vec</a:t>
+            </a:r>
+          </a:p>
+        </p:txBody>
+      </p:sp>
+      <p:sp>
+        <p:nvSpPr>
+          <p:cNvPr id="7" name="TextBox 6">
+            <a:extLst>
+              <a:ext uri="{FF2B5EF4-FFF2-40B4-BE49-F238E27FC236}">
+                <a16:creationId xmlns:a16="http://schemas.microsoft.com/office/drawing/2014/main" id="{ECDE5E49-DFA4-F0A7-21B4-CC066F4621F9}"/>
+              </a:ext>
+            </a:extLst>
+          </p:cNvPr>
+          <p:cNvSpPr txBox="1"/>
+          <p:nvPr/>
+        </p:nvSpPr>
+        <p:spPr>
+          <a:xfrm>
+            <a:off x="160020" y="75938"/>
+            <a:ext cx="6190488" cy="461665"/>
+          </a:xfrm>
+          <a:prstGeom prst="rect">
+            <a:avLst/>
+          </a:prstGeom>
+          <a:noFill/>
+        </p:spPr>
+        <p:txBody>
+          <a:bodyPr wrap="square">
+            <a:spAutoFit/>
+          </a:bodyPr>
+          <a:lstStyle/>
+          <a:p>
+            <a:r>
+              <a:rPr lang="en-US" sz="2400" b="1" dirty="0">
+                <a:solidFill>
+                  <a:schemeClr val="accent6">
+                    <a:lumMod val="60000"/>
+                    <a:lumOff val="40000"/>
+                  </a:schemeClr>
+                </a:solidFill>
+              </a:rPr>
+              <a:t>Applications: Where are Transformers used ?</a:t>
+            </a:r>
+            <a:endParaRPr lang="en-US" sz="2400" dirty="0">
+              <a:solidFill>
+                <a:schemeClr val="accent6">
+                  <a:lumMod val="60000"/>
+                  <a:lumOff val="40000"/>
+                </a:schemeClr>
+              </a:solidFill>
+            </a:endParaRPr>
+          </a:p>
+        </p:txBody>
+      </p:sp>
+      <p:sp>
+        <p:nvSpPr>
+          <p:cNvPr id="9" name="TextBox 8">
+            <a:extLst>
+              <a:ext uri="{FF2B5EF4-FFF2-40B4-BE49-F238E27FC236}">
+                <a16:creationId xmlns:a16="http://schemas.microsoft.com/office/drawing/2014/main" id="{4FDE56E9-0F1F-C034-5068-52E1A749CF87}"/>
+              </a:ext>
+            </a:extLst>
+          </p:cNvPr>
+          <p:cNvSpPr txBox="1"/>
+          <p:nvPr/>
+        </p:nvSpPr>
+        <p:spPr>
+          <a:xfrm>
+            <a:off x="6231636" y="1346168"/>
+            <a:ext cx="3433572" cy="1569660"/>
+          </a:xfrm>
+          <a:prstGeom prst="rect">
+            <a:avLst/>
+          </a:prstGeom>
+          <a:noFill/>
+        </p:spPr>
+        <p:txBody>
+          <a:bodyPr wrap="square">
+            <a:spAutoFit/>
+          </a:bodyPr>
+          <a:lstStyle/>
+          <a:p>
+            <a:pPr marL="0" indent="0">
+              <a:buNone/>
+            </a:pPr>
+            <a:r>
+              <a:rPr lang="en-US" sz="2400" b="1" dirty="0">
+                <a:solidFill>
+                  <a:schemeClr val="accent6">
+                    <a:lumMod val="60000"/>
+                    <a:lumOff val="40000"/>
+                  </a:schemeClr>
+                </a:solidFill>
+              </a:rPr>
+              <a:t>Multimodal</a:t>
+            </a:r>
+          </a:p>
+          <a:p>
+            <a:pPr marL="342900" indent="-342900">
+              <a:buFont typeface="Arial" panose="020B0604020202020204" pitchFamily="34" charset="0"/>
+              <a:buChar char="•"/>
+            </a:pPr>
+            <a:r>
+              <a:rPr lang="en-US" sz="2400" dirty="0">
+                <a:solidFill>
+                  <a:schemeClr val="accent6">
+                    <a:lumMod val="60000"/>
+                    <a:lumOff val="40000"/>
+                  </a:schemeClr>
+                </a:solidFill>
+              </a:rPr>
+              <a:t>CLIP (image + text)</a:t>
+            </a:r>
+          </a:p>
+          <a:p>
+            <a:pPr marL="342900" indent="-342900">
+              <a:buFont typeface="Arial" panose="020B0604020202020204" pitchFamily="34" charset="0"/>
+              <a:buChar char="•"/>
+            </a:pPr>
+            <a:r>
+              <a:rPr lang="en-US" sz="2400" dirty="0">
+                <a:solidFill>
+                  <a:schemeClr val="accent6">
+                    <a:lumMod val="60000"/>
+                    <a:lumOff val="40000"/>
+                  </a:schemeClr>
+                </a:solidFill>
+              </a:rPr>
+              <a:t>Flamingo, Gemini</a:t>
+            </a:r>
+          </a:p>
+          <a:p>
+            <a:endParaRPr lang="en-US" sz="2400" dirty="0">
+              <a:solidFill>
+                <a:schemeClr val="accent6">
+                  <a:lumMod val="60000"/>
+                  <a:lumOff val="40000"/>
+                </a:schemeClr>
+              </a:solidFill>
+            </a:endParaRPr>
           </a:p>
         </p:txBody>
       </p:sp>
     </p:spTree>
     <p:extLst>
       <p:ext uri="{BB962C8B-B14F-4D97-AF65-F5344CB8AC3E}">
-        <p14:creationId xmlns:p14="http://schemas.microsoft.com/office/powerpoint/2010/main" val="623873989"/>
+        <p14:creationId xmlns:p14="http://schemas.microsoft.com/office/powerpoint/2010/main" val="26364453"/>
       </p:ext>
     </p:extLst>
   </p:cSld>
@@ -15449,7 +19211,7 @@
 </p:sld>
 </file>
 
-<file path=ppt/slides/slide4.xml><?xml version="1.0" encoding="utf-8"?>
+<file path=ppt/slides/slide5.xml><?xml version="1.0" encoding="utf-8"?>
 <p:sld xmlns:a="http://schemas.openxmlformats.org/drawingml/2006/main" xmlns:r="http://schemas.openxmlformats.org/officeDocument/2006/relationships" xmlns:p="http://schemas.openxmlformats.org/presentationml/2006/main">
   <p:cSld>
     <p:spTree>
@@ -15636,7 +19398,7 @@
                   </a:schemeClr>
                 </a:solidFill>
               </a:rPr>
-              <a:t>Training becomes slow. </a:t>
+              <a:t>-&gt;Training becomes slow. </a:t>
             </a:r>
           </a:p>
         </p:txBody>
@@ -15654,7 +19416,7 @@
 </p:sld>
 </file>
 
-<file path=ppt/slides/slide5.xml><?xml version="1.0" encoding="utf-8"?>
+<file path=ppt/slides/slide6.xml><?xml version="1.0" encoding="utf-8"?>
 <p:sld xmlns:a="http://schemas.openxmlformats.org/drawingml/2006/main" xmlns:r="http://schemas.openxmlformats.org/officeDocument/2006/relationships" xmlns:p="http://schemas.openxmlformats.org/presentationml/2006/main">
   <p:cSld>
     <p:spTree>
@@ -15692,7 +19454,7 @@
         <p:spPr>
           <a:xfrm>
             <a:off x="146304" y="243512"/>
-            <a:ext cx="11539728" cy="4154984"/>
+            <a:ext cx="11539728" cy="5262979"/>
           </a:xfrm>
           <a:prstGeom prst="rect">
             <a:avLst/>
@@ -15808,7 +19570,29 @@
                   </a:schemeClr>
                 </a:solidFill>
               </a:rPr>
-              <a:t> that I borrowed from the university library after attending the seminar yesterday was fascinating. I think I will buy </a:t>
+              <a:t> that I borrowed from the university library </a:t>
+            </a:r>
+            <a:r>
+              <a:rPr lang="en-US" sz="2400" b="1" u="sng" dirty="0">
+                <a:solidFill>
+                  <a:schemeClr val="accent6">
+                    <a:lumMod val="60000"/>
+                    <a:lumOff val="40000"/>
+                  </a:schemeClr>
+                </a:solidFill>
+              </a:rPr>
+              <a:t>shelf</a:t>
+            </a:r>
+            <a:r>
+              <a:rPr lang="en-US" sz="2400" dirty="0">
+                <a:solidFill>
+                  <a:schemeClr val="accent6">
+                    <a:lumMod val="60000"/>
+                    <a:lumOff val="40000"/>
+                  </a:schemeClr>
+                </a:solidFill>
+              </a:rPr>
+              <a:t> after attending yesterday seminar was good read. I think I will buy </a:t>
             </a:r>
             <a:r>
               <a:rPr lang="en-US" sz="2400" b="1" u="sng" dirty="0">
@@ -15931,6 +19715,29 @@
                 </a:solidFill>
               </a:rPr>
               <a:t> “book”</a:t>
+            </a:r>
+          </a:p>
+          <a:p>
+            <a:endParaRPr lang="en-US" sz="2400" b="1" dirty="0">
+              <a:solidFill>
+                <a:schemeClr val="accent6">
+                  <a:lumMod val="60000"/>
+                  <a:lumOff val="40000"/>
+                </a:schemeClr>
+              </a:solidFill>
+            </a:endParaRPr>
+          </a:p>
+          <a:p>
+            <a:r>
+              <a:rPr lang="en-US" sz="2400" dirty="0">
+                <a:solidFill>
+                  <a:schemeClr val="accent6">
+                    <a:lumMod val="60000"/>
+                    <a:lumOff val="40000"/>
+                  </a:schemeClr>
+                </a:solidFill>
+              </a:rPr>
+              <a:t>Vanishing Gradient -&gt; As you proceed further in sentence, because of multiplication of small derivatives, RNN would forget the previous words</a:t>
             </a:r>
           </a:p>
         </p:txBody>
@@ -15948,7 +19755,7 @@
 </p:sld>
 </file>
 
-<file path=ppt/slides/slide6.xml><?xml version="1.0" encoding="utf-8"?>
+<file path=ppt/slides/slide7.xml><?xml version="1.0" encoding="utf-8"?>
 <p:sld xmlns:a="http://schemas.openxmlformats.org/drawingml/2006/main" xmlns:r="http://schemas.openxmlformats.org/officeDocument/2006/relationships" xmlns:p="http://schemas.openxmlformats.org/presentationml/2006/main">
   <p:cSld>
     <p:spTree>
@@ -16108,7 +19915,7 @@
 </p:sld>
 </file>
 
-<file path=ppt/slides/slide7.xml><?xml version="1.0" encoding="utf-8"?>
+<file path=ppt/slides/slide8.xml><?xml version="1.0" encoding="utf-8"?>
 <p:sld xmlns:a="http://schemas.openxmlformats.org/drawingml/2006/main" xmlns:r="http://schemas.openxmlformats.org/officeDocument/2006/relationships" xmlns:p="http://schemas.openxmlformats.org/presentationml/2006/main">
   <p:cSld>
     <p:spTree>
@@ -16200,7 +20007,7 @@
                   </a:schemeClr>
                 </a:solidFill>
               </a:rPr>
-              <a:t>Example1: It is good for figuring out the context</a:t>
+              <a:t>Use case 1: It is good for figuring out the context</a:t>
             </a:r>
           </a:p>
           <a:p>
@@ -16365,7 +20172,7 @@
                   </a:schemeClr>
                 </a:solidFill>
               </a:rPr>
-              <a:t>Example2: It is good for predicting next word</a:t>
+              <a:t>Use case 2: It is good for predicting next word</a:t>
             </a:r>
           </a:p>
           <a:p>
@@ -16401,7 +20208,18 @@
                   </a:schemeClr>
                 </a:solidFill>
               </a:rPr>
-              <a:t>Response: LLM</a:t>
+              <a:t>Response: </a:t>
+            </a:r>
+            <a:r>
+              <a:rPr lang="en-US" sz="2400" b="1" u="sng" dirty="0">
+                <a:solidFill>
+                  <a:schemeClr val="accent6">
+                    <a:lumMod val="60000"/>
+                    <a:lumOff val="40000"/>
+                  </a:schemeClr>
+                </a:solidFill>
+              </a:rPr>
+              <a:t>LLM</a:t>
             </a:r>
           </a:p>
           <a:p>
@@ -16414,7 +20232,18 @@
                   </a:schemeClr>
                 </a:solidFill>
               </a:rPr>
-              <a:t>Response: LLM stands</a:t>
+              <a:t>Response: LLM </a:t>
+            </a:r>
+            <a:r>
+              <a:rPr lang="en-US" sz="2400" b="1" u="sng" dirty="0">
+                <a:solidFill>
+                  <a:schemeClr val="accent6">
+                    <a:lumMod val="60000"/>
+                    <a:lumOff val="40000"/>
+                  </a:schemeClr>
+                </a:solidFill>
+              </a:rPr>
+              <a:t>stands</a:t>
             </a:r>
           </a:p>
           <a:p>
@@ -16427,7 +20256,18 @@
                   </a:schemeClr>
                 </a:solidFill>
               </a:rPr>
-              <a:t>Response: LLM stands for</a:t>
+              <a:t>Response: LLM stands </a:t>
+            </a:r>
+            <a:r>
+              <a:rPr lang="en-US" sz="2400" b="1" u="sng" dirty="0">
+                <a:solidFill>
+                  <a:schemeClr val="accent6">
+                    <a:lumMod val="60000"/>
+                    <a:lumOff val="40000"/>
+                  </a:schemeClr>
+                </a:solidFill>
+              </a:rPr>
+              <a:t>for</a:t>
             </a:r>
           </a:p>
           <a:p>
@@ -16440,7 +20280,18 @@
                   </a:schemeClr>
                 </a:solidFill>
               </a:rPr>
-              <a:t>Response: LLM stands for Large</a:t>
+              <a:t>Response: LLM stands for </a:t>
+            </a:r>
+            <a:r>
+              <a:rPr lang="en-US" sz="2400" b="1" u="sng" dirty="0">
+                <a:solidFill>
+                  <a:schemeClr val="accent6">
+                    <a:lumMod val="60000"/>
+                    <a:lumOff val="40000"/>
+                  </a:schemeClr>
+                </a:solidFill>
+              </a:rPr>
+              <a:t>Large</a:t>
             </a:r>
           </a:p>
           <a:p>
@@ -16453,7 +20304,18 @@
                   </a:schemeClr>
                 </a:solidFill>
               </a:rPr>
-              <a:t>Response: LLM stands for Large Language</a:t>
+              <a:t>Response: LLM stands for Large </a:t>
+            </a:r>
+            <a:r>
+              <a:rPr lang="en-US" sz="2400" b="1" u="sng" dirty="0">
+                <a:solidFill>
+                  <a:schemeClr val="accent6">
+                    <a:lumMod val="60000"/>
+                    <a:lumOff val="40000"/>
+                  </a:schemeClr>
+                </a:solidFill>
+              </a:rPr>
+              <a:t>Language</a:t>
             </a:r>
           </a:p>
           <a:p>
@@ -16466,7 +20328,18 @@
                   </a:schemeClr>
                 </a:solidFill>
               </a:rPr>
-              <a:t>Response: LLM stands for Large Language Models</a:t>
+              <a:t>Response: LLM stands for Large Language </a:t>
+            </a:r>
+            <a:r>
+              <a:rPr lang="en-US" sz="2400" b="1" u="sng" dirty="0">
+                <a:solidFill>
+                  <a:schemeClr val="accent6">
+                    <a:lumMod val="60000"/>
+                    <a:lumOff val="40000"/>
+                  </a:schemeClr>
+                </a:solidFill>
+              </a:rPr>
+              <a:t>Models</a:t>
             </a:r>
           </a:p>
           <a:p>
@@ -16497,12 +20370,12 @@
 </p:sld>
 </file>
 
-<file path=ppt/slides/slide8.xml><?xml version="1.0" encoding="utf-8"?>
+<file path=ppt/slides/slide9.xml><?xml version="1.0" encoding="utf-8"?>
 <p:sld xmlns:a="http://schemas.openxmlformats.org/drawingml/2006/main" xmlns:r="http://schemas.openxmlformats.org/officeDocument/2006/relationships" xmlns:p="http://schemas.openxmlformats.org/presentationml/2006/main">
   <p:cSld>
     <p:spTree>
       <p:nvGrpSpPr>
-        <p:cNvPr id="1" name=""/>
+        <p:cNvPr id="1" name="Shape 73"/>
         <p:cNvGrpSpPr/>
         <p:nvPr/>
       </p:nvGrpSpPr>
@@ -16516,596 +20389,849 @@
       </p:grpSpPr>
       <p:sp>
         <p:nvSpPr>
-          <p:cNvPr id="5" name="TextBox 4">
-            <a:extLst>
-              <a:ext uri="{FF2B5EF4-FFF2-40B4-BE49-F238E27FC236}">
-                <a16:creationId xmlns:a16="http://schemas.microsoft.com/office/drawing/2014/main" id="{EBE40E0B-1ABC-C627-0738-854645894156}"/>
-              </a:ext>
-            </a:extLst>
-          </p:cNvPr>
+          <p:cNvPr id="74" name="Google Shape;74;p16"/>
           <p:cNvSpPr txBox="1"/>
           <p:nvPr/>
         </p:nvSpPr>
         <p:spPr>
           <a:xfrm>
-            <a:off x="301840" y="1443841"/>
-            <a:ext cx="4663352" cy="4524315"/>
+            <a:off x="508000" y="444500"/>
+            <a:ext cx="11176000" cy="762000"/>
           </a:xfrm>
           <a:prstGeom prst="rect">
             <a:avLst/>
           </a:prstGeom>
           <a:noFill/>
+          <a:ln>
+            <a:noFill/>
+          </a:ln>
         </p:spPr>
         <p:txBody>
-          <a:bodyPr wrap="square">
-            <a:spAutoFit/>
+          <a:bodyPr spcFirstLastPara="1" wrap="square" lIns="0" tIns="0" rIns="0" bIns="0" anchor="ctr" anchorCtr="0">
+            <a:noAutofit/>
           </a:bodyPr>
           <a:lstStyle/>
           <a:p>
-            <a:pPr marL="0" indent="0">
-              <a:buNone/>
-            </a:pPr>
-            <a:r>
-              <a:rPr lang="en-US" sz="2400" b="1" dirty="0">
-                <a:solidFill>
-                  <a:schemeClr val="accent6">
-                    <a:lumMod val="60000"/>
-                    <a:lumOff val="40000"/>
-                  </a:schemeClr>
-                </a:solidFill>
-              </a:rPr>
-              <a:t>NLP</a:t>
-            </a:r>
-          </a:p>
-          <a:p>
-            <a:pPr marL="342900" indent="-342900">
-              <a:buFont typeface="Arial" panose="020B0604020202020204" pitchFamily="34" charset="0"/>
-              <a:buChar char="•"/>
-            </a:pPr>
-            <a:r>
-              <a:rPr lang="en-US" sz="2400" dirty="0">
-                <a:solidFill>
-                  <a:schemeClr val="accent6">
-                    <a:lumMod val="60000"/>
-                    <a:lumOff val="40000"/>
-                  </a:schemeClr>
-                </a:solidFill>
-              </a:rPr>
-              <a:t>Text classification (BERT)</a:t>
-            </a:r>
-          </a:p>
-          <a:p>
-            <a:pPr marL="342900" indent="-342900">
-              <a:buFont typeface="Arial" panose="020B0604020202020204" pitchFamily="34" charset="0"/>
-              <a:buChar char="•"/>
-            </a:pPr>
-            <a:r>
-              <a:rPr lang="en-US" sz="2400" dirty="0">
-                <a:solidFill>
-                  <a:schemeClr val="accent6">
-                    <a:lumMod val="60000"/>
-                    <a:lumOff val="40000"/>
-                  </a:schemeClr>
-                </a:solidFill>
-              </a:rPr>
-              <a:t>Text generation (GPT)</a:t>
-            </a:r>
-          </a:p>
-          <a:p>
-            <a:pPr marL="342900" indent="-342900">
-              <a:buFont typeface="Arial" panose="020B0604020202020204" pitchFamily="34" charset="0"/>
-              <a:buChar char="•"/>
-            </a:pPr>
-            <a:r>
-              <a:rPr lang="en-US" sz="2400" dirty="0">
-                <a:solidFill>
-                  <a:schemeClr val="accent6">
-                    <a:lumMod val="60000"/>
-                    <a:lumOff val="40000"/>
-                  </a:schemeClr>
-                </a:solidFill>
-              </a:rPr>
-              <a:t>Translation (T5, </a:t>
-            </a:r>
-            <a:r>
-              <a:rPr lang="en-US" sz="2400" dirty="0" err="1">
-                <a:solidFill>
-                  <a:schemeClr val="accent6">
-                    <a:lumMod val="60000"/>
-                    <a:lumOff val="40000"/>
-                  </a:schemeClr>
-                </a:solidFill>
-              </a:rPr>
-              <a:t>MarianMT</a:t>
-            </a:r>
-            <a:r>
-              <a:rPr lang="en-US" sz="2400" dirty="0">
-                <a:solidFill>
-                  <a:schemeClr val="accent6">
-                    <a:lumMod val="60000"/>
-                    <a:lumOff val="40000"/>
-                  </a:schemeClr>
-                </a:solidFill>
-              </a:rPr>
-              <a:t>)</a:t>
-            </a:r>
-          </a:p>
-          <a:p>
-            <a:pPr marL="342900" indent="-342900">
-              <a:buFont typeface="Arial" panose="020B0604020202020204" pitchFamily="34" charset="0"/>
-              <a:buChar char="•"/>
-            </a:pPr>
-            <a:r>
-              <a:rPr lang="en-US" sz="2400" dirty="0">
-                <a:solidFill>
-                  <a:schemeClr val="accent6">
-                    <a:lumMod val="60000"/>
-                    <a:lumOff val="40000"/>
-                  </a:schemeClr>
-                </a:solidFill>
-              </a:rPr>
-              <a:t>Question answering (</a:t>
-            </a:r>
-            <a:r>
-              <a:rPr lang="en-US" sz="2400" dirty="0" err="1">
-                <a:solidFill>
-                  <a:schemeClr val="accent6">
-                    <a:lumMod val="60000"/>
-                    <a:lumOff val="40000"/>
-                  </a:schemeClr>
-                </a:solidFill>
-              </a:rPr>
-              <a:t>RoBERTa</a:t>
-            </a:r>
-            <a:r>
-              <a:rPr lang="en-US" sz="2400" dirty="0">
-                <a:solidFill>
-                  <a:schemeClr val="accent6">
-                    <a:lumMod val="60000"/>
-                    <a:lumOff val="40000"/>
-                  </a:schemeClr>
-                </a:solidFill>
-              </a:rPr>
-              <a:t>)</a:t>
-            </a:r>
-          </a:p>
-          <a:p>
-            <a:endParaRPr lang="en-US" sz="2400" dirty="0">
+            <a:r>
+              <a:rPr lang="en" sz="3467" b="1" dirty="0">
+                <a:solidFill>
+                  <a:schemeClr val="accent6">
+                    <a:lumMod val="60000"/>
+                    <a:lumOff val="40000"/>
+                  </a:schemeClr>
+                </a:solidFill>
+                <a:latin typeface="Times New Roman"/>
+                <a:ea typeface="Times New Roman"/>
+                <a:cs typeface="Times New Roman"/>
+                <a:sym typeface="Times New Roman"/>
+              </a:rPr>
+              <a:t>Why training a Transformer from scratch is not preferred?</a:t>
+            </a:r>
+            <a:endParaRPr sz="3467" b="1" dirty="0">
               <a:solidFill>
                 <a:schemeClr val="accent6">
                   <a:lumMod val="60000"/>
                   <a:lumOff val="40000"/>
                 </a:schemeClr>
               </a:solidFill>
+              <a:latin typeface="Times New Roman"/>
+              <a:ea typeface="Times New Roman"/>
+              <a:cs typeface="Times New Roman"/>
+              <a:sym typeface="Times New Roman"/>
             </a:endParaRPr>
-          </a:p>
-          <a:p>
-            <a:pPr marL="0" indent="0">
-              <a:buNone/>
-            </a:pPr>
-            <a:r>
-              <a:rPr lang="en-US" sz="2400" b="1" dirty="0">
-                <a:solidFill>
-                  <a:schemeClr val="accent6">
-                    <a:lumMod val="60000"/>
-                    <a:lumOff val="40000"/>
-                  </a:schemeClr>
-                </a:solidFill>
-              </a:rPr>
-              <a:t> Vision</a:t>
-            </a:r>
-          </a:p>
-          <a:p>
-            <a:pPr marL="342900" indent="-342900">
-              <a:buFont typeface="Arial" panose="020B0604020202020204" pitchFamily="34" charset="0"/>
-              <a:buChar char="•"/>
-            </a:pPr>
-            <a:r>
-              <a:rPr lang="en-US" sz="2400" dirty="0">
-                <a:solidFill>
-                  <a:schemeClr val="accent6">
-                    <a:lumMod val="60000"/>
-                    <a:lumOff val="40000"/>
-                  </a:schemeClr>
-                </a:solidFill>
-              </a:rPr>
-              <a:t>Vision Transformers (</a:t>
-            </a:r>
-            <a:r>
-              <a:rPr lang="en-US" sz="2400" dirty="0" err="1">
-                <a:solidFill>
-                  <a:schemeClr val="accent6">
-                    <a:lumMod val="60000"/>
-                    <a:lumOff val="40000"/>
-                  </a:schemeClr>
-                </a:solidFill>
-              </a:rPr>
-              <a:t>ViT</a:t>
-            </a:r>
-            <a:r>
-              <a:rPr lang="en-US" sz="2400" dirty="0">
-                <a:solidFill>
-                  <a:schemeClr val="accent6">
-                    <a:lumMod val="60000"/>
-                    <a:lumOff val="40000"/>
-                  </a:schemeClr>
-                </a:solidFill>
-              </a:rPr>
-              <a:t>)</a:t>
-            </a:r>
-          </a:p>
-          <a:p>
-            <a:pPr marL="342900" indent="-342900">
-              <a:buFont typeface="Arial" panose="020B0604020202020204" pitchFamily="34" charset="0"/>
-              <a:buChar char="•"/>
-            </a:pPr>
-            <a:r>
-              <a:rPr lang="en-US" sz="2400" dirty="0">
-                <a:solidFill>
-                  <a:schemeClr val="accent6">
-                    <a:lumMod val="60000"/>
-                    <a:lumOff val="40000"/>
-                  </a:schemeClr>
-                </a:solidFill>
-              </a:rPr>
-              <a:t>Object detection, segmentation</a:t>
-            </a:r>
-          </a:p>
-          <a:p>
-            <a:endParaRPr lang="en-US" sz="2400" dirty="0">
-              <a:solidFill>
-                <a:schemeClr val="accent6">
-                  <a:lumMod val="60000"/>
-                  <a:lumOff val="40000"/>
-                </a:schemeClr>
-              </a:solidFill>
-            </a:endParaRPr>
-          </a:p>
-          <a:p>
-            <a:pPr marL="0" indent="0">
-              <a:buNone/>
-            </a:pPr>
-            <a:r>
-              <a:rPr lang="en-US" sz="2400" b="1" dirty="0">
-                <a:solidFill>
-                  <a:schemeClr val="accent6">
-                    <a:lumMod val="60000"/>
-                    <a:lumOff val="40000"/>
-                  </a:schemeClr>
-                </a:solidFill>
-              </a:rPr>
-              <a:t>Speech</a:t>
-            </a:r>
-          </a:p>
-          <a:p>
-            <a:pPr marL="342900" indent="-342900">
-              <a:buFont typeface="Arial" panose="020B0604020202020204" pitchFamily="34" charset="0"/>
-              <a:buChar char="•"/>
-            </a:pPr>
-            <a:r>
-              <a:rPr lang="en-US" sz="2400" dirty="0">
-                <a:solidFill>
-                  <a:schemeClr val="accent6">
-                    <a:lumMod val="60000"/>
-                    <a:lumOff val="40000"/>
-                  </a:schemeClr>
-                </a:solidFill>
-              </a:rPr>
-              <a:t>Whisper, wav2vec</a:t>
-            </a:r>
           </a:p>
         </p:txBody>
       </p:sp>
-      <p:sp>
-        <p:nvSpPr>
-          <p:cNvPr id="7" name="TextBox 6">
-            <a:extLst>
-              <a:ext uri="{FF2B5EF4-FFF2-40B4-BE49-F238E27FC236}">
-                <a16:creationId xmlns:a16="http://schemas.microsoft.com/office/drawing/2014/main" id="{ECDE5E49-DFA4-F0A7-21B4-CC066F4621F9}"/>
-              </a:ext>
-            </a:extLst>
-          </p:cNvPr>
-          <p:cNvSpPr txBox="1"/>
+      <p:grpSp>
+        <p:nvGrpSpPr>
+          <p:cNvPr id="75" name="Google Shape;75;p16"/>
+          <p:cNvGrpSpPr/>
           <p:nvPr/>
-        </p:nvSpPr>
+        </p:nvGrpSpPr>
+        <p:grpSpPr>
+          <a:xfrm>
+            <a:off x="508000" y="1397000"/>
+            <a:ext cx="7112200" cy="4635400"/>
+            <a:chOff x="381000" y="1047750"/>
+            <a:chExt cx="5334150" cy="3476550"/>
+          </a:xfrm>
+        </p:grpSpPr>
+        <p:grpSp>
+          <p:nvGrpSpPr>
+            <p:cNvPr id="76" name="Google Shape;76;p16"/>
+            <p:cNvGrpSpPr/>
+            <p:nvPr/>
+          </p:nvGrpSpPr>
+          <p:grpSpPr>
+            <a:xfrm>
+              <a:off x="381000" y="1047750"/>
+              <a:ext cx="2571900" cy="1666800"/>
+              <a:chOff x="0" y="0"/>
+              <a:chExt cx="2571900" cy="1666800"/>
+            </a:xfrm>
+          </p:grpSpPr>
+          <p:sp>
+            <p:nvSpPr>
+              <p:cNvPr id="77" name="Google Shape;77;p16"/>
+              <p:cNvSpPr/>
+              <p:nvPr/>
+            </p:nvSpPr>
+            <p:spPr>
+              <a:xfrm>
+                <a:off x="0" y="0"/>
+                <a:ext cx="2571900" cy="1666800"/>
+              </a:xfrm>
+              <a:prstGeom prst="roundRect">
+                <a:avLst>
+                  <a:gd name="adj" fmla="val 6857"/>
+                </a:avLst>
+              </a:prstGeom>
+              <a:solidFill>
+                <a:srgbClr val="FFFFFF"/>
+              </a:solidFill>
+              <a:ln w="9525" cap="flat" cmpd="sng">
+                <a:solidFill>
+                  <a:srgbClr val="E2E8F0"/>
+                </a:solidFill>
+                <a:prstDash val="solid"/>
+                <a:round/>
+                <a:headEnd type="none" w="sm" len="sm"/>
+                <a:tailEnd type="none" w="sm" len="sm"/>
+              </a:ln>
+            </p:spPr>
+            <p:txBody>
+              <a:bodyPr spcFirstLastPara="1" wrap="square" lIns="0" tIns="0" rIns="0" bIns="0" anchor="ctr" anchorCtr="0">
+                <a:noAutofit/>
+              </a:bodyPr>
+              <a:lstStyle/>
+              <a:p>
+                <a:endParaRPr sz="2400">
+                  <a:solidFill>
+                    <a:schemeClr val="accent6">
+                      <a:lumMod val="60000"/>
+                      <a:lumOff val="40000"/>
+                    </a:schemeClr>
+                  </a:solidFill>
+                </a:endParaRPr>
+              </a:p>
+            </p:txBody>
+          </p:sp>
+          <p:sp>
+            <p:nvSpPr>
+              <p:cNvPr id="78" name="Google Shape;78;p16"/>
+              <p:cNvSpPr txBox="1"/>
+              <p:nvPr/>
+            </p:nvSpPr>
+            <p:spPr>
+              <a:xfrm>
+                <a:off x="0" y="0"/>
+                <a:ext cx="2571900" cy="1666800"/>
+              </a:xfrm>
+              <a:prstGeom prst="rect">
+                <a:avLst/>
+              </a:prstGeom>
+              <a:noFill/>
+              <a:ln>
+                <a:noFill/>
+              </a:ln>
+            </p:spPr>
+            <p:txBody>
+              <a:bodyPr spcFirstLastPara="1" wrap="square" lIns="254000" tIns="254000" rIns="254000" bIns="254000" anchor="t" anchorCtr="0">
+                <a:noAutofit/>
+              </a:bodyPr>
+              <a:lstStyle/>
+              <a:p>
+                <a:r>
+                  <a:rPr lang="en" sz="1333" b="1" dirty="0">
+                    <a:latin typeface="Inter"/>
+                    <a:ea typeface="Inter"/>
+                    <a:cs typeface="Inter"/>
+                    <a:sym typeface="Inter"/>
+                  </a:rPr>
+                  <a:t>01. Computational Cost</a:t>
+                </a:r>
+                <a:endParaRPr sz="2400" dirty="0">
+                  <a:latin typeface="Inter"/>
+                  <a:ea typeface="Inter"/>
+                  <a:cs typeface="Inter"/>
+                  <a:sym typeface="Inter"/>
+                </a:endParaRPr>
+              </a:p>
+              <a:p>
+                <a:r>
+                  <a:rPr lang="en" sz="1733" b="1" dirty="0">
+                    <a:latin typeface="Inter"/>
+                    <a:ea typeface="Inter"/>
+                    <a:cs typeface="Inter"/>
+                    <a:sym typeface="Inter"/>
+                  </a:rPr>
+                  <a:t>High GPU Demand</a:t>
+                </a:r>
+                <a:endParaRPr sz="1733" b="1" dirty="0">
+                  <a:latin typeface="Inter"/>
+                  <a:ea typeface="Inter"/>
+                  <a:cs typeface="Inter"/>
+                  <a:sym typeface="Inter"/>
+                </a:endParaRPr>
+              </a:p>
+              <a:p>
+                <a:pPr>
+                  <a:spcBef>
+                    <a:spcPts val="800"/>
+                  </a:spcBef>
+                </a:pPr>
+                <a:r>
+                  <a:rPr lang="en" sz="1400" dirty="0">
+                    <a:latin typeface="Inter"/>
+                    <a:ea typeface="Inter"/>
+                    <a:cs typeface="Inter"/>
+                    <a:sym typeface="Inter"/>
+                  </a:rPr>
+                  <a:t>Requires massive GPU resources, long runtimes, and extensive hyperparameter tuning.</a:t>
+                </a:r>
+                <a:endParaRPr sz="1400" dirty="0">
+                  <a:latin typeface="Inter"/>
+                  <a:ea typeface="Inter"/>
+                  <a:cs typeface="Inter"/>
+                  <a:sym typeface="Inter"/>
+                </a:endParaRPr>
+              </a:p>
+            </p:txBody>
+          </p:sp>
+        </p:grpSp>
+        <p:grpSp>
+          <p:nvGrpSpPr>
+            <p:cNvPr id="79" name="Google Shape;79;p16"/>
+            <p:cNvGrpSpPr/>
+            <p:nvPr/>
+          </p:nvGrpSpPr>
+          <p:grpSpPr>
+            <a:xfrm>
+              <a:off x="3143250" y="1047750"/>
+              <a:ext cx="2571900" cy="1666800"/>
+              <a:chOff x="0" y="0"/>
+              <a:chExt cx="2571900" cy="1666800"/>
+            </a:xfrm>
+          </p:grpSpPr>
+          <p:sp>
+            <p:nvSpPr>
+              <p:cNvPr id="80" name="Google Shape;80;p16"/>
+              <p:cNvSpPr/>
+              <p:nvPr/>
+            </p:nvSpPr>
+            <p:spPr>
+              <a:xfrm>
+                <a:off x="0" y="0"/>
+                <a:ext cx="2571900" cy="1666800"/>
+              </a:xfrm>
+              <a:prstGeom prst="roundRect">
+                <a:avLst>
+                  <a:gd name="adj" fmla="val 6857"/>
+                </a:avLst>
+              </a:prstGeom>
+              <a:solidFill>
+                <a:srgbClr val="FFFFFF"/>
+              </a:solidFill>
+              <a:ln w="9525" cap="flat" cmpd="sng">
+                <a:solidFill>
+                  <a:srgbClr val="E2E8F0"/>
+                </a:solidFill>
+                <a:prstDash val="solid"/>
+                <a:round/>
+                <a:headEnd type="none" w="sm" len="sm"/>
+                <a:tailEnd type="none" w="sm" len="sm"/>
+              </a:ln>
+            </p:spPr>
+            <p:txBody>
+              <a:bodyPr spcFirstLastPara="1" wrap="square" lIns="0" tIns="0" rIns="0" bIns="0" anchor="ctr" anchorCtr="0">
+                <a:noAutofit/>
+              </a:bodyPr>
+              <a:lstStyle/>
+              <a:p>
+                <a:endParaRPr sz="2400">
+                  <a:solidFill>
+                    <a:schemeClr val="accent6">
+                      <a:lumMod val="60000"/>
+                      <a:lumOff val="40000"/>
+                    </a:schemeClr>
+                  </a:solidFill>
+                </a:endParaRPr>
+              </a:p>
+            </p:txBody>
+          </p:sp>
+          <p:sp>
+            <p:nvSpPr>
+              <p:cNvPr id="81" name="Google Shape;81;p16"/>
+              <p:cNvSpPr txBox="1"/>
+              <p:nvPr/>
+            </p:nvSpPr>
+            <p:spPr>
+              <a:xfrm>
+                <a:off x="0" y="0"/>
+                <a:ext cx="2571900" cy="1666800"/>
+              </a:xfrm>
+              <a:prstGeom prst="rect">
+                <a:avLst/>
+              </a:prstGeom>
+              <a:noFill/>
+              <a:ln>
+                <a:noFill/>
+              </a:ln>
+            </p:spPr>
+            <p:txBody>
+              <a:bodyPr spcFirstLastPara="1" wrap="square" lIns="254000" tIns="254000" rIns="254000" bIns="254000" anchor="t" anchorCtr="0">
+                <a:noAutofit/>
+              </a:bodyPr>
+              <a:lstStyle/>
+              <a:p>
+                <a:r>
+                  <a:rPr lang="en" sz="1333" b="1" dirty="0">
+                    <a:latin typeface="Inter"/>
+                    <a:ea typeface="Inter"/>
+                    <a:cs typeface="Inter"/>
+                    <a:sym typeface="Inter"/>
+                  </a:rPr>
+                  <a:t>02. Data Inefficiency</a:t>
+                </a:r>
+                <a:endParaRPr sz="2400" dirty="0">
+                  <a:latin typeface="Inter"/>
+                  <a:ea typeface="Inter"/>
+                  <a:cs typeface="Inter"/>
+                  <a:sym typeface="Inter"/>
+                </a:endParaRPr>
+              </a:p>
+              <a:p>
+                <a:r>
+                  <a:rPr lang="en" sz="1733" b="1" dirty="0">
+                    <a:latin typeface="Inter"/>
+                    <a:ea typeface="Inter"/>
+                    <a:cs typeface="Inter"/>
+                    <a:sym typeface="Inter"/>
+                  </a:rPr>
+                  <a:t>Sparse Labeled Data</a:t>
+                </a:r>
+                <a:endParaRPr sz="1733" b="1" dirty="0">
+                  <a:latin typeface="Inter"/>
+                  <a:ea typeface="Inter"/>
+                  <a:cs typeface="Inter"/>
+                  <a:sym typeface="Inter"/>
+                </a:endParaRPr>
+              </a:p>
+              <a:p>
+                <a:pPr>
+                  <a:spcBef>
+                    <a:spcPts val="800"/>
+                  </a:spcBef>
+                </a:pPr>
+                <a:r>
+                  <a:rPr lang="en" sz="1400" dirty="0">
+                    <a:latin typeface="Inter"/>
+                    <a:ea typeface="Inter"/>
+                    <a:cs typeface="Inter"/>
+                    <a:sym typeface="Inter"/>
+                  </a:rPr>
+                  <a:t>Downstream tasks have limited data; training from scratch leads to poor generalization.</a:t>
+                </a:r>
+                <a:endParaRPr sz="1400" dirty="0">
+                  <a:latin typeface="Inter"/>
+                  <a:ea typeface="Inter"/>
+                  <a:cs typeface="Inter"/>
+                  <a:sym typeface="Inter"/>
+                </a:endParaRPr>
+              </a:p>
+            </p:txBody>
+          </p:sp>
+        </p:grpSp>
+        <p:grpSp>
+          <p:nvGrpSpPr>
+            <p:cNvPr id="82" name="Google Shape;82;p16"/>
+            <p:cNvGrpSpPr/>
+            <p:nvPr/>
+          </p:nvGrpSpPr>
+          <p:grpSpPr>
+            <a:xfrm>
+              <a:off x="381000" y="2857500"/>
+              <a:ext cx="2571900" cy="1666800"/>
+              <a:chOff x="0" y="0"/>
+              <a:chExt cx="2571900" cy="1666800"/>
+            </a:xfrm>
+          </p:grpSpPr>
+          <p:sp>
+            <p:nvSpPr>
+              <p:cNvPr id="83" name="Google Shape;83;p16"/>
+              <p:cNvSpPr/>
+              <p:nvPr/>
+            </p:nvSpPr>
+            <p:spPr>
+              <a:xfrm>
+                <a:off x="0" y="0"/>
+                <a:ext cx="2571900" cy="1666800"/>
+              </a:xfrm>
+              <a:prstGeom prst="roundRect">
+                <a:avLst>
+                  <a:gd name="adj" fmla="val 6857"/>
+                </a:avLst>
+              </a:prstGeom>
+              <a:solidFill>
+                <a:srgbClr val="FFFFFF"/>
+              </a:solidFill>
+              <a:ln w="9525" cap="flat" cmpd="sng">
+                <a:solidFill>
+                  <a:srgbClr val="E2E8F0"/>
+                </a:solidFill>
+                <a:prstDash val="solid"/>
+                <a:round/>
+                <a:headEnd type="none" w="sm" len="sm"/>
+                <a:tailEnd type="none" w="sm" len="sm"/>
+              </a:ln>
+            </p:spPr>
+            <p:txBody>
+              <a:bodyPr spcFirstLastPara="1" wrap="square" lIns="0" tIns="0" rIns="0" bIns="0" anchor="ctr" anchorCtr="0">
+                <a:noAutofit/>
+              </a:bodyPr>
+              <a:lstStyle/>
+              <a:p>
+                <a:endParaRPr sz="2400">
+                  <a:solidFill>
+                    <a:schemeClr val="accent6">
+                      <a:lumMod val="60000"/>
+                      <a:lumOff val="40000"/>
+                    </a:schemeClr>
+                  </a:solidFill>
+                </a:endParaRPr>
+              </a:p>
+            </p:txBody>
+          </p:sp>
+          <p:sp>
+            <p:nvSpPr>
+              <p:cNvPr id="84" name="Google Shape;84;p16"/>
+              <p:cNvSpPr txBox="1"/>
+              <p:nvPr/>
+            </p:nvSpPr>
+            <p:spPr>
+              <a:xfrm>
+                <a:off x="0" y="0"/>
+                <a:ext cx="2571900" cy="1666800"/>
+              </a:xfrm>
+              <a:prstGeom prst="rect">
+                <a:avLst/>
+              </a:prstGeom>
+              <a:noFill/>
+              <a:ln>
+                <a:noFill/>
+              </a:ln>
+            </p:spPr>
+            <p:txBody>
+              <a:bodyPr spcFirstLastPara="1" wrap="square" lIns="254000" tIns="254000" rIns="254000" bIns="254000" anchor="t" anchorCtr="0">
+                <a:noAutofit/>
+              </a:bodyPr>
+              <a:lstStyle/>
+              <a:p>
+                <a:r>
+                  <a:rPr lang="en" sz="1333" b="1" dirty="0">
+                    <a:latin typeface="Inter"/>
+                    <a:ea typeface="Inter"/>
+                    <a:cs typeface="Inter"/>
+                    <a:sym typeface="Inter"/>
+                  </a:rPr>
+                  <a:t>03. Information Loss</a:t>
+                </a:r>
+                <a:endParaRPr sz="2400" dirty="0">
+                  <a:latin typeface="Inter"/>
+                  <a:ea typeface="Inter"/>
+                  <a:cs typeface="Inter"/>
+                  <a:sym typeface="Inter"/>
+                </a:endParaRPr>
+              </a:p>
+              <a:p>
+                <a:r>
+                  <a:rPr lang="en" sz="1733" b="1" dirty="0">
+                    <a:latin typeface="Inter"/>
+                    <a:ea typeface="Inter"/>
+                    <a:cs typeface="Inter"/>
+                    <a:sym typeface="Inter"/>
+                  </a:rPr>
+                  <a:t>Representation Discard</a:t>
+                </a:r>
+                <a:endParaRPr sz="1733" b="1" dirty="0">
+                  <a:latin typeface="Inter"/>
+                  <a:ea typeface="Inter"/>
+                  <a:cs typeface="Inter"/>
+                  <a:sym typeface="Inter"/>
+                </a:endParaRPr>
+              </a:p>
+              <a:p>
+                <a:pPr>
+                  <a:spcBef>
+                    <a:spcPts val="800"/>
+                  </a:spcBef>
+                </a:pPr>
+                <a:r>
+                  <a:rPr lang="en" sz="1400" dirty="0">
+                    <a:latin typeface="Inter"/>
+                    <a:ea typeface="Inter"/>
+                    <a:cs typeface="Inter"/>
+                    <a:sym typeface="Inter"/>
+                  </a:rPr>
+                  <a:t>Training anew completely discards rich linguistic or visual features already learned.</a:t>
+                </a:r>
+                <a:endParaRPr sz="1400" dirty="0">
+                  <a:latin typeface="Inter"/>
+                  <a:ea typeface="Inter"/>
+                  <a:cs typeface="Inter"/>
+                  <a:sym typeface="Inter"/>
+                </a:endParaRPr>
+              </a:p>
+            </p:txBody>
+          </p:sp>
+        </p:grpSp>
+        <p:grpSp>
+          <p:nvGrpSpPr>
+            <p:cNvPr id="85" name="Google Shape;85;p16"/>
+            <p:cNvGrpSpPr/>
+            <p:nvPr/>
+          </p:nvGrpSpPr>
+          <p:grpSpPr>
+            <a:xfrm>
+              <a:off x="3143250" y="2857500"/>
+              <a:ext cx="2571900" cy="1666800"/>
+              <a:chOff x="0" y="0"/>
+              <a:chExt cx="2571900" cy="1666800"/>
+            </a:xfrm>
+          </p:grpSpPr>
+          <p:sp>
+            <p:nvSpPr>
+              <p:cNvPr id="86" name="Google Shape;86;p16"/>
+              <p:cNvSpPr/>
+              <p:nvPr/>
+            </p:nvSpPr>
+            <p:spPr>
+              <a:xfrm>
+                <a:off x="0" y="0"/>
+                <a:ext cx="2571900" cy="1666800"/>
+              </a:xfrm>
+              <a:prstGeom prst="roundRect">
+                <a:avLst>
+                  <a:gd name="adj" fmla="val 6857"/>
+                </a:avLst>
+              </a:prstGeom>
+              <a:solidFill>
+                <a:srgbClr val="FFFFFF"/>
+              </a:solidFill>
+              <a:ln w="9525" cap="flat" cmpd="sng">
+                <a:solidFill>
+                  <a:srgbClr val="E2E8F0"/>
+                </a:solidFill>
+                <a:prstDash val="solid"/>
+                <a:round/>
+                <a:headEnd type="none" w="sm" len="sm"/>
+                <a:tailEnd type="none" w="sm" len="sm"/>
+              </a:ln>
+            </p:spPr>
+            <p:txBody>
+              <a:bodyPr spcFirstLastPara="1" wrap="square" lIns="0" tIns="0" rIns="0" bIns="0" anchor="ctr" anchorCtr="0">
+                <a:noAutofit/>
+              </a:bodyPr>
+              <a:lstStyle/>
+              <a:p>
+                <a:endParaRPr sz="2400">
+                  <a:solidFill>
+                    <a:schemeClr val="accent6">
+                      <a:lumMod val="60000"/>
+                      <a:lumOff val="40000"/>
+                    </a:schemeClr>
+                  </a:solidFill>
+                </a:endParaRPr>
+              </a:p>
+            </p:txBody>
+          </p:sp>
+          <p:sp>
+            <p:nvSpPr>
+              <p:cNvPr id="87" name="Google Shape;87;p16"/>
+              <p:cNvSpPr txBox="1"/>
+              <p:nvPr/>
+            </p:nvSpPr>
+            <p:spPr>
+              <a:xfrm>
+                <a:off x="0" y="0"/>
+                <a:ext cx="2571900" cy="1666800"/>
+              </a:xfrm>
+              <a:prstGeom prst="rect">
+                <a:avLst/>
+              </a:prstGeom>
+              <a:noFill/>
+              <a:ln>
+                <a:noFill/>
+              </a:ln>
+            </p:spPr>
+            <p:txBody>
+              <a:bodyPr spcFirstLastPara="1" wrap="square" lIns="254000" tIns="254000" rIns="254000" bIns="254000" anchor="t" anchorCtr="0">
+                <a:noAutofit/>
+              </a:bodyPr>
+              <a:lstStyle/>
+              <a:p>
+                <a:r>
+                  <a:rPr lang="en" sz="1333" b="1" dirty="0">
+                    <a:latin typeface="Inter"/>
+                    <a:ea typeface="Inter"/>
+                    <a:cs typeface="Inter"/>
+                    <a:sym typeface="Inter"/>
+                  </a:rPr>
+                  <a:t>04. Constraints</a:t>
+                </a:r>
+                <a:endParaRPr sz="2400" dirty="0">
+                  <a:latin typeface="Inter"/>
+                  <a:ea typeface="Inter"/>
+                  <a:cs typeface="Inter"/>
+                  <a:sym typeface="Inter"/>
+                </a:endParaRPr>
+              </a:p>
+              <a:p>
+                <a:r>
+                  <a:rPr lang="en" sz="1733" b="1" dirty="0">
+                    <a:latin typeface="Inter"/>
+                    <a:ea typeface="Inter"/>
+                    <a:cs typeface="Inter"/>
+                    <a:sym typeface="Inter"/>
+                  </a:rPr>
+                  <a:t>Resource &amp; Time</a:t>
+                </a:r>
+                <a:endParaRPr sz="1733" b="1" dirty="0">
+                  <a:latin typeface="Inter"/>
+                  <a:ea typeface="Inter"/>
+                  <a:cs typeface="Inter"/>
+                  <a:sym typeface="Inter"/>
+                </a:endParaRPr>
+              </a:p>
+              <a:p>
+                <a:pPr>
+                  <a:spcBef>
+                    <a:spcPts val="800"/>
+                  </a:spcBef>
+                </a:pPr>
+                <a:r>
+                  <a:rPr lang="en" sz="1400" dirty="0">
+                    <a:latin typeface="Inter"/>
+                    <a:ea typeface="Inter"/>
+                    <a:cs typeface="Inter"/>
+                    <a:sym typeface="Inter"/>
+                  </a:rPr>
+                  <a:t>Fails to leverage existing weights, demanding excessive cost and budget investments.</a:t>
+                </a:r>
+                <a:endParaRPr sz="1400" dirty="0">
+                  <a:latin typeface="Inter"/>
+                  <a:ea typeface="Inter"/>
+                  <a:cs typeface="Inter"/>
+                  <a:sym typeface="Inter"/>
+                </a:endParaRPr>
+              </a:p>
+            </p:txBody>
+          </p:sp>
+        </p:grpSp>
+      </p:grpSp>
+      <p:grpSp>
+        <p:nvGrpSpPr>
+          <p:cNvPr id="88" name="Google Shape;88;p16"/>
+          <p:cNvGrpSpPr/>
+          <p:nvPr/>
+        </p:nvGrpSpPr>
+        <p:grpSpPr>
+          <a:xfrm>
+            <a:off x="7874000" y="1397000"/>
+            <a:ext cx="3810000" cy="4635600"/>
+            <a:chOff x="0" y="0"/>
+            <a:chExt cx="2857500" cy="3476700"/>
+          </a:xfrm>
+        </p:grpSpPr>
+        <p:sp>
+          <p:nvSpPr>
+            <p:cNvPr id="89" name="Google Shape;89;p16"/>
+            <p:cNvSpPr/>
+            <p:nvPr/>
+          </p:nvSpPr>
+          <p:spPr>
+            <a:xfrm>
+              <a:off x="0" y="0"/>
+              <a:ext cx="2857500" cy="3476700"/>
+            </a:xfrm>
+            <a:prstGeom prst="roundRect">
+              <a:avLst>
+                <a:gd name="adj" fmla="val 5333"/>
+              </a:avLst>
+            </a:prstGeom>
+            <a:solidFill>
+              <a:srgbClr val="FFFBEB"/>
+            </a:solidFill>
+            <a:ln w="14300" cap="flat" cmpd="sng">
+              <a:solidFill>
+                <a:srgbClr val="FDE68A"/>
+              </a:solidFill>
+              <a:prstDash val="solid"/>
+              <a:round/>
+              <a:headEnd type="none" w="sm" len="sm"/>
+              <a:tailEnd type="none" w="sm" len="sm"/>
+            </a:ln>
+          </p:spPr>
+          <p:txBody>
+            <a:bodyPr spcFirstLastPara="1" wrap="square" lIns="0" tIns="0" rIns="0" bIns="0" anchor="ctr" anchorCtr="0">
+              <a:noAutofit/>
+            </a:bodyPr>
+            <a:lstStyle/>
+            <a:p>
+              <a:endParaRPr sz="2400">
+                <a:solidFill>
+                  <a:schemeClr val="accent6">
+                    <a:lumMod val="60000"/>
+                    <a:lumOff val="40000"/>
+                  </a:schemeClr>
+                </a:solidFill>
+              </a:endParaRPr>
+            </a:p>
+          </p:txBody>
+        </p:sp>
+        <p:sp>
+          <p:nvSpPr>
+            <p:cNvPr id="90" name="Google Shape;90;p16"/>
+            <p:cNvSpPr txBox="1"/>
+            <p:nvPr/>
+          </p:nvSpPr>
+          <p:spPr>
+            <a:xfrm>
+              <a:off x="0" y="0"/>
+              <a:ext cx="2857500" cy="3476700"/>
+            </a:xfrm>
+            <a:prstGeom prst="rect">
+              <a:avLst/>
+            </a:prstGeom>
+            <a:noFill/>
+            <a:ln>
+              <a:noFill/>
+            </a:ln>
+          </p:spPr>
+          <p:txBody>
+            <a:bodyPr spcFirstLastPara="1" wrap="square" lIns="304800" tIns="304800" rIns="304800" bIns="304800" anchor="ctr" anchorCtr="0">
+              <a:noAutofit/>
+            </a:bodyPr>
+            <a:lstStyle/>
+            <a:p>
+              <a:r>
+                <a:rPr lang="en" sz="1333" dirty="0">
+                  <a:latin typeface="Inter ExtraBold"/>
+                  <a:ea typeface="Inter ExtraBold"/>
+                  <a:cs typeface="Inter ExtraBold"/>
+                  <a:sym typeface="Inter ExtraBold"/>
+                </a:rPr>
+                <a:t>The Ideal Solution</a:t>
+              </a:r>
+              <a:endParaRPr sz="2400" dirty="0">
+                <a:latin typeface="Inter"/>
+                <a:ea typeface="Inter"/>
+                <a:cs typeface="Inter"/>
+                <a:sym typeface="Inter"/>
+              </a:endParaRPr>
+            </a:p>
+            <a:p>
+              <a:r>
+                <a:rPr lang="en" sz="2667" dirty="0">
+                  <a:latin typeface="Inter ExtraBold"/>
+                  <a:ea typeface="Inter ExtraBold"/>
+                  <a:cs typeface="Inter ExtraBold"/>
+                  <a:sym typeface="Inter ExtraBold"/>
+                </a:rPr>
+                <a:t>Pre-trained Transformers</a:t>
+              </a:r>
+              <a:endParaRPr sz="2667" dirty="0">
+                <a:latin typeface="Inter ExtraBold"/>
+                <a:ea typeface="Inter ExtraBold"/>
+                <a:cs typeface="Inter ExtraBold"/>
+                <a:sym typeface="Inter ExtraBold"/>
+              </a:endParaRPr>
+            </a:p>
+            <a:p>
+              <a:pPr>
+                <a:spcBef>
+                  <a:spcPts val="1200"/>
+                </a:spcBef>
+              </a:pPr>
+              <a:r>
+                <a:rPr lang="en" sz="1467" dirty="0">
+                  <a:latin typeface="Inter"/>
+                  <a:ea typeface="Inter"/>
+                  <a:cs typeface="Inter"/>
+                  <a:sym typeface="Inter"/>
+                </a:rPr>
+                <a:t>Fine-tuning leverages existing weights efficiently to achieve comparable or better performance.</a:t>
+              </a:r>
+              <a:endParaRPr sz="1467" dirty="0">
+                <a:latin typeface="Inter"/>
+                <a:ea typeface="Inter"/>
+                <a:cs typeface="Inter"/>
+                <a:sym typeface="Inter"/>
+              </a:endParaRPr>
+            </a:p>
+            <a:p>
+              <a:pPr>
+                <a:spcBef>
+                  <a:spcPts val="2000"/>
+                </a:spcBef>
+              </a:pPr>
+              <a:r>
+                <a:rPr lang="en" sz="1400" u="sng" dirty="0">
+                  <a:latin typeface="Inter SemiBold"/>
+                  <a:ea typeface="Inter SemiBold"/>
+                  <a:cs typeface="Inter SemiBold"/>
+                  <a:sym typeface="Inter SemiBold"/>
+                  <a:hlinkClick r:id="rId3">
+                    <a:extLst>
+                      <a:ext uri="{A12FA001-AC4F-418D-AE19-62706E023703}">
+                        <ahyp:hlinkClr xmlns:ahyp="http://schemas.microsoft.com/office/drawing/2018/hyperlinkcolor" val="tx"/>
+                      </a:ext>
+                    </a:extLst>
+                  </a:hlinkClick>
+                </a:rPr>
+                <a:t>huggingface.co</a:t>
+              </a:r>
+              <a:endParaRPr sz="2400" dirty="0">
+                <a:latin typeface="Inter"/>
+                <a:ea typeface="Inter"/>
+                <a:cs typeface="Inter"/>
+                <a:sym typeface="Inter"/>
+              </a:endParaRPr>
+            </a:p>
+          </p:txBody>
+        </p:sp>
+      </p:grpSp>
+      <p:pic>
+        <p:nvPicPr>
+          <p:cNvPr id="91" name="Google Shape;91;p16"/>
+          <p:cNvPicPr preferRelativeResize="0"/>
+          <p:nvPr/>
+        </p:nvPicPr>
+        <p:blipFill rotWithShape="1">
+          <a:blip r:embed="rId4">
+            <a:alphaModFix/>
+          </a:blip>
+          <a:srcRect l="10" r="20"/>
+          <a:stretch/>
+        </p:blipFill>
         <p:spPr>
           <a:xfrm>
-            <a:off x="160020" y="75938"/>
-            <a:ext cx="6190488" cy="461665"/>
+            <a:off x="8382000" y="5165167"/>
+            <a:ext cx="2794000" cy="742800"/>
           </a:xfrm>
           <a:prstGeom prst="rect">
             <a:avLst/>
           </a:prstGeom>
           <a:noFill/>
+          <a:ln>
+            <a:noFill/>
+          </a:ln>
         </p:spPr>
-        <p:txBody>
-          <a:bodyPr wrap="square">
-            <a:spAutoFit/>
-          </a:bodyPr>
-          <a:lstStyle/>
-          <a:p>
-            <a:r>
-              <a:rPr lang="en-US" sz="2400" b="1" dirty="0">
-                <a:solidFill>
-                  <a:schemeClr val="accent6">
-                    <a:lumMod val="60000"/>
-                    <a:lumOff val="40000"/>
-                  </a:schemeClr>
-                </a:solidFill>
-              </a:rPr>
-              <a:t>Applications: Where are Transformers used ?</a:t>
-            </a:r>
-            <a:endParaRPr lang="en-US" sz="2400" dirty="0">
-              <a:solidFill>
-                <a:schemeClr val="accent6">
-                  <a:lumMod val="60000"/>
-                  <a:lumOff val="40000"/>
-                </a:schemeClr>
-              </a:solidFill>
-            </a:endParaRPr>
-          </a:p>
-        </p:txBody>
-      </p:sp>
-      <p:sp>
-        <p:nvSpPr>
-          <p:cNvPr id="9" name="TextBox 8">
-            <a:extLst>
-              <a:ext uri="{FF2B5EF4-FFF2-40B4-BE49-F238E27FC236}">
-                <a16:creationId xmlns:a16="http://schemas.microsoft.com/office/drawing/2014/main" id="{4FDE56E9-0F1F-C034-5068-52E1A749CF87}"/>
-              </a:ext>
-            </a:extLst>
-          </p:cNvPr>
-          <p:cNvSpPr txBox="1"/>
-          <p:nvPr/>
-        </p:nvSpPr>
-        <p:spPr>
-          <a:xfrm>
-            <a:off x="6231636" y="1346168"/>
-            <a:ext cx="3433572" cy="1569660"/>
-          </a:xfrm>
-          <a:prstGeom prst="rect">
-            <a:avLst/>
-          </a:prstGeom>
-          <a:noFill/>
-        </p:spPr>
-        <p:txBody>
-          <a:bodyPr wrap="square">
-            <a:spAutoFit/>
-          </a:bodyPr>
-          <a:lstStyle/>
-          <a:p>
-            <a:pPr marL="0" indent="0">
-              <a:buNone/>
-            </a:pPr>
-            <a:r>
-              <a:rPr lang="en-US" sz="2400" b="1" dirty="0">
-                <a:solidFill>
-                  <a:schemeClr val="accent6">
-                    <a:lumMod val="60000"/>
-                    <a:lumOff val="40000"/>
-                  </a:schemeClr>
-                </a:solidFill>
-              </a:rPr>
-              <a:t>Multimodal</a:t>
-            </a:r>
-          </a:p>
-          <a:p>
-            <a:pPr marL="342900" indent="-342900">
-              <a:buFont typeface="Arial" panose="020B0604020202020204" pitchFamily="34" charset="0"/>
-              <a:buChar char="•"/>
-            </a:pPr>
-            <a:r>
-              <a:rPr lang="en-US" sz="2400" dirty="0">
-                <a:solidFill>
-                  <a:schemeClr val="accent6">
-                    <a:lumMod val="60000"/>
-                    <a:lumOff val="40000"/>
-                  </a:schemeClr>
-                </a:solidFill>
-              </a:rPr>
-              <a:t>CLIP (image + text)</a:t>
-            </a:r>
-          </a:p>
-          <a:p>
-            <a:pPr marL="342900" indent="-342900">
-              <a:buFont typeface="Arial" panose="020B0604020202020204" pitchFamily="34" charset="0"/>
-              <a:buChar char="•"/>
-            </a:pPr>
-            <a:r>
-              <a:rPr lang="en-US" sz="2400" dirty="0">
-                <a:solidFill>
-                  <a:schemeClr val="accent6">
-                    <a:lumMod val="60000"/>
-                    <a:lumOff val="40000"/>
-                  </a:schemeClr>
-                </a:solidFill>
-              </a:rPr>
-              <a:t>Flamingo, Gemini</a:t>
-            </a:r>
-          </a:p>
-          <a:p>
-            <a:endParaRPr lang="en-US" sz="2400" dirty="0">
-              <a:solidFill>
-                <a:schemeClr val="accent6">
-                  <a:lumMod val="60000"/>
-                  <a:lumOff val="40000"/>
-                </a:schemeClr>
-              </a:solidFill>
-            </a:endParaRPr>
-          </a:p>
-        </p:txBody>
-      </p:sp>
+      </p:pic>
     </p:spTree>
     <p:extLst>
       <p:ext uri="{BB962C8B-B14F-4D97-AF65-F5344CB8AC3E}">
-        <p14:creationId xmlns:p14="http://schemas.microsoft.com/office/powerpoint/2010/main" val="26364453"/>
-      </p:ext>
-    </p:extLst>
-  </p:cSld>
-  <p:clrMapOvr>
-    <a:masterClrMapping/>
-  </p:clrMapOvr>
-</p:sld>
-</file>
-
-<file path=ppt/slides/slide9.xml><?xml version="1.0" encoding="utf-8"?>
-<p:sld xmlns:a="http://schemas.openxmlformats.org/drawingml/2006/main" xmlns:r="http://schemas.openxmlformats.org/officeDocument/2006/relationships" xmlns:p="http://schemas.openxmlformats.org/presentationml/2006/main">
-  <p:cSld>
-    <p:spTree>
-      <p:nvGrpSpPr>
-        <p:cNvPr id="1" name=""/>
-        <p:cNvGrpSpPr/>
-        <p:nvPr/>
-      </p:nvGrpSpPr>
-      <p:grpSpPr>
-        <a:xfrm>
-          <a:off x="0" y="0"/>
-          <a:ext cx="0" cy="0"/>
-          <a:chOff x="0" y="0"/>
-          <a:chExt cx="0" cy="0"/>
-        </a:xfrm>
-      </p:grpSpPr>
-      <p:sp>
-        <p:nvSpPr>
-          <p:cNvPr id="5" name="TextBox 4">
-            <a:extLst>
-              <a:ext uri="{FF2B5EF4-FFF2-40B4-BE49-F238E27FC236}">
-                <a16:creationId xmlns:a16="http://schemas.microsoft.com/office/drawing/2014/main" id="{DC1E3151-BBC1-B76C-848D-AAF87366B8DE}"/>
-              </a:ext>
-            </a:extLst>
-          </p:cNvPr>
-          <p:cNvSpPr txBox="1"/>
-          <p:nvPr/>
-        </p:nvSpPr>
-        <p:spPr>
-          <a:xfrm>
-            <a:off x="192024" y="969925"/>
-            <a:ext cx="10561320" cy="2677656"/>
-          </a:xfrm>
-          <a:prstGeom prst="rect">
-            <a:avLst/>
-          </a:prstGeom>
-          <a:noFill/>
-        </p:spPr>
-        <p:txBody>
-          <a:bodyPr wrap="square">
-            <a:spAutoFit/>
-          </a:bodyPr>
-          <a:lstStyle/>
-          <a:p>
-            <a:r>
-              <a:rPr lang="en-US" sz="2400" b="1" dirty="0">
-                <a:solidFill>
-                  <a:schemeClr val="accent6">
-                    <a:lumMod val="60000"/>
-                    <a:lumOff val="40000"/>
-                  </a:schemeClr>
-                </a:solidFill>
-              </a:rPr>
-              <a:t>Key Concepts of Transformers</a:t>
-            </a:r>
-          </a:p>
-          <a:p>
-            <a:endParaRPr lang="en-US" sz="2400" dirty="0">
-              <a:solidFill>
-                <a:schemeClr val="accent6">
-                  <a:lumMod val="60000"/>
-                  <a:lumOff val="40000"/>
-                </a:schemeClr>
-              </a:solidFill>
-            </a:endParaRPr>
-          </a:p>
-          <a:p>
-            <a:pPr marL="342900" indent="-342900">
-              <a:buFont typeface="Arial" panose="020B0604020202020204" pitchFamily="34" charset="0"/>
-              <a:buChar char="•"/>
-            </a:pPr>
-            <a:r>
-              <a:rPr lang="en-US" sz="2400" dirty="0">
-                <a:solidFill>
-                  <a:schemeClr val="accent6">
-                    <a:lumMod val="60000"/>
-                    <a:lumOff val="40000"/>
-                  </a:schemeClr>
-                </a:solidFill>
-              </a:rPr>
-              <a:t>Self-Attention</a:t>
-            </a:r>
-          </a:p>
-          <a:p>
-            <a:pPr marL="342900" indent="-342900">
-              <a:buFont typeface="Arial" panose="020B0604020202020204" pitchFamily="34" charset="0"/>
-              <a:buChar char="•"/>
-            </a:pPr>
-            <a:r>
-              <a:rPr lang="en-US" sz="2400" dirty="0">
-                <a:solidFill>
-                  <a:schemeClr val="accent6">
-                    <a:lumMod val="60000"/>
-                    <a:lumOff val="40000"/>
-                  </a:schemeClr>
-                </a:solidFill>
-              </a:rPr>
-              <a:t>Parallel Processing</a:t>
-            </a:r>
-          </a:p>
-          <a:p>
-            <a:pPr marL="342900" indent="-342900">
-              <a:buFont typeface="Arial" panose="020B0604020202020204" pitchFamily="34" charset="0"/>
-              <a:buChar char="•"/>
-            </a:pPr>
-            <a:r>
-              <a:rPr lang="en-US" sz="2400" dirty="0">
-                <a:solidFill>
-                  <a:schemeClr val="accent6">
-                    <a:lumMod val="60000"/>
-                    <a:lumOff val="40000"/>
-                  </a:schemeClr>
-                </a:solidFill>
-              </a:rPr>
-              <a:t>Encoder-Decoder Structure</a:t>
-            </a:r>
-          </a:p>
-          <a:p>
-            <a:pPr marL="342900" indent="-342900">
-              <a:buFont typeface="Arial" panose="020B0604020202020204" pitchFamily="34" charset="0"/>
-              <a:buChar char="•"/>
-            </a:pPr>
-            <a:r>
-              <a:rPr lang="en-US" sz="2400" dirty="0">
-                <a:solidFill>
-                  <a:schemeClr val="accent6">
-                    <a:lumMod val="60000"/>
-                    <a:lumOff val="40000"/>
-                  </a:schemeClr>
-                </a:solidFill>
-              </a:rPr>
-              <a:t>Positional Encoding </a:t>
-            </a:r>
-          </a:p>
-          <a:p>
-            <a:pPr marL="342900" indent="-342900">
-              <a:buFont typeface="Arial" panose="020B0604020202020204" pitchFamily="34" charset="0"/>
-              <a:buChar char="•"/>
-            </a:pPr>
-            <a:r>
-              <a:rPr lang="en-US" sz="2400" dirty="0">
-                <a:solidFill>
-                  <a:schemeClr val="accent6">
-                    <a:lumMod val="60000"/>
-                    <a:lumOff val="40000"/>
-                  </a:schemeClr>
-                </a:solidFill>
-              </a:rPr>
-              <a:t>Multi-Head Attention</a:t>
-            </a:r>
-          </a:p>
-        </p:txBody>
-      </p:sp>
-    </p:spTree>
-    <p:extLst>
-      <p:ext uri="{BB962C8B-B14F-4D97-AF65-F5344CB8AC3E}">
-        <p14:creationId xmlns:p14="http://schemas.microsoft.com/office/powerpoint/2010/main" val="1007131688"/>
+        <p14:creationId xmlns:p14="http://schemas.microsoft.com/office/powerpoint/2010/main" val="2878610152"/>
       </p:ext>
     </p:extLst>
   </p:cSld>
